--- a/results/meeting_deck_2026-09-04/ibis_pybis_status_2026-09-04.pptx
+++ b/results/meeting_deck_2026-09-04/ibis_pybis_status_2026-09-04.pptx
@@ -23,6 +23,7 @@
     <p:sldId id="268" r:id="rId20"/>
     <p:sldId id="269" r:id="rId21"/>
     <p:sldId id="270" r:id="rId22"/>
+    <p:sldId id="271" r:id="rId23"/>
   </p:sldIdLst>
   <p:sldSz cx="12192000" cy="6858000"/>
   <p:notesSz cx="6858000" cy="9144000"/>
@@ -671,7 +672,7 @@
           <a:lstStyle/>
           <a:p>
             <a:r>
-              <a:t>Lead with this. It reframes the goal: full-swing accuracy is close to as good as the format allows, so effort belongs on truncated pulses.</a:t>
+              <a:t>Lead with this. Full-swing accuracy is close to as good as the format allows, so effort belongs on truncated pulses.</a:t>
             </a:r>
           </a:p>
         </p:txBody>
@@ -741,7 +742,7 @@
           <a:lstStyle/>
           <a:p>
             <a:r>
-              <a:t>The gap that remains on the falling edge is the ~35 ps the format costs. It is not something our command layer created.</a:t>
+              <a:t>The sign of the stranded charge flips with the timestep, so it is an integration error. Any fix by tuning a coefficient is a coin flip, which is why the retuned version helped on some cases and not others.</a:t>
             </a:r>
           </a:p>
         </p:txBody>
@@ -811,7 +812,7 @@
           <a:lstStyle/>
           <a:p>
             <a:r>
-              <a:t>The last bullet matters: it is an integration error, so any fix by tuning a coefficient is a coin flip.</a:t>
+              <a:t>delay_cmd is level-driven: the command is a function of the current input level, not of accumulated edge history, so it returns to exactly zero and strands nothing. On this case the pedestal goes from 97.9 mV to 5.2 mV against the transistor's 2.1 mV. Across all 29 matched stress cases RMSE goes from 108.6 to 92.2 mV, the only build that beats native IBIS.</a:t>
             </a:r>
           </a:p>
         </p:txBody>
@@ -881,7 +882,77 @@
           <a:lstStyle/>
           <a:p>
             <a:r>
-              <a:t>Nine buffer variants later confirmed this: the shift grows on 9 of 9, and full swing and stress carry opposite signs, so neither number is a proxy for the other.</a:t>
+              <a:t>State the caveat honestly: delay_cmd has a known 1.25 ns dead zone after a reversal where neither device is commanded on, which is why predriver_cmd was previously preferred.</a:t>
+            </a:r>
+          </a:p>
+        </p:txBody>
+      </p:sp>
+      <p:sp>
+        <p:nvSpPr>
+          <p:cNvPr id="4" name="Slide Number Placeholder 3"/>
+          <p:cNvSpPr>
+            <a:spLocks noGrp="1"/>
+          </p:cNvSpPr>
+          <p:nvPr>
+            <p:ph type="sldNum" idx="5" sz="quarter"/>
+          </p:nvPr>
+        </p:nvSpPr>
+        <p:spPr/>
+      </p:sp>
+    </p:spTree>
+  </p:cSld>
+  <p:clrMapOvr>
+    <a:masterClrMapping/>
+  </p:clrMapOvr>
+</p:notes>
+</file>
+
+<file path=ppt/notesSlides/notesSlide6.xml><?xml version="1.0" encoding="utf-8"?>
+<p:notes xmlns:a="http://schemas.openxmlformats.org/drawingml/2006/main" xmlns:p="http://schemas.openxmlformats.org/presentationml/2006/main" xmlns:r="http://schemas.openxmlformats.org/officeDocument/2006/relationships">
+  <p:cSld>
+    <p:spTree>
+      <p:nvGrpSpPr>
+        <p:cNvPr id="1" name=""/>
+        <p:cNvGrpSpPr/>
+        <p:nvPr/>
+      </p:nvGrpSpPr>
+      <p:grpSpPr>
+        <a:xfrm>
+          <a:off x="0" y="0"/>
+          <a:ext cx="0" cy="0"/>
+          <a:chOff x="0" y="0"/>
+          <a:chExt cx="0" cy="0"/>
+        </a:xfrm>
+      </p:grpSpPr>
+      <p:sp>
+        <p:nvSpPr>
+          <p:cNvPr id="2" name="Slide Image Placeholder 1"/>
+          <p:cNvSpPr>
+            <a:spLocks noGrp="1"/>
+          </p:cNvSpPr>
+          <p:nvPr>
+            <p:ph type="sldImg" idx="2"/>
+          </p:nvPr>
+        </p:nvSpPr>
+        <p:spPr/>
+      </p:sp>
+      <p:sp>
+        <p:nvSpPr>
+          <p:cNvPr id="3" name="Notes Placeholder 2"/>
+          <p:cNvSpPr>
+            <a:spLocks noGrp="1"/>
+          </p:cNvSpPr>
+          <p:nvPr>
+            <p:ph type="body" idx="3" sz="quarter"/>
+          </p:nvPr>
+        </p:nvSpPr>
+        <p:spPr/>
+        <p:txBody>
+          <a:bodyPr/>
+          <a:lstStyle/>
+          <a:p>
+            <a:r>
+              <a:t>I proposed the wrong cause first, Miller feedthrough, and built a nomiller variant to test it. It came back identical to the control. Those caps are 20.5 fF against C_comp's 5 pF, 0.41%, 250x too small, which is arithmetic I should have done before building the variant. The null result still rules out the small capacitor and points at C_comp.</a:t>
             </a:r>
           </a:p>
         </p:txBody>
@@ -2995,50 +3066,14 @@
       </p:sp>
       <p:sp>
         <p:nvSpPr>
-          <p:cNvPr id="4" name="TextBox 3"/>
-          <p:cNvSpPr txBox="1"/>
-          <p:nvPr/>
-        </p:nvSpPr>
-        <p:spPr>
-          <a:xfrm>
-            <a:off x="640080" y="1051560"/>
-            <a:ext cx="10972800" cy="1280160"/>
-          </a:xfrm>
-          <a:prstGeom prst="rect">
-            <a:avLst/>
-          </a:prstGeom>
-          <a:noFill/>
-        </p:spPr>
-        <p:txBody>
-          <a:bodyPr wrap="square" lIns="45720" rIns="45720" anchor="t">
-            <a:spAutoFit/>
-          </a:bodyPr>
-          <a:lstStyle/>
-          <a:p>
-            <a:pPr algn="l">
-              <a:defRPr sz="1500" b="0">
-                <a:solidFill>
-                  <a:srgbClr val="191F1C"/>
-                </a:solidFill>
-                <a:latin typeface="Aptos"/>
-              </a:defRPr>
-            </a:pPr>
-            <a:r>
-              <a:t>Nominal C_comp beats zero on all 12 tables, and the margin scales with the die capacitance — ex2 at 5 pF needs a −124 to −178 ps correction without it. I had this backwards at first: I misapplied the book's double-counting diagnostic and reported that pybis over-applies C_comp. The golden-waveform test overturned that.</a:t>
-            </a:r>
-          </a:p>
-        </p:txBody>
-      </p:sp>
-      <p:sp>
-        <p:nvSpPr>
-          <p:cNvPr id="5" name="Rectangle 4"/>
+          <p:cNvPr id="4" name="Rectangle 3"/>
           <p:cNvSpPr/>
           <p:nvPr/>
         </p:nvSpPr>
         <p:spPr>
           <a:xfrm>
-            <a:off x="3251780" y="2761488"/>
-            <a:ext cx="5749398" cy="3026664"/>
+            <a:off x="475488" y="1143000"/>
+            <a:ext cx="11210544" cy="4809743"/>
           </a:xfrm>
           <a:prstGeom prst="rect">
             <a:avLst/>
@@ -3076,7 +3111,7 @@
       </p:sp>
       <p:pic>
         <p:nvPicPr>
-          <p:cNvPr id="6" name="Picture 5" descr="ccomp_validation.png"/>
+          <p:cNvPr id="5" name="Picture 4" descr="ccomp.png"/>
           <p:cNvPicPr>
             <a:picLocks noChangeAspect="1"/>
           </p:cNvPicPr>
@@ -3090,8 +3125,8 @@
         </p:blipFill>
         <p:spPr>
           <a:xfrm>
-            <a:off x="3279212" y="2788920"/>
-            <a:ext cx="5694534" cy="2971800"/>
+            <a:off x="502920" y="1170432"/>
+            <a:ext cx="11155680" cy="4754879"/>
           </a:xfrm>
           <a:prstGeom prst="rect">
             <a:avLst/>
@@ -3100,36 +3135,55 @@
       </p:pic>
       <p:sp>
         <p:nvSpPr>
-          <p:cNvPr id="7" name="TextBox 6"/>
-          <p:cNvSpPr txBox="1"/>
+          <p:cNvPr id="6" name="Rectangle 5"/>
+          <p:cNvSpPr/>
           <p:nvPr/>
         </p:nvSpPr>
         <p:spPr>
           <a:xfrm>
-            <a:off x="475488" y="6547104"/>
-            <a:ext cx="10789920" cy="164592"/>
+            <a:off x="384048" y="6062472"/>
+            <a:ext cx="11109960" cy="393192"/>
           </a:xfrm>
           <a:prstGeom prst="rect">
             <a:avLst/>
           </a:prstGeom>
-          <a:noFill/>
-        </p:spPr>
-        <p:txBody>
-          <a:bodyPr wrap="square" lIns="45720" rIns="45720" anchor="t">
-            <a:spAutoFit/>
-          </a:bodyPr>
-          <a:lstStyle/>
-          <a:p>
-            <a:pPr algn="l">
-              <a:defRPr sz="750" b="0">
-                <a:solidFill>
-                  <a:srgbClr val="666C68"/>
+          <a:solidFill>
+            <a:srgbClr val="F1F8F2"/>
+          </a:solidFill>
+          <a:ln>
+            <a:solidFill>
+              <a:srgbClr val="F1F8F2"/>
+            </a:solidFill>
+          </a:ln>
+        </p:spPr>
+        <p:style>
+          <a:lnRef idx="1">
+            <a:schemeClr val="accent1"/>
+          </a:lnRef>
+          <a:fillRef idx="3">
+            <a:schemeClr val="accent1"/>
+          </a:fillRef>
+          <a:effectRef idx="2">
+            <a:schemeClr val="accent1"/>
+          </a:effectRef>
+          <a:fontRef idx="minor">
+            <a:schemeClr val="lt1"/>
+          </a:fontRef>
+        </p:style>
+        <p:txBody>
+          <a:bodyPr rtlCol="0" anchor="ctr"/>
+          <a:lstStyle/>
+          <a:p>
+            <a:pPr algn="ctr">
+              <a:defRPr sz="1400" b="1">
+                <a:solidFill>
+                  <a:srgbClr val="2B7A43"/>
                 </a:solidFill>
                 <a:latin typeface="Aptos"/>
               </a:defRPr>
             </a:pPr>
             <a:r>
-              <a:t>results/pybis_ccomp_converged_2026-09-03/</a:t>
+              <a:t>I had this backwards first. The golden-waveform test overturned my own claim that pybis over-applies C_comp.</a:t>
             </a:r>
           </a:p>
         </p:txBody>
@@ -3225,8 +3279,8 @@
         </p:nvSpPr>
         <p:spPr>
           <a:xfrm>
-            <a:off x="640080" y="1097280"/>
-            <a:ext cx="10972800" cy="822960"/>
+            <a:off x="640080" y="1188720"/>
+            <a:ext cx="10972800" cy="914400"/>
           </a:xfrm>
           <a:prstGeom prst="rect">
             <a:avLst/>
@@ -3240,7 +3294,7 @@
           <a:lstStyle/>
           <a:p>
             <a:pPr algn="l">
-              <a:defRPr sz="1500" b="0">
+              <a:defRPr sz="1700" b="0">
                 <a:solidFill>
                   <a:srgbClr val="191F1C"/>
                 </a:solidFill>
@@ -3248,7 +3302,7 @@
               </a:defRPr>
             </a:pPr>
             <a:r>
-              <a:t>Every native-IBIS-vs-pybis number changes two things at once: the IBIS implementation and the SPICE engine. We wrote a translator so the same pybis model runs in both.</a:t>
+              <a:t>Every native-vs-pybis number changes two things at once: the IBIS implementation and the SPICE engine. We wrote a translator so the same model runs in both.</a:t>
             </a:r>
           </a:p>
         </p:txBody>
@@ -3261,8 +3315,8 @@
         </p:nvSpPr>
         <p:spPr>
           <a:xfrm>
-            <a:off x="640080" y="2103120"/>
-            <a:ext cx="10972800" cy="1645920"/>
+            <a:off x="640080" y="2286000"/>
+            <a:ext cx="10972800" cy="1828800"/>
           </a:xfrm>
           <a:prstGeom prst="roundRect">
             <a:avLst/>
@@ -3295,7 +3349,7 @@
           <a:lstStyle/>
           <a:p>
             <a:pPr algn="ctr">
-              <a:defRPr sz="1250">
+              <a:defRPr sz="1500">
                 <a:solidFill>
                   <a:srgbClr val="1E3027"/>
                 </a:solidFill>
@@ -3303,20 +3357,20 @@
               </a:defRPr>
             </a:pPr>
             <a:r>
-              <a:t>                              50% crossing</a:t>
+              <a:t>                          50% crossing</a:t>
             </a:r>
             <a:br/>
             <a:br/>
             <a:r>
-              <a:t>  pybis model in ngspice          5.3371 ns</a:t>
+              <a:t>  pybis in ngspice            5.3371 ns</a:t>
             </a:r>
             <a:br/>
             <a:r>
-              <a:t>  pybis model in HSPICE           5.3375 ns      engine:  -0.5 ps rising, -0.0 falling</a:t>
+              <a:t>  pybis in HSPICE             5.3375 ns     engine  -0.5 ps</a:t>
             </a:r>
             <a:br/>
             <a:r>
-              <a:t>  native IBIS in HSPICE           5.3319 ns      model:   +5.6 ps</a:t>
+              <a:t>  native IBIS in HSPICE       5.3319 ns     model   +5.6 ps</a:t>
             </a:r>
           </a:p>
         </p:txBody>
@@ -3329,63 +3383,8 @@
         </p:nvSpPr>
         <p:spPr>
           <a:xfrm>
-            <a:off x="640080" y="3931920"/>
-            <a:ext cx="10972800" cy="1280160"/>
-          </a:xfrm>
-          <a:prstGeom prst="rect">
-            <a:avLst/>
-          </a:prstGeom>
-          <a:noFill/>
-        </p:spPr>
-        <p:txBody>
-          <a:bodyPr wrap="square" lIns="73152" rIns="36576" tIns="36576" bIns="36576">
-            <a:spAutoFit/>
-          </a:bodyPr>
-          <a:lstStyle/>
-          <a:p>
-            <a:pPr>
-              <a:spcAft>
-                <a:spcPts val="700"/>
-              </a:spcAft>
-              <a:defRPr sz="1700">
-                <a:solidFill>
-                  <a:srgbClr val="191F1C"/>
-                </a:solidFill>
-                <a:latin typeface="Aptos"/>
-              </a:defRPr>
-            </a:pPr>
-            <a:r>
-              <a:t>- The engine is not the source of the difference — provided ngspice is run converged.</a:t>
-            </a:r>
-          </a:p>
-          <a:p>
-            <a:pPr>
-              <a:spcAft>
-                <a:spcPts val="700"/>
-              </a:spcAft>
-              <a:defRPr sz="1700">
-                <a:solidFill>
-                  <a:srgbClr val="191F1C"/>
-                </a:solidFill>
-                <a:latin typeface="Aptos"/>
-              </a:defRPr>
-            </a:pPr>
-            <a:r>
-              <a:t>- That proviso is real: at a 1 ps step ngspice was an aliasing outlier that doubled the apparent lag and inflated a whole validation sweep.</a:t>
-            </a:r>
-          </a:p>
-        </p:txBody>
-      </p:sp>
-      <p:sp>
-        <p:nvSpPr>
-          <p:cNvPr id="7" name="TextBox 6"/>
-          <p:cNvSpPr txBox="1"/>
-          <p:nvPr/>
-        </p:nvSpPr>
-        <p:spPr>
-          <a:xfrm>
-            <a:off x="475488" y="6547104"/>
-            <a:ext cx="10789920" cy="164592"/>
+            <a:off x="640080" y="4297680"/>
+            <a:ext cx="10972800" cy="914400"/>
           </a:xfrm>
           <a:prstGeom prst="rect">
             <a:avLst/>
@@ -3399,15 +3398,70 @@
           <a:lstStyle/>
           <a:p>
             <a:pPr algn="l">
-              <a:defRPr sz="750" b="0">
-                <a:solidFill>
-                  <a:srgbClr val="666C68"/>
+              <a:defRPr sz="1700" b="0">
+                <a:solidFill>
+                  <a:srgbClr val="191F1C"/>
                 </a:solidFill>
                 <a:latin typeface="Aptos"/>
               </a:defRPr>
             </a:pPr>
             <a:r>
-              <a:t>results/pybis_engine_model_decoupling_2026-09-03/</a:t>
+              <a:t>The engine is not the source, provided ngspice is converged. At a 1 ps step it was an aliasing outlier that doubled the apparent lag.</a:t>
+            </a:r>
+          </a:p>
+        </p:txBody>
+      </p:sp>
+      <p:sp>
+        <p:nvSpPr>
+          <p:cNvPr id="7" name="Rectangle 6"/>
+          <p:cNvSpPr/>
+          <p:nvPr/>
+        </p:nvSpPr>
+        <p:spPr>
+          <a:xfrm>
+            <a:off x="384048" y="6062472"/>
+            <a:ext cx="11109960" cy="393192"/>
+          </a:xfrm>
+          <a:prstGeom prst="rect">
+            <a:avLst/>
+          </a:prstGeom>
+          <a:solidFill>
+            <a:srgbClr val="F1F8F2"/>
+          </a:solidFill>
+          <a:ln>
+            <a:solidFill>
+              <a:srgbClr val="F1F8F2"/>
+            </a:solidFill>
+          </a:ln>
+        </p:spPr>
+        <p:style>
+          <a:lnRef idx="1">
+            <a:schemeClr val="accent1"/>
+          </a:lnRef>
+          <a:fillRef idx="3">
+            <a:schemeClr val="accent1"/>
+          </a:fillRef>
+          <a:effectRef idx="2">
+            <a:schemeClr val="accent1"/>
+          </a:effectRef>
+          <a:fontRef idx="minor">
+            <a:schemeClr val="lt1"/>
+          </a:fontRef>
+        </p:style>
+        <p:txBody>
+          <a:bodyPr rtlCol="0" anchor="ctr"/>
+          <a:lstStyle/>
+          <a:p>
+            <a:pPr algn="ctr">
+              <a:defRPr sz="1400" b="1">
+                <a:solidFill>
+                  <a:srgbClr val="2B7A43"/>
+                </a:solidFill>
+                <a:latin typeface="Aptos"/>
+              </a:defRPr>
+            </a:pPr>
+            <a:r>
+              <a:t>Converged, the two engines agree to half a picosecond.</a:t>
             </a:r>
           </a:p>
         </p:txBody>
@@ -3503,8 +3557,8 @@
         </p:nvSpPr>
         <p:spPr>
           <a:xfrm>
-            <a:off x="640080" y="1280160"/>
-            <a:ext cx="10972800" cy="2194560"/>
+            <a:off x="640080" y="1371600"/>
+            <a:ext cx="10972800" cy="2743200"/>
           </a:xfrm>
           <a:prstGeom prst="rect">
             <a:avLst/>
@@ -3529,7 +3583,7 @@
               </a:defRPr>
             </a:pPr>
             <a:r>
-              <a:t>- The control reproduces the shipped solve to 2.4e−08, so the method is exact.</a:t>
+              <a:t>- The control reproduces the shipped solve to 2.4e-08, so the method is exact.</a:t>
             </a:r>
           </a:p>
           <a:p>
@@ -3545,7 +3599,7 @@
               </a:defRPr>
             </a:pPr>
             <a:r>
-              <a:t>- In quiet regions Ku is load-independent to four decimals — the extraction is a device property, not a fixture artifact.</a:t>
+              <a:t>- In quiet regions Ku is load-independent to four decimals. It is a device property, not a fixture artifact.</a:t>
             </a:r>
           </a:p>
           <a:p>
@@ -3574,8 +3628,8 @@
         </p:nvSpPr>
         <p:spPr>
           <a:xfrm>
-            <a:off x="640080" y="3657600"/>
-            <a:ext cx="10972800" cy="822960"/>
+            <a:off x="640080" y="4206240"/>
+            <a:ext cx="10972800" cy="914400"/>
           </a:xfrm>
           <a:prstGeom prst="rect">
             <a:avLst/>
@@ -3589,7 +3643,7 @@
           <a:lstStyle/>
           <a:p>
             <a:pPr algn="l">
-              <a:defRPr sz="1500" b="0">
+              <a:defRPr sz="1700" b="0">
                 <a:solidFill>
                   <a:srgbClr val="191F1C"/>
                 </a:solidFill>
@@ -3597,7 +3651,7 @@
               </a:defRPr>
             </a:pPr>
             <a:r>
-              <a:t>Practical conclusion: added L and C are safe individually. The resonant combination has to be avoided when characterising.</a:t>
+              <a:t>Added L and C are safe individually. The resonant combination has to be avoided when characterising.</a:t>
             </a:r>
           </a:p>
         </p:txBody>
@@ -3652,7 +3706,7 @@
               </a:defRPr>
             </a:pPr>
             <a:r>
-              <a:t>The two-fixture extraction is trustworthy — as long as the fixture is not resonant.</a:t>
+              <a:t>The two-fixture extraction is trustworthy, as long as the fixture is not resonant.</a:t>
             </a:r>
           </a:p>
         </p:txBody>
@@ -3748,8 +3802,8 @@
         </p:nvSpPr>
         <p:spPr>
           <a:xfrm>
-            <a:off x="640080" y="1188720"/>
-            <a:ext cx="6949440" cy="2468880"/>
+            <a:off x="640080" y="1234440"/>
+            <a:ext cx="10972800" cy="2560320"/>
           </a:xfrm>
           <a:prstGeom prst="roundRect">
             <a:avLst/>
@@ -3782,7 +3836,7 @@
           <a:lstStyle/>
           <a:p>
             <a:pPr algn="ctr">
-              <a:defRPr sz="1200">
+              <a:defRPr sz="1500">
                 <a:solidFill>
                   <a:srgbClr val="1E3027"/>
                 </a:solidFill>
@@ -3790,32 +3844,28 @@
               </a:defRPr>
             </a:pPr>
             <a:r>
-              <a:t>ex2 variants, all seven edge rates</a:t>
+              <a:t>ex2 variants                    edge     max|Ku|</a:t>
             </a:r>
             <a:br/>
             <a:br/>
             <a:r>
-              <a:t>  variant                          output edge   max|Ku|</a:t>
+              <a:t>  slowpre   predriver halved     328 ps     1.047</a:t>
             </a:r>
             <a:br/>
             <a:r>
-              <a:t>  slowpre  (predriver halved)         328 ps      1.047</a:t>
+              <a:t>  base      control              200 ps     1.283</a:t>
             </a:r>
             <a:br/>
             <a:r>
-              <a:t>  base     (control)                  200 ps      1.283</a:t>
+              <a:t>  nomiller  Miller caps removed  208 ps     1.299</a:t>
             </a:r>
             <a:br/>
             <a:r>
-              <a:t>  nomiller (Miller caps removed)      208 ps      1.299</a:t>
+              <a:t>  skewp     output PMOS halved   160 ps     1.589</a:t>
             </a:r>
             <a:br/>
             <a:r>
-              <a:t>  skewp    (output PMOS halved)       160 ps      1.589</a:t>
-            </a:r>
-            <a:br/>
-            <a:r>
-              <a:t>  weak     (both output devices /2)   152 ps      1.779</a:t>
+              <a:t>  weak      both devices halved  152 ps     1.779</a:t>
             </a:r>
           </a:p>
         </p:txBody>
@@ -3828,79 +3878,8 @@
         </p:nvSpPr>
         <p:spPr>
           <a:xfrm>
-            <a:off x="7772400" y="1188720"/>
-            <a:ext cx="3931920" cy="2743200"/>
-          </a:xfrm>
-          <a:prstGeom prst="rect">
-            <a:avLst/>
-          </a:prstGeom>
-          <a:noFill/>
-        </p:spPr>
-        <p:txBody>
-          <a:bodyPr wrap="square" lIns="73152" rIns="36576" tIns="36576" bIns="36576">
-            <a:spAutoFit/>
-          </a:bodyPr>
-          <a:lstStyle/>
-          <a:p>
-            <a:pPr>
-              <a:spcAft>
-                <a:spcPts val="700"/>
-              </a:spcAft>
-              <a:defRPr sz="1700">
-                <a:solidFill>
-                  <a:srgbClr val="191F1C"/>
-                </a:solidFill>
-                <a:latin typeface="Aptos"/>
-              </a:defRPr>
-            </a:pPr>
-            <a:r>
-              <a:t>- Monotonic in C_comp × dV/dt against the device drive.</a:t>
-            </a:r>
-          </a:p>
-          <a:p>
-            <a:pPr>
-              <a:spcAft>
-                <a:spcPts val="700"/>
-              </a:spcAft>
-              <a:defRPr sz="1700">
-                <a:solidFill>
-                  <a:srgbClr val="191F1C"/>
-                </a:solidFill>
-                <a:latin typeface="Aptos"/>
-              </a:defRPr>
-            </a:pPr>
-            <a:r>
-              <a:t>- For ex2: 5 pF × 3.3 V / 200 ps = 82 mA of displacement current against a ~51 mA drive. It exceeds the device, so the solve must push Ku above 1.</a:t>
-            </a:r>
-          </a:p>
-          <a:p>
-            <a:pPr>
-              <a:spcAft>
-                <a:spcPts val="700"/>
-              </a:spcAft>
-              <a:defRPr sz="1700">
-                <a:solidFill>
-                  <a:srgbClr val="191F1C"/>
-                </a:solidFill>
-                <a:latin typeface="Aptos"/>
-              </a:defRPr>
-            </a:pPr>
-            <a:r>
-              <a:t>- Healthy baselines differ per silicon — inv_chain 1.03, io_buf 1.18, ex2 1.28 — so no absolute number works.</a:t>
-            </a:r>
-          </a:p>
-        </p:txBody>
-      </p:sp>
-      <p:sp>
-        <p:nvSpPr>
-          <p:cNvPr id="6" name="TextBox 5"/>
-          <p:cNvSpPr txBox="1"/>
-          <p:nvPr/>
-        </p:nvSpPr>
-        <p:spPr>
-          <a:xfrm>
-            <a:off x="640080" y="3840480"/>
-            <a:ext cx="10972800" cy="1371600"/>
+            <a:off x="640080" y="3931920"/>
+            <a:ext cx="10972800" cy="1554480"/>
           </a:xfrm>
           <a:prstGeom prst="rect">
             <a:avLst/>
@@ -3914,7 +3893,7 @@
           <a:lstStyle/>
           <a:p>
             <a:pPr algn="l">
-              <a:defRPr sz="1400" b="0">
+              <a:defRPr sz="1700" b="0">
                 <a:solidFill>
                   <a:srgbClr val="191F1C"/>
                 </a:solidFill>
@@ -3922,14 +3901,14 @@
               </a:defRPr>
             </a:pPr>
             <a:r>
-              <a:t>I proposed the wrong cause first: gate-to-drain (Miller) feedthrough. The nomiller variant came back identical to the control. Those caps are 20.5 fF against C_comp's 5 pF — 0.41%, 250× too small — which is arithmetic I should have done before building the variant. The null result still helps: it rules out the small capacitor and points at C_comp.</a:t>
-            </a:r>
-          </a:p>
-        </p:txBody>
-      </p:sp>
-      <p:sp>
-        <p:nvSpPr>
-          <p:cNvPr id="7" name="Rectangle 6"/>
+              <a:t>Monotonic in C_comp times dV/dt against the device drive. For ex2 that is 82 mA of displacement current against a ~51 mA drive: it exceeds the device, so the solve must push Ku above 1. Healthy baselines differ per silicon, inv_chain 1.03, io_buf 1.18, ex2 1.28.</a:t>
+            </a:r>
+          </a:p>
+        </p:txBody>
+      </p:sp>
+      <p:sp>
+        <p:nvSpPr>
+          <p:cNvPr id="6" name="Rectangle 5"/>
           <p:cNvSpPr/>
           <p:nvPr/>
         </p:nvSpPr>
@@ -3977,7 +3956,7 @@
               </a:defRPr>
             </a:pPr>
             <a:r>
-              <a:t>A high max|Ku| is a real signature of a large die capacitance driven fast. The cap should be a within-buffer outlier test.</a:t>
+              <a:t>A high max|Ku| is a real signature of a large die capacitance driven fast, not a corrupted extraction.</a:t>
             </a:r>
           </a:p>
         </p:txBody>
@@ -4073,8 +4052,8 @@
         </p:nvSpPr>
         <p:spPr>
           <a:xfrm>
-            <a:off x="640080" y="1188720"/>
-            <a:ext cx="5486400" cy="2926080"/>
+            <a:off x="640080" y="1280160"/>
+            <a:ext cx="10972800" cy="2560320"/>
           </a:xfrm>
           <a:prstGeom prst="rect">
             <a:avLst/>
@@ -4099,7 +4078,7 @@
               </a:defRPr>
             </a:pPr>
             <a:r>
-              <a:t>- We built nine variants of inv_chain and ex2 in HSPICE using the real transistor library — slower predriver, halved output devices, skewed PMOS, Miller caps removed, plus an open-drain build.</a:t>
+              <a:t>- Nine variants of inv_chain and ex2 built in HSPICE with the real transistor library: slower predriver, halved output devices, skewed PMOS, Miller caps removed, plus an open-drain build.</a:t>
             </a:r>
           </a:p>
           <a:p>
@@ -4115,7 +4094,7 @@
               </a:defRPr>
             </a:pPr>
             <a:r>
-              <a:t>- The point is to test whether what we learned on three buffers holds across different silicon, rather than being a property of one netlist.</a:t>
+              <a:t>- The point is to test whether what we learned on three buffers holds across different silicon.</a:t>
             </a:r>
           </a:p>
           <a:p>
@@ -4131,31 +4110,67 @@
               </a:defRPr>
             </a:pPr>
             <a:r>
-              <a:t>- Each one goes through the same s2ibispy characterisation and the same stress axis, so the comparison is like for like.</a:t>
-            </a:r>
-          </a:p>
-        </p:txBody>
-      </p:sp>
-      <p:sp>
-        <p:nvSpPr>
-          <p:cNvPr id="5" name="Rectangle 4"/>
+              <a:t>- Same characterisation, same stress axis, so the comparison is like for like.</a:t>
+            </a:r>
+          </a:p>
+        </p:txBody>
+      </p:sp>
+      <p:sp>
+        <p:nvSpPr>
+          <p:cNvPr id="5" name="TextBox 4"/>
+          <p:cNvSpPr txBox="1"/>
+          <p:nvPr/>
+        </p:nvSpPr>
+        <p:spPr>
+          <a:xfrm>
+            <a:off x="640080" y="4114800"/>
+            <a:ext cx="10972800" cy="914400"/>
+          </a:xfrm>
+          <a:prstGeom prst="rect">
+            <a:avLst/>
+          </a:prstGeom>
+          <a:noFill/>
+        </p:spPr>
+        <p:txBody>
+          <a:bodyPr wrap="square" lIns="45720" rIns="45720" anchor="t">
+            <a:spAutoFit/>
+          </a:bodyPr>
+          <a:lstStyle/>
+          <a:p>
+            <a:pPr algn="l">
+              <a:defRPr sz="1700" b="0">
+                <a:solidFill>
+                  <a:srgbClr val="191F1C"/>
+                </a:solidFill>
+                <a:latin typeface="Aptos"/>
+              </a:defRPr>
+            </a:pPr>
+            <a:r>
+              <a:t>Running now: the same 90-50% stress axis on all nine, with Ku and Kd solved from the transistor for every case.</a:t>
+            </a:r>
+          </a:p>
+        </p:txBody>
+      </p:sp>
+      <p:sp>
+        <p:nvSpPr>
+          <p:cNvPr id="6" name="Rectangle 5"/>
           <p:cNvSpPr/>
           <p:nvPr/>
         </p:nvSpPr>
         <p:spPr>
           <a:xfrm>
-            <a:off x="6281928" y="1564455"/>
-            <a:ext cx="5541264" cy="3546209"/>
+            <a:off x="384048" y="6062472"/>
+            <a:ext cx="11109960" cy="393192"/>
           </a:xfrm>
           <a:prstGeom prst="rect">
             <a:avLst/>
           </a:prstGeom>
           <a:solidFill>
-            <a:srgbClr val="FFFFFF"/>
+            <a:srgbClr val="F1F8F2"/>
           </a:solidFill>
-          <a:ln w="10160">
+          <a:ln>
             <a:solidFill>
-              <a:srgbClr val="CBD0CC"/>
+              <a:srgbClr val="F1F8F2"/>
             </a:solidFill>
           </a:ln>
         </p:spPr>
@@ -4177,66 +4192,16 @@
           <a:bodyPr rtlCol="0" anchor="ctr"/>
           <a:lstStyle/>
           <a:p>
-            <a:pPr algn="ctr"/>
-          </a:p>
-        </p:txBody>
-      </p:sp>
-      <p:pic>
-        <p:nvPicPr>
-          <p:cNvPr id="6" name="Picture 5" descr="kukd.png"/>
-          <p:cNvPicPr>
-            <a:picLocks noChangeAspect="1"/>
-          </p:cNvPicPr>
-          <p:nvPr/>
-        </p:nvPicPr>
-        <p:blipFill>
-          <a:blip r:embed="rId2"/>
-          <a:stretch>
-            <a:fillRect/>
-          </a:stretch>
-        </p:blipFill>
-        <p:spPr>
-          <a:xfrm>
-            <a:off x="6309360" y="1591887"/>
-            <a:ext cx="5486400" cy="3491345"/>
-          </a:xfrm>
-          <a:prstGeom prst="rect">
-            <a:avLst/>
-          </a:prstGeom>
-        </p:spPr>
-      </p:pic>
-      <p:sp>
-        <p:nvSpPr>
-          <p:cNvPr id="7" name="TextBox 6"/>
-          <p:cNvSpPr txBox="1"/>
-          <p:nvPr/>
-        </p:nvSpPr>
-        <p:spPr>
-          <a:xfrm>
-            <a:off x="640080" y="4389120"/>
-            <a:ext cx="5486400" cy="1005840"/>
-          </a:xfrm>
-          <a:prstGeom prst="rect">
-            <a:avLst/>
-          </a:prstGeom>
-          <a:noFill/>
-        </p:spPr>
-        <p:txBody>
-          <a:bodyPr wrap="square" lIns="45720" rIns="45720" anchor="t">
-            <a:spAutoFit/>
-          </a:bodyPr>
-          <a:lstStyle/>
-          <a:p>
-            <a:pPr algn="l">
-              <a:defRPr sz="1400" b="0">
-                <a:solidFill>
-                  <a:srgbClr val="191F1C"/>
+            <a:pPr algn="ctr">
+              <a:defRPr sz="1400" b="1">
+                <a:solidFill>
+                  <a:srgbClr val="2B7A43"/>
                 </a:solidFill>
                 <a:latin typeface="Aptos"/>
               </a:defRPr>
             </a:pPr>
             <a:r>
-              <a:t>Ku and Kd for one stressed case. The coefficients show things the pad trace hides — here the gate-state build starts moving before the transistor does.</a:t>
+              <a:t>Ku and Kd show what the pad trace hides.</a:t>
             </a:r>
           </a:p>
         </p:txBody>
@@ -4283,7 +4248,7 @@
               </a:defRPr>
             </a:pPr>
             <a:r>
-              <a:t>Where this leaves us</a:t>
+              <a:t>The coefficients under stress</a:t>
             </a:r>
           </a:p>
         </p:txBody>
@@ -4319,6 +4284,213 @@
               </a:defRPr>
             </a:pPr>
             <a:r>
+              <a:t>WHAT SHOULD CHANGE</a:t>
+            </a:r>
+          </a:p>
+        </p:txBody>
+      </p:sp>
+      <p:sp>
+        <p:nvSpPr>
+          <p:cNvPr id="4" name="Rectangle 3"/>
+          <p:cNvSpPr/>
+          <p:nvPr/>
+        </p:nvSpPr>
+        <p:spPr>
+          <a:xfrm>
+            <a:off x="475488" y="1143000"/>
+            <a:ext cx="11210544" cy="4809743"/>
+          </a:xfrm>
+          <a:prstGeom prst="rect">
+            <a:avLst/>
+          </a:prstGeom>
+          <a:solidFill>
+            <a:srgbClr val="FFFFFF"/>
+          </a:solidFill>
+          <a:ln w="10160">
+            <a:solidFill>
+              <a:srgbClr val="CBD0CC"/>
+            </a:solidFill>
+          </a:ln>
+        </p:spPr>
+        <p:style>
+          <a:lnRef idx="1">
+            <a:schemeClr val="accent1"/>
+          </a:lnRef>
+          <a:fillRef idx="3">
+            <a:schemeClr val="accent1"/>
+          </a:fillRef>
+          <a:effectRef idx="2">
+            <a:schemeClr val="accent1"/>
+          </a:effectRef>
+          <a:fontRef idx="minor">
+            <a:schemeClr val="lt1"/>
+          </a:fontRef>
+        </p:style>
+        <p:txBody>
+          <a:bodyPr rtlCol="0" anchor="ctr"/>
+          <a:lstStyle/>
+          <a:p>
+            <a:pPr algn="ctr"/>
+          </a:p>
+        </p:txBody>
+      </p:sp>
+      <p:pic>
+        <p:nvPicPr>
+          <p:cNvPr id="5" name="Picture 4" descr="variant_kukd.png"/>
+          <p:cNvPicPr>
+            <a:picLocks noChangeAspect="1"/>
+          </p:cNvPicPr>
+          <p:nvPr/>
+        </p:nvPicPr>
+        <p:blipFill>
+          <a:blip r:embed="rId2"/>
+          <a:stretch>
+            <a:fillRect/>
+          </a:stretch>
+        </p:blipFill>
+        <p:spPr>
+          <a:xfrm>
+            <a:off x="502920" y="1170432"/>
+            <a:ext cx="11155680" cy="4754879"/>
+          </a:xfrm>
+          <a:prstGeom prst="rect">
+            <a:avLst/>
+          </a:prstGeom>
+        </p:spPr>
+      </p:pic>
+      <p:sp>
+        <p:nvSpPr>
+          <p:cNvPr id="6" name="Rectangle 5"/>
+          <p:cNvSpPr/>
+          <p:nvPr/>
+        </p:nvSpPr>
+        <p:spPr>
+          <a:xfrm>
+            <a:off x="384048" y="6062472"/>
+            <a:ext cx="11109960" cy="393192"/>
+          </a:xfrm>
+          <a:prstGeom prst="rect">
+            <a:avLst/>
+          </a:prstGeom>
+          <a:solidFill>
+            <a:srgbClr val="F1F8F2"/>
+          </a:solidFill>
+          <a:ln>
+            <a:solidFill>
+              <a:srgbClr val="F1F8F2"/>
+            </a:solidFill>
+          </a:ln>
+        </p:spPr>
+        <p:style>
+          <a:lnRef idx="1">
+            <a:schemeClr val="accent1"/>
+          </a:lnRef>
+          <a:fillRef idx="3">
+            <a:schemeClr val="accent1"/>
+          </a:fillRef>
+          <a:effectRef idx="2">
+            <a:schemeClr val="accent1"/>
+          </a:effectRef>
+          <a:fontRef idx="minor">
+            <a:schemeClr val="lt1"/>
+          </a:fontRef>
+        </p:style>
+        <p:txBody>
+          <a:bodyPr rtlCol="0" anchor="ctr"/>
+          <a:lstStyle/>
+          <a:p>
+            <a:pPr algn="ctr">
+              <a:defRPr sz="1400" b="1">
+                <a:solidFill>
+                  <a:srgbClr val="2B7A43"/>
+                </a:solidFill>
+                <a:latin typeface="Aptos"/>
+              </a:defRPr>
+            </a:pPr>
+            <a:r>
+              <a:t>The gate-state build starts moving before the transistor does. Visible in Ku, invisible in the pad.</a:t>
+            </a:r>
+          </a:p>
+        </p:txBody>
+      </p:sp>
+    </p:spTree>
+  </p:cSld>
+  <p:clrMapOvr>
+    <a:masterClrMapping/>
+  </p:clrMapOvr>
+</p:sld>
+</file>
+
+<file path=ppt/slides/slide16.xml><?xml version="1.0" encoding="utf-8"?>
+<p:sld xmlns:a="http://schemas.openxmlformats.org/drawingml/2006/main" xmlns:p="http://schemas.openxmlformats.org/presentationml/2006/main" xmlns:r="http://schemas.openxmlformats.org/officeDocument/2006/relationships">
+  <p:cSld>
+    <p:spTree>
+      <p:nvGrpSpPr>
+        <p:cNvPr id="1" name=""/>
+        <p:cNvGrpSpPr/>
+        <p:nvPr/>
+      </p:nvGrpSpPr>
+      <p:grpSpPr/>
+      <p:sp>
+        <p:nvSpPr>
+          <p:cNvPr id="2" name="Title 1"/>
+          <p:cNvSpPr>
+            <a:spLocks noGrp="1"/>
+          </p:cNvSpPr>
+          <p:nvPr>
+            <p:ph type="title"/>
+          </p:nvPr>
+        </p:nvSpPr>
+        <p:spPr/>
+        <p:txBody>
+          <a:bodyPr/>
+          <a:lstStyle/>
+          <a:p>
+            <a:pPr algn="l">
+              <a:defRPr sz="2700" b="0">
+                <a:solidFill>
+                  <a:srgbClr val="000000"/>
+                </a:solidFill>
+                <a:latin typeface="Times New Roman"/>
+              </a:defRPr>
+            </a:pPr>
+            <a:r>
+              <a:t>Where this leaves us</a:t>
+            </a:r>
+          </a:p>
+        </p:txBody>
+      </p:sp>
+      <p:sp>
+        <p:nvSpPr>
+          <p:cNvPr id="3" name="TextBox 2"/>
+          <p:cNvSpPr txBox="1"/>
+          <p:nvPr/>
+        </p:nvSpPr>
+        <p:spPr>
+          <a:xfrm>
+            <a:off x="9372600" y="109728"/>
+            <a:ext cx="2148840" cy="228600"/>
+          </a:xfrm>
+          <a:prstGeom prst="rect">
+            <a:avLst/>
+          </a:prstGeom>
+          <a:noFill/>
+        </p:spPr>
+        <p:txBody>
+          <a:bodyPr wrap="square" lIns="45720" rIns="45720" anchor="t">
+            <a:spAutoFit/>
+          </a:bodyPr>
+          <a:lstStyle/>
+          <a:p>
+            <a:pPr algn="r">
+              <a:defRPr sz="950" b="1">
+                <a:solidFill>
+                  <a:srgbClr val="666C68"/>
+                </a:solidFill>
+                <a:latin typeface="Aptos"/>
+              </a:defRPr>
+            </a:pPr>
+            <a:r>
               <a:t>SUMMARY</a:t>
             </a:r>
           </a:p>
@@ -4332,8 +4504,8 @@
         </p:nvSpPr>
         <p:spPr>
           <a:xfrm>
-            <a:off x="640080" y="1188720"/>
-            <a:ext cx="10972800" cy="3291840"/>
+            <a:off x="640080" y="1280160"/>
+            <a:ext cx="10972800" cy="2743200"/>
           </a:xfrm>
           <a:prstGeom prst="rect">
             <a:avLst/>
@@ -4358,7 +4530,7 @@
               </a:defRPr>
             </a:pPr>
             <a:r>
-              <a:t>- Settled — C_comp is handled correctly; the engine is not a confounder; pybis reproduces its own golden waveforms; the offset has a working fix in delay_cmd.</a:t>
+              <a:t>- Settled: C_comp is right, the engine is not a confounder, pybis reproduces its own golden waveforms, and delay_cmd fixes the offset.</a:t>
             </a:r>
           </a:p>
           <a:p>
@@ -4374,7 +4546,7 @@
               </a:defRPr>
             </a:pPr>
             <a:r>
-              <a:t>- Open — the timing shift has no candidate mechanism, and it grows with truncation on every buffer tried.</a:t>
+              <a:t>- Open: the timing shift has no candidate mechanism, and it grows with truncation on every buffer tried.</a:t>
             </a:r>
           </a:p>
           <a:p>
@@ -4390,23 +4562,7 @@
               </a:defRPr>
             </a:pPr>
             <a:r>
-              <a:t>- Open — the 1.25 max|Ku| cap needs replacing with a within-buffer outlier test before it rejects more good models.</a:t>
-            </a:r>
-          </a:p>
-          <a:p>
-            <a:pPr>
-              <a:spcAft>
-                <a:spcPts val="700"/>
-              </a:spcAft>
-              <a:defRPr sz="1700">
-                <a:solidFill>
-                  <a:srgbClr val="191F1C"/>
-                </a:solidFill>
-                <a:latin typeface="Aptos"/>
-              </a:defRPr>
-            </a:pPr>
-            <a:r>
-              <a:t>- Running now — the same stress axis applied to all nine variants, with Ku/Kd solved from the transistor for each case.</a:t>
+              <a:t>- Open: the 1.25 max|Ku| cap needs replacing before it rejects more good models.</a:t>
             </a:r>
           </a:p>
         </p:txBody>
@@ -4419,8 +4575,8 @@
         </p:nvSpPr>
         <p:spPr>
           <a:xfrm>
-            <a:off x="640080" y="4572000"/>
-            <a:ext cx="10972800" cy="1188720"/>
+            <a:off x="640080" y="4297680"/>
+            <a:ext cx="10972800" cy="1280160"/>
           </a:xfrm>
           <a:prstGeom prst="rect">
             <a:avLst/>
@@ -4434,7 +4590,7 @@
           <a:lstStyle/>
           <a:p>
             <a:pPr algn="l">
-              <a:defRPr sz="1400" b="0">
+              <a:defRPr sz="1700" b="0">
                 <a:solidFill>
                   <a:srgbClr val="191F1C"/>
                 </a:solidFill>
@@ -4442,7 +4598,7 @@
               </a:defRPr>
             </a:pPr>
             <a:r>
-              <a:t>Two rules that cost us real time, worth not re-learning: any bench for this model must start with a real edge and never a held level, because it initialises pulldown-on and latches state only on an edge. And ngspice must be converged before any conclusion is drawn from it.</a:t>
+              <a:t>Two rules worth not re-learning: any bench for this model must start with a real edge, never a held level. And ngspice must be converged before drawing any conclusion from it.</a:t>
             </a:r>
           </a:p>
         </p:txBody>
@@ -4489,7 +4645,7 @@
               </a:defRPr>
             </a:pPr>
             <a:r>
-              <a:t>What we are actually trying to do</a:t>
+              <a:t>What we are trying to do</a:t>
             </a:r>
           </a:p>
         </p:txBody>
@@ -4538,8 +4694,8 @@
         </p:nvSpPr>
         <p:spPr>
           <a:xfrm>
-            <a:off x="640080" y="1188720"/>
-            <a:ext cx="5486400" cy="2377440"/>
+            <a:off x="640080" y="1280160"/>
+            <a:ext cx="5394960" cy="2011680"/>
           </a:xfrm>
           <a:prstGeom prst="rect">
             <a:avLst/>
@@ -4564,7 +4720,7 @@
               </a:defRPr>
             </a:pPr>
             <a:r>
-              <a:t>- The transistor netlist in HSPICE is ground truth. Native IBIS is the bar to beat, not the target.</a:t>
+              <a:t>- The transistor netlist in HSPICE is ground truth.</a:t>
             </a:r>
           </a:p>
           <a:p>
@@ -4580,7 +4736,7 @@
               </a:defRPr>
             </a:pPr>
             <a:r>
-              <a:t>- Everything below is measured against the transistor, never against native IBIS.</a:t>
+              <a:t>- Native IBIS is the bar to beat, not the target.</a:t>
             </a:r>
           </a:p>
           <a:p>
@@ -4596,7 +4752,7 @@
               </a:defRPr>
             </a:pPr>
             <a:r>
-              <a:t>- Two things are in play at once in any comparison — the IBIS implementation and the SPICE engine. We separated them (slide 10).</a:t>
+              <a:t>- Everything here is measured against the transistor.</a:t>
             </a:r>
           </a:p>
         </p:txBody>
@@ -4609,8 +4765,8 @@
         </p:nvSpPr>
         <p:spPr>
           <a:xfrm>
-            <a:off x="6583680" y="1280160"/>
-            <a:ext cx="5029200" cy="2011680"/>
+            <a:off x="6400800" y="1280160"/>
+            <a:ext cx="5212080" cy="2651760"/>
           </a:xfrm>
           <a:prstGeom prst="roundRect">
             <a:avLst/>
@@ -4643,7 +4799,7 @@
           <a:lstStyle/>
           <a:p>
             <a:pPr algn="ctr">
-              <a:defRPr sz="1200">
+              <a:defRPr sz="1500">
                 <a:solidFill>
                   <a:srgbClr val="1E3027"/>
                 </a:solidFill>
@@ -4651,20 +4807,28 @@
               </a:defRPr>
             </a:pPr>
             <a:r>
-              <a:t>falling 50% crossing vs transistor, io_buf full swing</a:t>
+              <a:t>falling 50% crossing</a:t>
+            </a:r>
+            <a:br/>
+            <a:r>
+              <a:t>vs the transistor</a:t>
+            </a:r>
+            <a:br/>
+            <a:r>
+              <a:t>io_buf, full swing</a:t>
             </a:r>
             <a:br/>
             <a:br/>
             <a:r>
-              <a:t>  native IBIS            +34.6 ps</a:t>
+              <a:t>  native IBIS       +34.6 ps</a:t>
             </a:r>
             <a:br/>
             <a:r>
-              <a:t>  pybis InputDriven      +38.4 ps</a:t>
+              <a:t>  pybis stock       +38.4 ps</a:t>
             </a:r>
             <a:br/>
             <a:r>
-              <a:t>  pybis gate-state       +43.5 ps</a:t>
+              <a:t>  pybis gate-state  +43.5 ps</a:t>
             </a:r>
           </a:p>
         </p:txBody>
@@ -4677,8 +4841,8 @@
         </p:nvSpPr>
         <p:spPr>
           <a:xfrm>
-            <a:off x="6583680" y="3474720"/>
-            <a:ext cx="5029200" cy="1097280"/>
+            <a:off x="640080" y="3566160"/>
+            <a:ext cx="10972800" cy="1188720"/>
           </a:xfrm>
           <a:prstGeom prst="rect">
             <a:avLst/>
@@ -4692,7 +4856,7 @@
           <a:lstStyle/>
           <a:p>
             <a:pPr algn="l">
-              <a:defRPr sz="1400" b="0">
+              <a:defRPr sz="1700" b="0">
                 <a:solidFill>
                   <a:srgbClr val="191F1C"/>
                 </a:solidFill>
@@ -4700,7 +4864,7 @@
               </a:defRPr>
             </a:pPr>
             <a:r>
-              <a:t>On a clean edge about 80% of the distance to the transistor is the IBIS format itself — native pays it too. Our command layer costs roughly 5 ps on top.</a:t>
+              <a:t>About 80% of the distance to the transistor is the IBIS format itself, which native pays too. Our command layer costs about 5 ps on top of that.</a:t>
             </a:r>
           </a:p>
         </p:txBody>
@@ -4755,7 +4919,7 @@
               </a:defRPr>
             </a:pPr>
             <a:r>
-              <a:t>We are already near the format's floor on clean edges. The distance worth attacking is under stress.</a:t>
+              <a:t>We are near the format's floor on clean edges. The distance worth attacking is under stress.</a:t>
             </a:r>
           </a:p>
         </p:txBody>
@@ -4802,7 +4966,7 @@
               </a:defRPr>
             </a:pPr>
             <a:r>
-              <a:t>On a clean edge, all three agree closely</a:t>
+              <a:t>On a clean edge, all three agree</a:t>
             </a:r>
           </a:p>
         </p:txBody>
@@ -4845,50 +5009,14 @@
       </p:sp>
       <p:sp>
         <p:nvSpPr>
-          <p:cNvPr id="4" name="TextBox 3"/>
-          <p:cNvSpPr txBox="1"/>
-          <p:nvPr/>
-        </p:nvSpPr>
-        <p:spPr>
-          <a:xfrm>
-            <a:off x="640080" y="1051560"/>
-            <a:ext cx="10972800" cy="731520"/>
-          </a:xfrm>
-          <a:prstGeom prst="rect">
-            <a:avLst/>
-          </a:prstGeom>
-          <a:noFill/>
-        </p:spPr>
-        <p:txBody>
-          <a:bodyPr wrap="square" lIns="45720" rIns="45720" anchor="t">
-            <a:spAutoFit/>
-          </a:bodyPr>
-          <a:lstStyle/>
-          <a:p>
-            <a:pPr algn="l">
-              <a:defRPr sz="1500" b="0">
-                <a:solidFill>
-                  <a:srgbClr val="191F1C"/>
-                </a:solidFill>
-                <a:latin typeface="Aptos"/>
-              </a:defRPr>
-            </a:pPr>
-            <a:r>
-              <a:t>io_buf, full swing into 50 Ω and 2 pF. Native IBIS and stock pybis sit almost on top of each other; both are slightly late on the falling edge against the transistor.</a:t>
-            </a:r>
-          </a:p>
-        </p:txBody>
-      </p:sp>
-      <p:sp>
-        <p:nvSpPr>
-          <p:cNvPr id="5" name="Rectangle 4"/>
+          <p:cNvPr id="4" name="Rectangle 3"/>
           <p:cNvSpPr/>
           <p:nvPr/>
         </p:nvSpPr>
         <p:spPr>
           <a:xfrm>
-            <a:off x="3720647" y="2761488"/>
-            <a:ext cx="4811665" cy="3026664"/>
+            <a:off x="475488" y="1143000"/>
+            <a:ext cx="11210544" cy="4809743"/>
           </a:xfrm>
           <a:prstGeom prst="rect">
             <a:avLst/>
@@ -4926,7 +5054,7 @@
       </p:sp>
       <p:pic>
         <p:nvPicPr>
-          <p:cNvPr id="6" name="Picture 5" descr="defect_b_full_swing.png"/>
+          <p:cNvPr id="5" name="Picture 4" descr="clean_edge.png"/>
           <p:cNvPicPr>
             <a:picLocks noChangeAspect="1"/>
           </p:cNvPicPr>
@@ -4940,8 +5068,8 @@
         </p:blipFill>
         <p:spPr>
           <a:xfrm>
-            <a:off x="3748079" y="2788920"/>
-            <a:ext cx="4756801" cy="2971800"/>
+            <a:off x="502920" y="1170432"/>
+            <a:ext cx="11155680" cy="4754879"/>
           </a:xfrm>
           <a:prstGeom prst="rect">
             <a:avLst/>
@@ -4950,36 +5078,55 @@
       </p:pic>
       <p:sp>
         <p:nvSpPr>
-          <p:cNvPr id="7" name="TextBox 6"/>
-          <p:cNvSpPr txBox="1"/>
+          <p:cNvPr id="6" name="Rectangle 5"/>
+          <p:cNvSpPr/>
           <p:nvPr/>
         </p:nvSpPr>
         <p:spPr>
           <a:xfrm>
-            <a:off x="475488" y="6547104"/>
-            <a:ext cx="10789920" cy="164592"/>
+            <a:off x="384048" y="6062472"/>
+            <a:ext cx="11109960" cy="393192"/>
           </a:xfrm>
           <a:prstGeom prst="rect">
             <a:avLst/>
           </a:prstGeom>
-          <a:noFill/>
-        </p:spPr>
-        <p:txBody>
-          <a:bodyPr wrap="square" lIns="45720" rIns="45720" anchor="t">
-            <a:spAutoFit/>
-          </a:bodyPr>
-          <a:lstStyle/>
-          <a:p>
-            <a:pPr algn="l">
-              <a:defRPr sz="750" b="0">
-                <a:solidFill>
-                  <a:srgbClr val="666C68"/>
+          <a:solidFill>
+            <a:srgbClr val="F1F8F2"/>
+          </a:solidFill>
+          <a:ln>
+            <a:solidFill>
+              <a:srgbClr val="F1F8F2"/>
+            </a:solidFill>
+          </a:ln>
+        </p:spPr>
+        <p:style>
+          <a:lnRef idx="1">
+            <a:schemeClr val="accent1"/>
+          </a:lnRef>
+          <a:fillRef idx="3">
+            <a:schemeClr val="accent1"/>
+          </a:fillRef>
+          <a:effectRef idx="2">
+            <a:schemeClr val="accent1"/>
+          </a:effectRef>
+          <a:fontRef idx="minor">
+            <a:schemeClr val="lt1"/>
+          </a:fontRef>
+        </p:style>
+        <p:txBody>
+          <a:bodyPr rtlCol="0" anchor="ctr"/>
+          <a:lstStyle/>
+          <a:p>
+            <a:pPr algn="ctr">
+              <a:defRPr sz="1400" b="1">
+                <a:solidFill>
+                  <a:srgbClr val="2B7A43"/>
                 </a:solidFill>
                 <a:latin typeface="Aptos"/>
               </a:defRPr>
             </a:pPr>
             <a:r>
-              <a:t>results/defect_b_full_swing_2026-09-03/</a:t>
+              <a:t>The gap left on the falling edge is what the format costs. We did not create it.</a:t>
             </a:r>
           </a:p>
         </p:txBody>
@@ -5026,7 +5173,7 @@
               </a:defRPr>
             </a:pPr>
             <a:r>
-              <a:t>Under stress there are two separate problems</a:t>
+              <a:t>Under stress there are two problems</a:t>
             </a:r>
           </a:p>
         </p:txBody>
@@ -5075,8 +5222,8 @@
         </p:nvSpPr>
         <p:spPr>
           <a:xfrm>
-            <a:off x="640080" y="1097280"/>
-            <a:ext cx="10972800" cy="640080"/>
+            <a:off x="640080" y="1188720"/>
+            <a:ext cx="10972800" cy="914400"/>
           </a:xfrm>
           <a:prstGeom prst="rect">
             <a:avLst/>
@@ -5090,7 +5237,7 @@
           <a:lstStyle/>
           <a:p>
             <a:pPr algn="l">
-              <a:defRPr sz="1500" b="0">
+              <a:defRPr sz="1700" b="0">
                 <a:solidFill>
                   <a:srgbClr val="191F1C"/>
                 </a:solidFill>
@@ -5098,7 +5245,7 @@
               </a:defRPr>
             </a:pPr>
             <a:r>
-              <a:t>Stress here means a truncated pulse — the input reverses before the pad finishes its transition. Targets are 90/80/70/60/50% of the transistor's settled swing.</a:t>
+              <a:t>Stress means a truncated pulse: the input reverses before the pad finishes its transition. Targets are 90/80/70/60/50% of the transistor's settled swing.</a:t>
             </a:r>
           </a:p>
         </p:txBody>
@@ -5111,8 +5258,8 @@
         </p:nvSpPr>
         <p:spPr>
           <a:xfrm>
-            <a:off x="640080" y="1920240"/>
-            <a:ext cx="10972800" cy="2377440"/>
+            <a:off x="640080" y="2286000"/>
+            <a:ext cx="10972800" cy="2468880"/>
           </a:xfrm>
           <a:prstGeom prst="roundRect">
             <a:avLst/>
@@ -5145,7 +5292,7 @@
           <a:lstStyle/>
           <a:p>
             <a:pPr algn="ctr">
-              <a:defRPr sz="1300">
+              <a:defRPr sz="1500">
                 <a:solidFill>
                   <a:srgbClr val="1E3027"/>
                 </a:solidFill>
@@ -5153,71 +5300,35 @@
               </a:defRPr>
             </a:pPr>
             <a:r>
-              <a:t>The offset          a settled-state Ku error, on 90/60/50 only.</a:t>
+              <a:t>The offset         a settled-state Ku error, on 90/60/50 only.</a:t>
             </a:r>
             <a:br/>
             <a:r>
-              <a:t>                    Not a true DC offset -- a ~6 ns tail that</a:t>
+              <a:t>                   A ~6 ns tail that looks permanent on a</a:t>
             </a:r>
             <a:br/>
             <a:r>
-              <a:t>                    looks permanent on a 10 ns plot.</a:t>
+              <a:t>                   10 ns plot -- not a true DC offset.</a:t>
             </a:r>
             <a:br/>
             <a:br/>
             <a:r>
-              <a:t>The timing shift    falling 50% crossing 69-99 ps late vs the</a:t>
+              <a:t>The timing shift   falling 50% crossing 69-99 ps late, on</a:t>
             </a:r>
             <a:br/>
             <a:r>
-              <a:t>                    transistor, on every case, where native</a:t>
+              <a:t>                   every case, where native IBIS is</a:t>
             </a:r>
             <a:br/>
             <a:r>
-              <a:t>                    IBIS is 5-26 ps *early*.</a:t>
-            </a:r>
-          </a:p>
-        </p:txBody>
-      </p:sp>
-      <p:sp>
-        <p:nvSpPr>
-          <p:cNvPr id="6" name="TextBox 5"/>
-          <p:cNvSpPr txBox="1"/>
-          <p:nvPr/>
-        </p:nvSpPr>
-        <p:spPr>
-          <a:xfrm>
-            <a:off x="640080" y="4480560"/>
-            <a:ext cx="10972800" cy="731520"/>
-          </a:xfrm>
-          <a:prstGeom prst="rect">
-            <a:avLst/>
-          </a:prstGeom>
-          <a:noFill/>
-        </p:spPr>
-        <p:txBody>
-          <a:bodyPr wrap="square" lIns="45720" rIns="45720" anchor="t">
-            <a:spAutoFit/>
-          </a:bodyPr>
-          <a:lstStyle/>
-          <a:p>
-            <a:pPr algn="l">
-              <a:defRPr sz="1500" b="0">
-                <a:solidFill>
-                  <a:srgbClr val="191F1C"/>
-                </a:solidFill>
-                <a:latin typeface="Aptos"/>
-              </a:defRPr>
-            </a:pPr>
-            <a:r>
-              <a:t>They were assumed to be one mechanism, because truncation triggers both. We tested that, and they are not — see slide 7.</a:t>
-            </a:r>
-          </a:p>
-        </p:txBody>
-      </p:sp>
-      <p:sp>
-        <p:nvSpPr>
-          <p:cNvPr id="7" name="Rectangle 6"/>
+              <a:t>                   5-26 ps early.</a:t>
+            </a:r>
+          </a:p>
+        </p:txBody>
+      </p:sp>
+      <p:sp>
+        <p:nvSpPr>
+          <p:cNvPr id="6" name="Rectangle 5"/>
           <p:cNvSpPr/>
           <p:nvPr/>
         </p:nvSpPr>
@@ -5265,7 +5376,7 @@
               </a:defRPr>
             </a:pPr>
             <a:r>
-              <a:t>One is an amplitude error that decays; the other is a timing error that does not.</a:t>
+              <a:t>One is an amplitude error that decays. The other is a timing error that does not.</a:t>
             </a:r>
           </a:p>
         </p:txBody>
@@ -5312,7 +5423,7 @@
               </a:defRPr>
             </a:pPr>
             <a:r>
-              <a:t>The offset: a command capacitor with no DC path</a:t>
+              <a:t>Where the offset comes from</a:t>
             </a:r>
           </a:p>
         </p:txBody>
@@ -5355,101 +5466,14 @@
       </p:sp>
       <p:sp>
         <p:nvSpPr>
-          <p:cNvPr id="4" name="TextBox 3"/>
-          <p:cNvSpPr txBox="1"/>
-          <p:nvPr/>
-        </p:nvSpPr>
-        <p:spPr>
-          <a:xfrm>
-            <a:off x="640080" y="1188720"/>
-            <a:ext cx="6400800" cy="3108960"/>
-          </a:xfrm>
-          <a:prstGeom prst="rect">
-            <a:avLst/>
-          </a:prstGeom>
-          <a:noFill/>
-        </p:spPr>
-        <p:txBody>
-          <a:bodyPr wrap="square" lIns="73152" rIns="36576" tIns="36576" bIns="36576">
-            <a:spAutoFit/>
-          </a:bodyPr>
-          <a:lstStyle/>
-          <a:p>
-            <a:pPr>
-              <a:spcAft>
-                <a:spcPts val="700"/>
-              </a:spcAft>
-              <a:defRPr sz="1700">
-                <a:solidFill>
-                  <a:srgbClr val="191F1C"/>
-                </a:solidFill>
-                <a:latin typeface="Aptos"/>
-              </a:defRPr>
-            </a:pPr>
-            <a:r>
-              <a:t>- GUPCMD is a capacitor across 1e15 Ω, charged by a fixed packet on each input edge.</a:t>
-            </a:r>
-          </a:p>
-          <a:p>
-            <a:pPr>
-              <a:spcAft>
-                <a:spcPts val="700"/>
-              </a:spcAft>
-              <a:defRPr sz="1700">
-                <a:solidFill>
-                  <a:srgbClr val="191F1C"/>
-                </a:solidFill>
-                <a:latin typeface="Aptos"/>
-              </a:defRPr>
-            </a:pPr>
-            <a:r>
-              <a:t>- A truncated pulse strands charge in it, and there is no resistive path to remove that charge.</a:t>
-            </a:r>
-          </a:p>
-          <a:p>
-            <a:pPr>
-              <a:spcAft>
-                <a:spcPts val="700"/>
-              </a:spcAft>
-              <a:defRPr sz="1700">
-                <a:solidFill>
-                  <a:srgbClr val="191F1C"/>
-                </a:solidFill>
-                <a:latin typeface="Aptos"/>
-              </a:defRPr>
-            </a:pPr>
-            <a:r>
-              <a:t>- The stranded charge maps through the gate state into Ku, and Ku into the pad — that is the chain on the right.</a:t>
-            </a:r>
-          </a:p>
-          <a:p>
-            <a:pPr>
-              <a:spcAft>
-                <a:spcPts val="700"/>
-              </a:spcAft>
-              <a:defRPr sz="1700">
-                <a:solidFill>
-                  <a:srgbClr val="191F1C"/>
-                </a:solidFill>
-                <a:latin typeface="Aptos"/>
-              </a:defRPr>
-            </a:pPr>
-            <a:r>
-              <a:t>- The sign of the stranded charge flips with the timestep, which is why tuning it looked like it worked and then did not.</a:t>
-            </a:r>
-          </a:p>
-        </p:txBody>
-      </p:sp>
-      <p:sp>
-        <p:nvSpPr>
-          <p:cNvPr id="5" name="Rectangle 4"/>
+          <p:cNvPr id="4" name="Rectangle 3"/>
           <p:cNvSpPr/>
           <p:nvPr/>
         </p:nvSpPr>
         <p:spPr>
           <a:xfrm>
-            <a:off x="7341800" y="1024127"/>
-            <a:ext cx="4335918" cy="4764024"/>
+            <a:off x="475488" y="1143000"/>
+            <a:ext cx="11210544" cy="4809743"/>
           </a:xfrm>
           <a:prstGeom prst="rect">
             <a:avLst/>
@@ -5487,7 +5511,7 @@
       </p:sp>
       <p:pic>
         <p:nvPicPr>
-          <p:cNvPr id="6" name="Picture 5" descr="03_offset_chain.png"/>
+          <p:cNvPr id="5" name="Picture 4" descr="offset_chain.png"/>
           <p:cNvPicPr>
             <a:picLocks noChangeAspect="1"/>
           </p:cNvPicPr>
@@ -5501,8 +5525,8 @@
         </p:blipFill>
         <p:spPr>
           <a:xfrm>
-            <a:off x="7369232" y="1051560"/>
-            <a:ext cx="4281054" cy="4709160"/>
+            <a:off x="502920" y="1170432"/>
+            <a:ext cx="11155680" cy="4754879"/>
           </a:xfrm>
           <a:prstGeom prst="rect">
             <a:avLst/>
@@ -5511,36 +5535,55 @@
       </p:pic>
       <p:sp>
         <p:nvSpPr>
-          <p:cNvPr id="7" name="TextBox 6"/>
-          <p:cNvSpPr txBox="1"/>
+          <p:cNvPr id="6" name="Rectangle 5"/>
+          <p:cNvSpPr/>
           <p:nvPr/>
         </p:nvSpPr>
         <p:spPr>
           <a:xfrm>
-            <a:off x="475488" y="6547104"/>
-            <a:ext cx="10789920" cy="164592"/>
+            <a:off x="384048" y="6062472"/>
+            <a:ext cx="11109960" cy="393192"/>
           </a:xfrm>
           <a:prstGeom prst="rect">
             <a:avLst/>
           </a:prstGeom>
-          <a:noFill/>
-        </p:spPr>
-        <p:txBody>
-          <a:bodyPr wrap="square" lIns="45720" rIns="45720" anchor="t">
-            <a:spAutoFit/>
-          </a:bodyPr>
-          <a:lstStyle/>
-          <a:p>
-            <a:pPr algn="l">
-              <a:defRPr sz="750" b="0">
-                <a:solidFill>
-                  <a:srgbClr val="666C68"/>
+          <a:solidFill>
+            <a:srgbClr val="F1F8F2"/>
+          </a:solidFill>
+          <a:ln>
+            <a:solidFill>
+              <a:srgbClr val="F1F8F2"/>
+            </a:solidFill>
+          </a:ln>
+        </p:spPr>
+        <p:style>
+          <a:lnRef idx="1">
+            <a:schemeClr val="accent1"/>
+          </a:lnRef>
+          <a:fillRef idx="3">
+            <a:schemeClr val="accent1"/>
+          </a:fillRef>
+          <a:effectRef idx="2">
+            <a:schemeClr val="accent1"/>
+          </a:effectRef>
+          <a:fontRef idx="minor">
+            <a:schemeClr val="lt1"/>
+          </a:fontRef>
+        </p:style>
+        <p:txBody>
+          <a:bodyPr rtlCol="0" anchor="ctr"/>
+          <a:lstStyle/>
+          <a:p>
+            <a:pPr algn="ctr">
+              <a:defRPr sz="1400" b="1">
+                <a:solidFill>
+                  <a:srgbClr val="2B7A43"/>
                 </a:solidFill>
                 <a:latin typeface="Aptos"/>
               </a:defRPr>
             </a:pPr>
             <a:r>
-              <a:t>results/settled_offset_diagnosis_2026-08-27/</a:t>
+              <a:t>GUPCMD is a capacitor across 1e15 ohm. A truncated pulse strands charge with no path to remove it.</a:t>
             </a:r>
           </a:p>
         </p:txBody>
@@ -5587,7 +5630,7 @@
               </a:defRPr>
             </a:pPr>
             <a:r>
-              <a:t>delay_cmd removes the offset</a:t>
+              <a:t>delay_cmd removes it</a:t>
             </a:r>
           </a:p>
         </p:txBody>
@@ -5630,154 +5673,14 @@
       </p:sp>
       <p:sp>
         <p:nvSpPr>
-          <p:cNvPr id="4" name="TextBox 3"/>
-          <p:cNvSpPr txBox="1"/>
-          <p:nvPr/>
-        </p:nvSpPr>
-        <p:spPr>
-          <a:xfrm>
-            <a:off x="640080" y="1188720"/>
-            <a:ext cx="6400800" cy="1280160"/>
-          </a:xfrm>
-          <a:prstGeom prst="rect">
-            <a:avLst/>
-          </a:prstGeom>
-          <a:noFill/>
-        </p:spPr>
-        <p:txBody>
-          <a:bodyPr wrap="square" lIns="73152" rIns="36576" tIns="36576" bIns="36576">
-            <a:spAutoFit/>
-          </a:bodyPr>
-          <a:lstStyle/>
-          <a:p>
-            <a:pPr>
-              <a:spcAft>
-                <a:spcPts val="700"/>
-              </a:spcAft>
-              <a:defRPr sz="1700">
-                <a:solidFill>
-                  <a:srgbClr val="191F1C"/>
-                </a:solidFill>
-                <a:latin typeface="Aptos"/>
-              </a:defRPr>
-            </a:pPr>
-            <a:r>
-              <a:t>- delay_cmd is level-driven: the command is a function of the current input level, not of accumulated edge history.</a:t>
-            </a:r>
-          </a:p>
-          <a:p>
-            <a:pPr>
-              <a:spcAft>
-                <a:spcPts val="700"/>
-              </a:spcAft>
-              <a:defRPr sz="1700">
-                <a:solidFill>
-                  <a:srgbClr val="191F1C"/>
-                </a:solidFill>
-                <a:latin typeface="Aptos"/>
-              </a:defRPr>
-            </a:pPr>
-            <a:r>
-              <a:t>- So it returns to exactly zero and strands nothing.</a:t>
-            </a:r>
-          </a:p>
-        </p:txBody>
-      </p:sp>
-      <p:sp>
-        <p:nvSpPr>
-          <p:cNvPr id="5" name="Rounded Rectangle 4"/>
+          <p:cNvPr id="4" name="Rectangle 3"/>
           <p:cNvSpPr/>
           <p:nvPr/>
         </p:nvSpPr>
         <p:spPr>
           <a:xfrm>
-            <a:off x="640080" y="2560320"/>
-            <a:ext cx="6400800" cy="2743200"/>
-          </a:xfrm>
-          <a:prstGeom prst="roundRect">
-            <a:avLst/>
-          </a:prstGeom>
-          <a:solidFill>
-            <a:srgbClr val="F6F8F7"/>
-          </a:solidFill>
-          <a:ln w="12700">
-            <a:solidFill>
-              <a:srgbClr val="A4AEA8"/>
-            </a:solidFill>
-          </a:ln>
-        </p:spPr>
-        <p:style>
-          <a:lnRef idx="1">
-            <a:schemeClr val="accent1"/>
-          </a:lnRef>
-          <a:fillRef idx="3">
-            <a:schemeClr val="accent1"/>
-          </a:fillRef>
-          <a:effectRef idx="2">
-            <a:schemeClr val="accent1"/>
-          </a:effectRef>
-          <a:fontRef idx="minor">
-            <a:schemeClr val="lt1"/>
-          </a:fontRef>
-        </p:style>
-        <p:txBody>
-          <a:bodyPr rtlCol="0" anchor="ctr" wrap="none" lIns="118872" rIns="73152" tIns="91440" bIns="73152"/>
-          <a:lstStyle/>
-          <a:p>
-            <a:pPr algn="ctr">
-              <a:defRPr sz="1250">
-                <a:solidFill>
-                  <a:srgbClr val="1E3027"/>
-                </a:solidFill>
-                <a:latin typeface="Consolas"/>
-              </a:defRPr>
-            </a:pPr>
-            <a:r>
-              <a:t>settled pad offset at reversal</a:t>
-            </a:r>
-            <a:br/>
-            <a:br/>
-            <a:r>
-              <a:t>  gate-state (as shipped)   63.9 mV</a:t>
-            </a:r>
-            <a:br/>
-            <a:r>
-              <a:t>  delay_cmd                  3.7 mV</a:t>
-            </a:r>
-            <a:br/>
-            <a:r>
-              <a:t>  transistor                 7.5 mV</a:t>
-            </a:r>
-            <a:br/>
-            <a:r>
-              <a:t>  native IBIS                6.4 mV</a:t>
-            </a:r>
-            <a:br/>
-            <a:br/>
-            <a:r>
-              <a:t>across all 29 matched stress cases</a:t>
-            </a:r>
-            <a:br/>
-            <a:r>
-              <a:t>  RMSE  108.6 mV -&gt; 92.2 mV</a:t>
-            </a:r>
-            <a:br/>
-            <a:r>
-              <a:t>  the only build that beats native IBIS</a:t>
-            </a:r>
-          </a:p>
-        </p:txBody>
-      </p:sp>
-      <p:sp>
-        <p:nvSpPr>
-          <p:cNvPr id="6" name="Rectangle 5"/>
-          <p:cNvSpPr/>
-          <p:nvPr/>
-        </p:nvSpPr>
-        <p:spPr>
-          <a:xfrm>
-            <a:off x="7341800" y="1024127"/>
-            <a:ext cx="4335918" cy="4764024"/>
+            <a:off x="475488" y="1143000"/>
+            <a:ext cx="11210544" cy="4809743"/>
           </a:xfrm>
           <a:prstGeom prst="rect">
             <a:avLst/>
@@ -5815,7 +5718,7 @@
       </p:sp>
       <p:pic>
         <p:nvPicPr>
-          <p:cNvPr id="7" name="Picture 6" descr="04_offset_fix.png"/>
+          <p:cNvPr id="5" name="Picture 4" descr="offset_removed.png"/>
           <p:cNvPicPr>
             <a:picLocks noChangeAspect="1"/>
           </p:cNvPicPr>
@@ -5829,8 +5732,8 @@
         </p:blipFill>
         <p:spPr>
           <a:xfrm>
-            <a:off x="7369232" y="1051560"/>
-            <a:ext cx="4281054" cy="4709160"/>
+            <a:off x="502920" y="1170432"/>
+            <a:ext cx="11155680" cy="4754879"/>
           </a:xfrm>
           <a:prstGeom prst="rect">
             <a:avLst/>
@@ -5839,7 +5742,7 @@
       </p:pic>
       <p:sp>
         <p:nvSpPr>
-          <p:cNvPr id="8" name="Rectangle 7"/>
+          <p:cNvPr id="6" name="Rectangle 5"/>
           <p:cNvSpPr/>
           <p:nvPr/>
         </p:nvSpPr>
@@ -5934,7 +5837,7 @@
               </a:defRPr>
             </a:pPr>
             <a:r>
-              <a:t>But it does not fix the timing — they are two mechanisms</a:t>
+              <a:t>It does not fix the timing</a:t>
             </a:r>
           </a:p>
         </p:txBody>
@@ -5983,8 +5886,8 @@
         </p:nvSpPr>
         <p:spPr>
           <a:xfrm>
-            <a:off x="640080" y="1097280"/>
-            <a:ext cx="10972800" cy="1005840"/>
+            <a:off x="640080" y="1188720"/>
+            <a:ext cx="10972800" cy="1280160"/>
           </a:xfrm>
           <a:prstGeom prst="rect">
             <a:avLst/>
@@ -5998,7 +5901,7 @@
           <a:lstStyle/>
           <a:p>
             <a:pPr algn="l">
-              <a:defRPr sz="1500" b="0">
+              <a:defRPr sz="1700" b="0">
                 <a:solidFill>
                   <a:srgbClr val="191F1C"/>
                 </a:solidFill>
@@ -6006,7 +5909,7 @@
               </a:defRPr>
             </a:pPr>
             <a:r>
-              <a:t>The open question in the plan was whether the offset and the timing shift were one mechanism showing up twice. If they were, delay_cmd would already fix both. Its amplitude had been measured; its timing never had.</a:t>
+              <a:t>The open question was whether the offset and the timing shift were one mechanism showing up twice. If they were, delay_cmd would already fix both. Its amplitude had been measured; its timing never had.</a:t>
             </a:r>
           </a:p>
         </p:txBody>
@@ -6019,8 +5922,8 @@
         </p:nvSpPr>
         <p:spPr>
           <a:xfrm>
-            <a:off x="640080" y="2286000"/>
-            <a:ext cx="10972800" cy="1737360"/>
+            <a:off x="640080" y="2651760"/>
+            <a:ext cx="10972800" cy="2103120"/>
           </a:xfrm>
           <a:prstGeom prst="roundRect">
             <a:avLst/>
@@ -6053,7 +5956,7 @@
           <a:lstStyle/>
           <a:p>
             <a:pPr algn="ctr">
-              <a:defRPr sz="1300">
+              <a:defRPr sz="1500">
                 <a:solidFill>
                   <a:srgbClr val="1E3027"/>
                 </a:solidFill>
@@ -6061,63 +5964,32 @@
               </a:defRPr>
             </a:pPr>
             <a:r>
-              <a:t>We measured it.  delay_cmd improved the timing on 0 of 19 stress cases.</a:t>
+              <a:t>We measured it.</a:t>
             </a:r>
             <a:br/>
             <a:br/>
             <a:r>
-              <a:t>  -&gt; the shift persists when the stranded charge is gone</a:t>
+              <a:t>  delay_cmd improved the timing on 0 of 19 stress cases.</a:t>
             </a:r>
             <a:br/>
-            <a:r>
-              <a:t>  -&gt; they are genuinely two defects, not one</a:t>
-            </a:r>
             <a:br/>
             <a:r>
-              <a:t>  -&gt; the offset has a fix; the timing shift has no candidate mechanism yet</a:t>
-            </a:r>
-          </a:p>
-        </p:txBody>
-      </p:sp>
-      <p:sp>
-        <p:nvSpPr>
-          <p:cNvPr id="6" name="TextBox 5"/>
-          <p:cNvSpPr txBox="1"/>
-          <p:nvPr/>
-        </p:nvSpPr>
-        <p:spPr>
-          <a:xfrm>
-            <a:off x="640080" y="4206240"/>
-            <a:ext cx="10972800" cy="914400"/>
-          </a:xfrm>
-          <a:prstGeom prst="rect">
-            <a:avLst/>
-          </a:prstGeom>
-          <a:noFill/>
-        </p:spPr>
-        <p:txBody>
-          <a:bodyPr wrap="square" lIns="45720" rIns="45720" anchor="t">
-            <a:spAutoFit/>
-          </a:bodyPr>
-          <a:lstStyle/>
-          <a:p>
-            <a:pPr algn="l">
-              <a:defRPr sz="1400" b="0">
-                <a:solidFill>
-                  <a:srgbClr val="191F1C"/>
-                </a:solidFill>
-                <a:latin typeface="Aptos"/>
-              </a:defRPr>
-            </a:pPr>
-            <a:r>
-              <a:t>Worth stating plainly: delay_cmd also has a known 1.25 ns dead zone after a reversal where neither device is commanded on, which is why predriver_cmd was previously preferred.</a:t>
-            </a:r>
-          </a:p>
-        </p:txBody>
-      </p:sp>
-      <p:sp>
-        <p:nvSpPr>
-          <p:cNvPr id="7" name="Rectangle 6"/>
+              <a:t>  -&gt; the shift persists once the stranded charge is gone</a:t>
+            </a:r>
+            <a:br/>
+            <a:r>
+              <a:t>  -&gt; they are two defects, not one</a:t>
+            </a:r>
+            <a:br/>
+            <a:r>
+              <a:t>  -&gt; the offset has a fix; the shift has no mechanism yet</a:t>
+            </a:r>
+          </a:p>
+        </p:txBody>
+      </p:sp>
+      <p:sp>
+        <p:nvSpPr>
+          <p:cNvPr id="6" name="Rectangle 5"/>
           <p:cNvSpPr/>
           <p:nvPr/>
         </p:nvSpPr>
@@ -6165,7 +6037,7 @@
               </a:defRPr>
             </a:pPr>
             <a:r>
-              <a:t>A cheap experiment closed a question that had been open for weeks — with the less convenient answer.</a:t>
+              <a:t>A cheap experiment closed a question that was open for weeks, with the less convenient answer.</a:t>
             </a:r>
           </a:p>
         </p:txBody>
@@ -6212,7 +6084,7 @@
               </a:defRPr>
             </a:pPr>
             <a:r>
-              <a:t>The timing shift grows as the pulse is truncated</a:t>
+              <a:t>The shift grows as the pulse is truncated</a:t>
             </a:r>
           </a:p>
         </p:txBody>
@@ -6255,50 +6127,14 @@
       </p:sp>
       <p:sp>
         <p:nvSpPr>
-          <p:cNvPr id="4" name="TextBox 3"/>
-          <p:cNvSpPr txBox="1"/>
-          <p:nvPr/>
-        </p:nvSpPr>
-        <p:spPr>
-          <a:xfrm>
-            <a:off x="640080" y="1051560"/>
-            <a:ext cx="10972800" cy="731520"/>
-          </a:xfrm>
-          <a:prstGeom prst="rect">
-            <a:avLst/>
-          </a:prstGeom>
-          <a:noFill/>
-        </p:spPr>
-        <p:txBody>
-          <a:bodyPr wrap="square" lIns="45720" rIns="45720" anchor="t">
-            <a:spAutoFit/>
-          </a:bodyPr>
-          <a:lstStyle/>
-          <a:p>
-            <a:pPr algn="l">
-              <a:defRPr sz="1500" b="0">
-                <a:solidFill>
-                  <a:srgbClr val="191F1C"/>
-                </a:solidFill>
-                <a:latin typeface="Aptos"/>
-              </a:defRPr>
-            </a:pPr>
-            <a:r>
-              <a:t>Measured against the transistor across the depth family. The shift is not a fixed penalty — it grows as the pulse gets shorter, on every buffer we have tried.</a:t>
-            </a:r>
-          </a:p>
-        </p:txBody>
-      </p:sp>
-      <p:sp>
-        <p:nvSpPr>
-          <p:cNvPr id="5" name="Rectangle 4"/>
+          <p:cNvPr id="4" name="Rectangle 3"/>
           <p:cNvSpPr/>
           <p:nvPr/>
         </p:nvSpPr>
         <p:spPr>
           <a:xfrm>
-            <a:off x="3409056" y="2761488"/>
-            <a:ext cx="5434846" cy="3026664"/>
+            <a:off x="475488" y="1143000"/>
+            <a:ext cx="11210544" cy="4809743"/>
           </a:xfrm>
           <a:prstGeom prst="rect">
             <a:avLst/>
@@ -6336,7 +6172,7 @@
       </p:sp>
       <p:pic>
         <p:nvPicPr>
-          <p:cNvPr id="6" name="Picture 5" descr="timing_shift_vs_depth.png"/>
+          <p:cNvPr id="5" name="Picture 4" descr="shift_vs_depth.png"/>
           <p:cNvPicPr>
             <a:picLocks noChangeAspect="1"/>
           </p:cNvPicPr>
@@ -6350,8 +6186,8 @@
         </p:blipFill>
         <p:spPr>
           <a:xfrm>
-            <a:off x="3436488" y="2788920"/>
-            <a:ext cx="5379982" cy="2971800"/>
+            <a:off x="502920" y="1170432"/>
+            <a:ext cx="11155680" cy="4754879"/>
           </a:xfrm>
           <a:prstGeom prst="rect">
             <a:avLst/>
@@ -6360,36 +6196,55 @@
       </p:pic>
       <p:sp>
         <p:nvSpPr>
-          <p:cNvPr id="7" name="TextBox 6"/>
-          <p:cNvSpPr txBox="1"/>
+          <p:cNvPr id="6" name="Rectangle 5"/>
+          <p:cNvSpPr/>
           <p:nvPr/>
         </p:nvSpPr>
         <p:spPr>
           <a:xfrm>
-            <a:off x="475488" y="6547104"/>
-            <a:ext cx="10789920" cy="164592"/>
+            <a:off x="384048" y="6062472"/>
+            <a:ext cx="11109960" cy="393192"/>
           </a:xfrm>
           <a:prstGeom prst="rect">
             <a:avLst/>
           </a:prstGeom>
-          <a:noFill/>
-        </p:spPr>
-        <p:txBody>
-          <a:bodyPr wrap="square" lIns="45720" rIns="45720" anchor="t">
-            <a:spAutoFit/>
-          </a:bodyPr>
-          <a:lstStyle/>
-          <a:p>
-            <a:pPr algn="l">
-              <a:defRPr sz="750" b="0">
-                <a:solidFill>
-                  <a:srgbClr val="666C68"/>
+          <a:solidFill>
+            <a:srgbClr val="F1F8F2"/>
+          </a:solidFill>
+          <a:ln>
+            <a:solidFill>
+              <a:srgbClr val="F1F8F2"/>
+            </a:solidFill>
+          </a:ln>
+        </p:spPr>
+        <p:style>
+          <a:lnRef idx="1">
+            <a:schemeClr val="accent1"/>
+          </a:lnRef>
+          <a:fillRef idx="3">
+            <a:schemeClr val="accent1"/>
+          </a:fillRef>
+          <a:effectRef idx="2">
+            <a:schemeClr val="accent1"/>
+          </a:effectRef>
+          <a:fontRef idx="minor">
+            <a:schemeClr val="lt1"/>
+          </a:fontRef>
+        </p:style>
+        <p:txBody>
+          <a:bodyPr rtlCol="0" anchor="ctr"/>
+          <a:lstStyle/>
+          <a:p>
+            <a:pPr algn="ctr">
+              <a:defRPr sz="1400" b="1">
+                <a:solidFill>
+                  <a:srgbClr val="2B7A43"/>
                 </a:solidFill>
                 <a:latin typeface="Aptos"/>
               </a:defRPr>
             </a:pPr>
             <a:r>
-              <a:t>results/timing_shift_decomposition_2026-09-03/</a:t>
+              <a:t>Not a fixed penalty. It grows with truncation on every buffer we have tried.</a:t>
             </a:r>
           </a:p>
         </p:txBody>
@@ -6485,8 +6340,8 @@
         </p:nvSpPr>
         <p:spPr>
           <a:xfrm>
-            <a:off x="640080" y="1188720"/>
-            <a:ext cx="5486400" cy="3108960"/>
+            <a:off x="640080" y="1280160"/>
+            <a:ext cx="6035040" cy="2560320"/>
           </a:xfrm>
           <a:prstGeom prst="rect">
             <a:avLst/>
@@ -6527,7 +6382,7 @@
               </a:defRPr>
             </a:pPr>
             <a:r>
-              <a:t>- It is self-contained — no transistor, no native IBIS, no engine confound. We had never done this before.</a:t>
+              <a:t>- Self-contained: no transistor, no native IBIS, no engine confound. We had never done this.</a:t>
             </a:r>
           </a:p>
           <a:p>
@@ -6543,47 +6398,31 @@
               </a:defRPr>
             </a:pPr>
             <a:r>
-              <a:t>- pybis reproduces all three buffers' own golden waveforms: figure of merit 0.03–0.41%, shift +4 to +8 ps.</a:t>
-            </a:r>
-          </a:p>
-          <a:p>
-            <a:pPr>
-              <a:spcAft>
-                <a:spcPts val="700"/>
-              </a:spcAft>
-              <a:defRPr sz="1700">
-                <a:solidFill>
-                  <a:srgbClr val="191F1C"/>
-                </a:solidFill>
-                <a:latin typeface="Aptos"/>
-              </a:defRPr>
-            </a:pPr>
-            <a:r>
-              <a:t>- It is now the standing health check, and it settled the C_comp question.</a:t>
-            </a:r>
-          </a:p>
-        </p:txBody>
-      </p:sp>
-      <p:sp>
-        <p:nvSpPr>
-          <p:cNvPr id="5" name="Rectangle 4"/>
+              <a:t>- pybis reproduces all three buffers' own golden waveforms.</a:t>
+            </a:r>
+          </a:p>
+        </p:txBody>
+      </p:sp>
+      <p:sp>
+        <p:nvSpPr>
+          <p:cNvPr id="5" name="Rounded Rectangle 4"/>
           <p:cNvSpPr/>
           <p:nvPr/>
         </p:nvSpPr>
         <p:spPr>
           <a:xfrm>
-            <a:off x="7393587" y="1024127"/>
-            <a:ext cx="4232344" cy="4764024"/>
-          </a:xfrm>
-          <a:prstGeom prst="rect">
+            <a:off x="6949440" y="1371600"/>
+            <a:ext cx="4663440" cy="2194560"/>
+          </a:xfrm>
+          <a:prstGeom prst="roundRect">
             <a:avLst/>
           </a:prstGeom>
           <a:solidFill>
-            <a:srgbClr val="FFFFFF"/>
+            <a:srgbClr val="F6F8F7"/>
           </a:solidFill>
-          <a:ln w="10160">
+          <a:ln w="12700">
             <a:solidFill>
-              <a:srgbClr val="CBD0CC"/>
+              <a:srgbClr val="A4AEA8"/>
             </a:solidFill>
           </a:ln>
         </p:spPr>
@@ -6602,37 +6441,72 @@
           </a:fontRef>
         </p:style>
         <p:txBody>
-          <a:bodyPr rtlCol="0" anchor="ctr"/>
-          <a:lstStyle/>
-          <a:p>
-            <a:pPr algn="ctr"/>
-          </a:p>
-        </p:txBody>
-      </p:sp>
-      <p:pic>
-        <p:nvPicPr>
-          <p:cNvPr id="6" name="Picture 5" descr="golden_waveform_test.png"/>
-          <p:cNvPicPr>
-            <a:picLocks noChangeAspect="1"/>
-          </p:cNvPicPr>
+          <a:bodyPr rtlCol="0" anchor="ctr" wrap="none" lIns="118872" rIns="73152" tIns="91440" bIns="73152"/>
+          <a:lstStyle/>
+          <a:p>
+            <a:pPr algn="ctr">
+              <a:defRPr sz="1500">
+                <a:solidFill>
+                  <a:srgbClr val="1E3027"/>
+                </a:solidFill>
+                <a:latin typeface="Consolas"/>
+              </a:defRPr>
+            </a:pPr>
+            <a:r>
+              <a:t>figure of merit   0.03 - 0.41 %</a:t>
+            </a:r>
+            <a:br/>
+            <a:r>
+              <a:t>timing shift      +4 to +8 ps</a:t>
+            </a:r>
+            <a:br/>
+            <a:br/>
+            <a:r>
+              <a:t>three buffers, both edges,</a:t>
+            </a:r>
+            <a:br/>
+            <a:r>
+              <a:t>both fixtures</a:t>
+            </a:r>
+          </a:p>
+        </p:txBody>
+      </p:sp>
+      <p:sp>
+        <p:nvSpPr>
+          <p:cNvPr id="6" name="TextBox 5"/>
+          <p:cNvSpPr txBox="1"/>
           <p:nvPr/>
-        </p:nvPicPr>
-        <p:blipFill>
-          <a:blip r:embed="rId2"/>
-          <a:stretch>
-            <a:fillRect/>
-          </a:stretch>
-        </p:blipFill>
-        <p:spPr>
-          <a:xfrm>
-            <a:off x="7421019" y="1051560"/>
-            <a:ext cx="4177480" cy="4709160"/>
+        </p:nvSpPr>
+        <p:spPr>
+          <a:xfrm>
+            <a:off x="640080" y="4023360"/>
+            <a:ext cx="10972800" cy="731520"/>
           </a:xfrm>
           <a:prstGeom prst="rect">
             <a:avLst/>
           </a:prstGeom>
-        </p:spPr>
-      </p:pic>
+          <a:noFill/>
+        </p:spPr>
+        <p:txBody>
+          <a:bodyPr wrap="square" lIns="45720" rIns="45720" anchor="t">
+            <a:spAutoFit/>
+          </a:bodyPr>
+          <a:lstStyle/>
+          <a:p>
+            <a:pPr algn="l">
+              <a:defRPr sz="1700" b="0">
+                <a:solidFill>
+                  <a:srgbClr val="191F1C"/>
+                </a:solidFill>
+                <a:latin typeface="Aptos"/>
+              </a:defRPr>
+            </a:pPr>
+            <a:r>
+              <a:t>It is now the standing health check, and it settled the C_comp question.</a:t>
+            </a:r>
+          </a:p>
+        </p:txBody>
+      </p:sp>
       <p:sp>
         <p:nvSpPr>
           <p:cNvPr id="7" name="Rectangle 6"/>
@@ -6683,7 +6557,7 @@
               </a:defRPr>
             </a:pPr>
             <a:r>
-              <a:t>Whatever is wrong under stress, it is not the I-V × Ku(t) reconstruction itself.</a:t>
+              <a:t>Whatever is wrong under stress, it is not the I-V times Ku(t) reconstruction.</a:t>
             </a:r>
           </a:p>
         </p:txBody>

--- a/results/meeting_deck_2026-09-04/ibis_pybis_status_2026-09-04.pptx
+++ b/results/meeting_deck_2026-09-04/ibis_pybis_status_2026-09-04.pptx
@@ -24,6 +24,7 @@
     <p:sldId id="269" r:id="rId21"/>
     <p:sldId id="270" r:id="rId22"/>
     <p:sldId id="271" r:id="rId23"/>
+    <p:sldId id="272" r:id="rId24"/>
   </p:sldIdLst>
   <p:sldSz cx="12192000" cy="6858000"/>
   <p:notesSz cx="6858000" cy="9144000"/>
@@ -3023,7 +3024,7 @@
               </a:defRPr>
             </a:pPr>
             <a:r>
-              <a:t>C_comp is handled correctly</a:t>
+              <a:t>The core reconstruction is sound</a:t>
             </a:r>
           </a:p>
         </p:txBody>
@@ -3066,24 +3067,95 @@
       </p:sp>
       <p:sp>
         <p:nvSpPr>
-          <p:cNvPr id="4" name="Rectangle 3"/>
+          <p:cNvPr id="4" name="TextBox 3"/>
+          <p:cNvSpPr txBox="1"/>
+          <p:nvPr/>
+        </p:nvSpPr>
+        <p:spPr>
+          <a:xfrm>
+            <a:off x="640080" y="1280160"/>
+            <a:ext cx="6035040" cy="2560320"/>
+          </a:xfrm>
+          <a:prstGeom prst="rect">
+            <a:avLst/>
+          </a:prstGeom>
+          <a:noFill/>
+        </p:spPr>
+        <p:txBody>
+          <a:bodyPr wrap="square" lIns="73152" rIns="36576" tIns="36576" bIns="36576">
+            <a:spAutoFit/>
+          </a:bodyPr>
+          <a:lstStyle/>
+          <a:p>
+            <a:pPr>
+              <a:spcAft>
+                <a:spcPts val="700"/>
+              </a:spcAft>
+              <a:defRPr sz="1700">
+                <a:solidFill>
+                  <a:srgbClr val="191F1C"/>
+                </a:solidFill>
+                <a:latin typeface="Aptos"/>
+              </a:defRPr>
+            </a:pPr>
+            <a:r>
+              <a:t>•  A golden-waveform test replays a model's own V-T tables into the fixture that produced them.</a:t>
+            </a:r>
+          </a:p>
+          <a:p>
+            <a:pPr>
+              <a:spcAft>
+                <a:spcPts val="700"/>
+              </a:spcAft>
+              <a:defRPr sz="1700">
+                <a:solidFill>
+                  <a:srgbClr val="191F1C"/>
+                </a:solidFill>
+                <a:latin typeface="Aptos"/>
+              </a:defRPr>
+            </a:pPr>
+            <a:r>
+              <a:t>•  Self-contained: no transistor, no native IBIS, no engine confound. We had never done this.</a:t>
+            </a:r>
+          </a:p>
+          <a:p>
+            <a:pPr>
+              <a:spcAft>
+                <a:spcPts val="700"/>
+              </a:spcAft>
+              <a:defRPr sz="1700">
+                <a:solidFill>
+                  <a:srgbClr val="191F1C"/>
+                </a:solidFill>
+                <a:latin typeface="Aptos"/>
+              </a:defRPr>
+            </a:pPr>
+            <a:r>
+              <a:t>•  pybis reproduces all three buffers' own golden waveforms.</a:t>
+            </a:r>
+          </a:p>
+        </p:txBody>
+      </p:sp>
+      <p:sp>
+        <p:nvSpPr>
+          <p:cNvPr id="5" name="Rounded Rectangle 4"/>
           <p:cNvSpPr/>
           <p:nvPr/>
         </p:nvSpPr>
         <p:spPr>
           <a:xfrm>
-            <a:off x="475488" y="1143000"/>
-            <a:ext cx="11210544" cy="4809743"/>
-          </a:xfrm>
-          <a:prstGeom prst="rect">
+            <a:off x="6858000" y="1371600"/>
+            <a:ext cx="4754880" cy="1591310"/>
+          </a:xfrm>
+          <a:prstGeom prst="roundRect">
             <a:avLst/>
           </a:prstGeom>
           <a:solidFill>
-            <a:srgbClr val="FFFFFF"/>
+            <a:srgbClr val="F6F8F7"/>
           </a:solidFill>
-          <a:ln w="10160">
+          <a:ln w="12700">
             <a:solidFill>
-              <a:srgbClr val="CBD0CC"/>
+              <a:srgbClr val="A4AEA8"/>
             </a:solidFill>
           </a:ln>
         </p:spPr>
@@ -3102,40 +3174,111 @@
           </a:fontRef>
         </p:style>
         <p:txBody>
-          <a:bodyPr rtlCol="0" anchor="ctr"/>
-          <a:lstStyle/>
-          <a:p>
-            <a:pPr algn="ctr"/>
-          </a:p>
-        </p:txBody>
-      </p:sp>
-      <p:pic>
-        <p:nvPicPr>
-          <p:cNvPr id="5" name="Picture 4" descr="ccomp.png"/>
-          <p:cNvPicPr>
-            <a:picLocks noChangeAspect="1"/>
-          </p:cNvPicPr>
+          <a:bodyPr rtlCol="0" anchor="t" wrap="none" lIns="118872" rIns="73152" tIns="91440" bIns="73152"/>
+          <a:lstStyle/>
+          <a:p>
+            <a:pPr algn="l">
+              <a:defRPr sz="1700">
+                <a:solidFill>
+                  <a:srgbClr val="1E3027"/>
+                </a:solidFill>
+                <a:latin typeface="Consolas"/>
+              </a:defRPr>
+            </a:pPr>
+            <a:r>
+              <a:t>figure of merit   0.03 - 0.41 %</a:t>
+            </a:r>
+          </a:p>
+          <a:p>
+            <a:pPr algn="l">
+              <a:defRPr sz="1700">
+                <a:solidFill>
+                  <a:srgbClr val="1E3027"/>
+                </a:solidFill>
+                <a:latin typeface="Consolas"/>
+              </a:defRPr>
+            </a:pPr>
+            <a:r>
+              <a:t>timing shift      +4 to +8 ps</a:t>
+            </a:r>
+          </a:p>
+          <a:p>
+            <a:pPr algn="l">
+              <a:defRPr sz="1700">
+                <a:solidFill>
+                  <a:srgbClr val="1E3027"/>
+                </a:solidFill>
+                <a:latin typeface="Consolas"/>
+              </a:defRPr>
+            </a:pPr>
+          </a:p>
+          <a:p>
+            <a:pPr algn="l">
+              <a:defRPr sz="1700">
+                <a:solidFill>
+                  <a:srgbClr val="1E3027"/>
+                </a:solidFill>
+                <a:latin typeface="Consolas"/>
+              </a:defRPr>
+            </a:pPr>
+            <a:r>
+              <a:t>three buffers, both edges,</a:t>
+            </a:r>
+          </a:p>
+          <a:p>
+            <a:pPr algn="l">
+              <a:defRPr sz="1700">
+                <a:solidFill>
+                  <a:srgbClr val="1E3027"/>
+                </a:solidFill>
+                <a:latin typeface="Consolas"/>
+              </a:defRPr>
+            </a:pPr>
+            <a:r>
+              <a:t>both fixtures</a:t>
+            </a:r>
+          </a:p>
+        </p:txBody>
+      </p:sp>
+      <p:sp>
+        <p:nvSpPr>
+          <p:cNvPr id="6" name="TextBox 5"/>
+          <p:cNvSpPr txBox="1"/>
           <p:nvPr/>
-        </p:nvPicPr>
-        <p:blipFill>
-          <a:blip r:embed="rId2"/>
-          <a:stretch>
-            <a:fillRect/>
-          </a:stretch>
-        </p:blipFill>
-        <p:spPr>
-          <a:xfrm>
-            <a:off x="502920" y="1170432"/>
-            <a:ext cx="11155680" cy="4754879"/>
+        </p:nvSpPr>
+        <p:spPr>
+          <a:xfrm>
+            <a:off x="640080" y="4023360"/>
+            <a:ext cx="10972800" cy="731520"/>
           </a:xfrm>
           <a:prstGeom prst="rect">
             <a:avLst/>
           </a:prstGeom>
-        </p:spPr>
-      </p:pic>
-      <p:sp>
-        <p:nvSpPr>
-          <p:cNvPr id="6" name="Rectangle 5"/>
+          <a:noFill/>
+        </p:spPr>
+        <p:txBody>
+          <a:bodyPr wrap="square" lIns="45720" rIns="45720" anchor="t">
+            <a:spAutoFit/>
+          </a:bodyPr>
+          <a:lstStyle/>
+          <a:p>
+            <a:pPr algn="l">
+              <a:defRPr sz="1700" b="0">
+                <a:solidFill>
+                  <a:srgbClr val="191F1C"/>
+                </a:solidFill>
+                <a:latin typeface="Aptos"/>
+              </a:defRPr>
+            </a:pPr>
+            <a:r>
+              <a:t>It is now the standing health check, and it settled the C_comp question.</a:t>
+            </a:r>
+          </a:p>
+        </p:txBody>
+      </p:sp>
+      <p:sp>
+        <p:nvSpPr>
+          <p:cNvPr id="7" name="Rectangle 6"/>
           <p:cNvSpPr/>
           <p:nvPr/>
         </p:nvSpPr>
@@ -3183,7 +3326,7 @@
               </a:defRPr>
             </a:pPr>
             <a:r>
-              <a:t>I had this backwards first. The golden-waveform test overturned my own claim that pybis over-applies C_comp.</a:t>
+              <a:t>Whatever is wrong under stress, it is not the I-V times Ku(t) reconstruction.</a:t>
             </a:r>
           </a:p>
         </p:txBody>
@@ -3230,7 +3373,7 @@
               </a:defRPr>
             </a:pPr>
             <a:r>
-              <a:t>Is it the engine or the model?</a:t>
+              <a:t>C_comp is handled correctly</a:t>
             </a:r>
           </a:p>
         </p:txBody>
@@ -3266,67 +3409,31 @@
               </a:defRPr>
             </a:pPr>
             <a:r>
-              <a:t>METHOD</a:t>
-            </a:r>
-          </a:p>
-        </p:txBody>
-      </p:sp>
-      <p:sp>
-        <p:nvSpPr>
-          <p:cNvPr id="4" name="TextBox 3"/>
-          <p:cNvSpPr txBox="1"/>
-          <p:nvPr/>
-        </p:nvSpPr>
-        <p:spPr>
-          <a:xfrm>
-            <a:off x="640080" y="1188720"/>
-            <a:ext cx="10972800" cy="914400"/>
-          </a:xfrm>
-          <a:prstGeom prst="rect">
-            <a:avLst/>
-          </a:prstGeom>
-          <a:noFill/>
-        </p:spPr>
-        <p:txBody>
-          <a:bodyPr wrap="square" lIns="45720" rIns="45720" anchor="t">
-            <a:spAutoFit/>
-          </a:bodyPr>
-          <a:lstStyle/>
-          <a:p>
-            <a:pPr algn="l">
-              <a:defRPr sz="1700" b="0">
-                <a:solidFill>
-                  <a:srgbClr val="191F1C"/>
-                </a:solidFill>
-                <a:latin typeface="Aptos"/>
-              </a:defRPr>
-            </a:pPr>
-            <a:r>
-              <a:t>Every native-vs-pybis number changes two things at once: the IBIS implementation and the SPICE engine. We wrote a translator so the same model runs in both.</a:t>
-            </a:r>
-          </a:p>
-        </p:txBody>
-      </p:sp>
-      <p:sp>
-        <p:nvSpPr>
-          <p:cNvPr id="5" name="Rounded Rectangle 4"/>
+              <a:t>CONFIDENCE</a:t>
+            </a:r>
+          </a:p>
+        </p:txBody>
+      </p:sp>
+      <p:sp>
+        <p:nvSpPr>
+          <p:cNvPr id="4" name="Rectangle 3"/>
           <p:cNvSpPr/>
           <p:nvPr/>
         </p:nvSpPr>
         <p:spPr>
           <a:xfrm>
-            <a:off x="640080" y="2286000"/>
-            <a:ext cx="10972800" cy="1828800"/>
-          </a:xfrm>
-          <a:prstGeom prst="roundRect">
+            <a:off x="475488" y="1143000"/>
+            <a:ext cx="11210544" cy="4809743"/>
+          </a:xfrm>
+          <a:prstGeom prst="rect">
             <a:avLst/>
           </a:prstGeom>
           <a:solidFill>
-            <a:srgbClr val="F6F8F7"/>
+            <a:srgbClr val="FFFFFF"/>
           </a:solidFill>
-          <a:ln w="12700">
+          <a:ln w="10160">
             <a:solidFill>
-              <a:srgbClr val="A4AEA8"/>
+              <a:srgbClr val="CBD0CC"/>
             </a:solidFill>
           </a:ln>
         </p:spPr>
@@ -3345,75 +3452,40 @@
           </a:fontRef>
         </p:style>
         <p:txBody>
-          <a:bodyPr rtlCol="0" anchor="ctr" wrap="none" lIns="118872" rIns="73152" tIns="91440" bIns="73152"/>
-          <a:lstStyle/>
-          <a:p>
-            <a:pPr algn="ctr">
-              <a:defRPr sz="1500">
-                <a:solidFill>
-                  <a:srgbClr val="1E3027"/>
-                </a:solidFill>
-                <a:latin typeface="Consolas"/>
-              </a:defRPr>
-            </a:pPr>
-            <a:r>
-              <a:t>                          50% crossing</a:t>
-            </a:r>
-            <a:br/>
-            <a:br/>
-            <a:r>
-              <a:t>  pybis in ngspice            5.3371 ns</a:t>
-            </a:r>
-            <a:br/>
-            <a:r>
-              <a:t>  pybis in HSPICE             5.3375 ns     engine  -0.5 ps</a:t>
-            </a:r>
-            <a:br/>
-            <a:r>
-              <a:t>  native IBIS in HSPICE       5.3319 ns     model   +5.6 ps</a:t>
-            </a:r>
-          </a:p>
-        </p:txBody>
-      </p:sp>
-      <p:sp>
-        <p:nvSpPr>
-          <p:cNvPr id="6" name="TextBox 5"/>
-          <p:cNvSpPr txBox="1"/>
+          <a:bodyPr rtlCol="0" anchor="ctr"/>
+          <a:lstStyle/>
+          <a:p>
+            <a:pPr algn="ctr"/>
+          </a:p>
+        </p:txBody>
+      </p:sp>
+      <p:pic>
+        <p:nvPicPr>
+          <p:cNvPr id="5" name="Picture 4" descr="ccomp.png"/>
+          <p:cNvPicPr>
+            <a:picLocks noChangeAspect="1"/>
+          </p:cNvPicPr>
           <p:nvPr/>
-        </p:nvSpPr>
-        <p:spPr>
-          <a:xfrm>
-            <a:off x="640080" y="4297680"/>
-            <a:ext cx="10972800" cy="914400"/>
+        </p:nvPicPr>
+        <p:blipFill>
+          <a:blip r:embed="rId2"/>
+          <a:stretch>
+            <a:fillRect/>
+          </a:stretch>
+        </p:blipFill>
+        <p:spPr>
+          <a:xfrm>
+            <a:off x="502920" y="1170432"/>
+            <a:ext cx="11155680" cy="4754879"/>
           </a:xfrm>
           <a:prstGeom prst="rect">
             <a:avLst/>
           </a:prstGeom>
-          <a:noFill/>
-        </p:spPr>
-        <p:txBody>
-          <a:bodyPr wrap="square" lIns="45720" rIns="45720" anchor="t">
-            <a:spAutoFit/>
-          </a:bodyPr>
-          <a:lstStyle/>
-          <a:p>
-            <a:pPr algn="l">
-              <a:defRPr sz="1700" b="0">
-                <a:solidFill>
-                  <a:srgbClr val="191F1C"/>
-                </a:solidFill>
-                <a:latin typeface="Aptos"/>
-              </a:defRPr>
-            </a:pPr>
-            <a:r>
-              <a:t>The engine is not the source, provided ngspice is converged. At a 1 ps step it was an aliasing outlier that doubled the apparent lag.</a:t>
-            </a:r>
-          </a:p>
-        </p:txBody>
-      </p:sp>
-      <p:sp>
-        <p:nvSpPr>
-          <p:cNvPr id="7" name="Rectangle 6"/>
+        </p:spPr>
+      </p:pic>
+      <p:sp>
+        <p:nvSpPr>
+          <p:cNvPr id="6" name="Rectangle 5"/>
           <p:cNvSpPr/>
           <p:nvPr/>
         </p:nvSpPr>
@@ -3461,7 +3533,7 @@
               </a:defRPr>
             </a:pPr>
             <a:r>
-              <a:t>Converged, the two engines agree to half a picosecond.</a:t>
+              <a:t>I had this backwards first. The golden-waveform test overturned my own claim that pybis over-applies C_comp.</a:t>
             </a:r>
           </a:p>
         </p:txBody>
@@ -3508,7 +3580,7 @@
               </a:defRPr>
             </a:pPr>
             <a:r>
-              <a:t>What fixtures do to the extracted Ku/Kd</a:t>
+              <a:t>Is it the engine or the model?</a:t>
             </a:r>
           </a:p>
         </p:txBody>
@@ -3557,78 +3629,7 @@
         </p:nvSpPr>
         <p:spPr>
           <a:xfrm>
-            <a:off x="640080" y="1371600"/>
-            <a:ext cx="10972800" cy="2743200"/>
-          </a:xfrm>
-          <a:prstGeom prst="rect">
-            <a:avLst/>
-          </a:prstGeom>
-          <a:noFill/>
-        </p:spPr>
-        <p:txBody>
-          <a:bodyPr wrap="square" lIns="73152" rIns="36576" tIns="36576" bIns="36576">
-            <a:spAutoFit/>
-          </a:bodyPr>
-          <a:lstStyle/>
-          <a:p>
-            <a:pPr>
-              <a:spcAft>
-                <a:spcPts val="700"/>
-              </a:spcAft>
-              <a:defRPr sz="1700">
-                <a:solidFill>
-                  <a:srgbClr val="191F1C"/>
-                </a:solidFill>
-                <a:latin typeface="Aptos"/>
-              </a:defRPr>
-            </a:pPr>
-            <a:r>
-              <a:t>- The control reproduces the shipped solve to 2.4e-08, so the method is exact.</a:t>
-            </a:r>
-          </a:p>
-          <a:p>
-            <a:pPr>
-              <a:spcAft>
-                <a:spcPts val="700"/>
-              </a:spcAft>
-              <a:defRPr sz="1700">
-                <a:solidFill>
-                  <a:srgbClr val="191F1C"/>
-                </a:solidFill>
-                <a:latin typeface="Aptos"/>
-              </a:defRPr>
-            </a:pPr>
-            <a:r>
-              <a:t>- In quiet regions Ku is load-independent to four decimals. It is a device property, not a fixture artifact.</a:t>
-            </a:r>
-          </a:p>
-          <a:p>
-            <a:pPr>
-              <a:spcAft>
-                <a:spcPts val="700"/>
-              </a:spcAft>
-              <a:defRPr sz="1700">
-                <a:solidFill>
-                  <a:srgbClr val="191F1C"/>
-                </a:solidFill>
-                <a:latin typeface="Aptos"/>
-              </a:defRPr>
-            </a:pPr>
-            <a:r>
-              <a:t>- A resonant R+L+C fixture corrupts Ku for 1.14 ns, reaching 0.26 of error.</a:t>
-            </a:r>
-          </a:p>
-        </p:txBody>
-      </p:sp>
-      <p:sp>
-        <p:nvSpPr>
-          <p:cNvPr id="5" name="TextBox 4"/>
-          <p:cNvSpPr txBox="1"/>
-          <p:nvPr/>
-        </p:nvSpPr>
-        <p:spPr>
-          <a:xfrm>
-            <a:off x="640080" y="4206240"/>
+            <a:off x="640080" y="1188720"/>
             <a:ext cx="10972800" cy="914400"/>
           </a:xfrm>
           <a:prstGeom prst="rect">
@@ -3651,14 +3652,154 @@
               </a:defRPr>
             </a:pPr>
             <a:r>
-              <a:t>Added L and C are safe individually. The resonant combination has to be avoided when characterising.</a:t>
-            </a:r>
-          </a:p>
-        </p:txBody>
-      </p:sp>
-      <p:sp>
-        <p:nvSpPr>
-          <p:cNvPr id="6" name="Rectangle 5"/>
+              <a:t>Every native-vs-pybis number changes two things at once: the IBIS implementation and the SPICE engine. We wrote a translator so the same model runs in both.</a:t>
+            </a:r>
+          </a:p>
+        </p:txBody>
+      </p:sp>
+      <p:sp>
+        <p:nvSpPr>
+          <p:cNvPr id="5" name="Rounded Rectangle 4"/>
+          <p:cNvSpPr/>
+          <p:nvPr/>
+        </p:nvSpPr>
+        <p:spPr>
+          <a:xfrm>
+            <a:off x="640080" y="2377440"/>
+            <a:ext cx="10972800" cy="1591310"/>
+          </a:xfrm>
+          <a:prstGeom prst="roundRect">
+            <a:avLst/>
+          </a:prstGeom>
+          <a:solidFill>
+            <a:srgbClr val="F6F8F7"/>
+          </a:solidFill>
+          <a:ln w="12700">
+            <a:solidFill>
+              <a:srgbClr val="A4AEA8"/>
+            </a:solidFill>
+          </a:ln>
+        </p:spPr>
+        <p:style>
+          <a:lnRef idx="1">
+            <a:schemeClr val="accent1"/>
+          </a:lnRef>
+          <a:fillRef idx="3">
+            <a:schemeClr val="accent1"/>
+          </a:fillRef>
+          <a:effectRef idx="2">
+            <a:schemeClr val="accent1"/>
+          </a:effectRef>
+          <a:fontRef idx="minor">
+            <a:schemeClr val="lt1"/>
+          </a:fontRef>
+        </p:style>
+        <p:txBody>
+          <a:bodyPr rtlCol="0" anchor="t" wrap="none" lIns="118872" rIns="73152" tIns="91440" bIns="73152"/>
+          <a:lstStyle/>
+          <a:p>
+            <a:pPr algn="l">
+              <a:defRPr sz="1700">
+                <a:solidFill>
+                  <a:srgbClr val="1E3027"/>
+                </a:solidFill>
+                <a:latin typeface="Consolas"/>
+              </a:defRPr>
+            </a:pPr>
+            <a:r>
+              <a:t>                          50% crossing</a:t>
+            </a:r>
+          </a:p>
+          <a:p>
+            <a:pPr algn="l">
+              <a:defRPr sz="1700">
+                <a:solidFill>
+                  <a:srgbClr val="1E3027"/>
+                </a:solidFill>
+                <a:latin typeface="Consolas"/>
+              </a:defRPr>
+            </a:pPr>
+          </a:p>
+          <a:p>
+            <a:pPr algn="l">
+              <a:defRPr sz="1700">
+                <a:solidFill>
+                  <a:srgbClr val="1E3027"/>
+                </a:solidFill>
+                <a:latin typeface="Consolas"/>
+              </a:defRPr>
+            </a:pPr>
+            <a:r>
+              <a:t>  pybis in ngspice            5.3371 ns</a:t>
+            </a:r>
+          </a:p>
+          <a:p>
+            <a:pPr algn="l">
+              <a:defRPr sz="1700">
+                <a:solidFill>
+                  <a:srgbClr val="1E3027"/>
+                </a:solidFill>
+                <a:latin typeface="Consolas"/>
+              </a:defRPr>
+            </a:pPr>
+            <a:r>
+              <a:t>  pybis in HSPICE             5.3375 ns     engine  -0.5 ps</a:t>
+            </a:r>
+          </a:p>
+          <a:p>
+            <a:pPr algn="l">
+              <a:defRPr sz="1700">
+                <a:solidFill>
+                  <a:srgbClr val="1E3027"/>
+                </a:solidFill>
+                <a:latin typeface="Consolas"/>
+              </a:defRPr>
+            </a:pPr>
+            <a:r>
+              <a:t>  native IBIS in HSPICE       5.3319 ns     model   +5.6 ps</a:t>
+            </a:r>
+          </a:p>
+        </p:txBody>
+      </p:sp>
+      <p:sp>
+        <p:nvSpPr>
+          <p:cNvPr id="6" name="TextBox 5"/>
+          <p:cNvSpPr txBox="1"/>
+          <p:nvPr/>
+        </p:nvSpPr>
+        <p:spPr>
+          <a:xfrm>
+            <a:off x="640080" y="4297680"/>
+            <a:ext cx="10972800" cy="914400"/>
+          </a:xfrm>
+          <a:prstGeom prst="rect">
+            <a:avLst/>
+          </a:prstGeom>
+          <a:noFill/>
+        </p:spPr>
+        <p:txBody>
+          <a:bodyPr wrap="square" lIns="45720" rIns="45720" anchor="t">
+            <a:spAutoFit/>
+          </a:bodyPr>
+          <a:lstStyle/>
+          <a:p>
+            <a:pPr algn="l">
+              <a:defRPr sz="1700" b="0">
+                <a:solidFill>
+                  <a:srgbClr val="191F1C"/>
+                </a:solidFill>
+                <a:latin typeface="Aptos"/>
+              </a:defRPr>
+            </a:pPr>
+            <a:r>
+              <a:t>The engine is not the source, provided ngspice is converged. At a 1 ps step it was an aliasing outlier that doubled the apparent lag.</a:t>
+            </a:r>
+          </a:p>
+        </p:txBody>
+      </p:sp>
+      <p:sp>
+        <p:nvSpPr>
+          <p:cNvPr id="7" name="Rectangle 6"/>
           <p:cNvSpPr/>
           <p:nvPr/>
         </p:nvSpPr>
@@ -3706,7 +3847,7 @@
               </a:defRPr>
             </a:pPr>
             <a:r>
-              <a:t>The two-fixture extraction is trustworthy, as long as the fixture is not resonant.</a:t>
+              <a:t>Converged, the two engines agree to half a picosecond.</a:t>
             </a:r>
           </a:p>
         </p:txBody>
@@ -3753,7 +3894,7 @@
               </a:defRPr>
             </a:pPr>
             <a:r>
-              <a:t>The 1.25 max|Ku| cap rejects good models</a:t>
+              <a:t>What fixtures do to the extracted Ku/Kd</a:t>
             </a:r>
           </a:p>
         </p:txBody>
@@ -3789,83 +3930,78 @@
               </a:defRPr>
             </a:pPr>
             <a:r>
-              <a:t>WHAT SHOULD CHANGE</a:t>
-            </a:r>
-          </a:p>
-        </p:txBody>
-      </p:sp>
-      <p:sp>
-        <p:nvSpPr>
-          <p:cNvPr id="4" name="Rounded Rectangle 3"/>
-          <p:cNvSpPr/>
+              <a:t>METHOD</a:t>
+            </a:r>
+          </a:p>
+        </p:txBody>
+      </p:sp>
+      <p:sp>
+        <p:nvSpPr>
+          <p:cNvPr id="4" name="TextBox 3"/>
+          <p:cNvSpPr txBox="1"/>
           <p:nvPr/>
         </p:nvSpPr>
         <p:spPr>
           <a:xfrm>
-            <a:off x="640080" y="1234440"/>
-            <a:ext cx="10972800" cy="2560320"/>
-          </a:xfrm>
-          <a:prstGeom prst="roundRect">
-            <a:avLst/>
-          </a:prstGeom>
-          <a:solidFill>
-            <a:srgbClr val="F6F8F7"/>
-          </a:solidFill>
-          <a:ln w="12700">
-            <a:solidFill>
-              <a:srgbClr val="A4AEA8"/>
-            </a:solidFill>
-          </a:ln>
-        </p:spPr>
-        <p:style>
-          <a:lnRef idx="1">
-            <a:schemeClr val="accent1"/>
-          </a:lnRef>
-          <a:fillRef idx="3">
-            <a:schemeClr val="accent1"/>
-          </a:fillRef>
-          <a:effectRef idx="2">
-            <a:schemeClr val="accent1"/>
-          </a:effectRef>
-          <a:fontRef idx="minor">
-            <a:schemeClr val="lt1"/>
-          </a:fontRef>
-        </p:style>
-        <p:txBody>
-          <a:bodyPr rtlCol="0" anchor="ctr" wrap="none" lIns="118872" rIns="73152" tIns="91440" bIns="73152"/>
-          <a:lstStyle/>
-          <a:p>
-            <a:pPr algn="ctr">
-              <a:defRPr sz="1500">
-                <a:solidFill>
-                  <a:srgbClr val="1E3027"/>
-                </a:solidFill>
-                <a:latin typeface="Consolas"/>
-              </a:defRPr>
-            </a:pPr>
-            <a:r>
-              <a:t>ex2 variants                    edge     max|Ku|</a:t>
-            </a:r>
-            <a:br/>
-            <a:br/>
-            <a:r>
-              <a:t>  slowpre   predriver halved     328 ps     1.047</a:t>
-            </a:r>
-            <a:br/>
-            <a:r>
-              <a:t>  base      control              200 ps     1.283</a:t>
-            </a:r>
-            <a:br/>
-            <a:r>
-              <a:t>  nomiller  Miller caps removed  208 ps     1.299</a:t>
-            </a:r>
-            <a:br/>
-            <a:r>
-              <a:t>  skewp     output PMOS halved   160 ps     1.589</a:t>
-            </a:r>
-            <a:br/>
-            <a:r>
-              <a:t>  weak      both devices halved  152 ps     1.779</a:t>
+            <a:off x="640080" y="1371600"/>
+            <a:ext cx="10972800" cy="2743200"/>
+          </a:xfrm>
+          <a:prstGeom prst="rect">
+            <a:avLst/>
+          </a:prstGeom>
+          <a:noFill/>
+        </p:spPr>
+        <p:txBody>
+          <a:bodyPr wrap="square" lIns="73152" rIns="36576" tIns="36576" bIns="36576">
+            <a:spAutoFit/>
+          </a:bodyPr>
+          <a:lstStyle/>
+          <a:p>
+            <a:pPr>
+              <a:spcAft>
+                <a:spcPts val="700"/>
+              </a:spcAft>
+              <a:defRPr sz="1700">
+                <a:solidFill>
+                  <a:srgbClr val="191F1C"/>
+                </a:solidFill>
+                <a:latin typeface="Aptos"/>
+              </a:defRPr>
+            </a:pPr>
+            <a:r>
+              <a:t>•  The control reproduces the shipped solve to 2.4e-08, so the method is exact.</a:t>
+            </a:r>
+          </a:p>
+          <a:p>
+            <a:pPr>
+              <a:spcAft>
+                <a:spcPts val="700"/>
+              </a:spcAft>
+              <a:defRPr sz="1700">
+                <a:solidFill>
+                  <a:srgbClr val="191F1C"/>
+                </a:solidFill>
+                <a:latin typeface="Aptos"/>
+              </a:defRPr>
+            </a:pPr>
+            <a:r>
+              <a:t>•  In quiet regions Ku is load-independent to four decimals. It is a device property, not a fixture artifact.</a:t>
+            </a:r>
+          </a:p>
+          <a:p>
+            <a:pPr>
+              <a:spcAft>
+                <a:spcPts val="700"/>
+              </a:spcAft>
+              <a:defRPr sz="1700">
+                <a:solidFill>
+                  <a:srgbClr val="191F1C"/>
+                </a:solidFill>
+                <a:latin typeface="Aptos"/>
+              </a:defRPr>
+            </a:pPr>
+            <a:r>
+              <a:t>•  A resonant R+L+C fixture corrupts Ku for 1.14 ns, reaching 0.26 of error.</a:t>
             </a:r>
           </a:p>
         </p:txBody>
@@ -3878,8 +4014,8 @@
         </p:nvSpPr>
         <p:spPr>
           <a:xfrm>
-            <a:off x="640080" y="3931920"/>
-            <a:ext cx="10972800" cy="1554480"/>
+            <a:off x="640080" y="4206240"/>
+            <a:ext cx="10972800" cy="914400"/>
           </a:xfrm>
           <a:prstGeom prst="rect">
             <a:avLst/>
@@ -3901,7 +4037,7 @@
               </a:defRPr>
             </a:pPr>
             <a:r>
-              <a:t>Monotonic in C_comp times dV/dt against the device drive. For ex2 that is 82 mA of displacement current against a ~51 mA drive: it exceeds the device, so the solve must push Ku above 1. Healthy baselines differ per silicon, inv_chain 1.03, io_buf 1.18, ex2 1.28.</a:t>
+              <a:t>Added L and C are safe individually. The resonant combination has to be avoided when characterising.</a:t>
             </a:r>
           </a:p>
         </p:txBody>
@@ -3956,7 +4092,7 @@
               </a:defRPr>
             </a:pPr>
             <a:r>
-              <a:t>A high max|Ku| is a real signature of a large die capacitance driven fast, not a corrupted extraction.</a:t>
+              <a:t>The two-fixture extraction is trustworthy, as long as the fixture is not resonant.</a:t>
             </a:r>
           </a:p>
         </p:txBody>
@@ -4003,7 +4139,7 @@
               </a:defRPr>
             </a:pPr>
             <a:r>
-              <a:t>New buffers, and what they are for</a:t>
+              <a:t>The 1.25 max|Ku| cap rejects good models</a:t>
             </a:r>
           </a:p>
         </p:txBody>
@@ -4046,111 +4182,73 @@
       </p:sp>
       <p:sp>
         <p:nvSpPr>
-          <p:cNvPr id="4" name="TextBox 3"/>
-          <p:cNvSpPr txBox="1"/>
+          <p:cNvPr id="4" name="Rectangle 3"/>
+          <p:cNvSpPr/>
           <p:nvPr/>
         </p:nvSpPr>
         <p:spPr>
           <a:xfrm>
-            <a:off x="640080" y="1280160"/>
-            <a:ext cx="10972800" cy="2560320"/>
+            <a:off x="475488" y="1207008"/>
+            <a:ext cx="11210544" cy="4535423"/>
           </a:xfrm>
           <a:prstGeom prst="rect">
             <a:avLst/>
           </a:prstGeom>
-          <a:noFill/>
-        </p:spPr>
-        <p:txBody>
-          <a:bodyPr wrap="square" lIns="73152" rIns="36576" tIns="36576" bIns="36576">
-            <a:spAutoFit/>
-          </a:bodyPr>
-          <a:lstStyle/>
-          <a:p>
-            <a:pPr>
-              <a:spcAft>
-                <a:spcPts val="700"/>
-              </a:spcAft>
-              <a:defRPr sz="1700">
-                <a:solidFill>
-                  <a:srgbClr val="191F1C"/>
-                </a:solidFill>
-                <a:latin typeface="Aptos"/>
-              </a:defRPr>
-            </a:pPr>
-            <a:r>
-              <a:t>- Nine variants of inv_chain and ex2 built in HSPICE with the real transistor library: slower predriver, halved output devices, skewed PMOS, Miller caps removed, plus an open-drain build.</a:t>
-            </a:r>
-          </a:p>
-          <a:p>
-            <a:pPr>
-              <a:spcAft>
-                <a:spcPts val="700"/>
-              </a:spcAft>
-              <a:defRPr sz="1700">
-                <a:solidFill>
-                  <a:srgbClr val="191F1C"/>
-                </a:solidFill>
-                <a:latin typeface="Aptos"/>
-              </a:defRPr>
-            </a:pPr>
-            <a:r>
-              <a:t>- The point is to test whether what we learned on three buffers holds across different silicon.</a:t>
-            </a:r>
-          </a:p>
-          <a:p>
-            <a:pPr>
-              <a:spcAft>
-                <a:spcPts val="700"/>
-              </a:spcAft>
-              <a:defRPr sz="1700">
-                <a:solidFill>
-                  <a:srgbClr val="191F1C"/>
-                </a:solidFill>
-                <a:latin typeface="Aptos"/>
-              </a:defRPr>
-            </a:pPr>
-            <a:r>
-              <a:t>- Same characterisation, same stress axis, so the comparison is like for like.</a:t>
-            </a:r>
-          </a:p>
-        </p:txBody>
-      </p:sp>
-      <p:sp>
-        <p:nvSpPr>
-          <p:cNvPr id="5" name="TextBox 4"/>
-          <p:cNvSpPr txBox="1"/>
+          <a:solidFill>
+            <a:srgbClr val="FFFFFF"/>
+          </a:solidFill>
+          <a:ln w="10160">
+            <a:solidFill>
+              <a:srgbClr val="CBD0CC"/>
+            </a:solidFill>
+          </a:ln>
+        </p:spPr>
+        <p:style>
+          <a:lnRef idx="1">
+            <a:schemeClr val="accent1"/>
+          </a:lnRef>
+          <a:fillRef idx="3">
+            <a:schemeClr val="accent1"/>
+          </a:fillRef>
+          <a:effectRef idx="2">
+            <a:schemeClr val="accent1"/>
+          </a:effectRef>
+          <a:fontRef idx="minor">
+            <a:schemeClr val="lt1"/>
+          </a:fontRef>
+        </p:style>
+        <p:txBody>
+          <a:bodyPr rtlCol="0" anchor="ctr"/>
+          <a:lstStyle/>
+          <a:p>
+            <a:pPr algn="ctr"/>
+          </a:p>
+        </p:txBody>
+      </p:sp>
+      <p:pic>
+        <p:nvPicPr>
+          <p:cNvPr id="5" name="Picture 4" descr="ku_cap.png"/>
+          <p:cNvPicPr>
+            <a:picLocks noChangeAspect="1"/>
+          </p:cNvPicPr>
           <p:nvPr/>
-        </p:nvSpPr>
-        <p:spPr>
-          <a:xfrm>
-            <a:off x="640080" y="4114800"/>
-            <a:ext cx="10972800" cy="914400"/>
+        </p:nvPicPr>
+        <p:blipFill>
+          <a:blip r:embed="rId2"/>
+          <a:stretch>
+            <a:fillRect/>
+          </a:stretch>
+        </p:blipFill>
+        <p:spPr>
+          <a:xfrm>
+            <a:off x="502920" y="1234440"/>
+            <a:ext cx="11155680" cy="4480559"/>
           </a:xfrm>
           <a:prstGeom prst="rect">
             <a:avLst/>
           </a:prstGeom>
-          <a:noFill/>
-        </p:spPr>
-        <p:txBody>
-          <a:bodyPr wrap="square" lIns="45720" rIns="45720" anchor="t">
-            <a:spAutoFit/>
-          </a:bodyPr>
-          <a:lstStyle/>
-          <a:p>
-            <a:pPr algn="l">
-              <a:defRPr sz="1700" b="0">
-                <a:solidFill>
-                  <a:srgbClr val="191F1C"/>
-                </a:solidFill>
-                <a:latin typeface="Aptos"/>
-              </a:defRPr>
-            </a:pPr>
-            <a:r>
-              <a:t>Running now: the same 90-50% stress axis on all nine, with Ku and Kd solved from the transistor for every case.</a:t>
-            </a:r>
-          </a:p>
-        </p:txBody>
-      </p:sp>
+        </p:spPr>
+      </p:pic>
       <p:sp>
         <p:nvSpPr>
           <p:cNvPr id="6" name="Rectangle 5"/>
@@ -4201,7 +4299,7 @@
               </a:defRPr>
             </a:pPr>
             <a:r>
-              <a:t>Ku and Kd show what the pad trace hides.</a:t>
+              <a:t>A high max|Ku| is a real signature of a large die capacitance driven fast, not a corrupted extraction.</a:t>
             </a:r>
           </a:p>
         </p:txBody>
@@ -4248,7 +4346,7 @@
               </a:defRPr>
             </a:pPr>
             <a:r>
-              <a:t>The coefficients under stress</a:t>
+              <a:t>New buffers, and what they are for</a:t>
             </a:r>
           </a:p>
         </p:txBody>
@@ -4291,73 +4389,111 @@
       </p:sp>
       <p:sp>
         <p:nvSpPr>
-          <p:cNvPr id="4" name="Rectangle 3"/>
-          <p:cNvSpPr/>
+          <p:cNvPr id="4" name="TextBox 3"/>
+          <p:cNvSpPr txBox="1"/>
           <p:nvPr/>
         </p:nvSpPr>
         <p:spPr>
           <a:xfrm>
-            <a:off x="475488" y="1143000"/>
-            <a:ext cx="11210544" cy="4809743"/>
+            <a:off x="640080" y="1280160"/>
+            <a:ext cx="10972800" cy="2560320"/>
           </a:xfrm>
           <a:prstGeom prst="rect">
             <a:avLst/>
           </a:prstGeom>
-          <a:solidFill>
-            <a:srgbClr val="FFFFFF"/>
-          </a:solidFill>
-          <a:ln w="10160">
-            <a:solidFill>
-              <a:srgbClr val="CBD0CC"/>
-            </a:solidFill>
-          </a:ln>
-        </p:spPr>
-        <p:style>
-          <a:lnRef idx="1">
-            <a:schemeClr val="accent1"/>
-          </a:lnRef>
-          <a:fillRef idx="3">
-            <a:schemeClr val="accent1"/>
-          </a:fillRef>
-          <a:effectRef idx="2">
-            <a:schemeClr val="accent1"/>
-          </a:effectRef>
-          <a:fontRef idx="minor">
-            <a:schemeClr val="lt1"/>
-          </a:fontRef>
-        </p:style>
-        <p:txBody>
-          <a:bodyPr rtlCol="0" anchor="ctr"/>
-          <a:lstStyle/>
-          <a:p>
-            <a:pPr algn="ctr"/>
-          </a:p>
-        </p:txBody>
-      </p:sp>
-      <p:pic>
-        <p:nvPicPr>
-          <p:cNvPr id="5" name="Picture 4" descr="variant_kukd.png"/>
-          <p:cNvPicPr>
-            <a:picLocks noChangeAspect="1"/>
-          </p:cNvPicPr>
+          <a:noFill/>
+        </p:spPr>
+        <p:txBody>
+          <a:bodyPr wrap="square" lIns="73152" rIns="36576" tIns="36576" bIns="36576">
+            <a:spAutoFit/>
+          </a:bodyPr>
+          <a:lstStyle/>
+          <a:p>
+            <a:pPr>
+              <a:spcAft>
+                <a:spcPts val="700"/>
+              </a:spcAft>
+              <a:defRPr sz="1700">
+                <a:solidFill>
+                  <a:srgbClr val="191F1C"/>
+                </a:solidFill>
+                <a:latin typeface="Aptos"/>
+              </a:defRPr>
+            </a:pPr>
+            <a:r>
+              <a:t>•  Nine variants of inv_chain and ex2 built in HSPICE with the real transistor library: slower predriver, halved output devices, skewed PMOS, Miller caps removed, plus an open-drain build.</a:t>
+            </a:r>
+          </a:p>
+          <a:p>
+            <a:pPr>
+              <a:spcAft>
+                <a:spcPts val="700"/>
+              </a:spcAft>
+              <a:defRPr sz="1700">
+                <a:solidFill>
+                  <a:srgbClr val="191F1C"/>
+                </a:solidFill>
+                <a:latin typeface="Aptos"/>
+              </a:defRPr>
+            </a:pPr>
+            <a:r>
+              <a:t>•  The point is to test whether what we learned on three buffers holds across different silicon.</a:t>
+            </a:r>
+          </a:p>
+          <a:p>
+            <a:pPr>
+              <a:spcAft>
+                <a:spcPts val="700"/>
+              </a:spcAft>
+              <a:defRPr sz="1700">
+                <a:solidFill>
+                  <a:srgbClr val="191F1C"/>
+                </a:solidFill>
+                <a:latin typeface="Aptos"/>
+              </a:defRPr>
+            </a:pPr>
+            <a:r>
+              <a:t>•  Same characterisation, same stress axis, so the comparison is like for like.</a:t>
+            </a:r>
+          </a:p>
+        </p:txBody>
+      </p:sp>
+      <p:sp>
+        <p:nvSpPr>
+          <p:cNvPr id="5" name="TextBox 4"/>
+          <p:cNvSpPr txBox="1"/>
           <p:nvPr/>
-        </p:nvPicPr>
-        <p:blipFill>
-          <a:blip r:embed="rId2"/>
-          <a:stretch>
-            <a:fillRect/>
-          </a:stretch>
-        </p:blipFill>
-        <p:spPr>
-          <a:xfrm>
-            <a:off x="502920" y="1170432"/>
-            <a:ext cx="11155680" cy="4754879"/>
+        </p:nvSpPr>
+        <p:spPr>
+          <a:xfrm>
+            <a:off x="640080" y="4114800"/>
+            <a:ext cx="10972800" cy="914400"/>
           </a:xfrm>
           <a:prstGeom prst="rect">
             <a:avLst/>
           </a:prstGeom>
-        </p:spPr>
-      </p:pic>
+          <a:noFill/>
+        </p:spPr>
+        <p:txBody>
+          <a:bodyPr wrap="square" lIns="45720" rIns="45720" anchor="t">
+            <a:spAutoFit/>
+          </a:bodyPr>
+          <a:lstStyle/>
+          <a:p>
+            <a:pPr algn="l">
+              <a:defRPr sz="1700" b="0">
+                <a:solidFill>
+                  <a:srgbClr val="191F1C"/>
+                </a:solidFill>
+                <a:latin typeface="Aptos"/>
+              </a:defRPr>
+            </a:pPr>
+            <a:r>
+              <a:t>Running now: the same 90-50% stress axis on all nine, with Ku and Kd solved from the transistor for every case.</a:t>
+            </a:r>
+          </a:p>
+        </p:txBody>
+      </p:sp>
       <p:sp>
         <p:nvSpPr>
           <p:cNvPr id="6" name="Rectangle 5"/>
@@ -4408,7 +4544,7 @@
               </a:defRPr>
             </a:pPr>
             <a:r>
-              <a:t>The gate-state build starts moving before the transistor does. Visible in Ku, invisible in the pad.</a:t>
+              <a:t>Ku and Kd show what the pad trace hides.</a:t>
             </a:r>
           </a:p>
         </p:txBody>
@@ -4455,6 +4591,213 @@
               </a:defRPr>
             </a:pPr>
             <a:r>
+              <a:t>The coefficients under stress</a:t>
+            </a:r>
+          </a:p>
+        </p:txBody>
+      </p:sp>
+      <p:sp>
+        <p:nvSpPr>
+          <p:cNvPr id="3" name="TextBox 2"/>
+          <p:cNvSpPr txBox="1"/>
+          <p:nvPr/>
+        </p:nvSpPr>
+        <p:spPr>
+          <a:xfrm>
+            <a:off x="9372600" y="109728"/>
+            <a:ext cx="2148840" cy="228600"/>
+          </a:xfrm>
+          <a:prstGeom prst="rect">
+            <a:avLst/>
+          </a:prstGeom>
+          <a:noFill/>
+        </p:spPr>
+        <p:txBody>
+          <a:bodyPr wrap="square" lIns="45720" rIns="45720" anchor="t">
+            <a:spAutoFit/>
+          </a:bodyPr>
+          <a:lstStyle/>
+          <a:p>
+            <a:pPr algn="r">
+              <a:defRPr sz="950" b="1">
+                <a:solidFill>
+                  <a:srgbClr val="666C68"/>
+                </a:solidFill>
+                <a:latin typeface="Aptos"/>
+              </a:defRPr>
+            </a:pPr>
+            <a:r>
+              <a:t>WHAT SHOULD CHANGE</a:t>
+            </a:r>
+          </a:p>
+        </p:txBody>
+      </p:sp>
+      <p:sp>
+        <p:nvSpPr>
+          <p:cNvPr id="4" name="Rectangle 3"/>
+          <p:cNvSpPr/>
+          <p:nvPr/>
+        </p:nvSpPr>
+        <p:spPr>
+          <a:xfrm>
+            <a:off x="475488" y="1143000"/>
+            <a:ext cx="11210544" cy="4809743"/>
+          </a:xfrm>
+          <a:prstGeom prst="rect">
+            <a:avLst/>
+          </a:prstGeom>
+          <a:solidFill>
+            <a:srgbClr val="FFFFFF"/>
+          </a:solidFill>
+          <a:ln w="10160">
+            <a:solidFill>
+              <a:srgbClr val="CBD0CC"/>
+            </a:solidFill>
+          </a:ln>
+        </p:spPr>
+        <p:style>
+          <a:lnRef idx="1">
+            <a:schemeClr val="accent1"/>
+          </a:lnRef>
+          <a:fillRef idx="3">
+            <a:schemeClr val="accent1"/>
+          </a:fillRef>
+          <a:effectRef idx="2">
+            <a:schemeClr val="accent1"/>
+          </a:effectRef>
+          <a:fontRef idx="minor">
+            <a:schemeClr val="lt1"/>
+          </a:fontRef>
+        </p:style>
+        <p:txBody>
+          <a:bodyPr rtlCol="0" anchor="ctr"/>
+          <a:lstStyle/>
+          <a:p>
+            <a:pPr algn="ctr"/>
+          </a:p>
+        </p:txBody>
+      </p:sp>
+      <p:pic>
+        <p:nvPicPr>
+          <p:cNvPr id="5" name="Picture 4" descr="variant_kukd.png"/>
+          <p:cNvPicPr>
+            <a:picLocks noChangeAspect="1"/>
+          </p:cNvPicPr>
+          <p:nvPr/>
+        </p:nvPicPr>
+        <p:blipFill>
+          <a:blip r:embed="rId2"/>
+          <a:stretch>
+            <a:fillRect/>
+          </a:stretch>
+        </p:blipFill>
+        <p:spPr>
+          <a:xfrm>
+            <a:off x="502920" y="1170432"/>
+            <a:ext cx="11155680" cy="4754879"/>
+          </a:xfrm>
+          <a:prstGeom prst="rect">
+            <a:avLst/>
+          </a:prstGeom>
+        </p:spPr>
+      </p:pic>
+      <p:sp>
+        <p:nvSpPr>
+          <p:cNvPr id="6" name="Rectangle 5"/>
+          <p:cNvSpPr/>
+          <p:nvPr/>
+        </p:nvSpPr>
+        <p:spPr>
+          <a:xfrm>
+            <a:off x="384048" y="6062472"/>
+            <a:ext cx="11109960" cy="393192"/>
+          </a:xfrm>
+          <a:prstGeom prst="rect">
+            <a:avLst/>
+          </a:prstGeom>
+          <a:solidFill>
+            <a:srgbClr val="F1F8F2"/>
+          </a:solidFill>
+          <a:ln>
+            <a:solidFill>
+              <a:srgbClr val="F1F8F2"/>
+            </a:solidFill>
+          </a:ln>
+        </p:spPr>
+        <p:style>
+          <a:lnRef idx="1">
+            <a:schemeClr val="accent1"/>
+          </a:lnRef>
+          <a:fillRef idx="3">
+            <a:schemeClr val="accent1"/>
+          </a:fillRef>
+          <a:effectRef idx="2">
+            <a:schemeClr val="accent1"/>
+          </a:effectRef>
+          <a:fontRef idx="minor">
+            <a:schemeClr val="lt1"/>
+          </a:fontRef>
+        </p:style>
+        <p:txBody>
+          <a:bodyPr rtlCol="0" anchor="ctr"/>
+          <a:lstStyle/>
+          <a:p>
+            <a:pPr algn="ctr">
+              <a:defRPr sz="1400" b="1">
+                <a:solidFill>
+                  <a:srgbClr val="2B7A43"/>
+                </a:solidFill>
+                <a:latin typeface="Aptos"/>
+              </a:defRPr>
+            </a:pPr>
+            <a:r>
+              <a:t>The gate-state build starts moving before the transistor does. Visible in Ku, invisible in the pad.</a:t>
+            </a:r>
+          </a:p>
+        </p:txBody>
+      </p:sp>
+    </p:spTree>
+  </p:cSld>
+  <p:clrMapOvr>
+    <a:masterClrMapping/>
+  </p:clrMapOvr>
+</p:sld>
+</file>
+
+<file path=ppt/slides/slide17.xml><?xml version="1.0" encoding="utf-8"?>
+<p:sld xmlns:a="http://schemas.openxmlformats.org/drawingml/2006/main" xmlns:p="http://schemas.openxmlformats.org/presentationml/2006/main" xmlns:r="http://schemas.openxmlformats.org/officeDocument/2006/relationships">
+  <p:cSld>
+    <p:spTree>
+      <p:nvGrpSpPr>
+        <p:cNvPr id="1" name=""/>
+        <p:cNvGrpSpPr/>
+        <p:nvPr/>
+      </p:nvGrpSpPr>
+      <p:grpSpPr/>
+      <p:sp>
+        <p:nvSpPr>
+          <p:cNvPr id="2" name="Title 1"/>
+          <p:cNvSpPr>
+            <a:spLocks noGrp="1"/>
+          </p:cNvSpPr>
+          <p:nvPr>
+            <p:ph type="title"/>
+          </p:nvPr>
+        </p:nvSpPr>
+        <p:spPr/>
+        <p:txBody>
+          <a:bodyPr/>
+          <a:lstStyle/>
+          <a:p>
+            <a:pPr algn="l">
+              <a:defRPr sz="2700" b="0">
+                <a:solidFill>
+                  <a:srgbClr val="000000"/>
+                </a:solidFill>
+                <a:latin typeface="Times New Roman"/>
+              </a:defRPr>
+            </a:pPr>
+            <a:r>
               <a:t>Where this leaves us</a:t>
             </a:r>
           </a:p>
@@ -4530,7 +4873,7 @@
               </a:defRPr>
             </a:pPr>
             <a:r>
-              <a:t>- Settled: C_comp is right, the engine is not a confounder, pybis reproduces its own golden waveforms, and delay_cmd fixes the offset.</a:t>
+              <a:t>•  Settled: C_comp is right, the engine is not a confounder, pybis reproduces its own golden waveforms, and delay_cmd fixes the offset.</a:t>
             </a:r>
           </a:p>
           <a:p>
@@ -4546,7 +4889,7 @@
               </a:defRPr>
             </a:pPr>
             <a:r>
-              <a:t>- Open: the timing shift has no candidate mechanism, and it grows with truncation on every buffer tried.</a:t>
+              <a:t>•  Open: the timing shift has no candidate mechanism, and it grows with truncation on every buffer tried.</a:t>
             </a:r>
           </a:p>
           <a:p>
@@ -4562,7 +4905,7 @@
               </a:defRPr>
             </a:pPr>
             <a:r>
-              <a:t>- Open: the 1.25 max|Ku| cap needs replacing before it rejects more good models.</a:t>
+              <a:t>•  Open: the 1.25 max|Ku| cap needs replacing before it rejects more good models.</a:t>
             </a:r>
           </a:p>
         </p:txBody>
@@ -4720,7 +5063,7 @@
               </a:defRPr>
             </a:pPr>
             <a:r>
-              <a:t>- The transistor netlist in HSPICE is ground truth.</a:t>
+              <a:t>•  The transistor netlist in HSPICE is ground truth.</a:t>
             </a:r>
           </a:p>
           <a:p>
@@ -4736,7 +5079,7 @@
               </a:defRPr>
             </a:pPr>
             <a:r>
-              <a:t>- Native IBIS is the bar to beat, not the target.</a:t>
+              <a:t>•  Native IBIS is the bar to beat, not the target.</a:t>
             </a:r>
           </a:p>
           <a:p>
@@ -4752,97 +5095,21 @@
               </a:defRPr>
             </a:pPr>
             <a:r>
-              <a:t>- Everything here is measured against the transistor.</a:t>
-            </a:r>
-          </a:p>
-        </p:txBody>
-      </p:sp>
-      <p:sp>
-        <p:nvSpPr>
-          <p:cNvPr id="5" name="Rounded Rectangle 4"/>
-          <p:cNvSpPr/>
-          <p:nvPr/>
-        </p:nvSpPr>
-        <p:spPr>
-          <a:xfrm>
-            <a:off x="6400800" y="1280160"/>
-            <a:ext cx="5212080" cy="2651760"/>
-          </a:xfrm>
-          <a:prstGeom prst="roundRect">
-            <a:avLst/>
-          </a:prstGeom>
-          <a:solidFill>
-            <a:srgbClr val="F6F8F7"/>
-          </a:solidFill>
-          <a:ln w="12700">
-            <a:solidFill>
-              <a:srgbClr val="A4AEA8"/>
-            </a:solidFill>
-          </a:ln>
-        </p:spPr>
-        <p:style>
-          <a:lnRef idx="1">
-            <a:schemeClr val="accent1"/>
-          </a:lnRef>
-          <a:fillRef idx="3">
-            <a:schemeClr val="accent1"/>
-          </a:fillRef>
-          <a:effectRef idx="2">
-            <a:schemeClr val="accent1"/>
-          </a:effectRef>
-          <a:fontRef idx="minor">
-            <a:schemeClr val="lt1"/>
-          </a:fontRef>
-        </p:style>
-        <p:txBody>
-          <a:bodyPr rtlCol="0" anchor="ctr" wrap="none" lIns="118872" rIns="73152" tIns="91440" bIns="73152"/>
-          <a:lstStyle/>
-          <a:p>
-            <a:pPr algn="ctr">
-              <a:defRPr sz="1500">
-                <a:solidFill>
-                  <a:srgbClr val="1E3027"/>
-                </a:solidFill>
-                <a:latin typeface="Consolas"/>
-              </a:defRPr>
-            </a:pPr>
-            <a:r>
-              <a:t>falling 50% crossing</a:t>
-            </a:r>
-            <a:br/>
-            <a:r>
-              <a:t>vs the transistor</a:t>
-            </a:r>
-            <a:br/>
-            <a:r>
-              <a:t>io_buf, full swing</a:t>
-            </a:r>
-            <a:br/>
-            <a:br/>
-            <a:r>
-              <a:t>  native IBIS       +34.6 ps</a:t>
-            </a:r>
-            <a:br/>
-            <a:r>
-              <a:t>  pybis stock       +38.4 ps</a:t>
-            </a:r>
-            <a:br/>
-            <a:r>
-              <a:t>  pybis gate-state  +43.5 ps</a:t>
-            </a:r>
-          </a:p>
-        </p:txBody>
-      </p:sp>
-      <p:sp>
-        <p:nvSpPr>
-          <p:cNvPr id="6" name="TextBox 5"/>
+              <a:t>•  Everything here is measured against the transistor.</a:t>
+            </a:r>
+          </a:p>
+        </p:txBody>
+      </p:sp>
+      <p:sp>
+        <p:nvSpPr>
+          <p:cNvPr id="5" name="TextBox 4"/>
           <p:cNvSpPr txBox="1"/>
           <p:nvPr/>
         </p:nvSpPr>
         <p:spPr>
           <a:xfrm>
             <a:off x="640080" y="3566160"/>
-            <a:ext cx="10972800" cy="1188720"/>
+            <a:ext cx="10972800" cy="1097280"/>
           </a:xfrm>
           <a:prstGeom prst="rect">
             <a:avLst/>
@@ -4864,14 +5131,14 @@
               </a:defRPr>
             </a:pPr>
             <a:r>
-              <a:t>About 80% of the distance to the transistor is the IBIS format itself, which native pays too. Our command layer costs about 5 ps on top of that.</a:t>
-            </a:r>
-          </a:p>
-        </p:txBody>
-      </p:sp>
-      <p:sp>
-        <p:nvSpPr>
-          <p:cNvPr id="7" name="Rectangle 6"/>
+              <a:t>Two things move in any comparison — the IBIS implementation and the SPICE engine. We separated them, and the engine is not the source.</a:t>
+            </a:r>
+          </a:p>
+        </p:txBody>
+      </p:sp>
+      <p:sp>
+        <p:nvSpPr>
+          <p:cNvPr id="6" name="Rectangle 5"/>
           <p:cNvSpPr/>
           <p:nvPr/>
         </p:nvSpPr>
@@ -4966,7 +5233,7 @@
               </a:defRPr>
             </a:pPr>
             <a:r>
-              <a:t>On a clean edge, all three agree</a:t>
+              <a:t>Where the error actually comes from</a:t>
             </a:r>
           </a:p>
         </p:txBody>
@@ -5015,8 +5282,8 @@
         </p:nvSpPr>
         <p:spPr>
           <a:xfrm>
-            <a:off x="475488" y="1143000"/>
-            <a:ext cx="11210544" cy="4809743"/>
+            <a:off x="475488" y="1207008"/>
+            <a:ext cx="11210544" cy="4535423"/>
           </a:xfrm>
           <a:prstGeom prst="rect">
             <a:avLst/>
@@ -5054,7 +5321,7 @@
       </p:sp>
       <p:pic>
         <p:nvPicPr>
-          <p:cNvPr id="5" name="Picture 4" descr="clean_edge.png"/>
+          <p:cNvPr id="5" name="Picture 4" descr="error_budget.png"/>
           <p:cNvPicPr>
             <a:picLocks noChangeAspect="1"/>
           </p:cNvPicPr>
@@ -5068,8 +5335,8 @@
         </p:blipFill>
         <p:spPr>
           <a:xfrm>
-            <a:off x="502920" y="1170432"/>
-            <a:ext cx="11155680" cy="4754879"/>
+            <a:off x="502920" y="1234440"/>
+            <a:ext cx="11155680" cy="4480559"/>
           </a:xfrm>
           <a:prstGeom prst="rect">
             <a:avLst/>
@@ -5126,7 +5393,7 @@
               </a:defRPr>
             </a:pPr>
             <a:r>
-              <a:t>The gap left on the falling edge is what the format costs. We did not create it.</a:t>
+              <a:t>The format costs ~35 ps. Our command layer costs ~5 ps on top. We are near the floor on clean edges.</a:t>
             </a:r>
           </a:p>
         </p:txBody>
@@ -5173,7 +5440,7 @@
               </a:defRPr>
             </a:pPr>
             <a:r>
-              <a:t>Under stress there are two problems</a:t>
+              <a:t>On a clean edge, all three agree</a:t>
             </a:r>
           </a:p>
         </p:txBody>
@@ -5209,67 +5476,31 @@
               </a:defRPr>
             </a:pPr>
             <a:r>
-              <a:t>THE TWO DEFECTS</a:t>
-            </a:r>
-          </a:p>
-        </p:txBody>
-      </p:sp>
-      <p:sp>
-        <p:nvSpPr>
-          <p:cNvPr id="4" name="TextBox 3"/>
-          <p:cNvSpPr txBox="1"/>
-          <p:nvPr/>
-        </p:nvSpPr>
-        <p:spPr>
-          <a:xfrm>
-            <a:off x="640080" y="1188720"/>
-            <a:ext cx="10972800" cy="914400"/>
-          </a:xfrm>
-          <a:prstGeom prst="rect">
-            <a:avLst/>
-          </a:prstGeom>
-          <a:noFill/>
-        </p:spPr>
-        <p:txBody>
-          <a:bodyPr wrap="square" lIns="45720" rIns="45720" anchor="t">
-            <a:spAutoFit/>
-          </a:bodyPr>
-          <a:lstStyle/>
-          <a:p>
-            <a:pPr algn="l">
-              <a:defRPr sz="1700" b="0">
-                <a:solidFill>
-                  <a:srgbClr val="191F1C"/>
-                </a:solidFill>
-                <a:latin typeface="Aptos"/>
-              </a:defRPr>
-            </a:pPr>
-            <a:r>
-              <a:t>Stress means a truncated pulse: the input reverses before the pad finishes its transition. Targets are 90/80/70/60/50% of the transistor's settled swing.</a:t>
-            </a:r>
-          </a:p>
-        </p:txBody>
-      </p:sp>
-      <p:sp>
-        <p:nvSpPr>
-          <p:cNvPr id="5" name="Rounded Rectangle 4"/>
+              <a:t>WHERE WE ARE</a:t>
+            </a:r>
+          </a:p>
+        </p:txBody>
+      </p:sp>
+      <p:sp>
+        <p:nvSpPr>
+          <p:cNvPr id="4" name="Rectangle 3"/>
           <p:cNvSpPr/>
           <p:nvPr/>
         </p:nvSpPr>
         <p:spPr>
           <a:xfrm>
-            <a:off x="640080" y="2286000"/>
-            <a:ext cx="10972800" cy="2468880"/>
-          </a:xfrm>
-          <a:prstGeom prst="roundRect">
+            <a:off x="475488" y="1143000"/>
+            <a:ext cx="11210544" cy="4809743"/>
+          </a:xfrm>
+          <a:prstGeom prst="rect">
             <a:avLst/>
           </a:prstGeom>
           <a:solidFill>
-            <a:srgbClr val="F6F8F7"/>
+            <a:srgbClr val="FFFFFF"/>
           </a:solidFill>
-          <a:ln w="12700">
+          <a:ln w="10160">
             <a:solidFill>
-              <a:srgbClr val="A4AEA8"/>
+              <a:srgbClr val="CBD0CC"/>
             </a:solidFill>
           </a:ln>
         </p:spPr>
@@ -5288,44 +5519,37 @@
           </a:fontRef>
         </p:style>
         <p:txBody>
-          <a:bodyPr rtlCol="0" anchor="ctr" wrap="none" lIns="118872" rIns="73152" tIns="91440" bIns="73152"/>
-          <a:lstStyle/>
-          <a:p>
-            <a:pPr algn="ctr">
-              <a:defRPr sz="1500">
-                <a:solidFill>
-                  <a:srgbClr val="1E3027"/>
-                </a:solidFill>
-                <a:latin typeface="Consolas"/>
-              </a:defRPr>
-            </a:pPr>
-            <a:r>
-              <a:t>The offset         a settled-state Ku error, on 90/60/50 only.</a:t>
-            </a:r>
-            <a:br/>
-            <a:r>
-              <a:t>                   A ~6 ns tail that looks permanent on a</a:t>
-            </a:r>
-            <a:br/>
-            <a:r>
-              <a:t>                   10 ns plot -- not a true DC offset.</a:t>
-            </a:r>
-            <a:br/>
-            <a:br/>
-            <a:r>
-              <a:t>The timing shift   falling 50% crossing 69-99 ps late, on</a:t>
-            </a:r>
-            <a:br/>
-            <a:r>
-              <a:t>                   every case, where native IBIS is</a:t>
-            </a:r>
-            <a:br/>
-            <a:r>
-              <a:t>                   5-26 ps early.</a:t>
-            </a:r>
-          </a:p>
-        </p:txBody>
-      </p:sp>
+          <a:bodyPr rtlCol="0" anchor="ctr"/>
+          <a:lstStyle/>
+          <a:p>
+            <a:pPr algn="ctr"/>
+          </a:p>
+        </p:txBody>
+      </p:sp>
+      <p:pic>
+        <p:nvPicPr>
+          <p:cNvPr id="5" name="Picture 4" descr="clean_edge.png"/>
+          <p:cNvPicPr>
+            <a:picLocks noChangeAspect="1"/>
+          </p:cNvPicPr>
+          <p:nvPr/>
+        </p:nvPicPr>
+        <p:blipFill>
+          <a:blip r:embed="rId2"/>
+          <a:stretch>
+            <a:fillRect/>
+          </a:stretch>
+        </p:blipFill>
+        <p:spPr>
+          <a:xfrm>
+            <a:off x="502920" y="1170432"/>
+            <a:ext cx="11155680" cy="4754879"/>
+          </a:xfrm>
+          <a:prstGeom prst="rect">
+            <a:avLst/>
+          </a:prstGeom>
+        </p:spPr>
+      </p:pic>
       <p:sp>
         <p:nvSpPr>
           <p:cNvPr id="6" name="Rectangle 5"/>
@@ -5376,7 +5600,7 @@
               </a:defRPr>
             </a:pPr>
             <a:r>
-              <a:t>One is an amplitude error that decays. The other is a timing error that does not.</a:t>
+              <a:t>The gap left on the falling edge is what the format costs. We did not create it.</a:t>
             </a:r>
           </a:p>
         </p:txBody>
@@ -5423,7 +5647,7 @@
               </a:defRPr>
             </a:pPr>
             <a:r>
-              <a:t>Where the offset comes from</a:t>
+              <a:t>Under stress there are two problems</a:t>
             </a:r>
           </a:p>
         </p:txBody>
@@ -5466,24 +5690,60 @@
       </p:sp>
       <p:sp>
         <p:nvSpPr>
-          <p:cNvPr id="4" name="Rectangle 3"/>
+          <p:cNvPr id="4" name="TextBox 3"/>
+          <p:cNvSpPr txBox="1"/>
+          <p:nvPr/>
+        </p:nvSpPr>
+        <p:spPr>
+          <a:xfrm>
+            <a:off x="640080" y="1188720"/>
+            <a:ext cx="10972800" cy="914400"/>
+          </a:xfrm>
+          <a:prstGeom prst="rect">
+            <a:avLst/>
+          </a:prstGeom>
+          <a:noFill/>
+        </p:spPr>
+        <p:txBody>
+          <a:bodyPr wrap="square" lIns="45720" rIns="45720" anchor="t">
+            <a:spAutoFit/>
+          </a:bodyPr>
+          <a:lstStyle/>
+          <a:p>
+            <a:pPr algn="l">
+              <a:defRPr sz="1700" b="0">
+                <a:solidFill>
+                  <a:srgbClr val="191F1C"/>
+                </a:solidFill>
+                <a:latin typeface="Aptos"/>
+              </a:defRPr>
+            </a:pPr>
+            <a:r>
+              <a:t>Stress means a truncated pulse: the input reverses before the pad finishes its transition. Targets are 90/80/70/60/50% of the transistor's settled swing.</a:t>
+            </a:r>
+          </a:p>
+        </p:txBody>
+      </p:sp>
+      <p:sp>
+        <p:nvSpPr>
+          <p:cNvPr id="5" name="Rounded Rectangle 4"/>
           <p:cNvSpPr/>
           <p:nvPr/>
         </p:nvSpPr>
         <p:spPr>
           <a:xfrm>
-            <a:off x="475488" y="1143000"/>
-            <a:ext cx="11210544" cy="4809743"/>
-          </a:xfrm>
-          <a:prstGeom prst="rect">
+            <a:off x="640080" y="2377440"/>
+            <a:ext cx="10972800" cy="2118105"/>
+          </a:xfrm>
+          <a:prstGeom prst="roundRect">
             <a:avLst/>
           </a:prstGeom>
           <a:solidFill>
-            <a:srgbClr val="FFFFFF"/>
+            <a:srgbClr val="F6F8F7"/>
           </a:solidFill>
-          <a:ln w="10160">
+          <a:ln w="12700">
             <a:solidFill>
-              <a:srgbClr val="CBD0CC"/>
+              <a:srgbClr val="A4AEA8"/>
             </a:solidFill>
           </a:ln>
         </p:spPr>
@@ -5502,37 +5762,98 @@
           </a:fontRef>
         </p:style>
         <p:txBody>
-          <a:bodyPr rtlCol="0" anchor="ctr"/>
-          <a:lstStyle/>
-          <a:p>
-            <a:pPr algn="ctr"/>
-          </a:p>
-        </p:txBody>
-      </p:sp>
-      <p:pic>
-        <p:nvPicPr>
-          <p:cNvPr id="5" name="Picture 4" descr="offset_chain.png"/>
-          <p:cNvPicPr>
-            <a:picLocks noChangeAspect="1"/>
-          </p:cNvPicPr>
-          <p:nvPr/>
-        </p:nvPicPr>
-        <p:blipFill>
-          <a:blip r:embed="rId2"/>
-          <a:stretch>
-            <a:fillRect/>
-          </a:stretch>
-        </p:blipFill>
-        <p:spPr>
-          <a:xfrm>
-            <a:off x="502920" y="1170432"/>
-            <a:ext cx="11155680" cy="4754879"/>
-          </a:xfrm>
-          <a:prstGeom prst="rect">
-            <a:avLst/>
-          </a:prstGeom>
-        </p:spPr>
-      </p:pic>
+          <a:bodyPr rtlCol="0" anchor="t" wrap="none" lIns="118872" rIns="73152" tIns="91440" bIns="73152"/>
+          <a:lstStyle/>
+          <a:p>
+            <a:pPr algn="l">
+              <a:defRPr sz="1700">
+                <a:solidFill>
+                  <a:srgbClr val="1E3027"/>
+                </a:solidFill>
+                <a:latin typeface="Consolas"/>
+              </a:defRPr>
+            </a:pPr>
+            <a:r>
+              <a:t>The offset         a settled-state Ku error, on 90/60/50 only.</a:t>
+            </a:r>
+          </a:p>
+          <a:p>
+            <a:pPr algn="l">
+              <a:defRPr sz="1700">
+                <a:solidFill>
+                  <a:srgbClr val="1E3027"/>
+                </a:solidFill>
+                <a:latin typeface="Consolas"/>
+              </a:defRPr>
+            </a:pPr>
+            <a:r>
+              <a:t>                   A ~6 ns tail that looks permanent on a</a:t>
+            </a:r>
+          </a:p>
+          <a:p>
+            <a:pPr algn="l">
+              <a:defRPr sz="1700">
+                <a:solidFill>
+                  <a:srgbClr val="1E3027"/>
+                </a:solidFill>
+                <a:latin typeface="Consolas"/>
+              </a:defRPr>
+            </a:pPr>
+            <a:r>
+              <a:t>                   10 ns plot -- not a true DC offset.</a:t>
+            </a:r>
+          </a:p>
+          <a:p>
+            <a:pPr algn="l">
+              <a:defRPr sz="1700">
+                <a:solidFill>
+                  <a:srgbClr val="1E3027"/>
+                </a:solidFill>
+                <a:latin typeface="Consolas"/>
+              </a:defRPr>
+            </a:pPr>
+          </a:p>
+          <a:p>
+            <a:pPr algn="l">
+              <a:defRPr sz="1700">
+                <a:solidFill>
+                  <a:srgbClr val="1E3027"/>
+                </a:solidFill>
+                <a:latin typeface="Consolas"/>
+              </a:defRPr>
+            </a:pPr>
+            <a:r>
+              <a:t>The timing shift   falling 50% crossing 69-99 ps late, on</a:t>
+            </a:r>
+          </a:p>
+          <a:p>
+            <a:pPr algn="l">
+              <a:defRPr sz="1700">
+                <a:solidFill>
+                  <a:srgbClr val="1E3027"/>
+                </a:solidFill>
+                <a:latin typeface="Consolas"/>
+              </a:defRPr>
+            </a:pPr>
+            <a:r>
+              <a:t>                   every case, where native IBIS is</a:t>
+            </a:r>
+          </a:p>
+          <a:p>
+            <a:pPr algn="l">
+              <a:defRPr sz="1700">
+                <a:solidFill>
+                  <a:srgbClr val="1E3027"/>
+                </a:solidFill>
+                <a:latin typeface="Consolas"/>
+              </a:defRPr>
+            </a:pPr>
+            <a:r>
+              <a:t>                   5-26 ps early.</a:t>
+            </a:r>
+          </a:p>
+        </p:txBody>
+      </p:sp>
       <p:sp>
         <p:nvSpPr>
           <p:cNvPr id="6" name="Rectangle 5"/>
@@ -5583,7 +5904,7 @@
               </a:defRPr>
             </a:pPr>
             <a:r>
-              <a:t>GUPCMD is a capacitor across 1e15 ohm. A truncated pulse strands charge with no path to remove it.</a:t>
+              <a:t>One is an amplitude error that decays. The other is a timing error that does not.</a:t>
             </a:r>
           </a:p>
         </p:txBody>
@@ -5630,7 +5951,7 @@
               </a:defRPr>
             </a:pPr>
             <a:r>
-              <a:t>delay_cmd removes it</a:t>
+              <a:t>Where the offset comes from</a:t>
             </a:r>
           </a:p>
         </p:txBody>
@@ -5718,7 +6039,7 @@
       </p:sp>
       <p:pic>
         <p:nvPicPr>
-          <p:cNvPr id="5" name="Picture 4" descr="offset_removed.png"/>
+          <p:cNvPr id="5" name="Picture 4" descr="offset_chain.png"/>
           <p:cNvPicPr>
             <a:picLocks noChangeAspect="1"/>
           </p:cNvPicPr>
@@ -5790,7 +6111,7 @@
               </a:defRPr>
             </a:pPr>
             <a:r>
-              <a:t>Level-driven commands fix the offset. This part is settled.</a:t>
+              <a:t>GUPCMD is a capacitor across 1e15 ohm. A truncated pulse strands charge with no path to remove it.</a:t>
             </a:r>
           </a:p>
         </p:txBody>
@@ -5837,7 +6158,7 @@
               </a:defRPr>
             </a:pPr>
             <a:r>
-              <a:t>It does not fix the timing</a:t>
+              <a:t>delay_cmd removes it</a:t>
             </a:r>
           </a:p>
         </p:txBody>
@@ -5880,60 +6201,24 @@
       </p:sp>
       <p:sp>
         <p:nvSpPr>
-          <p:cNvPr id="4" name="TextBox 3"/>
-          <p:cNvSpPr txBox="1"/>
-          <p:nvPr/>
-        </p:nvSpPr>
-        <p:spPr>
-          <a:xfrm>
-            <a:off x="640080" y="1188720"/>
-            <a:ext cx="10972800" cy="1280160"/>
-          </a:xfrm>
-          <a:prstGeom prst="rect">
-            <a:avLst/>
-          </a:prstGeom>
-          <a:noFill/>
-        </p:spPr>
-        <p:txBody>
-          <a:bodyPr wrap="square" lIns="45720" rIns="45720" anchor="t">
-            <a:spAutoFit/>
-          </a:bodyPr>
-          <a:lstStyle/>
-          <a:p>
-            <a:pPr algn="l">
-              <a:defRPr sz="1700" b="0">
-                <a:solidFill>
-                  <a:srgbClr val="191F1C"/>
-                </a:solidFill>
-                <a:latin typeface="Aptos"/>
-              </a:defRPr>
-            </a:pPr>
-            <a:r>
-              <a:t>The open question was whether the offset and the timing shift were one mechanism showing up twice. If they were, delay_cmd would already fix both. Its amplitude had been measured; its timing never had.</a:t>
-            </a:r>
-          </a:p>
-        </p:txBody>
-      </p:sp>
-      <p:sp>
-        <p:nvSpPr>
-          <p:cNvPr id="5" name="Rounded Rectangle 4"/>
+          <p:cNvPr id="4" name="Rectangle 3"/>
           <p:cNvSpPr/>
           <p:nvPr/>
         </p:nvSpPr>
         <p:spPr>
           <a:xfrm>
-            <a:off x="640080" y="2651760"/>
-            <a:ext cx="10972800" cy="2103120"/>
-          </a:xfrm>
-          <a:prstGeom prst="roundRect">
+            <a:off x="475488" y="1143000"/>
+            <a:ext cx="11210544" cy="4809743"/>
+          </a:xfrm>
+          <a:prstGeom prst="rect">
             <a:avLst/>
           </a:prstGeom>
           <a:solidFill>
-            <a:srgbClr val="F6F8F7"/>
+            <a:srgbClr val="FFFFFF"/>
           </a:solidFill>
-          <a:ln w="12700">
+          <a:ln w="10160">
             <a:solidFill>
-              <a:srgbClr val="A4AEA8"/>
+              <a:srgbClr val="CBD0CC"/>
             </a:solidFill>
           </a:ln>
         </p:spPr>
@@ -5952,41 +6237,37 @@
           </a:fontRef>
         </p:style>
         <p:txBody>
-          <a:bodyPr rtlCol="0" anchor="ctr" wrap="none" lIns="118872" rIns="73152" tIns="91440" bIns="73152"/>
-          <a:lstStyle/>
-          <a:p>
-            <a:pPr algn="ctr">
-              <a:defRPr sz="1500">
-                <a:solidFill>
-                  <a:srgbClr val="1E3027"/>
-                </a:solidFill>
-                <a:latin typeface="Consolas"/>
-              </a:defRPr>
-            </a:pPr>
-            <a:r>
-              <a:t>We measured it.</a:t>
-            </a:r>
-            <a:br/>
-            <a:br/>
-            <a:r>
-              <a:t>  delay_cmd improved the timing on 0 of 19 stress cases.</a:t>
-            </a:r>
-            <a:br/>
-            <a:br/>
-            <a:r>
-              <a:t>  -&gt; the shift persists once the stranded charge is gone</a:t>
-            </a:r>
-            <a:br/>
-            <a:r>
-              <a:t>  -&gt; they are two defects, not one</a:t>
-            </a:r>
-            <a:br/>
-            <a:r>
-              <a:t>  -&gt; the offset has a fix; the shift has no mechanism yet</a:t>
-            </a:r>
-          </a:p>
-        </p:txBody>
-      </p:sp>
+          <a:bodyPr rtlCol="0" anchor="ctr"/>
+          <a:lstStyle/>
+          <a:p>
+            <a:pPr algn="ctr"/>
+          </a:p>
+        </p:txBody>
+      </p:sp>
+      <p:pic>
+        <p:nvPicPr>
+          <p:cNvPr id="5" name="Picture 4" descr="offset_removed.png"/>
+          <p:cNvPicPr>
+            <a:picLocks noChangeAspect="1"/>
+          </p:cNvPicPr>
+          <p:nvPr/>
+        </p:nvPicPr>
+        <p:blipFill>
+          <a:blip r:embed="rId2"/>
+          <a:stretch>
+            <a:fillRect/>
+          </a:stretch>
+        </p:blipFill>
+        <p:spPr>
+          <a:xfrm>
+            <a:off x="502920" y="1170432"/>
+            <a:ext cx="11155680" cy="4754879"/>
+          </a:xfrm>
+          <a:prstGeom prst="rect">
+            <a:avLst/>
+          </a:prstGeom>
+        </p:spPr>
+      </p:pic>
       <p:sp>
         <p:nvSpPr>
           <p:cNvPr id="6" name="Rectangle 5"/>
@@ -6037,7 +6318,7 @@
               </a:defRPr>
             </a:pPr>
             <a:r>
-              <a:t>A cheap experiment closed a question that was open for weeks, with the less convenient answer.</a:t>
+              <a:t>Level-driven commands fix the offset. This part is settled.</a:t>
             </a:r>
           </a:p>
         </p:txBody>
@@ -6084,7 +6365,7 @@
               </a:defRPr>
             </a:pPr>
             <a:r>
-              <a:t>The shift grows as the pulse is truncated</a:t>
+              <a:t>It does not fix the timing</a:t>
             </a:r>
           </a:p>
         </p:txBody>
@@ -6127,24 +6408,60 @@
       </p:sp>
       <p:sp>
         <p:nvSpPr>
-          <p:cNvPr id="4" name="Rectangle 3"/>
+          <p:cNvPr id="4" name="TextBox 3"/>
+          <p:cNvSpPr txBox="1"/>
+          <p:nvPr/>
+        </p:nvSpPr>
+        <p:spPr>
+          <a:xfrm>
+            <a:off x="640080" y="1188720"/>
+            <a:ext cx="10972800" cy="1280160"/>
+          </a:xfrm>
+          <a:prstGeom prst="rect">
+            <a:avLst/>
+          </a:prstGeom>
+          <a:noFill/>
+        </p:spPr>
+        <p:txBody>
+          <a:bodyPr wrap="square" lIns="45720" rIns="45720" anchor="t">
+            <a:spAutoFit/>
+          </a:bodyPr>
+          <a:lstStyle/>
+          <a:p>
+            <a:pPr algn="l">
+              <a:defRPr sz="1700" b="0">
+                <a:solidFill>
+                  <a:srgbClr val="191F1C"/>
+                </a:solidFill>
+                <a:latin typeface="Aptos"/>
+              </a:defRPr>
+            </a:pPr>
+            <a:r>
+              <a:t>The open question was whether the offset and the timing shift were one mechanism showing up twice. If they were, delay_cmd would already fix both. Its amplitude had been measured; its timing never had.</a:t>
+            </a:r>
+          </a:p>
+        </p:txBody>
+      </p:sp>
+      <p:sp>
+        <p:nvSpPr>
+          <p:cNvPr id="5" name="Rounded Rectangle 4"/>
           <p:cNvSpPr/>
           <p:nvPr/>
         </p:nvSpPr>
         <p:spPr>
           <a:xfrm>
-            <a:off x="475488" y="1143000"/>
-            <a:ext cx="11210544" cy="4809743"/>
-          </a:xfrm>
-          <a:prstGeom prst="rect">
+            <a:off x="640080" y="2743200"/>
+            <a:ext cx="10972800" cy="2118105"/>
+          </a:xfrm>
+          <a:prstGeom prst="roundRect">
             <a:avLst/>
           </a:prstGeom>
           <a:solidFill>
-            <a:srgbClr val="FFFFFF"/>
+            <a:srgbClr val="F6F8F7"/>
           </a:solidFill>
-          <a:ln w="10160">
+          <a:ln w="12700">
             <a:solidFill>
-              <a:srgbClr val="CBD0CC"/>
+              <a:srgbClr val="A4AEA8"/>
             </a:solidFill>
           </a:ln>
         </p:spPr>
@@ -6163,37 +6480,95 @@
           </a:fontRef>
         </p:style>
         <p:txBody>
-          <a:bodyPr rtlCol="0" anchor="ctr"/>
-          <a:lstStyle/>
-          <a:p>
-            <a:pPr algn="ctr"/>
-          </a:p>
-        </p:txBody>
-      </p:sp>
-      <p:pic>
-        <p:nvPicPr>
-          <p:cNvPr id="5" name="Picture 4" descr="shift_vs_depth.png"/>
-          <p:cNvPicPr>
-            <a:picLocks noChangeAspect="1"/>
-          </p:cNvPicPr>
-          <p:nvPr/>
-        </p:nvPicPr>
-        <p:blipFill>
-          <a:blip r:embed="rId2"/>
-          <a:stretch>
-            <a:fillRect/>
-          </a:stretch>
-        </p:blipFill>
-        <p:spPr>
-          <a:xfrm>
-            <a:off x="502920" y="1170432"/>
-            <a:ext cx="11155680" cy="4754879"/>
-          </a:xfrm>
-          <a:prstGeom prst="rect">
-            <a:avLst/>
-          </a:prstGeom>
-        </p:spPr>
-      </p:pic>
+          <a:bodyPr rtlCol="0" anchor="t" wrap="none" lIns="118872" rIns="73152" tIns="91440" bIns="73152"/>
+          <a:lstStyle/>
+          <a:p>
+            <a:pPr algn="l">
+              <a:defRPr sz="1700">
+                <a:solidFill>
+                  <a:srgbClr val="1E3027"/>
+                </a:solidFill>
+                <a:latin typeface="Consolas"/>
+              </a:defRPr>
+            </a:pPr>
+            <a:r>
+              <a:t>We measured it.</a:t>
+            </a:r>
+          </a:p>
+          <a:p>
+            <a:pPr algn="l">
+              <a:defRPr sz="1700">
+                <a:solidFill>
+                  <a:srgbClr val="1E3027"/>
+                </a:solidFill>
+                <a:latin typeface="Consolas"/>
+              </a:defRPr>
+            </a:pPr>
+          </a:p>
+          <a:p>
+            <a:pPr algn="l">
+              <a:defRPr sz="1700">
+                <a:solidFill>
+                  <a:srgbClr val="1E3027"/>
+                </a:solidFill>
+                <a:latin typeface="Consolas"/>
+              </a:defRPr>
+            </a:pPr>
+            <a:r>
+              <a:t>  delay_cmd improved the timing on 0 of 19 stress cases.</a:t>
+            </a:r>
+          </a:p>
+          <a:p>
+            <a:pPr algn="l">
+              <a:defRPr sz="1700">
+                <a:solidFill>
+                  <a:srgbClr val="1E3027"/>
+                </a:solidFill>
+                <a:latin typeface="Consolas"/>
+              </a:defRPr>
+            </a:pPr>
+          </a:p>
+          <a:p>
+            <a:pPr algn="l">
+              <a:defRPr sz="1700">
+                <a:solidFill>
+                  <a:srgbClr val="1E3027"/>
+                </a:solidFill>
+                <a:latin typeface="Consolas"/>
+              </a:defRPr>
+            </a:pPr>
+            <a:r>
+              <a:t>  -&gt; the shift persists once the stranded charge is gone</a:t>
+            </a:r>
+          </a:p>
+          <a:p>
+            <a:pPr algn="l">
+              <a:defRPr sz="1700">
+                <a:solidFill>
+                  <a:srgbClr val="1E3027"/>
+                </a:solidFill>
+                <a:latin typeface="Consolas"/>
+              </a:defRPr>
+            </a:pPr>
+            <a:r>
+              <a:t>  -&gt; they are two defects, not one</a:t>
+            </a:r>
+          </a:p>
+          <a:p>
+            <a:pPr algn="l">
+              <a:defRPr sz="1700">
+                <a:solidFill>
+                  <a:srgbClr val="1E3027"/>
+                </a:solidFill>
+                <a:latin typeface="Consolas"/>
+              </a:defRPr>
+            </a:pPr>
+            <a:r>
+              <a:t>  -&gt; the offset has a fix; the shift has no mechanism yet</a:t>
+            </a:r>
+          </a:p>
+        </p:txBody>
+      </p:sp>
       <p:sp>
         <p:nvSpPr>
           <p:cNvPr id="6" name="Rectangle 5"/>
@@ -6244,7 +6619,7 @@
               </a:defRPr>
             </a:pPr>
             <a:r>
-              <a:t>Not a fixed penalty. It grows with truncation on every buffer we have tried.</a:t>
+              <a:t>A cheap experiment closed a question that was open for weeks, with the less convenient answer.</a:t>
             </a:r>
           </a:p>
         </p:txBody>
@@ -6291,7 +6666,7 @@
               </a:defRPr>
             </a:pPr>
             <a:r>
-              <a:t>The core reconstruction is sound</a:t>
+              <a:t>The shift grows as the pulse is truncated</a:t>
             </a:r>
           </a:p>
         </p:txBody>
@@ -6327,102 +6702,31 @@
               </a:defRPr>
             </a:pPr>
             <a:r>
-              <a:t>CONFIDENCE</a:t>
-            </a:r>
-          </a:p>
-        </p:txBody>
-      </p:sp>
-      <p:sp>
-        <p:nvSpPr>
-          <p:cNvPr id="4" name="TextBox 3"/>
-          <p:cNvSpPr txBox="1"/>
-          <p:nvPr/>
-        </p:nvSpPr>
-        <p:spPr>
-          <a:xfrm>
-            <a:off x="640080" y="1280160"/>
-            <a:ext cx="6035040" cy="2560320"/>
-          </a:xfrm>
-          <a:prstGeom prst="rect">
-            <a:avLst/>
-          </a:prstGeom>
-          <a:noFill/>
-        </p:spPr>
-        <p:txBody>
-          <a:bodyPr wrap="square" lIns="73152" rIns="36576" tIns="36576" bIns="36576">
-            <a:spAutoFit/>
-          </a:bodyPr>
-          <a:lstStyle/>
-          <a:p>
-            <a:pPr>
-              <a:spcAft>
-                <a:spcPts val="700"/>
-              </a:spcAft>
-              <a:defRPr sz="1700">
-                <a:solidFill>
-                  <a:srgbClr val="191F1C"/>
-                </a:solidFill>
-                <a:latin typeface="Aptos"/>
-              </a:defRPr>
-            </a:pPr>
-            <a:r>
-              <a:t>- A golden-waveform test replays a model's own V-T tables into the fixture that produced them.</a:t>
-            </a:r>
-          </a:p>
-          <a:p>
-            <a:pPr>
-              <a:spcAft>
-                <a:spcPts val="700"/>
-              </a:spcAft>
-              <a:defRPr sz="1700">
-                <a:solidFill>
-                  <a:srgbClr val="191F1C"/>
-                </a:solidFill>
-                <a:latin typeface="Aptos"/>
-              </a:defRPr>
-            </a:pPr>
-            <a:r>
-              <a:t>- Self-contained: no transistor, no native IBIS, no engine confound. We had never done this.</a:t>
-            </a:r>
-          </a:p>
-          <a:p>
-            <a:pPr>
-              <a:spcAft>
-                <a:spcPts val="700"/>
-              </a:spcAft>
-              <a:defRPr sz="1700">
-                <a:solidFill>
-                  <a:srgbClr val="191F1C"/>
-                </a:solidFill>
-                <a:latin typeface="Aptos"/>
-              </a:defRPr>
-            </a:pPr>
-            <a:r>
-              <a:t>- pybis reproduces all three buffers' own golden waveforms.</a:t>
-            </a:r>
-          </a:p>
-        </p:txBody>
-      </p:sp>
-      <p:sp>
-        <p:nvSpPr>
-          <p:cNvPr id="5" name="Rounded Rectangle 4"/>
+              <a:t>THE TWO DEFECTS</a:t>
+            </a:r>
+          </a:p>
+        </p:txBody>
+      </p:sp>
+      <p:sp>
+        <p:nvSpPr>
+          <p:cNvPr id="4" name="Rectangle 3"/>
           <p:cNvSpPr/>
           <p:nvPr/>
         </p:nvSpPr>
         <p:spPr>
           <a:xfrm>
-            <a:off x="6949440" y="1371600"/>
-            <a:ext cx="4663440" cy="2194560"/>
-          </a:xfrm>
-          <a:prstGeom prst="roundRect">
+            <a:off x="475488" y="1143000"/>
+            <a:ext cx="11210544" cy="4809743"/>
+          </a:xfrm>
+          <a:prstGeom prst="rect">
             <a:avLst/>
           </a:prstGeom>
           <a:solidFill>
-            <a:srgbClr val="F6F8F7"/>
+            <a:srgbClr val="FFFFFF"/>
           </a:solidFill>
-          <a:ln w="12700">
+          <a:ln w="10160">
             <a:solidFill>
-              <a:srgbClr val="A4AEA8"/>
+              <a:srgbClr val="CBD0CC"/>
             </a:solidFill>
           </a:ln>
         </p:spPr>
@@ -6441,75 +6745,40 @@
           </a:fontRef>
         </p:style>
         <p:txBody>
-          <a:bodyPr rtlCol="0" anchor="ctr" wrap="none" lIns="118872" rIns="73152" tIns="91440" bIns="73152"/>
-          <a:lstStyle/>
-          <a:p>
-            <a:pPr algn="ctr">
-              <a:defRPr sz="1500">
-                <a:solidFill>
-                  <a:srgbClr val="1E3027"/>
-                </a:solidFill>
-                <a:latin typeface="Consolas"/>
-              </a:defRPr>
-            </a:pPr>
-            <a:r>
-              <a:t>figure of merit   0.03 - 0.41 %</a:t>
-            </a:r>
-            <a:br/>
-            <a:r>
-              <a:t>timing shift      +4 to +8 ps</a:t>
-            </a:r>
-            <a:br/>
-            <a:br/>
-            <a:r>
-              <a:t>three buffers, both edges,</a:t>
-            </a:r>
-            <a:br/>
-            <a:r>
-              <a:t>both fixtures</a:t>
-            </a:r>
-          </a:p>
-        </p:txBody>
-      </p:sp>
-      <p:sp>
-        <p:nvSpPr>
-          <p:cNvPr id="6" name="TextBox 5"/>
-          <p:cNvSpPr txBox="1"/>
+          <a:bodyPr rtlCol="0" anchor="ctr"/>
+          <a:lstStyle/>
+          <a:p>
+            <a:pPr algn="ctr"/>
+          </a:p>
+        </p:txBody>
+      </p:sp>
+      <p:pic>
+        <p:nvPicPr>
+          <p:cNvPr id="5" name="Picture 4" descr="shift_vs_depth.png"/>
+          <p:cNvPicPr>
+            <a:picLocks noChangeAspect="1"/>
+          </p:cNvPicPr>
           <p:nvPr/>
-        </p:nvSpPr>
-        <p:spPr>
-          <a:xfrm>
-            <a:off x="640080" y="4023360"/>
-            <a:ext cx="10972800" cy="731520"/>
+        </p:nvPicPr>
+        <p:blipFill>
+          <a:blip r:embed="rId2"/>
+          <a:stretch>
+            <a:fillRect/>
+          </a:stretch>
+        </p:blipFill>
+        <p:spPr>
+          <a:xfrm>
+            <a:off x="502920" y="1170432"/>
+            <a:ext cx="11155680" cy="4754879"/>
           </a:xfrm>
           <a:prstGeom prst="rect">
             <a:avLst/>
           </a:prstGeom>
-          <a:noFill/>
-        </p:spPr>
-        <p:txBody>
-          <a:bodyPr wrap="square" lIns="45720" rIns="45720" anchor="t">
-            <a:spAutoFit/>
-          </a:bodyPr>
-          <a:lstStyle/>
-          <a:p>
-            <a:pPr algn="l">
-              <a:defRPr sz="1700" b="0">
-                <a:solidFill>
-                  <a:srgbClr val="191F1C"/>
-                </a:solidFill>
-                <a:latin typeface="Aptos"/>
-              </a:defRPr>
-            </a:pPr>
-            <a:r>
-              <a:t>It is now the standing health check, and it settled the C_comp question.</a:t>
-            </a:r>
-          </a:p>
-        </p:txBody>
-      </p:sp>
-      <p:sp>
-        <p:nvSpPr>
-          <p:cNvPr id="7" name="Rectangle 6"/>
+        </p:spPr>
+      </p:pic>
+      <p:sp>
+        <p:nvSpPr>
+          <p:cNvPr id="6" name="Rectangle 5"/>
           <p:cNvSpPr/>
           <p:nvPr/>
         </p:nvSpPr>
@@ -6557,7 +6826,7 @@
               </a:defRPr>
             </a:pPr>
             <a:r>
-              <a:t>Whatever is wrong under stress, it is not the I-V times Ku(t) reconstruction.</a:t>
+              <a:t>Not a fixed penalty. It grows with truncation on every buffer we have tried.</a:t>
             </a:r>
           </a:p>
         </p:txBody>

--- a/results/meeting_deck_2026-09-04/ibis_pybis_status_2026-09-04.pptx
+++ b/results/meeting_deck_2026-09-04/ibis_pybis_status_2026-09-04.pptx
@@ -3248,7 +3248,7 @@
         </p:nvSpPr>
         <p:spPr>
           <a:xfrm>
-            <a:off x="640080" y="4023360"/>
+            <a:off x="640080" y="3291840"/>
             <a:ext cx="10972800" cy="731520"/>
           </a:xfrm>
           <a:prstGeom prst="rect">
@@ -4014,7 +4014,7 @@
         </p:nvSpPr>
         <p:spPr>
           <a:xfrm>
-            <a:off x="640080" y="4206240"/>
+            <a:off x="640080" y="2926080"/>
             <a:ext cx="10972800" cy="914400"/>
           </a:xfrm>
           <a:prstGeom prst="rect">
@@ -4918,7 +4918,7 @@
         </p:nvSpPr>
         <p:spPr>
           <a:xfrm>
-            <a:off x="640080" y="4297680"/>
+            <a:off x="640080" y="3200400"/>
             <a:ext cx="10972800" cy="1280160"/>
           </a:xfrm>
           <a:prstGeom prst="rect">
@@ -4942,6 +4942,61 @@
             </a:pPr>
             <a:r>
               <a:t>Two rules worth not re-learning: any bench for this model must start with a real edge, never a held level. And ngspice must be converged before drawing any conclusion from it.</a:t>
+            </a:r>
+          </a:p>
+        </p:txBody>
+      </p:sp>
+      <p:sp>
+        <p:nvSpPr>
+          <p:cNvPr id="6" name="Rectangle 5"/>
+          <p:cNvSpPr/>
+          <p:nvPr/>
+        </p:nvSpPr>
+        <p:spPr>
+          <a:xfrm>
+            <a:off x="384048" y="6062472"/>
+            <a:ext cx="11109960" cy="393192"/>
+          </a:xfrm>
+          <a:prstGeom prst="rect">
+            <a:avLst/>
+          </a:prstGeom>
+          <a:solidFill>
+            <a:srgbClr val="F1F8F2"/>
+          </a:solidFill>
+          <a:ln>
+            <a:solidFill>
+              <a:srgbClr val="F1F8F2"/>
+            </a:solidFill>
+          </a:ln>
+        </p:spPr>
+        <p:style>
+          <a:lnRef idx="1">
+            <a:schemeClr val="accent1"/>
+          </a:lnRef>
+          <a:fillRef idx="3">
+            <a:schemeClr val="accent1"/>
+          </a:fillRef>
+          <a:effectRef idx="2">
+            <a:schemeClr val="accent1"/>
+          </a:effectRef>
+          <a:fontRef idx="minor">
+            <a:schemeClr val="lt1"/>
+          </a:fontRef>
+        </p:style>
+        <p:txBody>
+          <a:bodyPr rtlCol="0" anchor="ctr"/>
+          <a:lstStyle/>
+          <a:p>
+            <a:pPr algn="ctr">
+              <a:defRPr sz="1400" b="1">
+                <a:solidFill>
+                  <a:srgbClr val="2B7A43"/>
+                </a:solidFill>
+                <a:latin typeface="Aptos"/>
+              </a:defRPr>
+            </a:pPr>
+            <a:r>
+              <a:t>The offset is solved. The timing shift is the open one, and it is where the nine variants will land.</a:t>
             </a:r>
           </a:p>
         </p:txBody>
@@ -5108,7 +5163,7 @@
         </p:nvSpPr>
         <p:spPr>
           <a:xfrm>
-            <a:off x="640080" y="3566160"/>
+            <a:off x="640080" y="3017520"/>
             <a:ext cx="10972800" cy="1097280"/>
           </a:xfrm>
           <a:prstGeom prst="rect">

--- a/results/meeting_deck_2026-09-04/ibis_pybis_status_2026-09-04.pptx
+++ b/results/meeting_deck_2026-09-04/ibis_pybis_status_2026-09-04.pptx
@@ -22,9 +22,6 @@
     <p:sldId id="267" r:id="rId19"/>
     <p:sldId id="268" r:id="rId20"/>
     <p:sldId id="269" r:id="rId21"/>
-    <p:sldId id="270" r:id="rId22"/>
-    <p:sldId id="271" r:id="rId23"/>
-    <p:sldId id="272" r:id="rId24"/>
   </p:sldIdLst>
   <p:sldSz cx="12192000" cy="6858000"/>
   <p:notesSz cx="6858000" cy="9144000"/>
@@ -673,7 +670,7 @@
           <a:lstStyle/>
           <a:p>
             <a:r>
-              <a:t>Lead with this. Full-swing accuracy is close to as good as the format allows, so effort belongs on truncated pulses.</a:t>
+              <a:t>Lead with this. Full-swing accuracy is close to as good as the format allows, so the effort belongs on truncated pulses.</a:t>
             </a:r>
           </a:p>
         </p:txBody>
@@ -743,7 +740,7 @@
           <a:lstStyle/>
           <a:p>
             <a:r>
-              <a:t>The sign of the stranded charge flips with the timestep, so it is an integration error. Any fix by tuning a coefficient is a coin flip, which is why the retuned version helped on some cases and not others.</a:t>
+              <a:t>Two separate defects. The offset is a settled-state Ku error, on the 90/60/50 targets only -- a ~6 ns tail that looks permanent on a 10 ns plot. The timing shift is the falling 50% crossing 69-99 ps late on every case, where native IBIS is 5-26 ps early.</a:t>
             </a:r>
           </a:p>
         </p:txBody>
@@ -813,7 +810,7 @@
           <a:lstStyle/>
           <a:p>
             <a:r>
-              <a:t>delay_cmd is level-driven: the command is a function of the current input level, not of accumulated edge history, so it returns to exactly zero and strands nothing. On this case the pedestal goes from 97.9 mV to 5.2 mV against the transistor's 2.1 mV. Across all 29 matched stress cases RMSE goes from 108.6 to 92.2 mV, the only build that beats native IBIS.</a:t>
+              <a:t>The sign of the stranded charge flips with the timestep, so it is an integration error. Any fix by tuning a coefficient is a coin flip, which is why the retuned version helped on some cases and not others.</a:t>
             </a:r>
           </a:p>
         </p:txBody>
@@ -883,7 +880,7 @@
           <a:lstStyle/>
           <a:p>
             <a:r>
-              <a:t>State the caveat honestly: delay_cmd has a known 1.25 ns dead zone after a reversal where neither device is commanded on, which is why predriver_cmd was previously preferred.</a:t>
+              <a:t>On this case the pedestal goes from 97.9 mV to 5.2 mV against the transistor's 2.1 mV. Across all 29 matched stress cases RMSE goes from 108.6 to 92.2 mV, the only build that beats native IBIS. Caveat to state: delay_cmd has a 1.25 ns dead zone after a reversal where neither device is commanded on.</a:t>
             </a:r>
           </a:p>
         </p:txBody>
@@ -953,7 +950,147 @@
           <a:lstStyle/>
           <a:p>
             <a:r>
-              <a:t>I proposed the wrong cause first, Miller feedthrough, and built a nomiller variant to test it. It came back identical to the control. Those caps are 20.5 fF against C_comp's 5 pF, 0.41%, 250x too small, which is arithmetic I should have done before building the variant. The null result still rules out the small capacitor and points at C_comp.</a:t>
+              <a:t>I proposed the wrong cause first -- Miller feedthrough -- and built the nomiller variant to test it. It came back identical to the control. Those caps are 20.5 fF against C_comp's 5 pF, 0.41%, 250x too small, which is arithmetic I should have done before building the variant.</a:t>
+            </a:r>
+          </a:p>
+        </p:txBody>
+      </p:sp>
+      <p:sp>
+        <p:nvSpPr>
+          <p:cNvPr id="4" name="Slide Number Placeholder 3"/>
+          <p:cNvSpPr>
+            <a:spLocks noGrp="1"/>
+          </p:cNvSpPr>
+          <p:nvPr>
+            <p:ph type="sldNum" idx="5" sz="quarter"/>
+          </p:nvPr>
+        </p:nvSpPr>
+        <p:spPr/>
+      </p:sp>
+    </p:spTree>
+  </p:cSld>
+  <p:clrMapOvr>
+    <a:masterClrMapping/>
+  </p:clrMapOvr>
+</p:notes>
+</file>
+
+<file path=ppt/notesSlides/notesSlide7.xml><?xml version="1.0" encoding="utf-8"?>
+<p:notes xmlns:a="http://schemas.openxmlformats.org/drawingml/2006/main" xmlns:p="http://schemas.openxmlformats.org/presentationml/2006/main" xmlns:r="http://schemas.openxmlformats.org/officeDocument/2006/relationships">
+  <p:cSld>
+    <p:spTree>
+      <p:nvGrpSpPr>
+        <p:cNvPr id="1" name=""/>
+        <p:cNvGrpSpPr/>
+        <p:nvPr/>
+      </p:nvGrpSpPr>
+      <p:grpSpPr>
+        <a:xfrm>
+          <a:off x="0" y="0"/>
+          <a:ext cx="0" cy="0"/>
+          <a:chOff x="0" y="0"/>
+          <a:chExt cx="0" cy="0"/>
+        </a:xfrm>
+      </p:grpSpPr>
+      <p:sp>
+        <p:nvSpPr>
+          <p:cNvPr id="2" name="Slide Image Placeholder 1"/>
+          <p:cNvSpPr>
+            <a:spLocks noGrp="1"/>
+          </p:cNvSpPr>
+          <p:nvPr>
+            <p:ph type="sldImg" idx="2"/>
+          </p:nvPr>
+        </p:nvSpPr>
+        <p:spPr/>
+      </p:sp>
+      <p:sp>
+        <p:nvSpPr>
+          <p:cNvPr id="3" name="Notes Placeholder 2"/>
+          <p:cNvSpPr>
+            <a:spLocks noGrp="1"/>
+          </p:cNvSpPr>
+          <p:nvPr>
+            <p:ph type="body" idx="3" sz="quarter"/>
+          </p:nvPr>
+        </p:nvSpPr>
+        <p:spPr/>
+        <p:txBody>
+          <a:bodyPr/>
+          <a:lstStyle/>
+          <a:p>
+            <a:r>
+              <a:t>Ku and Kd here come from the transistor itself, by driving it into two fixtures and running the same two-equation solve the model uses. That is a ground-truth coefficient target, not native IBIS's opinion.</a:t>
+            </a:r>
+          </a:p>
+        </p:txBody>
+      </p:sp>
+      <p:sp>
+        <p:nvSpPr>
+          <p:cNvPr id="4" name="Slide Number Placeholder 3"/>
+          <p:cNvSpPr>
+            <a:spLocks noGrp="1"/>
+          </p:cNvSpPr>
+          <p:nvPr>
+            <p:ph type="sldNum" idx="5" sz="quarter"/>
+          </p:nvPr>
+        </p:nvSpPr>
+        <p:spPr/>
+      </p:sp>
+    </p:spTree>
+  </p:cSld>
+  <p:clrMapOvr>
+    <a:masterClrMapping/>
+  </p:clrMapOvr>
+</p:notes>
+</file>
+
+<file path=ppt/notesSlides/notesSlide8.xml><?xml version="1.0" encoding="utf-8"?>
+<p:notes xmlns:a="http://schemas.openxmlformats.org/drawingml/2006/main" xmlns:p="http://schemas.openxmlformats.org/presentationml/2006/main" xmlns:r="http://schemas.openxmlformats.org/officeDocument/2006/relationships">
+  <p:cSld>
+    <p:spTree>
+      <p:nvGrpSpPr>
+        <p:cNvPr id="1" name=""/>
+        <p:cNvGrpSpPr/>
+        <p:nvPr/>
+      </p:nvGrpSpPr>
+      <p:grpSpPr>
+        <a:xfrm>
+          <a:off x="0" y="0"/>
+          <a:ext cx="0" cy="0"/>
+          <a:chOff x="0" y="0"/>
+          <a:chExt cx="0" cy="0"/>
+        </a:xfrm>
+      </p:grpSpPr>
+      <p:sp>
+        <p:nvSpPr>
+          <p:cNvPr id="2" name="Slide Image Placeholder 1"/>
+          <p:cNvSpPr>
+            <a:spLocks noGrp="1"/>
+          </p:cNvSpPr>
+          <p:nvPr>
+            <p:ph type="sldImg" idx="2"/>
+          </p:nvPr>
+        </p:nvSpPr>
+        <p:spPr/>
+      </p:sp>
+      <p:sp>
+        <p:nvSpPr>
+          <p:cNvPr id="3" name="Notes Placeholder 2"/>
+          <p:cNvSpPr>
+            <a:spLocks noGrp="1"/>
+          </p:cNvSpPr>
+          <p:nvPr>
+            <p:ph type="body" idx="3" sz="quarter"/>
+          </p:nvPr>
+        </p:nvSpPr>
+        <p:spPr/>
+        <p:txBody>
+          <a:bodyPr/>
+          <a:lstStyle/>
+          <a:p>
+            <a:r>
+              <a:t>Two rules worth not re-learning: any bench for this model must start with a real edge, never a held level, because it initialises pulldown-on and latches state only on an edge. And ngspice must be converged before drawing any conclusion.</a:t>
             </a:r>
           </a:p>
         </p:txBody>
@@ -2919,7 +3056,7 @@
               </a:defRPr>
             </a:pPr>
             <a:r>
-              <a:t>Getting pybis closer to the transistor</a:t>
+              <a:t>Getting our IBIS model closer to the transistor</a:t>
             </a:r>
           </a:p>
         </p:txBody>
@@ -3024,7 +3161,7 @@
               </a:defRPr>
             </a:pPr>
             <a:r>
-              <a:t>The core reconstruction is sound</a:t>
+              <a:t>Is the difference the engine or the model?</a:t>
             </a:r>
           </a:p>
         </p:txBody>
@@ -3060,7 +3197,7 @@
               </a:defRPr>
             </a:pPr>
             <a:r>
-              <a:t>CONFIDENCE</a:t>
+              <a:t>METHOD</a:t>
             </a:r>
           </a:p>
         </p:txBody>
@@ -3073,8 +3210,8 @@
         </p:nvSpPr>
         <p:spPr>
           <a:xfrm>
-            <a:off x="640080" y="1280160"/>
-            <a:ext cx="6035040" cy="2560320"/>
+            <a:off x="640080" y="1170432"/>
+            <a:ext cx="11064240" cy="685800"/>
           </a:xfrm>
           <a:prstGeom prst="rect">
             <a:avLst/>
@@ -3089,7 +3226,7 @@
           <a:p>
             <a:pPr>
               <a:spcAft>
-                <a:spcPts val="700"/>
+                <a:spcPts val="300"/>
               </a:spcAft>
               <a:defRPr sz="1700">
                 <a:solidFill>
@@ -3099,15 +3236,35 @@
               </a:defRPr>
             </a:pPr>
             <a:r>
-              <a:t>•  A golden-waveform test replays a model's own V-T tables into the fixture that produced them.</a:t>
-            </a:r>
-          </a:p>
-          <a:p>
-            <a:pPr>
-              <a:spcAft>
-                <a:spcPts val="700"/>
-              </a:spcAft>
-              <a:defRPr sz="1700">
+              <a:t>•  Every native-vs-ours number changes two things at once. We wrote a translator so the same model runs in both simulators.</a:t>
+            </a:r>
+          </a:p>
+        </p:txBody>
+      </p:sp>
+      <p:sp>
+        <p:nvSpPr>
+          <p:cNvPr id="5" name="TextBox 4"/>
+          <p:cNvSpPr txBox="1"/>
+          <p:nvPr/>
+        </p:nvSpPr>
+        <p:spPr>
+          <a:xfrm>
+            <a:off x="640080" y="2103120"/>
+            <a:ext cx="10972800" cy="457200"/>
+          </a:xfrm>
+          <a:prstGeom prst="rect">
+            <a:avLst/>
+          </a:prstGeom>
+          <a:noFill/>
+        </p:spPr>
+        <p:txBody>
+          <a:bodyPr wrap="square" lIns="45720" rIns="45720" anchor="t">
+            <a:spAutoFit/>
+          </a:bodyPr>
+          <a:lstStyle/>
+          <a:p>
+            <a:pPr algn="l">
+              <a:defRPr sz="1700" b="0">
                 <a:solidFill>
                   <a:srgbClr val="191F1C"/>
                 </a:solidFill>
@@ -3115,127 +3272,7 @@
               </a:defRPr>
             </a:pPr>
             <a:r>
-              <a:t>•  Self-contained: no transistor, no native IBIS, no engine confound. We had never done this.</a:t>
-            </a:r>
-          </a:p>
-          <a:p>
-            <a:pPr>
-              <a:spcAft>
-                <a:spcPts val="700"/>
-              </a:spcAft>
-              <a:defRPr sz="1700">
-                <a:solidFill>
-                  <a:srgbClr val="191F1C"/>
-                </a:solidFill>
-                <a:latin typeface="Aptos"/>
-              </a:defRPr>
-            </a:pPr>
-            <a:r>
-              <a:t>•  pybis reproduces all three buffers' own golden waveforms.</a:t>
-            </a:r>
-          </a:p>
-        </p:txBody>
-      </p:sp>
-      <p:sp>
-        <p:nvSpPr>
-          <p:cNvPr id="5" name="Rounded Rectangle 4"/>
-          <p:cNvSpPr/>
-          <p:nvPr/>
-        </p:nvSpPr>
-        <p:spPr>
-          <a:xfrm>
-            <a:off x="6858000" y="1371600"/>
-            <a:ext cx="4754880" cy="1591310"/>
-          </a:xfrm>
-          <a:prstGeom prst="roundRect">
-            <a:avLst/>
-          </a:prstGeom>
-          <a:solidFill>
-            <a:srgbClr val="F6F8F7"/>
-          </a:solidFill>
-          <a:ln w="12700">
-            <a:solidFill>
-              <a:srgbClr val="A4AEA8"/>
-            </a:solidFill>
-          </a:ln>
-        </p:spPr>
-        <p:style>
-          <a:lnRef idx="1">
-            <a:schemeClr val="accent1"/>
-          </a:lnRef>
-          <a:fillRef idx="3">
-            <a:schemeClr val="accent1"/>
-          </a:fillRef>
-          <a:effectRef idx="2">
-            <a:schemeClr val="accent1"/>
-          </a:effectRef>
-          <a:fontRef idx="minor">
-            <a:schemeClr val="lt1"/>
-          </a:fontRef>
-        </p:style>
-        <p:txBody>
-          <a:bodyPr rtlCol="0" anchor="t" wrap="none" lIns="118872" rIns="73152" tIns="91440" bIns="73152"/>
-          <a:lstStyle/>
-          <a:p>
-            <a:pPr algn="l">
-              <a:defRPr sz="1700">
-                <a:solidFill>
-                  <a:srgbClr val="1E3027"/>
-                </a:solidFill>
-                <a:latin typeface="Consolas"/>
-              </a:defRPr>
-            </a:pPr>
-            <a:r>
-              <a:t>figure of merit   0.03 - 0.41 %</a:t>
-            </a:r>
-          </a:p>
-          <a:p>
-            <a:pPr algn="l">
-              <a:defRPr sz="1700">
-                <a:solidFill>
-                  <a:srgbClr val="1E3027"/>
-                </a:solidFill>
-                <a:latin typeface="Consolas"/>
-              </a:defRPr>
-            </a:pPr>
-            <a:r>
-              <a:t>timing shift      +4 to +8 ps</a:t>
-            </a:r>
-          </a:p>
-          <a:p>
-            <a:pPr algn="l">
-              <a:defRPr sz="1700">
-                <a:solidFill>
-                  <a:srgbClr val="1E3027"/>
-                </a:solidFill>
-                <a:latin typeface="Consolas"/>
-              </a:defRPr>
-            </a:pPr>
-          </a:p>
-          <a:p>
-            <a:pPr algn="l">
-              <a:defRPr sz="1700">
-                <a:solidFill>
-                  <a:srgbClr val="1E3027"/>
-                </a:solidFill>
-                <a:latin typeface="Consolas"/>
-              </a:defRPr>
-            </a:pPr>
-            <a:r>
-              <a:t>three buffers, both edges,</a:t>
-            </a:r>
-          </a:p>
-          <a:p>
-            <a:pPr algn="l">
-              <a:defRPr sz="1700">
-                <a:solidFill>
-                  <a:srgbClr val="1E3027"/>
-                </a:solidFill>
-                <a:latin typeface="Consolas"/>
-              </a:defRPr>
-            </a:pPr>
-            <a:r>
-              <a:t>both fixtures</a:t>
+              <a:t>Falling 50% crossing:</a:t>
             </a:r>
           </a:p>
         </p:txBody>
@@ -3248,8 +3285,79 @@
         </p:nvSpPr>
         <p:spPr>
           <a:xfrm>
-            <a:off x="640080" y="3291840"/>
-            <a:ext cx="10972800" cy="731520"/>
+            <a:off x="640080" y="2651760"/>
+            <a:ext cx="11064240" cy="2057400"/>
+          </a:xfrm>
+          <a:prstGeom prst="rect">
+            <a:avLst/>
+          </a:prstGeom>
+          <a:noFill/>
+        </p:spPr>
+        <p:txBody>
+          <a:bodyPr wrap="square" lIns="73152" rIns="36576" tIns="36576" bIns="36576">
+            <a:spAutoFit/>
+          </a:bodyPr>
+          <a:lstStyle/>
+          <a:p>
+            <a:pPr>
+              <a:spcAft>
+                <a:spcPts val="300"/>
+              </a:spcAft>
+              <a:defRPr sz="1700">
+                <a:solidFill>
+                  <a:srgbClr val="191F1C"/>
+                </a:solidFill>
+                <a:latin typeface="Aptos"/>
+              </a:defRPr>
+            </a:pPr>
+            <a:r>
+              <a:t>•  our model in ngspice     5.3371 ns</a:t>
+            </a:r>
+          </a:p>
+          <a:p>
+            <a:pPr>
+              <a:spcAft>
+                <a:spcPts val="300"/>
+              </a:spcAft>
+              <a:defRPr sz="1700">
+                <a:solidFill>
+                  <a:srgbClr val="191F1C"/>
+                </a:solidFill>
+                <a:latin typeface="Aptos"/>
+              </a:defRPr>
+            </a:pPr>
+            <a:r>
+              <a:t>•  our model in HSPICE      5.3375 ns     engine:  −0.5 ps</a:t>
+            </a:r>
+          </a:p>
+          <a:p>
+            <a:pPr>
+              <a:spcAft>
+                <a:spcPts val="300"/>
+              </a:spcAft>
+              <a:defRPr sz="1700">
+                <a:solidFill>
+                  <a:srgbClr val="191F1C"/>
+                </a:solidFill>
+                <a:latin typeface="Aptos"/>
+              </a:defRPr>
+            </a:pPr>
+            <a:r>
+              <a:t>•  native IBIS in HSPICE    5.3319 ns     model:   +5.6 ps</a:t>
+            </a:r>
+          </a:p>
+        </p:txBody>
+      </p:sp>
+      <p:sp>
+        <p:nvSpPr>
+          <p:cNvPr id="7" name="TextBox 6"/>
+          <p:cNvSpPr txBox="1"/>
+          <p:nvPr/>
+        </p:nvSpPr>
+        <p:spPr>
+          <a:xfrm>
+            <a:off x="640080" y="4572000"/>
+            <a:ext cx="10972800" cy="914400"/>
           </a:xfrm>
           <a:prstGeom prst="rect">
             <a:avLst/>
@@ -3271,62 +3379,7 @@
               </a:defRPr>
             </a:pPr>
             <a:r>
-              <a:t>It is now the standing health check, and it settled the C_comp question.</a:t>
-            </a:r>
-          </a:p>
-        </p:txBody>
-      </p:sp>
-      <p:sp>
-        <p:nvSpPr>
-          <p:cNvPr id="7" name="Rectangle 6"/>
-          <p:cNvSpPr/>
-          <p:nvPr/>
-        </p:nvSpPr>
-        <p:spPr>
-          <a:xfrm>
-            <a:off x="384048" y="6062472"/>
-            <a:ext cx="11109960" cy="393192"/>
-          </a:xfrm>
-          <a:prstGeom prst="rect">
-            <a:avLst/>
-          </a:prstGeom>
-          <a:solidFill>
-            <a:srgbClr val="F1F8F2"/>
-          </a:solidFill>
-          <a:ln>
-            <a:solidFill>
-              <a:srgbClr val="F1F8F2"/>
-            </a:solidFill>
-          </a:ln>
-        </p:spPr>
-        <p:style>
-          <a:lnRef idx="1">
-            <a:schemeClr val="accent1"/>
-          </a:lnRef>
-          <a:fillRef idx="3">
-            <a:schemeClr val="accent1"/>
-          </a:fillRef>
-          <a:effectRef idx="2">
-            <a:schemeClr val="accent1"/>
-          </a:effectRef>
-          <a:fontRef idx="minor">
-            <a:schemeClr val="lt1"/>
-          </a:fontRef>
-        </p:style>
-        <p:txBody>
-          <a:bodyPr rtlCol="0" anchor="ctr"/>
-          <a:lstStyle/>
-          <a:p>
-            <a:pPr algn="ctr">
-              <a:defRPr sz="1400" b="1">
-                <a:solidFill>
-                  <a:srgbClr val="2B7A43"/>
-                </a:solidFill>
-                <a:latin typeface="Aptos"/>
-              </a:defRPr>
-            </a:pPr>
-            <a:r>
-              <a:t>Whatever is wrong under stress, it is not the I-V times Ku(t) reconstruction.</a:t>
+              <a:t>The engine is not the source — provided ngspice is converged. At a 1 ps step it was an aliasing outlier that doubled the apparent lag.</a:t>
             </a:r>
           </a:p>
         </p:txBody>
@@ -3373,7 +3426,7 @@
               </a:defRPr>
             </a:pPr>
             <a:r>
-              <a:t>C_comp is handled correctly</a:t>
+              <a:t>What fixtures do to the extracted Ku/Kd</a:t>
             </a:r>
           </a:p>
         </p:txBody>
@@ -3409,131 +3462,114 @@
               </a:defRPr>
             </a:pPr>
             <a:r>
-              <a:t>CONFIDENCE</a:t>
-            </a:r>
-          </a:p>
-        </p:txBody>
-      </p:sp>
-      <p:sp>
-        <p:nvSpPr>
-          <p:cNvPr id="4" name="Rectangle 3"/>
-          <p:cNvSpPr/>
+              <a:t>METHOD</a:t>
+            </a:r>
+          </a:p>
+        </p:txBody>
+      </p:sp>
+      <p:sp>
+        <p:nvSpPr>
+          <p:cNvPr id="4" name="TextBox 3"/>
+          <p:cNvSpPr txBox="1"/>
           <p:nvPr/>
         </p:nvSpPr>
         <p:spPr>
           <a:xfrm>
-            <a:off x="475488" y="1143000"/>
-            <a:ext cx="11210544" cy="4809743"/>
-          </a:xfrm>
-          <a:prstGeom prst="rect">
-            <a:avLst/>
-          </a:prstGeom>
-          <a:solidFill>
-            <a:srgbClr val="FFFFFF"/>
-          </a:solidFill>
-          <a:ln w="10160">
-            <a:solidFill>
-              <a:srgbClr val="CBD0CC"/>
-            </a:solidFill>
-          </a:ln>
-        </p:spPr>
-        <p:style>
-          <a:lnRef idx="1">
-            <a:schemeClr val="accent1"/>
-          </a:lnRef>
-          <a:fillRef idx="3">
-            <a:schemeClr val="accent1"/>
-          </a:fillRef>
-          <a:effectRef idx="2">
-            <a:schemeClr val="accent1"/>
-          </a:effectRef>
-          <a:fontRef idx="minor">
-            <a:schemeClr val="lt1"/>
-          </a:fontRef>
-        </p:style>
-        <p:txBody>
-          <a:bodyPr rtlCol="0" anchor="ctr"/>
-          <a:lstStyle/>
-          <a:p>
-            <a:pPr algn="ctr"/>
-          </a:p>
-        </p:txBody>
-      </p:sp>
-      <p:pic>
-        <p:nvPicPr>
-          <p:cNvPr id="5" name="Picture 4" descr="ccomp.png"/>
-          <p:cNvPicPr>
-            <a:picLocks noChangeAspect="1"/>
-          </p:cNvPicPr>
+            <a:off x="640080" y="1170432"/>
+            <a:ext cx="11064240" cy="2057400"/>
+          </a:xfrm>
+          <a:prstGeom prst="rect">
+            <a:avLst/>
+          </a:prstGeom>
+          <a:noFill/>
+        </p:spPr>
+        <p:txBody>
+          <a:bodyPr wrap="square" lIns="73152" rIns="36576" tIns="36576" bIns="36576">
+            <a:spAutoFit/>
+          </a:bodyPr>
+          <a:lstStyle/>
+          <a:p>
+            <a:pPr>
+              <a:spcAft>
+                <a:spcPts val="300"/>
+              </a:spcAft>
+              <a:defRPr sz="1700">
+                <a:solidFill>
+                  <a:srgbClr val="191F1C"/>
+                </a:solidFill>
+                <a:latin typeface="Aptos"/>
+              </a:defRPr>
+            </a:pPr>
+            <a:r>
+              <a:t>•  The control reproduces the shipped solve to 2.4e−08, so the method is exact.</a:t>
+            </a:r>
+          </a:p>
+          <a:p>
+            <a:pPr>
+              <a:spcAft>
+                <a:spcPts val="300"/>
+              </a:spcAft>
+              <a:defRPr sz="1700">
+                <a:solidFill>
+                  <a:srgbClr val="191F1C"/>
+                </a:solidFill>
+                <a:latin typeface="Aptos"/>
+              </a:defRPr>
+            </a:pPr>
+            <a:r>
+              <a:t>•  In quiet regions Ku is load-independent to four decimals — a device property, not a fixture artifact.</a:t>
+            </a:r>
+          </a:p>
+          <a:p>
+            <a:pPr>
+              <a:spcAft>
+                <a:spcPts val="300"/>
+              </a:spcAft>
+              <a:defRPr sz="1700">
+                <a:solidFill>
+                  <a:srgbClr val="191F1C"/>
+                </a:solidFill>
+                <a:latin typeface="Aptos"/>
+              </a:defRPr>
+            </a:pPr>
+            <a:r>
+              <a:t>•  A resonant R+L+C fixture corrupts Ku for 1.14 ns, reaching 0.26 of error.</a:t>
+            </a:r>
+          </a:p>
+        </p:txBody>
+      </p:sp>
+      <p:sp>
+        <p:nvSpPr>
+          <p:cNvPr id="5" name="TextBox 4"/>
+          <p:cNvSpPr txBox="1"/>
           <p:nvPr/>
-        </p:nvPicPr>
-        <p:blipFill>
-          <a:blip r:embed="rId2"/>
-          <a:stretch>
-            <a:fillRect/>
-          </a:stretch>
-        </p:blipFill>
-        <p:spPr>
-          <a:xfrm>
-            <a:off x="502920" y="1170432"/>
-            <a:ext cx="11155680" cy="4754879"/>
-          </a:xfrm>
-          <a:prstGeom prst="rect">
-            <a:avLst/>
-          </a:prstGeom>
-        </p:spPr>
-      </p:pic>
-      <p:sp>
-        <p:nvSpPr>
-          <p:cNvPr id="6" name="Rectangle 5"/>
-          <p:cNvSpPr/>
-          <p:nvPr/>
-        </p:nvSpPr>
-        <p:spPr>
-          <a:xfrm>
-            <a:off x="384048" y="6062472"/>
-            <a:ext cx="11109960" cy="393192"/>
-          </a:xfrm>
-          <a:prstGeom prst="rect">
-            <a:avLst/>
-          </a:prstGeom>
-          <a:solidFill>
-            <a:srgbClr val="F1F8F2"/>
-          </a:solidFill>
-          <a:ln>
-            <a:solidFill>
-              <a:srgbClr val="F1F8F2"/>
-            </a:solidFill>
-          </a:ln>
-        </p:spPr>
-        <p:style>
-          <a:lnRef idx="1">
-            <a:schemeClr val="accent1"/>
-          </a:lnRef>
-          <a:fillRef idx="3">
-            <a:schemeClr val="accent1"/>
-          </a:fillRef>
-          <a:effectRef idx="2">
-            <a:schemeClr val="accent1"/>
-          </a:effectRef>
-          <a:fontRef idx="minor">
-            <a:schemeClr val="lt1"/>
-          </a:fontRef>
-        </p:style>
-        <p:txBody>
-          <a:bodyPr rtlCol="0" anchor="ctr"/>
-          <a:lstStyle/>
-          <a:p>
-            <a:pPr algn="ctr">
-              <a:defRPr sz="1400" b="1">
-                <a:solidFill>
-                  <a:srgbClr val="2B7A43"/>
+        </p:nvSpPr>
+        <p:spPr>
+          <a:xfrm>
+            <a:off x="640080" y="3931920"/>
+            <a:ext cx="10972800" cy="731520"/>
+          </a:xfrm>
+          <a:prstGeom prst="rect">
+            <a:avLst/>
+          </a:prstGeom>
+          <a:noFill/>
+        </p:spPr>
+        <p:txBody>
+          <a:bodyPr wrap="square" lIns="45720" rIns="45720" anchor="t">
+            <a:spAutoFit/>
+          </a:bodyPr>
+          <a:lstStyle/>
+          <a:p>
+            <a:pPr algn="l">
+              <a:defRPr sz="1700" b="0">
+                <a:solidFill>
+                  <a:srgbClr val="191F1C"/>
                 </a:solidFill>
                 <a:latin typeface="Aptos"/>
               </a:defRPr>
             </a:pPr>
             <a:r>
-              <a:t>I had this backwards first. The golden-waveform test overturned my own claim that pybis over-applies C_comp.</a:t>
+              <a:t>Added L and C are safe individually. The resonant combination has to be avoided when characterising.</a:t>
             </a:r>
           </a:p>
         </p:txBody>
@@ -3580,7 +3616,7 @@
               </a:defRPr>
             </a:pPr>
             <a:r>
-              <a:t>Is it the engine or the model?</a:t>
+              <a:t>The 1.25 max|Ku| cap rejects good models</a:t>
             </a:r>
           </a:p>
         </p:txBody>
@@ -3616,7 +3652,7 @@
               </a:defRPr>
             </a:pPr>
             <a:r>
-              <a:t>METHOD</a:t>
+              <a:t>WHAT SHOULD CHANGE</a:t>
             </a:r>
           </a:p>
         </p:txBody>
@@ -3630,7 +3666,7 @@
         <p:spPr>
           <a:xfrm>
             <a:off x="640080" y="1188720"/>
-            <a:ext cx="10972800" cy="914400"/>
+            <a:ext cx="10972800" cy="457200"/>
           </a:xfrm>
           <a:prstGeom prst="rect">
             <a:avLst/>
@@ -3652,111 +3688,110 @@
               </a:defRPr>
             </a:pPr>
             <a:r>
-              <a:t>Every native-vs-pybis number changes two things at once: the IBIS implementation and the SPICE engine. We wrote a translator so the same model runs in both.</a:t>
-            </a:r>
-          </a:p>
-        </p:txBody>
-      </p:sp>
-      <p:sp>
-        <p:nvSpPr>
-          <p:cNvPr id="5" name="Rounded Rectangle 4"/>
-          <p:cNvSpPr/>
+              <a:t>ex2 variants, across all seven characterisation edge rates:</a:t>
+            </a:r>
+          </a:p>
+        </p:txBody>
+      </p:sp>
+      <p:sp>
+        <p:nvSpPr>
+          <p:cNvPr id="5" name="TextBox 4"/>
+          <p:cNvSpPr txBox="1"/>
           <p:nvPr/>
         </p:nvSpPr>
         <p:spPr>
           <a:xfrm>
-            <a:off x="640080" y="2377440"/>
-            <a:ext cx="10972800" cy="1591310"/>
-          </a:xfrm>
-          <a:prstGeom prst="roundRect">
-            <a:avLst/>
-          </a:prstGeom>
-          <a:solidFill>
-            <a:srgbClr val="F6F8F7"/>
-          </a:solidFill>
-          <a:ln w="12700">
-            <a:solidFill>
-              <a:srgbClr val="A4AEA8"/>
-            </a:solidFill>
-          </a:ln>
-        </p:spPr>
-        <p:style>
-          <a:lnRef idx="1">
-            <a:schemeClr val="accent1"/>
-          </a:lnRef>
-          <a:fillRef idx="3">
-            <a:schemeClr val="accent1"/>
-          </a:fillRef>
-          <a:effectRef idx="2">
-            <a:schemeClr val="accent1"/>
-          </a:effectRef>
-          <a:fontRef idx="minor">
-            <a:schemeClr val="lt1"/>
-          </a:fontRef>
-        </p:style>
-        <p:txBody>
-          <a:bodyPr rtlCol="0" anchor="t" wrap="none" lIns="118872" rIns="73152" tIns="91440" bIns="73152"/>
-          <a:lstStyle/>
-          <a:p>
-            <a:pPr algn="l">
+            <a:off x="640080" y="1737360"/>
+            <a:ext cx="11064240" cy="3429000"/>
+          </a:xfrm>
+          <a:prstGeom prst="rect">
+            <a:avLst/>
+          </a:prstGeom>
+          <a:noFill/>
+        </p:spPr>
+        <p:txBody>
+          <a:bodyPr wrap="square" lIns="73152" rIns="36576" tIns="36576" bIns="36576">
+            <a:spAutoFit/>
+          </a:bodyPr>
+          <a:lstStyle/>
+          <a:p>
+            <a:pPr>
+              <a:spcAft>
+                <a:spcPts val="300"/>
+              </a:spcAft>
               <a:defRPr sz="1700">
                 <a:solidFill>
-                  <a:srgbClr val="1E3027"/>
-                </a:solidFill>
-                <a:latin typeface="Consolas"/>
-              </a:defRPr>
-            </a:pPr>
-            <a:r>
-              <a:t>                          50% crossing</a:t>
-            </a:r>
-          </a:p>
-          <a:p>
-            <a:pPr algn="l">
+                  <a:srgbClr val="191F1C"/>
+                </a:solidFill>
+                <a:latin typeface="Aptos"/>
+              </a:defRPr>
+            </a:pPr>
+            <a:r>
+              <a:t>•  slowpre   predriver halved      328 ps      1.047</a:t>
+            </a:r>
+          </a:p>
+          <a:p>
+            <a:pPr>
+              <a:spcAft>
+                <a:spcPts val="300"/>
+              </a:spcAft>
               <a:defRPr sz="1700">
                 <a:solidFill>
-                  <a:srgbClr val="1E3027"/>
-                </a:solidFill>
-                <a:latin typeface="Consolas"/>
-              </a:defRPr>
-            </a:pPr>
-          </a:p>
-          <a:p>
-            <a:pPr algn="l">
+                  <a:srgbClr val="191F1C"/>
+                </a:solidFill>
+                <a:latin typeface="Aptos"/>
+              </a:defRPr>
+            </a:pPr>
+            <a:r>
+              <a:t>•  base      control               200 ps      1.283</a:t>
+            </a:r>
+          </a:p>
+          <a:p>
+            <a:pPr>
+              <a:spcAft>
+                <a:spcPts val="300"/>
+              </a:spcAft>
               <a:defRPr sz="1700">
                 <a:solidFill>
-                  <a:srgbClr val="1E3027"/>
-                </a:solidFill>
-                <a:latin typeface="Consolas"/>
-              </a:defRPr>
-            </a:pPr>
-            <a:r>
-              <a:t>  pybis in ngspice            5.3371 ns</a:t>
-            </a:r>
-          </a:p>
-          <a:p>
-            <a:pPr algn="l">
+                  <a:srgbClr val="191F1C"/>
+                </a:solidFill>
+                <a:latin typeface="Aptos"/>
+              </a:defRPr>
+            </a:pPr>
+            <a:r>
+              <a:t>•  nomiller  Miller caps removed   208 ps      1.299</a:t>
+            </a:r>
+          </a:p>
+          <a:p>
+            <a:pPr>
+              <a:spcAft>
+                <a:spcPts val="300"/>
+              </a:spcAft>
               <a:defRPr sz="1700">
                 <a:solidFill>
-                  <a:srgbClr val="1E3027"/>
-                </a:solidFill>
-                <a:latin typeface="Consolas"/>
-              </a:defRPr>
-            </a:pPr>
-            <a:r>
-              <a:t>  pybis in HSPICE             5.3375 ns     engine  -0.5 ps</a:t>
-            </a:r>
-          </a:p>
-          <a:p>
-            <a:pPr algn="l">
+                  <a:srgbClr val="191F1C"/>
+                </a:solidFill>
+                <a:latin typeface="Aptos"/>
+              </a:defRPr>
+            </a:pPr>
+            <a:r>
+              <a:t>•  skewp     output PMOS halved    160 ps      1.589</a:t>
+            </a:r>
+          </a:p>
+          <a:p>
+            <a:pPr>
+              <a:spcAft>
+                <a:spcPts val="300"/>
+              </a:spcAft>
               <a:defRPr sz="1700">
                 <a:solidFill>
-                  <a:srgbClr val="1E3027"/>
-                </a:solidFill>
-                <a:latin typeface="Consolas"/>
-              </a:defRPr>
-            </a:pPr>
-            <a:r>
-              <a:t>  native IBIS in HSPICE       5.3319 ns     model   +5.6 ps</a:t>
+                  <a:srgbClr val="191F1C"/>
+                </a:solidFill>
+                <a:latin typeface="Aptos"/>
+              </a:defRPr>
+            </a:pPr>
+            <a:r>
+              <a:t>•  weak      both devices halved   152 ps      1.779</a:t>
             </a:r>
           </a:p>
         </p:txBody>
@@ -3769,8 +3804,8 @@
         </p:nvSpPr>
         <p:spPr>
           <a:xfrm>
-            <a:off x="640080" y="4297680"/>
-            <a:ext cx="10972800" cy="914400"/>
+            <a:off x="640080" y="4480560"/>
+            <a:ext cx="10972800" cy="1463040"/>
           </a:xfrm>
           <a:prstGeom prst="rect">
             <a:avLst/>
@@ -3792,62 +3827,11 @@
               </a:defRPr>
             </a:pPr>
             <a:r>
-              <a:t>The engine is not the source, provided ngspice is converged. At a 1 ps step it was an aliasing outlier that doubled the apparent lag.</a:t>
-            </a:r>
-          </a:p>
-        </p:txBody>
-      </p:sp>
-      <p:sp>
-        <p:nvSpPr>
-          <p:cNvPr id="7" name="Rectangle 6"/>
-          <p:cNvSpPr/>
-          <p:nvPr/>
-        </p:nvSpPr>
-        <p:spPr>
-          <a:xfrm>
-            <a:off x="384048" y="6062472"/>
-            <a:ext cx="11109960" cy="393192"/>
-          </a:xfrm>
-          <a:prstGeom prst="rect">
-            <a:avLst/>
-          </a:prstGeom>
-          <a:solidFill>
-            <a:srgbClr val="F1F8F2"/>
-          </a:solidFill>
-          <a:ln>
-            <a:solidFill>
-              <a:srgbClr val="F1F8F2"/>
-            </a:solidFill>
-          </a:ln>
-        </p:spPr>
-        <p:style>
-          <a:lnRef idx="1">
-            <a:schemeClr val="accent1"/>
-          </a:lnRef>
-          <a:fillRef idx="3">
-            <a:schemeClr val="accent1"/>
-          </a:fillRef>
-          <a:effectRef idx="2">
-            <a:schemeClr val="accent1"/>
-          </a:effectRef>
-          <a:fontRef idx="minor">
-            <a:schemeClr val="lt1"/>
-          </a:fontRef>
-        </p:style>
-        <p:txBody>
-          <a:bodyPr rtlCol="0" anchor="ctr"/>
-          <a:lstStyle/>
-          <a:p>
-            <a:pPr algn="ctr">
-              <a:defRPr sz="1400" b="1">
-                <a:solidFill>
-                  <a:srgbClr val="2B7A43"/>
-                </a:solidFill>
-                <a:latin typeface="Aptos"/>
-              </a:defRPr>
-            </a:pPr>
-            <a:r>
-              <a:t>Converged, the two engines agree to half a picosecond.</a:t>
+              <a:t>It follows C_comp × dV/dt against the device drive. For ex2 that is 82 mA of displacement current against a ~51 mA drive — it exceeds the device, so the solve has to push Ku above 1.</a:t>
+            </a:r>
+            <a:br/>
+            <a:r>
+              <a:t>Healthy baselines differ per silicon: inv_chain 1.03, io_buf 1.18, ex2 1.28. No absolute number works; it should be a within-buffer outlier test.</a:t>
             </a:r>
           </a:p>
         </p:txBody>
@@ -3894,7 +3878,7 @@
               </a:defRPr>
             </a:pPr>
             <a:r>
-              <a:t>What fixtures do to the extracted Ku/Kd</a:t>
+              <a:t>Nine new buffer variants, same stress axis</a:t>
             </a:r>
           </a:p>
         </p:txBody>
@@ -3930,7 +3914,7 @@
               </a:defRPr>
             </a:pPr>
             <a:r>
-              <a:t>METHOD</a:t>
+              <a:t>WHAT SHOULD CHANGE</a:t>
             </a:r>
           </a:p>
         </p:txBody>
@@ -3943,8 +3927,8 @@
         </p:nvSpPr>
         <p:spPr>
           <a:xfrm>
-            <a:off x="640080" y="1371600"/>
-            <a:ext cx="10972800" cy="2743200"/>
+            <a:off x="640080" y="1170432"/>
+            <a:ext cx="11064240" cy="1371600"/>
           </a:xfrm>
           <a:prstGeom prst="rect">
             <a:avLst/>
@@ -3959,7 +3943,7 @@
           <a:p>
             <a:pPr>
               <a:spcAft>
-                <a:spcPts val="700"/>
+                <a:spcPts val="300"/>
               </a:spcAft>
               <a:defRPr sz="1700">
                 <a:solidFill>
@@ -3969,13 +3953,13 @@
               </a:defRPr>
             </a:pPr>
             <a:r>
-              <a:t>•  The control reproduces the shipped solve to 2.4e-08, so the method is exact.</a:t>
+              <a:t>•  Slower predriver, halved output devices, skewed PMOS, open-drain.</a:t>
             </a:r>
           </a:p>
           <a:p>
             <a:pPr>
               <a:spcAft>
-                <a:spcPts val="700"/>
+                <a:spcPts val="300"/>
               </a:spcAft>
               <a:defRPr sz="1700">
                 <a:solidFill>
@@ -3985,83 +3969,31 @@
               </a:defRPr>
             </a:pPr>
             <a:r>
-              <a:t>•  In quiet regions Ku is load-independent to four decimals. It is a device property, not a fixture artifact.</a:t>
-            </a:r>
-          </a:p>
-          <a:p>
-            <a:pPr>
-              <a:spcAft>
-                <a:spcPts val="700"/>
-              </a:spcAft>
-              <a:defRPr sz="1700">
-                <a:solidFill>
-                  <a:srgbClr val="191F1C"/>
-                </a:solidFill>
-                <a:latin typeface="Aptos"/>
-              </a:defRPr>
-            </a:pPr>
-            <a:r>
-              <a:t>•  A resonant R+L+C fixture corrupts Ku for 1.14 ns, reaching 0.26 of error.</a:t>
-            </a:r>
-          </a:p>
-        </p:txBody>
-      </p:sp>
-      <p:sp>
-        <p:nvSpPr>
-          <p:cNvPr id="5" name="TextBox 4"/>
-          <p:cNvSpPr txBox="1"/>
-          <p:nvPr/>
-        </p:nvSpPr>
-        <p:spPr>
-          <a:xfrm>
-            <a:off x="640080" y="2926080"/>
-            <a:ext cx="10972800" cy="914400"/>
-          </a:xfrm>
-          <a:prstGeom prst="rect">
-            <a:avLst/>
-          </a:prstGeom>
-          <a:noFill/>
-        </p:spPr>
-        <p:txBody>
-          <a:bodyPr wrap="square" lIns="45720" rIns="45720" anchor="t">
-            <a:spAutoFit/>
-          </a:bodyPr>
-          <a:lstStyle/>
-          <a:p>
-            <a:pPr algn="l">
-              <a:defRPr sz="1700" b="0">
-                <a:solidFill>
-                  <a:srgbClr val="191F1C"/>
-                </a:solidFill>
-                <a:latin typeface="Aptos"/>
-              </a:defRPr>
-            </a:pPr>
-            <a:r>
-              <a:t>Added L and C are safe individually. The resonant combination has to be avoided when characterising.</a:t>
-            </a:r>
-          </a:p>
-        </p:txBody>
-      </p:sp>
-      <p:sp>
-        <p:nvSpPr>
-          <p:cNvPr id="6" name="Rectangle 5"/>
+              <a:t>•  Characterised and stressed exactly like the three base buffers.</a:t>
+            </a:r>
+          </a:p>
+        </p:txBody>
+      </p:sp>
+      <p:sp>
+        <p:nvSpPr>
+          <p:cNvPr id="5" name="Rectangle 4"/>
           <p:cNvSpPr/>
           <p:nvPr/>
         </p:nvSpPr>
         <p:spPr>
           <a:xfrm>
-            <a:off x="384048" y="6062472"/>
-            <a:ext cx="11109960" cy="393192"/>
+            <a:off x="513743" y="2057400"/>
+            <a:ext cx="5373312" cy="4398264"/>
           </a:xfrm>
           <a:prstGeom prst="rect">
             <a:avLst/>
           </a:prstGeom>
           <a:solidFill>
-            <a:srgbClr val="F1F8F2"/>
+            <a:srgbClr val="FFFFFF"/>
           </a:solidFill>
-          <a:ln>
+          <a:ln w="10160">
             <a:solidFill>
-              <a:srgbClr val="F1F8F2"/>
+              <a:srgbClr val="CBD0CC"/>
             </a:solidFill>
           </a:ln>
         </p:spPr>
@@ -4083,20 +4015,103 @@
           <a:bodyPr rtlCol="0" anchor="ctr"/>
           <a:lstStyle/>
           <a:p>
-            <a:pPr algn="ctr">
-              <a:defRPr sz="1400" b="1">
-                <a:solidFill>
-                  <a:srgbClr val="2B7A43"/>
-                </a:solidFill>
-                <a:latin typeface="Aptos"/>
-              </a:defRPr>
-            </a:pPr>
-            <a:r>
-              <a:t>The two-fixture extraction is trustworthy, as long as the fixture is not resonant.</a:t>
-            </a:r>
-          </a:p>
-        </p:txBody>
-      </p:sp>
+            <a:pPr algn="ctr"/>
+          </a:p>
+        </p:txBody>
+      </p:sp>
+      <p:pic>
+        <p:nvPicPr>
+          <p:cNvPr id="6" name="Picture 5" descr="variant_pad.png"/>
+          <p:cNvPicPr>
+            <a:picLocks noChangeAspect="1"/>
+          </p:cNvPicPr>
+          <p:nvPr/>
+        </p:nvPicPr>
+        <p:blipFill>
+          <a:blip r:embed="rId2"/>
+          <a:stretch>
+            <a:fillRect/>
+          </a:stretch>
+        </p:blipFill>
+        <p:spPr>
+          <a:xfrm>
+            <a:off x="541175" y="2084831"/>
+            <a:ext cx="5318448" cy="4343400"/>
+          </a:xfrm>
+          <a:prstGeom prst="rect">
+            <a:avLst/>
+          </a:prstGeom>
+        </p:spPr>
+      </p:pic>
+      <p:sp>
+        <p:nvSpPr>
+          <p:cNvPr id="7" name="Rectangle 6"/>
+          <p:cNvSpPr/>
+          <p:nvPr/>
+        </p:nvSpPr>
+        <p:spPr>
+          <a:xfrm>
+            <a:off x="6274463" y="2057400"/>
+            <a:ext cx="5373312" cy="4398264"/>
+          </a:xfrm>
+          <a:prstGeom prst="rect">
+            <a:avLst/>
+          </a:prstGeom>
+          <a:solidFill>
+            <a:srgbClr val="FFFFFF"/>
+          </a:solidFill>
+          <a:ln w="10160">
+            <a:solidFill>
+              <a:srgbClr val="CBD0CC"/>
+            </a:solidFill>
+          </a:ln>
+        </p:spPr>
+        <p:style>
+          <a:lnRef idx="1">
+            <a:schemeClr val="accent1"/>
+          </a:lnRef>
+          <a:fillRef idx="3">
+            <a:schemeClr val="accent1"/>
+          </a:fillRef>
+          <a:effectRef idx="2">
+            <a:schemeClr val="accent1"/>
+          </a:effectRef>
+          <a:fontRef idx="minor">
+            <a:schemeClr val="lt1"/>
+          </a:fontRef>
+        </p:style>
+        <p:txBody>
+          <a:bodyPr rtlCol="0" anchor="ctr"/>
+          <a:lstStyle/>
+          <a:p>
+            <a:pPr algn="ctr"/>
+          </a:p>
+        </p:txBody>
+      </p:sp>
+      <p:pic>
+        <p:nvPicPr>
+          <p:cNvPr id="8" name="Picture 7" descr="variant_kukd.png"/>
+          <p:cNvPicPr>
+            <a:picLocks noChangeAspect="1"/>
+          </p:cNvPicPr>
+          <p:nvPr/>
+        </p:nvPicPr>
+        <p:blipFill>
+          <a:blip r:embed="rId3"/>
+          <a:stretch>
+            <a:fillRect/>
+          </a:stretch>
+        </p:blipFill>
+        <p:spPr>
+          <a:xfrm>
+            <a:off x="6301895" y="2084831"/>
+            <a:ext cx="5318448" cy="4343400"/>
+          </a:xfrm>
+          <a:prstGeom prst="rect">
+            <a:avLst/>
+          </a:prstGeom>
+        </p:spPr>
+      </p:pic>
     </p:spTree>
   </p:cSld>
   <p:clrMapOvr>
@@ -4139,7 +4154,7 @@
               </a:defRPr>
             </a:pPr>
             <a:r>
-              <a:t>The 1.25 max|Ku| cap rejects good models</a:t>
+              <a:t>Where this leaves us</a:t>
             </a:r>
           </a:p>
         </p:txBody>
@@ -4175,192 +4190,21 @@
               </a:defRPr>
             </a:pPr>
             <a:r>
-              <a:t>WHAT SHOULD CHANGE</a:t>
-            </a:r>
-          </a:p>
-        </p:txBody>
-      </p:sp>
-      <p:sp>
-        <p:nvSpPr>
-          <p:cNvPr id="4" name="Rectangle 3"/>
-          <p:cNvSpPr/>
-          <p:nvPr/>
-        </p:nvSpPr>
-        <p:spPr>
-          <a:xfrm>
-            <a:off x="475488" y="1207008"/>
-            <a:ext cx="11210544" cy="4535423"/>
-          </a:xfrm>
-          <a:prstGeom prst="rect">
-            <a:avLst/>
-          </a:prstGeom>
-          <a:solidFill>
-            <a:srgbClr val="FFFFFF"/>
-          </a:solidFill>
-          <a:ln w="10160">
-            <a:solidFill>
-              <a:srgbClr val="CBD0CC"/>
-            </a:solidFill>
-          </a:ln>
-        </p:spPr>
-        <p:style>
-          <a:lnRef idx="1">
-            <a:schemeClr val="accent1"/>
-          </a:lnRef>
-          <a:fillRef idx="3">
-            <a:schemeClr val="accent1"/>
-          </a:fillRef>
-          <a:effectRef idx="2">
-            <a:schemeClr val="accent1"/>
-          </a:effectRef>
-          <a:fontRef idx="minor">
-            <a:schemeClr val="lt1"/>
-          </a:fontRef>
-        </p:style>
-        <p:txBody>
-          <a:bodyPr rtlCol="0" anchor="ctr"/>
-          <a:lstStyle/>
-          <a:p>
-            <a:pPr algn="ctr"/>
-          </a:p>
-        </p:txBody>
-      </p:sp>
-      <p:pic>
-        <p:nvPicPr>
-          <p:cNvPr id="5" name="Picture 4" descr="ku_cap.png"/>
-          <p:cNvPicPr>
-            <a:picLocks noChangeAspect="1"/>
-          </p:cNvPicPr>
-          <p:nvPr/>
-        </p:nvPicPr>
-        <p:blipFill>
-          <a:blip r:embed="rId2"/>
-          <a:stretch>
-            <a:fillRect/>
-          </a:stretch>
-        </p:blipFill>
-        <p:spPr>
-          <a:xfrm>
-            <a:off x="502920" y="1234440"/>
-            <a:ext cx="11155680" cy="4480559"/>
-          </a:xfrm>
-          <a:prstGeom prst="rect">
-            <a:avLst/>
-          </a:prstGeom>
-        </p:spPr>
-      </p:pic>
-      <p:sp>
-        <p:nvSpPr>
-          <p:cNvPr id="6" name="Rectangle 5"/>
-          <p:cNvSpPr/>
-          <p:nvPr/>
-        </p:nvSpPr>
-        <p:spPr>
-          <a:xfrm>
-            <a:off x="384048" y="6062472"/>
-            <a:ext cx="11109960" cy="393192"/>
-          </a:xfrm>
-          <a:prstGeom prst="rect">
-            <a:avLst/>
-          </a:prstGeom>
-          <a:solidFill>
-            <a:srgbClr val="F1F8F2"/>
-          </a:solidFill>
-          <a:ln>
-            <a:solidFill>
-              <a:srgbClr val="F1F8F2"/>
-            </a:solidFill>
-          </a:ln>
-        </p:spPr>
-        <p:style>
-          <a:lnRef idx="1">
-            <a:schemeClr val="accent1"/>
-          </a:lnRef>
-          <a:fillRef idx="3">
-            <a:schemeClr val="accent1"/>
-          </a:fillRef>
-          <a:effectRef idx="2">
-            <a:schemeClr val="accent1"/>
-          </a:effectRef>
-          <a:fontRef idx="minor">
-            <a:schemeClr val="lt1"/>
-          </a:fontRef>
-        </p:style>
-        <p:txBody>
-          <a:bodyPr rtlCol="0" anchor="ctr"/>
-          <a:lstStyle/>
-          <a:p>
-            <a:pPr algn="ctr">
-              <a:defRPr sz="1400" b="1">
-                <a:solidFill>
-                  <a:srgbClr val="2B7A43"/>
-                </a:solidFill>
-                <a:latin typeface="Aptos"/>
-              </a:defRPr>
-            </a:pPr>
-            <a:r>
-              <a:t>A high max|Ku| is a real signature of a large die capacitance driven fast, not a corrupted extraction.</a:t>
-            </a:r>
-          </a:p>
-        </p:txBody>
-      </p:sp>
-    </p:spTree>
-  </p:cSld>
-  <p:clrMapOvr>
-    <a:masterClrMapping/>
-  </p:clrMapOvr>
-</p:sld>
-</file>
-
-<file path=ppt/slides/slide15.xml><?xml version="1.0" encoding="utf-8"?>
-<p:sld xmlns:a="http://schemas.openxmlformats.org/drawingml/2006/main" xmlns:p="http://schemas.openxmlformats.org/presentationml/2006/main" xmlns:r="http://schemas.openxmlformats.org/officeDocument/2006/relationships">
-  <p:cSld>
-    <p:spTree>
-      <p:nvGrpSpPr>
-        <p:cNvPr id="1" name=""/>
-        <p:cNvGrpSpPr/>
-        <p:nvPr/>
-      </p:nvGrpSpPr>
-      <p:grpSpPr/>
-      <p:sp>
-        <p:nvSpPr>
-          <p:cNvPr id="2" name="Title 1"/>
-          <p:cNvSpPr>
-            <a:spLocks noGrp="1"/>
-          </p:cNvSpPr>
-          <p:nvPr>
-            <p:ph type="title"/>
-          </p:nvPr>
-        </p:nvSpPr>
-        <p:spPr/>
-        <p:txBody>
-          <a:bodyPr/>
-          <a:lstStyle/>
-          <a:p>
-            <a:pPr algn="l">
-              <a:defRPr sz="2700" b="0">
-                <a:solidFill>
-                  <a:srgbClr val="000000"/>
-                </a:solidFill>
-                <a:latin typeface="Times New Roman"/>
-              </a:defRPr>
-            </a:pPr>
-            <a:r>
-              <a:t>New buffers, and what they are for</a:t>
-            </a:r>
-          </a:p>
-        </p:txBody>
-      </p:sp>
-      <p:sp>
-        <p:nvSpPr>
-          <p:cNvPr id="3" name="TextBox 2"/>
+              <a:t>SUMMARY</a:t>
+            </a:r>
+          </a:p>
+        </p:txBody>
+      </p:sp>
+      <p:sp>
+        <p:nvSpPr>
+          <p:cNvPr id="4" name="TextBox 3"/>
           <p:cNvSpPr txBox="1"/>
           <p:nvPr/>
         </p:nvSpPr>
         <p:spPr>
           <a:xfrm>
-            <a:off x="9372600" y="109728"/>
-            <a:ext cx="2148840" cy="228600"/>
+            <a:off x="640080" y="1188720"/>
+            <a:ext cx="10972800" cy="457200"/>
           </a:xfrm>
           <a:prstGeom prst="rect">
             <a:avLst/>
@@ -4373,30 +4217,30 @@
           </a:bodyPr>
           <a:lstStyle/>
           <a:p>
-            <a:pPr algn="r">
-              <a:defRPr sz="950" b="1">
-                <a:solidFill>
-                  <a:srgbClr val="666C68"/>
+            <a:pPr algn="l">
+              <a:defRPr sz="1700" b="0">
+                <a:solidFill>
+                  <a:srgbClr val="191F1C"/>
                 </a:solidFill>
                 <a:latin typeface="Aptos"/>
               </a:defRPr>
             </a:pPr>
             <a:r>
-              <a:t>WHAT SHOULD CHANGE</a:t>
-            </a:r>
-          </a:p>
-        </p:txBody>
-      </p:sp>
-      <p:sp>
-        <p:nvSpPr>
-          <p:cNvPr id="4" name="TextBox 3"/>
+              <a:t>Settled:</a:t>
+            </a:r>
+          </a:p>
+        </p:txBody>
+      </p:sp>
+      <p:sp>
+        <p:nvSpPr>
+          <p:cNvPr id="5" name="TextBox 4"/>
           <p:cNvSpPr txBox="1"/>
           <p:nvPr/>
         </p:nvSpPr>
         <p:spPr>
           <a:xfrm>
-            <a:off x="640080" y="1280160"/>
-            <a:ext cx="10972800" cy="2560320"/>
+            <a:off x="640080" y="1737360"/>
+            <a:ext cx="11064240" cy="2743200"/>
           </a:xfrm>
           <a:prstGeom prst="rect">
             <a:avLst/>
@@ -4411,7 +4255,7 @@
           <a:p>
             <a:pPr>
               <a:spcAft>
-                <a:spcPts val="700"/>
+                <a:spcPts val="300"/>
               </a:spcAft>
               <a:defRPr sz="1700">
                 <a:solidFill>
@@ -4421,13 +4265,13 @@
               </a:defRPr>
             </a:pPr>
             <a:r>
-              <a:t>•  Nine variants of inv_chain and ex2 built in HSPICE with the real transistor library: slower predriver, halved output devices, skewed PMOS, Miller caps removed, plus an open-drain build.</a:t>
+              <a:t>•  C_comp is handled correctly</a:t>
             </a:r>
           </a:p>
           <a:p>
             <a:pPr>
               <a:spcAft>
-                <a:spcPts val="700"/>
+                <a:spcPts val="300"/>
               </a:spcAft>
               <a:defRPr sz="1700">
                 <a:solidFill>
@@ -4437,13 +4281,13 @@
               </a:defRPr>
             </a:pPr>
             <a:r>
-              <a:t>•  The point is to test whether what we learned on three buffers holds across different silicon.</a:t>
+              <a:t>•  the SPICE engine is not a confounder</a:t>
             </a:r>
           </a:p>
           <a:p>
             <a:pPr>
               <a:spcAft>
-                <a:spcPts val="700"/>
+                <a:spcPts val="300"/>
               </a:spcAft>
               <a:defRPr sz="1700">
                 <a:solidFill>
@@ -4453,21 +4297,37 @@
               </a:defRPr>
             </a:pPr>
             <a:r>
-              <a:t>•  Same characterisation, same stress axis, so the comparison is like for like.</a:t>
-            </a:r>
-          </a:p>
-        </p:txBody>
-      </p:sp>
-      <p:sp>
-        <p:nvSpPr>
-          <p:cNvPr id="5" name="TextBox 4"/>
+              <a:t>•  our model reproduces its own golden waveforms</a:t>
+            </a:r>
+          </a:p>
+          <a:p>
+            <a:pPr>
+              <a:spcAft>
+                <a:spcPts val="300"/>
+              </a:spcAft>
+              <a:defRPr sz="1700">
+                <a:solidFill>
+                  <a:srgbClr val="191F1C"/>
+                </a:solidFill>
+                <a:latin typeface="Aptos"/>
+              </a:defRPr>
+            </a:pPr>
+            <a:r>
+              <a:t>•  delay_cmd removes the settled offset</a:t>
+            </a:r>
+          </a:p>
+        </p:txBody>
+      </p:sp>
+      <p:sp>
+        <p:nvSpPr>
+          <p:cNvPr id="6" name="TextBox 5"/>
           <p:cNvSpPr txBox="1"/>
           <p:nvPr/>
         </p:nvSpPr>
         <p:spPr>
           <a:xfrm>
-            <a:off x="640080" y="4114800"/>
-            <a:ext cx="10972800" cy="914400"/>
+            <a:off x="640080" y="3840480"/>
+            <a:ext cx="10972800" cy="457200"/>
           </a:xfrm>
           <a:prstGeom prst="rect">
             <a:avLst/>
@@ -4489,366 +4349,21 @@
               </a:defRPr>
             </a:pPr>
             <a:r>
-              <a:t>Running now: the same 90-50% stress axis on all nine, with Ku and Kd solved from the transistor for every case.</a:t>
-            </a:r>
-          </a:p>
-        </p:txBody>
-      </p:sp>
-      <p:sp>
-        <p:nvSpPr>
-          <p:cNvPr id="6" name="Rectangle 5"/>
-          <p:cNvSpPr/>
-          <p:nvPr/>
-        </p:nvSpPr>
-        <p:spPr>
-          <a:xfrm>
-            <a:off x="384048" y="6062472"/>
-            <a:ext cx="11109960" cy="393192"/>
-          </a:xfrm>
-          <a:prstGeom prst="rect">
-            <a:avLst/>
-          </a:prstGeom>
-          <a:solidFill>
-            <a:srgbClr val="F1F8F2"/>
-          </a:solidFill>
-          <a:ln>
-            <a:solidFill>
-              <a:srgbClr val="F1F8F2"/>
-            </a:solidFill>
-          </a:ln>
-        </p:spPr>
-        <p:style>
-          <a:lnRef idx="1">
-            <a:schemeClr val="accent1"/>
-          </a:lnRef>
-          <a:fillRef idx="3">
-            <a:schemeClr val="accent1"/>
-          </a:fillRef>
-          <a:effectRef idx="2">
-            <a:schemeClr val="accent1"/>
-          </a:effectRef>
-          <a:fontRef idx="minor">
-            <a:schemeClr val="lt1"/>
-          </a:fontRef>
-        </p:style>
-        <p:txBody>
-          <a:bodyPr rtlCol="0" anchor="ctr"/>
-          <a:lstStyle/>
-          <a:p>
-            <a:pPr algn="ctr">
-              <a:defRPr sz="1400" b="1">
-                <a:solidFill>
-                  <a:srgbClr val="2B7A43"/>
-                </a:solidFill>
-                <a:latin typeface="Aptos"/>
-              </a:defRPr>
-            </a:pPr>
-            <a:r>
-              <a:t>Ku and Kd show what the pad trace hides.</a:t>
-            </a:r>
-          </a:p>
-        </p:txBody>
-      </p:sp>
-    </p:spTree>
-  </p:cSld>
-  <p:clrMapOvr>
-    <a:masterClrMapping/>
-  </p:clrMapOvr>
-</p:sld>
-</file>
-
-<file path=ppt/slides/slide16.xml><?xml version="1.0" encoding="utf-8"?>
-<p:sld xmlns:a="http://schemas.openxmlformats.org/drawingml/2006/main" xmlns:p="http://schemas.openxmlformats.org/presentationml/2006/main" xmlns:r="http://schemas.openxmlformats.org/officeDocument/2006/relationships">
-  <p:cSld>
-    <p:spTree>
-      <p:nvGrpSpPr>
-        <p:cNvPr id="1" name=""/>
-        <p:cNvGrpSpPr/>
-        <p:nvPr/>
-      </p:nvGrpSpPr>
-      <p:grpSpPr/>
-      <p:sp>
-        <p:nvSpPr>
-          <p:cNvPr id="2" name="Title 1"/>
-          <p:cNvSpPr>
-            <a:spLocks noGrp="1"/>
-          </p:cNvSpPr>
-          <p:nvPr>
-            <p:ph type="title"/>
-          </p:nvPr>
-        </p:nvSpPr>
-        <p:spPr/>
-        <p:txBody>
-          <a:bodyPr/>
-          <a:lstStyle/>
-          <a:p>
-            <a:pPr algn="l">
-              <a:defRPr sz="2700" b="0">
-                <a:solidFill>
-                  <a:srgbClr val="000000"/>
-                </a:solidFill>
-                <a:latin typeface="Times New Roman"/>
-              </a:defRPr>
-            </a:pPr>
-            <a:r>
-              <a:t>The coefficients under stress</a:t>
-            </a:r>
-          </a:p>
-        </p:txBody>
-      </p:sp>
-      <p:sp>
-        <p:nvSpPr>
-          <p:cNvPr id="3" name="TextBox 2"/>
+              <a:t>Open:</a:t>
+            </a:r>
+          </a:p>
+        </p:txBody>
+      </p:sp>
+      <p:sp>
+        <p:nvSpPr>
+          <p:cNvPr id="7" name="TextBox 6"/>
           <p:cNvSpPr txBox="1"/>
           <p:nvPr/>
         </p:nvSpPr>
         <p:spPr>
           <a:xfrm>
-            <a:off x="9372600" y="109728"/>
-            <a:ext cx="2148840" cy="228600"/>
-          </a:xfrm>
-          <a:prstGeom prst="rect">
-            <a:avLst/>
-          </a:prstGeom>
-          <a:noFill/>
-        </p:spPr>
-        <p:txBody>
-          <a:bodyPr wrap="square" lIns="45720" rIns="45720" anchor="t">
-            <a:spAutoFit/>
-          </a:bodyPr>
-          <a:lstStyle/>
-          <a:p>
-            <a:pPr algn="r">
-              <a:defRPr sz="950" b="1">
-                <a:solidFill>
-                  <a:srgbClr val="666C68"/>
-                </a:solidFill>
-                <a:latin typeface="Aptos"/>
-              </a:defRPr>
-            </a:pPr>
-            <a:r>
-              <a:t>WHAT SHOULD CHANGE</a:t>
-            </a:r>
-          </a:p>
-        </p:txBody>
-      </p:sp>
-      <p:sp>
-        <p:nvSpPr>
-          <p:cNvPr id="4" name="Rectangle 3"/>
-          <p:cNvSpPr/>
-          <p:nvPr/>
-        </p:nvSpPr>
-        <p:spPr>
-          <a:xfrm>
-            <a:off x="475488" y="1143000"/>
-            <a:ext cx="11210544" cy="4809743"/>
-          </a:xfrm>
-          <a:prstGeom prst="rect">
-            <a:avLst/>
-          </a:prstGeom>
-          <a:solidFill>
-            <a:srgbClr val="FFFFFF"/>
-          </a:solidFill>
-          <a:ln w="10160">
-            <a:solidFill>
-              <a:srgbClr val="CBD0CC"/>
-            </a:solidFill>
-          </a:ln>
-        </p:spPr>
-        <p:style>
-          <a:lnRef idx="1">
-            <a:schemeClr val="accent1"/>
-          </a:lnRef>
-          <a:fillRef idx="3">
-            <a:schemeClr val="accent1"/>
-          </a:fillRef>
-          <a:effectRef idx="2">
-            <a:schemeClr val="accent1"/>
-          </a:effectRef>
-          <a:fontRef idx="minor">
-            <a:schemeClr val="lt1"/>
-          </a:fontRef>
-        </p:style>
-        <p:txBody>
-          <a:bodyPr rtlCol="0" anchor="ctr"/>
-          <a:lstStyle/>
-          <a:p>
-            <a:pPr algn="ctr"/>
-          </a:p>
-        </p:txBody>
-      </p:sp>
-      <p:pic>
-        <p:nvPicPr>
-          <p:cNvPr id="5" name="Picture 4" descr="variant_kukd.png"/>
-          <p:cNvPicPr>
-            <a:picLocks noChangeAspect="1"/>
-          </p:cNvPicPr>
-          <p:nvPr/>
-        </p:nvPicPr>
-        <p:blipFill>
-          <a:blip r:embed="rId2"/>
-          <a:stretch>
-            <a:fillRect/>
-          </a:stretch>
-        </p:blipFill>
-        <p:spPr>
-          <a:xfrm>
-            <a:off x="502920" y="1170432"/>
-            <a:ext cx="11155680" cy="4754879"/>
-          </a:xfrm>
-          <a:prstGeom prst="rect">
-            <a:avLst/>
-          </a:prstGeom>
-        </p:spPr>
-      </p:pic>
-      <p:sp>
-        <p:nvSpPr>
-          <p:cNvPr id="6" name="Rectangle 5"/>
-          <p:cNvSpPr/>
-          <p:nvPr/>
-        </p:nvSpPr>
-        <p:spPr>
-          <a:xfrm>
-            <a:off x="384048" y="6062472"/>
-            <a:ext cx="11109960" cy="393192"/>
-          </a:xfrm>
-          <a:prstGeom prst="rect">
-            <a:avLst/>
-          </a:prstGeom>
-          <a:solidFill>
-            <a:srgbClr val="F1F8F2"/>
-          </a:solidFill>
-          <a:ln>
-            <a:solidFill>
-              <a:srgbClr val="F1F8F2"/>
-            </a:solidFill>
-          </a:ln>
-        </p:spPr>
-        <p:style>
-          <a:lnRef idx="1">
-            <a:schemeClr val="accent1"/>
-          </a:lnRef>
-          <a:fillRef idx="3">
-            <a:schemeClr val="accent1"/>
-          </a:fillRef>
-          <a:effectRef idx="2">
-            <a:schemeClr val="accent1"/>
-          </a:effectRef>
-          <a:fontRef idx="minor">
-            <a:schemeClr val="lt1"/>
-          </a:fontRef>
-        </p:style>
-        <p:txBody>
-          <a:bodyPr rtlCol="0" anchor="ctr"/>
-          <a:lstStyle/>
-          <a:p>
-            <a:pPr algn="ctr">
-              <a:defRPr sz="1400" b="1">
-                <a:solidFill>
-                  <a:srgbClr val="2B7A43"/>
-                </a:solidFill>
-                <a:latin typeface="Aptos"/>
-              </a:defRPr>
-            </a:pPr>
-            <a:r>
-              <a:t>The gate-state build starts moving before the transistor does. Visible in Ku, invisible in the pad.</a:t>
-            </a:r>
-          </a:p>
-        </p:txBody>
-      </p:sp>
-    </p:spTree>
-  </p:cSld>
-  <p:clrMapOvr>
-    <a:masterClrMapping/>
-  </p:clrMapOvr>
-</p:sld>
-</file>
-
-<file path=ppt/slides/slide17.xml><?xml version="1.0" encoding="utf-8"?>
-<p:sld xmlns:a="http://schemas.openxmlformats.org/drawingml/2006/main" xmlns:p="http://schemas.openxmlformats.org/presentationml/2006/main" xmlns:r="http://schemas.openxmlformats.org/officeDocument/2006/relationships">
-  <p:cSld>
-    <p:spTree>
-      <p:nvGrpSpPr>
-        <p:cNvPr id="1" name=""/>
-        <p:cNvGrpSpPr/>
-        <p:nvPr/>
-      </p:nvGrpSpPr>
-      <p:grpSpPr/>
-      <p:sp>
-        <p:nvSpPr>
-          <p:cNvPr id="2" name="Title 1"/>
-          <p:cNvSpPr>
-            <a:spLocks noGrp="1"/>
-          </p:cNvSpPr>
-          <p:nvPr>
-            <p:ph type="title"/>
-          </p:nvPr>
-        </p:nvSpPr>
-        <p:spPr/>
-        <p:txBody>
-          <a:bodyPr/>
-          <a:lstStyle/>
-          <a:p>
-            <a:pPr algn="l">
-              <a:defRPr sz="2700" b="0">
-                <a:solidFill>
-                  <a:srgbClr val="000000"/>
-                </a:solidFill>
-                <a:latin typeface="Times New Roman"/>
-              </a:defRPr>
-            </a:pPr>
-            <a:r>
-              <a:t>Where this leaves us</a:t>
-            </a:r>
-          </a:p>
-        </p:txBody>
-      </p:sp>
-      <p:sp>
-        <p:nvSpPr>
-          <p:cNvPr id="3" name="TextBox 2"/>
-          <p:cNvSpPr txBox="1"/>
-          <p:nvPr/>
-        </p:nvSpPr>
-        <p:spPr>
-          <a:xfrm>
-            <a:off x="9372600" y="109728"/>
-            <a:ext cx="2148840" cy="228600"/>
-          </a:xfrm>
-          <a:prstGeom prst="rect">
-            <a:avLst/>
-          </a:prstGeom>
-          <a:noFill/>
-        </p:spPr>
-        <p:txBody>
-          <a:bodyPr wrap="square" lIns="45720" rIns="45720" anchor="t">
-            <a:spAutoFit/>
-          </a:bodyPr>
-          <a:lstStyle/>
-          <a:p>
-            <a:pPr algn="r">
-              <a:defRPr sz="950" b="1">
-                <a:solidFill>
-                  <a:srgbClr val="666C68"/>
-                </a:solidFill>
-                <a:latin typeface="Aptos"/>
-              </a:defRPr>
-            </a:pPr>
-            <a:r>
-              <a:t>SUMMARY</a:t>
-            </a:r>
-          </a:p>
-        </p:txBody>
-      </p:sp>
-      <p:sp>
-        <p:nvSpPr>
-          <p:cNvPr id="4" name="TextBox 3"/>
-          <p:cNvSpPr txBox="1"/>
-          <p:nvPr/>
-        </p:nvSpPr>
-        <p:spPr>
-          <a:xfrm>
-            <a:off x="640080" y="1280160"/>
-            <a:ext cx="10972800" cy="2743200"/>
+            <a:off x="640080" y="4389120"/>
+            <a:ext cx="11064240" cy="1371600"/>
           </a:xfrm>
           <a:prstGeom prst="rect">
             <a:avLst/>
@@ -4863,7 +4378,7 @@
           <a:p>
             <a:pPr>
               <a:spcAft>
-                <a:spcPts val="700"/>
+                <a:spcPts val="300"/>
               </a:spcAft>
               <a:defRPr sz="1700">
                 <a:solidFill>
@@ -4873,13 +4388,13 @@
               </a:defRPr>
             </a:pPr>
             <a:r>
-              <a:t>•  Settled: C_comp is right, the engine is not a confounder, pybis reproduces its own golden waveforms, and delay_cmd fixes the offset.</a:t>
+              <a:t>•  the timing shift has no candidate mechanism, and grows with truncation</a:t>
             </a:r>
           </a:p>
           <a:p>
             <a:pPr>
               <a:spcAft>
-                <a:spcPts val="700"/>
+                <a:spcPts val="300"/>
               </a:spcAft>
               <a:defRPr sz="1700">
                 <a:solidFill>
@@ -4889,114 +4404,7 @@
               </a:defRPr>
             </a:pPr>
             <a:r>
-              <a:t>•  Open: the timing shift has no candidate mechanism, and it grows with truncation on every buffer tried.</a:t>
-            </a:r>
-          </a:p>
-          <a:p>
-            <a:pPr>
-              <a:spcAft>
-                <a:spcPts val="700"/>
-              </a:spcAft>
-              <a:defRPr sz="1700">
-                <a:solidFill>
-                  <a:srgbClr val="191F1C"/>
-                </a:solidFill>
-                <a:latin typeface="Aptos"/>
-              </a:defRPr>
-            </a:pPr>
-            <a:r>
-              <a:t>•  Open: the 1.25 max|Ku| cap needs replacing before it rejects more good models.</a:t>
-            </a:r>
-          </a:p>
-        </p:txBody>
-      </p:sp>
-      <p:sp>
-        <p:nvSpPr>
-          <p:cNvPr id="5" name="TextBox 4"/>
-          <p:cNvSpPr txBox="1"/>
-          <p:nvPr/>
-        </p:nvSpPr>
-        <p:spPr>
-          <a:xfrm>
-            <a:off x="640080" y="3200400"/>
-            <a:ext cx="10972800" cy="1280160"/>
-          </a:xfrm>
-          <a:prstGeom prst="rect">
-            <a:avLst/>
-          </a:prstGeom>
-          <a:noFill/>
-        </p:spPr>
-        <p:txBody>
-          <a:bodyPr wrap="square" lIns="45720" rIns="45720" anchor="t">
-            <a:spAutoFit/>
-          </a:bodyPr>
-          <a:lstStyle/>
-          <a:p>
-            <a:pPr algn="l">
-              <a:defRPr sz="1700" b="0">
-                <a:solidFill>
-                  <a:srgbClr val="191F1C"/>
-                </a:solidFill>
-                <a:latin typeface="Aptos"/>
-              </a:defRPr>
-            </a:pPr>
-            <a:r>
-              <a:t>Two rules worth not re-learning: any bench for this model must start with a real edge, never a held level. And ngspice must be converged before drawing any conclusion from it.</a:t>
-            </a:r>
-          </a:p>
-        </p:txBody>
-      </p:sp>
-      <p:sp>
-        <p:nvSpPr>
-          <p:cNvPr id="6" name="Rectangle 5"/>
-          <p:cNvSpPr/>
-          <p:nvPr/>
-        </p:nvSpPr>
-        <p:spPr>
-          <a:xfrm>
-            <a:off x="384048" y="6062472"/>
-            <a:ext cx="11109960" cy="393192"/>
-          </a:xfrm>
-          <a:prstGeom prst="rect">
-            <a:avLst/>
-          </a:prstGeom>
-          <a:solidFill>
-            <a:srgbClr val="F1F8F2"/>
-          </a:solidFill>
-          <a:ln>
-            <a:solidFill>
-              <a:srgbClr val="F1F8F2"/>
-            </a:solidFill>
-          </a:ln>
-        </p:spPr>
-        <p:style>
-          <a:lnRef idx="1">
-            <a:schemeClr val="accent1"/>
-          </a:lnRef>
-          <a:fillRef idx="3">
-            <a:schemeClr val="accent1"/>
-          </a:fillRef>
-          <a:effectRef idx="2">
-            <a:schemeClr val="accent1"/>
-          </a:effectRef>
-          <a:fontRef idx="minor">
-            <a:schemeClr val="lt1"/>
-          </a:fontRef>
-        </p:style>
-        <p:txBody>
-          <a:bodyPr rtlCol="0" anchor="ctr"/>
-          <a:lstStyle/>
-          <a:p>
-            <a:pPr algn="ctr">
-              <a:defRPr sz="1400" b="1">
-                <a:solidFill>
-                  <a:srgbClr val="2B7A43"/>
-                </a:solidFill>
-                <a:latin typeface="Aptos"/>
-              </a:defRPr>
-            </a:pPr>
-            <a:r>
-              <a:t>The offset is solved. The timing shift is the open one, and it is where the nine variants will land.</a:t>
+              <a:t>•  the 1.25 max|Ku| cap needs replacing with a within-buffer outlier test</a:t>
             </a:r>
           </a:p>
         </p:txBody>
@@ -5043,7 +4451,7 @@
               </a:defRPr>
             </a:pPr>
             <a:r>
-              <a:t>What we are trying to do</a:t>
+              <a:t>What we are comparing</a:t>
             </a:r>
           </a:p>
         </p:txBody>
@@ -5092,8 +4500,8 @@
         </p:nvSpPr>
         <p:spPr>
           <a:xfrm>
-            <a:off x="640080" y="1280160"/>
-            <a:ext cx="5394960" cy="2011680"/>
+            <a:off x="640080" y="1170432"/>
+            <a:ext cx="11064240" cy="2057400"/>
           </a:xfrm>
           <a:prstGeom prst="rect">
             <a:avLst/>
@@ -5108,7 +4516,7 @@
           <a:p>
             <a:pPr>
               <a:spcAft>
-                <a:spcPts val="700"/>
+                <a:spcPts val="300"/>
               </a:spcAft>
               <a:defRPr sz="1700">
                 <a:solidFill>
@@ -5118,13 +4526,13 @@
               </a:defRPr>
             </a:pPr>
             <a:r>
-              <a:t>•  The transistor netlist in HSPICE is ground truth.</a:t>
+              <a:t>•  HSPICE transistor — ground truth</a:t>
             </a:r>
           </a:p>
           <a:p>
             <a:pPr>
               <a:spcAft>
-                <a:spcPts val="700"/>
+                <a:spcPts val="300"/>
               </a:spcAft>
               <a:defRPr sz="1700">
                 <a:solidFill>
@@ -5134,13 +4542,13 @@
               </a:defRPr>
             </a:pPr>
             <a:r>
-              <a:t>•  Native IBIS is the bar to beat, not the target.</a:t>
+              <a:t>•  HSPICE native IBIS — the bar to beat, not the target</a:t>
             </a:r>
           </a:p>
           <a:p>
             <a:pPr>
               <a:spcAft>
-                <a:spcPts val="700"/>
+                <a:spcPts val="300"/>
               </a:spcAft>
               <a:defRPr sz="1700">
                 <a:solidFill>
@@ -5150,7 +4558,7 @@
               </a:defRPr>
             </a:pPr>
             <a:r>
-              <a:t>•  Everything here is measured against the transistor.</a:t>
+              <a:t>•  Our IBIS model in ngspice — measured against the transistor</a:t>
             </a:r>
           </a:p>
         </p:txBody>
@@ -5163,8 +4571,8 @@
         </p:nvSpPr>
         <p:spPr>
           <a:xfrm>
-            <a:off x="640080" y="3017520"/>
-            <a:ext cx="10972800" cy="1097280"/>
+            <a:off x="640080" y="2651760"/>
+            <a:ext cx="10972800" cy="457200"/>
           </a:xfrm>
           <a:prstGeom prst="rect">
             <a:avLst/>
@@ -5186,62 +4594,114 @@
               </a:defRPr>
             </a:pPr>
             <a:r>
-              <a:t>Two things move in any comparison — the IBIS implementation and the SPICE engine. We separated them, and the engine is not the source.</a:t>
-            </a:r>
-          </a:p>
-        </p:txBody>
-      </p:sp>
-      <p:sp>
-        <p:nvSpPr>
-          <p:cNvPr id="6" name="Rectangle 5"/>
-          <p:cNvSpPr/>
+              <a:t>Falling 50% crossing on io_buf at full swing, later than the transistor:</a:t>
+            </a:r>
+          </a:p>
+        </p:txBody>
+      </p:sp>
+      <p:sp>
+        <p:nvSpPr>
+          <p:cNvPr id="6" name="TextBox 5"/>
+          <p:cNvSpPr txBox="1"/>
           <p:nvPr/>
         </p:nvSpPr>
         <p:spPr>
           <a:xfrm>
-            <a:off x="384048" y="6062472"/>
-            <a:ext cx="11109960" cy="393192"/>
-          </a:xfrm>
-          <a:prstGeom prst="rect">
-            <a:avLst/>
-          </a:prstGeom>
-          <a:solidFill>
-            <a:srgbClr val="F1F8F2"/>
-          </a:solidFill>
-          <a:ln>
-            <a:solidFill>
-              <a:srgbClr val="F1F8F2"/>
-            </a:solidFill>
-          </a:ln>
-        </p:spPr>
-        <p:style>
-          <a:lnRef idx="1">
-            <a:schemeClr val="accent1"/>
-          </a:lnRef>
-          <a:fillRef idx="3">
-            <a:schemeClr val="accent1"/>
-          </a:fillRef>
-          <a:effectRef idx="2">
-            <a:schemeClr val="accent1"/>
-          </a:effectRef>
-          <a:fontRef idx="minor">
-            <a:schemeClr val="lt1"/>
-          </a:fontRef>
-        </p:style>
-        <p:txBody>
-          <a:bodyPr rtlCol="0" anchor="ctr"/>
-          <a:lstStyle/>
-          <a:p>
-            <a:pPr algn="ctr">
-              <a:defRPr sz="1400" b="1">
-                <a:solidFill>
-                  <a:srgbClr val="2B7A43"/>
+            <a:off x="640080" y="3200400"/>
+            <a:ext cx="11064240" cy="2057400"/>
+          </a:xfrm>
+          <a:prstGeom prst="rect">
+            <a:avLst/>
+          </a:prstGeom>
+          <a:noFill/>
+        </p:spPr>
+        <p:txBody>
+          <a:bodyPr wrap="square" lIns="73152" rIns="36576" tIns="36576" bIns="36576">
+            <a:spAutoFit/>
+          </a:bodyPr>
+          <a:lstStyle/>
+          <a:p>
+            <a:pPr>
+              <a:spcAft>
+                <a:spcPts val="300"/>
+              </a:spcAft>
+              <a:defRPr sz="1700">
+                <a:solidFill>
+                  <a:srgbClr val="191F1C"/>
                 </a:solidFill>
                 <a:latin typeface="Aptos"/>
               </a:defRPr>
             </a:pPr>
             <a:r>
-              <a:t>We are near the format's floor on clean edges. The distance worth attacking is under stress.</a:t>
+              <a:t>•  native IBIS          +34.6 ps</a:t>
+            </a:r>
+          </a:p>
+          <a:p>
+            <a:pPr>
+              <a:spcAft>
+                <a:spcPts val="300"/>
+              </a:spcAft>
+              <a:defRPr sz="1700">
+                <a:solidFill>
+                  <a:srgbClr val="191F1C"/>
+                </a:solidFill>
+                <a:latin typeface="Aptos"/>
+              </a:defRPr>
+            </a:pPr>
+            <a:r>
+              <a:t>•  our model, stock     +38.4 ps</a:t>
+            </a:r>
+          </a:p>
+          <a:p>
+            <a:pPr>
+              <a:spcAft>
+                <a:spcPts val="300"/>
+              </a:spcAft>
+              <a:defRPr sz="1700">
+                <a:solidFill>
+                  <a:srgbClr val="191F1C"/>
+                </a:solidFill>
+                <a:latin typeface="Aptos"/>
+              </a:defRPr>
+            </a:pPr>
+            <a:r>
+              <a:t>•  our model, gate-state  +43.5 ps</a:t>
+            </a:r>
+          </a:p>
+        </p:txBody>
+      </p:sp>
+      <p:sp>
+        <p:nvSpPr>
+          <p:cNvPr id="7" name="TextBox 6"/>
+          <p:cNvSpPr txBox="1"/>
+          <p:nvPr/>
+        </p:nvSpPr>
+        <p:spPr>
+          <a:xfrm>
+            <a:off x="640080" y="5029200"/>
+            <a:ext cx="10972800" cy="731520"/>
+          </a:xfrm>
+          <a:prstGeom prst="rect">
+            <a:avLst/>
+          </a:prstGeom>
+          <a:noFill/>
+        </p:spPr>
+        <p:txBody>
+          <a:bodyPr wrap="square" lIns="45720" rIns="45720" anchor="t">
+            <a:spAutoFit/>
+          </a:bodyPr>
+          <a:lstStyle/>
+          <a:p>
+            <a:pPr algn="l">
+              <a:defRPr sz="1700" b="0">
+                <a:solidFill>
+                  <a:srgbClr val="191F1C"/>
+                </a:solidFill>
+                <a:latin typeface="Aptos"/>
+              </a:defRPr>
+            </a:pPr>
+            <a:r>
+              <a:t>So the IBIS format itself costs about 35 ps, which native pays too. Our command layer costs about 5 ps on top.</a:t>
             </a:r>
           </a:p>
         </p:txBody>
@@ -5288,7 +4748,7 @@
               </a:defRPr>
             </a:pPr>
             <a:r>
-              <a:t>Where the error actually comes from</a:t>
+              <a:t>At full swing all three agree</a:t>
             </a:r>
           </a:p>
         </p:txBody>
@@ -5331,14 +4791,69 @@
       </p:sp>
       <p:sp>
         <p:nvSpPr>
-          <p:cNvPr id="4" name="Rectangle 3"/>
+          <p:cNvPr id="4" name="TextBox 3"/>
+          <p:cNvSpPr txBox="1"/>
+          <p:nvPr/>
+        </p:nvSpPr>
+        <p:spPr>
+          <a:xfrm>
+            <a:off x="640080" y="1170432"/>
+            <a:ext cx="11064240" cy="1371600"/>
+          </a:xfrm>
+          <a:prstGeom prst="rect">
+            <a:avLst/>
+          </a:prstGeom>
+          <a:noFill/>
+        </p:spPr>
+        <p:txBody>
+          <a:bodyPr wrap="square" lIns="73152" rIns="36576" tIns="36576" bIns="36576">
+            <a:spAutoFit/>
+          </a:bodyPr>
+          <a:lstStyle/>
+          <a:p>
+            <a:pPr>
+              <a:spcAft>
+                <a:spcPts val="300"/>
+              </a:spcAft>
+              <a:defRPr sz="1700">
+                <a:solidFill>
+                  <a:srgbClr val="191F1C"/>
+                </a:solidFill>
+                <a:latin typeface="Aptos"/>
+              </a:defRPr>
+            </a:pPr>
+            <a:r>
+              <a:t>•  The three curves sit on top of each other through the transition.</a:t>
+            </a:r>
+          </a:p>
+          <a:p>
+            <a:pPr>
+              <a:spcAft>
+                <a:spcPts val="300"/>
+              </a:spcAft>
+              <a:defRPr sz="1700">
+                <a:solidFill>
+                  <a:srgbClr val="191F1C"/>
+                </a:solidFill>
+                <a:latin typeface="Aptos"/>
+              </a:defRPr>
+            </a:pPr>
+            <a:r>
+              <a:t>•  What is left on the falling edge is the format's ~35 ps, not our layer.</a:t>
+            </a:r>
+          </a:p>
+        </p:txBody>
+      </p:sp>
+      <p:sp>
+        <p:nvSpPr>
+          <p:cNvPr id="5" name="Rectangle 4"/>
           <p:cNvSpPr/>
           <p:nvPr/>
         </p:nvSpPr>
         <p:spPr>
           <a:xfrm>
-            <a:off x="475488" y="1207008"/>
-            <a:ext cx="11210544" cy="4535423"/>
+            <a:off x="743653" y="1819656"/>
+            <a:ext cx="10674213" cy="4581144"/>
           </a:xfrm>
           <a:prstGeom prst="rect">
             <a:avLst/>
@@ -5376,7 +4891,7 @@
       </p:sp>
       <p:pic>
         <p:nvPicPr>
-          <p:cNvPr id="5" name="Picture 4" descr="error_budget.png"/>
+          <p:cNvPr id="6" name="Picture 5" descr="clean_edge.png"/>
           <p:cNvPicPr>
             <a:picLocks noChangeAspect="1"/>
           </p:cNvPicPr>
@@ -5390,69 +4905,14 @@
         </p:blipFill>
         <p:spPr>
           <a:xfrm>
-            <a:off x="502920" y="1234440"/>
-            <a:ext cx="11155680" cy="4480559"/>
+            <a:off x="771085" y="1847088"/>
+            <a:ext cx="10619349" cy="4526280"/>
           </a:xfrm>
           <a:prstGeom prst="rect">
             <a:avLst/>
           </a:prstGeom>
         </p:spPr>
       </p:pic>
-      <p:sp>
-        <p:nvSpPr>
-          <p:cNvPr id="6" name="Rectangle 5"/>
-          <p:cNvSpPr/>
-          <p:nvPr/>
-        </p:nvSpPr>
-        <p:spPr>
-          <a:xfrm>
-            <a:off x="384048" y="6062472"/>
-            <a:ext cx="11109960" cy="393192"/>
-          </a:xfrm>
-          <a:prstGeom prst="rect">
-            <a:avLst/>
-          </a:prstGeom>
-          <a:solidFill>
-            <a:srgbClr val="F1F8F2"/>
-          </a:solidFill>
-          <a:ln>
-            <a:solidFill>
-              <a:srgbClr val="F1F8F2"/>
-            </a:solidFill>
-          </a:ln>
-        </p:spPr>
-        <p:style>
-          <a:lnRef idx="1">
-            <a:schemeClr val="accent1"/>
-          </a:lnRef>
-          <a:fillRef idx="3">
-            <a:schemeClr val="accent1"/>
-          </a:fillRef>
-          <a:effectRef idx="2">
-            <a:schemeClr val="accent1"/>
-          </a:effectRef>
-          <a:fontRef idx="minor">
-            <a:schemeClr val="lt1"/>
-          </a:fontRef>
-        </p:style>
-        <p:txBody>
-          <a:bodyPr rtlCol="0" anchor="ctr"/>
-          <a:lstStyle/>
-          <a:p>
-            <a:pPr algn="ctr">
-              <a:defRPr sz="1400" b="1">
-                <a:solidFill>
-                  <a:srgbClr val="2B7A43"/>
-                </a:solidFill>
-                <a:latin typeface="Aptos"/>
-              </a:defRPr>
-            </a:pPr>
-            <a:r>
-              <a:t>The format costs ~35 ps. Our command layer costs ~5 ps on top. We are near the floor on clean edges.</a:t>
-            </a:r>
-          </a:p>
-        </p:txBody>
-      </p:sp>
     </p:spTree>
   </p:cSld>
   <p:clrMapOvr>
@@ -5495,7 +4955,7 @@
               </a:defRPr>
             </a:pPr>
             <a:r>
-              <a:t>On a clean edge, all three agree</a:t>
+              <a:t>Under a truncated pulse, two things go wrong</a:t>
             </a:r>
           </a:p>
         </p:txBody>
@@ -5531,21 +4991,76 @@
               </a:defRPr>
             </a:pPr>
             <a:r>
-              <a:t>WHERE WE ARE</a:t>
-            </a:r>
-          </a:p>
-        </p:txBody>
-      </p:sp>
-      <p:sp>
-        <p:nvSpPr>
-          <p:cNvPr id="4" name="Rectangle 3"/>
+              <a:t>THE TWO DEFECTS</a:t>
+            </a:r>
+          </a:p>
+        </p:txBody>
+      </p:sp>
+      <p:sp>
+        <p:nvSpPr>
+          <p:cNvPr id="4" name="TextBox 3"/>
+          <p:cNvSpPr txBox="1"/>
+          <p:nvPr/>
+        </p:nvSpPr>
+        <p:spPr>
+          <a:xfrm>
+            <a:off x="640080" y="1170432"/>
+            <a:ext cx="11064240" cy="1371600"/>
+          </a:xfrm>
+          <a:prstGeom prst="rect">
+            <a:avLst/>
+          </a:prstGeom>
+          <a:noFill/>
+        </p:spPr>
+        <p:txBody>
+          <a:bodyPr wrap="square" lIns="73152" rIns="36576" tIns="36576" bIns="36576">
+            <a:spAutoFit/>
+          </a:bodyPr>
+          <a:lstStyle/>
+          <a:p>
+            <a:pPr>
+              <a:spcAft>
+                <a:spcPts val="300"/>
+              </a:spcAft>
+              <a:defRPr sz="1700">
+                <a:solidFill>
+                  <a:srgbClr val="191F1C"/>
+                </a:solidFill>
+                <a:latin typeface="Aptos"/>
+              </a:defRPr>
+            </a:pPr>
+            <a:r>
+              <a:t>•  The input reverses before the pad finishes its transition.</a:t>
+            </a:r>
+          </a:p>
+          <a:p>
+            <a:pPr>
+              <a:spcAft>
+                <a:spcPts val="300"/>
+              </a:spcAft>
+              <a:defRPr sz="1700">
+                <a:solidFill>
+                  <a:srgbClr val="191F1C"/>
+                </a:solidFill>
+                <a:latin typeface="Aptos"/>
+              </a:defRPr>
+            </a:pPr>
+            <a:r>
+              <a:t>•  Left: the pad comes back up. Right: Ku stays part-on instead of returning.</a:t>
+            </a:r>
+          </a:p>
+        </p:txBody>
+      </p:sp>
+      <p:sp>
+        <p:nvSpPr>
+          <p:cNvPr id="5" name="Rectangle 4"/>
           <p:cNvSpPr/>
           <p:nvPr/>
         </p:nvSpPr>
         <p:spPr>
           <a:xfrm>
-            <a:off x="475488" y="1143000"/>
-            <a:ext cx="11210544" cy="4809743"/>
+            <a:off x="513743" y="2057400"/>
+            <a:ext cx="5373312" cy="4398264"/>
           </a:xfrm>
           <a:prstGeom prst="rect">
             <a:avLst/>
@@ -5583,7 +5098,7 @@
       </p:sp>
       <p:pic>
         <p:nvPicPr>
-          <p:cNvPr id="5" name="Picture 4" descr="clean_edge.png"/>
+          <p:cNvPr id="6" name="Picture 5" descr="stress_pad.png"/>
           <p:cNvPicPr>
             <a:picLocks noChangeAspect="1"/>
           </p:cNvPicPr>
@@ -5597,8 +5112,8 @@
         </p:blipFill>
         <p:spPr>
           <a:xfrm>
-            <a:off x="502920" y="1170432"/>
-            <a:ext cx="11155680" cy="4754879"/>
+            <a:off x="541175" y="2084831"/>
+            <a:ext cx="5318448" cy="4343400"/>
           </a:xfrm>
           <a:prstGeom prst="rect">
             <a:avLst/>
@@ -5607,24 +5122,24 @@
       </p:pic>
       <p:sp>
         <p:nvSpPr>
-          <p:cNvPr id="6" name="Rectangle 5"/>
+          <p:cNvPr id="7" name="Rectangle 6"/>
           <p:cNvSpPr/>
           <p:nvPr/>
         </p:nvSpPr>
         <p:spPr>
           <a:xfrm>
-            <a:off x="384048" y="6062472"/>
-            <a:ext cx="11109960" cy="393192"/>
+            <a:off x="6274463" y="2057400"/>
+            <a:ext cx="5373312" cy="4398264"/>
           </a:xfrm>
           <a:prstGeom prst="rect">
             <a:avLst/>
           </a:prstGeom>
           <a:solidFill>
-            <a:srgbClr val="F1F8F2"/>
+            <a:srgbClr val="FFFFFF"/>
           </a:solidFill>
-          <a:ln>
+          <a:ln w="10160">
             <a:solidFill>
-              <a:srgbClr val="F1F8F2"/>
+              <a:srgbClr val="CBD0CC"/>
             </a:solidFill>
           </a:ln>
         </p:spPr>
@@ -5646,20 +5161,34 @@
           <a:bodyPr rtlCol="0" anchor="ctr"/>
           <a:lstStyle/>
           <a:p>
-            <a:pPr algn="ctr">
-              <a:defRPr sz="1400" b="1">
-                <a:solidFill>
-                  <a:srgbClr val="2B7A43"/>
-                </a:solidFill>
-                <a:latin typeface="Aptos"/>
-              </a:defRPr>
-            </a:pPr>
-            <a:r>
-              <a:t>The gap left on the falling edge is what the format costs. We did not create it.</a:t>
-            </a:r>
-          </a:p>
-        </p:txBody>
-      </p:sp>
+            <a:pPr algn="ctr"/>
+          </a:p>
+        </p:txBody>
+      </p:sp>
+      <p:pic>
+        <p:nvPicPr>
+          <p:cNvPr id="8" name="Picture 7" descr="stress_kukd.png"/>
+          <p:cNvPicPr>
+            <a:picLocks noChangeAspect="1"/>
+          </p:cNvPicPr>
+          <p:nvPr/>
+        </p:nvPicPr>
+        <p:blipFill>
+          <a:blip r:embed="rId3"/>
+          <a:stretch>
+            <a:fillRect/>
+          </a:stretch>
+        </p:blipFill>
+        <p:spPr>
+          <a:xfrm>
+            <a:off x="6301895" y="2084831"/>
+            <a:ext cx="5318448" cy="4343400"/>
+          </a:xfrm>
+          <a:prstGeom prst="rect">
+            <a:avLst/>
+          </a:prstGeom>
+        </p:spPr>
+      </p:pic>
     </p:spTree>
   </p:cSld>
   <p:clrMapOvr>
@@ -5702,7 +5231,7 @@
               </a:defRPr>
             </a:pPr>
             <a:r>
-              <a:t>Under stress there are two problems</a:t>
+              <a:t>The offset: charge stranded in the command capacitor</a:t>
             </a:r>
           </a:p>
         </p:txBody>
@@ -5751,8 +5280,8 @@
         </p:nvSpPr>
         <p:spPr>
           <a:xfrm>
-            <a:off x="640080" y="1188720"/>
-            <a:ext cx="10972800" cy="914400"/>
+            <a:off x="640080" y="1170432"/>
+            <a:ext cx="11064240" cy="1371600"/>
           </a:xfrm>
           <a:prstGeom prst="rect">
             <a:avLst/>
@@ -5760,13 +5289,16 @@
           <a:noFill/>
         </p:spPr>
         <p:txBody>
-          <a:bodyPr wrap="square" lIns="45720" rIns="45720" anchor="t">
+          <a:bodyPr wrap="square" lIns="73152" rIns="36576" tIns="36576" bIns="36576">
             <a:spAutoFit/>
           </a:bodyPr>
           <a:lstStyle/>
           <a:p>
-            <a:pPr algn="l">
-              <a:defRPr sz="1700" b="0">
+            <a:pPr>
+              <a:spcAft>
+                <a:spcPts val="300"/>
+              </a:spcAft>
+              <a:defRPr sz="1700">
                 <a:solidFill>
                   <a:srgbClr val="191F1C"/>
                 </a:solidFill>
@@ -5774,31 +5306,47 @@
               </a:defRPr>
             </a:pPr>
             <a:r>
-              <a:t>Stress means a truncated pulse: the input reverses before the pad finishes its transition. Targets are 90/80/70/60/50% of the transistor's settled swing.</a:t>
-            </a:r>
-          </a:p>
-        </p:txBody>
-      </p:sp>
-      <p:sp>
-        <p:nvSpPr>
-          <p:cNvPr id="5" name="Rounded Rectangle 4"/>
+              <a:t>•  GUPCMD is a capacitor across 1e15 ohm, charged once per input edge.</a:t>
+            </a:r>
+          </a:p>
+          <a:p>
+            <a:pPr>
+              <a:spcAft>
+                <a:spcPts val="300"/>
+              </a:spcAft>
+              <a:defRPr sz="1700">
+                <a:solidFill>
+                  <a:srgbClr val="191F1C"/>
+                </a:solidFill>
+                <a:latin typeface="Aptos"/>
+              </a:defRPr>
+            </a:pPr>
+            <a:r>
+              <a:t>•  A truncated pulse leaves charge in it with no resistive path out.</a:t>
+            </a:r>
+          </a:p>
+        </p:txBody>
+      </p:sp>
+      <p:sp>
+        <p:nvSpPr>
+          <p:cNvPr id="5" name="Rectangle 4"/>
           <p:cNvSpPr/>
           <p:nvPr/>
         </p:nvSpPr>
         <p:spPr>
           <a:xfrm>
-            <a:off x="640080" y="2377440"/>
-            <a:ext cx="10972800" cy="2118105"/>
-          </a:xfrm>
-          <a:prstGeom prst="roundRect">
+            <a:off x="743653" y="1819656"/>
+            <a:ext cx="10674213" cy="4581144"/>
+          </a:xfrm>
+          <a:prstGeom prst="rect">
             <a:avLst/>
           </a:prstGeom>
           <a:solidFill>
-            <a:srgbClr val="F6F8F7"/>
+            <a:srgbClr val="FFFFFF"/>
           </a:solidFill>
-          <a:ln w="12700">
+          <a:ln w="10160">
             <a:solidFill>
-              <a:srgbClr val="A4AEA8"/>
+              <a:srgbClr val="CBD0CC"/>
             </a:solidFill>
           </a:ln>
         </p:spPr>
@@ -5817,153 +5365,37 @@
           </a:fontRef>
         </p:style>
         <p:txBody>
-          <a:bodyPr rtlCol="0" anchor="t" wrap="none" lIns="118872" rIns="73152" tIns="91440" bIns="73152"/>
-          <a:lstStyle/>
-          <a:p>
-            <a:pPr algn="l">
-              <a:defRPr sz="1700">
-                <a:solidFill>
-                  <a:srgbClr val="1E3027"/>
-                </a:solidFill>
-                <a:latin typeface="Consolas"/>
-              </a:defRPr>
-            </a:pPr>
-            <a:r>
-              <a:t>The offset         a settled-state Ku error, on 90/60/50 only.</a:t>
-            </a:r>
-          </a:p>
-          <a:p>
-            <a:pPr algn="l">
-              <a:defRPr sz="1700">
-                <a:solidFill>
-                  <a:srgbClr val="1E3027"/>
-                </a:solidFill>
-                <a:latin typeface="Consolas"/>
-              </a:defRPr>
-            </a:pPr>
-            <a:r>
-              <a:t>                   A ~6 ns tail that looks permanent on a</a:t>
-            </a:r>
-          </a:p>
-          <a:p>
-            <a:pPr algn="l">
-              <a:defRPr sz="1700">
-                <a:solidFill>
-                  <a:srgbClr val="1E3027"/>
-                </a:solidFill>
-                <a:latin typeface="Consolas"/>
-              </a:defRPr>
-            </a:pPr>
-            <a:r>
-              <a:t>                   10 ns plot -- not a true DC offset.</a:t>
-            </a:r>
-          </a:p>
-          <a:p>
-            <a:pPr algn="l">
-              <a:defRPr sz="1700">
-                <a:solidFill>
-                  <a:srgbClr val="1E3027"/>
-                </a:solidFill>
-                <a:latin typeface="Consolas"/>
-              </a:defRPr>
-            </a:pPr>
-          </a:p>
-          <a:p>
-            <a:pPr algn="l">
-              <a:defRPr sz="1700">
-                <a:solidFill>
-                  <a:srgbClr val="1E3027"/>
-                </a:solidFill>
-                <a:latin typeface="Consolas"/>
-              </a:defRPr>
-            </a:pPr>
-            <a:r>
-              <a:t>The timing shift   falling 50% crossing 69-99 ps late, on</a:t>
-            </a:r>
-          </a:p>
-          <a:p>
-            <a:pPr algn="l">
-              <a:defRPr sz="1700">
-                <a:solidFill>
-                  <a:srgbClr val="1E3027"/>
-                </a:solidFill>
-                <a:latin typeface="Consolas"/>
-              </a:defRPr>
-            </a:pPr>
-            <a:r>
-              <a:t>                   every case, where native IBIS is</a:t>
-            </a:r>
-          </a:p>
-          <a:p>
-            <a:pPr algn="l">
-              <a:defRPr sz="1700">
-                <a:solidFill>
-                  <a:srgbClr val="1E3027"/>
-                </a:solidFill>
-                <a:latin typeface="Consolas"/>
-              </a:defRPr>
-            </a:pPr>
-            <a:r>
-              <a:t>                   5-26 ps early.</a:t>
-            </a:r>
-          </a:p>
-        </p:txBody>
-      </p:sp>
-      <p:sp>
-        <p:nvSpPr>
-          <p:cNvPr id="6" name="Rectangle 5"/>
-          <p:cNvSpPr/>
+          <a:bodyPr rtlCol="0" anchor="ctr"/>
+          <a:lstStyle/>
+          <a:p>
+            <a:pPr algn="ctr"/>
+          </a:p>
+        </p:txBody>
+      </p:sp>
+      <p:pic>
+        <p:nvPicPr>
+          <p:cNvPr id="6" name="Picture 5" descr="offset_chain.png"/>
+          <p:cNvPicPr>
+            <a:picLocks noChangeAspect="1"/>
+          </p:cNvPicPr>
           <p:nvPr/>
-        </p:nvSpPr>
-        <p:spPr>
-          <a:xfrm>
-            <a:off x="384048" y="6062472"/>
-            <a:ext cx="11109960" cy="393192"/>
-          </a:xfrm>
-          <a:prstGeom prst="rect">
-            <a:avLst/>
-          </a:prstGeom>
-          <a:solidFill>
-            <a:srgbClr val="F1F8F2"/>
-          </a:solidFill>
-          <a:ln>
-            <a:solidFill>
-              <a:srgbClr val="F1F8F2"/>
-            </a:solidFill>
-          </a:ln>
-        </p:spPr>
-        <p:style>
-          <a:lnRef idx="1">
-            <a:schemeClr val="accent1"/>
-          </a:lnRef>
-          <a:fillRef idx="3">
-            <a:schemeClr val="accent1"/>
-          </a:fillRef>
-          <a:effectRef idx="2">
-            <a:schemeClr val="accent1"/>
-          </a:effectRef>
-          <a:fontRef idx="minor">
-            <a:schemeClr val="lt1"/>
-          </a:fontRef>
-        </p:style>
-        <p:txBody>
-          <a:bodyPr rtlCol="0" anchor="ctr"/>
-          <a:lstStyle/>
-          <a:p>
-            <a:pPr algn="ctr">
-              <a:defRPr sz="1400" b="1">
-                <a:solidFill>
-                  <a:srgbClr val="2B7A43"/>
-                </a:solidFill>
-                <a:latin typeface="Aptos"/>
-              </a:defRPr>
-            </a:pPr>
-            <a:r>
-              <a:t>One is an amplitude error that decays. The other is a timing error that does not.</a:t>
-            </a:r>
-          </a:p>
-        </p:txBody>
-      </p:sp>
+        </p:nvPicPr>
+        <p:blipFill>
+          <a:blip r:embed="rId2"/>
+          <a:stretch>
+            <a:fillRect/>
+          </a:stretch>
+        </p:blipFill>
+        <p:spPr>
+          <a:xfrm>
+            <a:off x="771085" y="1847088"/>
+            <a:ext cx="10619349" cy="4526280"/>
+          </a:xfrm>
+          <a:prstGeom prst="rect">
+            <a:avLst/>
+          </a:prstGeom>
+        </p:spPr>
+      </p:pic>
     </p:spTree>
   </p:cSld>
   <p:clrMapOvr>
@@ -6006,7 +5438,7 @@
               </a:defRPr>
             </a:pPr>
             <a:r>
-              <a:t>Where the offset comes from</a:t>
+              <a:t>delay_cmd removes the offset</a:t>
             </a:r>
           </a:p>
         </p:txBody>
@@ -6049,14 +5481,69 @@
       </p:sp>
       <p:sp>
         <p:nvSpPr>
-          <p:cNvPr id="4" name="Rectangle 3"/>
+          <p:cNvPr id="4" name="TextBox 3"/>
+          <p:cNvSpPr txBox="1"/>
+          <p:nvPr/>
+        </p:nvSpPr>
+        <p:spPr>
+          <a:xfrm>
+            <a:off x="640080" y="1170432"/>
+            <a:ext cx="11064240" cy="1371600"/>
+          </a:xfrm>
+          <a:prstGeom prst="rect">
+            <a:avLst/>
+          </a:prstGeom>
+          <a:noFill/>
+        </p:spPr>
+        <p:txBody>
+          <a:bodyPr wrap="square" lIns="73152" rIns="36576" tIns="36576" bIns="36576">
+            <a:spAutoFit/>
+          </a:bodyPr>
+          <a:lstStyle/>
+          <a:p>
+            <a:pPr>
+              <a:spcAft>
+                <a:spcPts val="300"/>
+              </a:spcAft>
+              <a:defRPr sz="1700">
+                <a:solidFill>
+                  <a:srgbClr val="191F1C"/>
+                </a:solidFill>
+                <a:latin typeface="Aptos"/>
+              </a:defRPr>
+            </a:pPr>
+            <a:r>
+              <a:t>•  The command becomes a function of the input level, not of edge history.</a:t>
+            </a:r>
+          </a:p>
+          <a:p>
+            <a:pPr>
+              <a:spcAft>
+                <a:spcPts val="300"/>
+              </a:spcAft>
+              <a:defRPr sz="1700">
+                <a:solidFill>
+                  <a:srgbClr val="191F1C"/>
+                </a:solidFill>
+                <a:latin typeface="Aptos"/>
+              </a:defRPr>
+            </a:pPr>
+            <a:r>
+              <a:t>•  It returns to exactly zero, so nothing is stranded.</a:t>
+            </a:r>
+          </a:p>
+        </p:txBody>
+      </p:sp>
+      <p:sp>
+        <p:nvSpPr>
+          <p:cNvPr id="5" name="Rectangle 4"/>
           <p:cNvSpPr/>
           <p:nvPr/>
         </p:nvSpPr>
         <p:spPr>
           <a:xfrm>
-            <a:off x="475488" y="1143000"/>
-            <a:ext cx="11210544" cy="4809743"/>
+            <a:off x="743653" y="1819656"/>
+            <a:ext cx="10674213" cy="4581144"/>
           </a:xfrm>
           <a:prstGeom prst="rect">
             <a:avLst/>
@@ -6094,7 +5581,7 @@
       </p:sp>
       <p:pic>
         <p:nvPicPr>
-          <p:cNvPr id="5" name="Picture 4" descr="offset_chain.png"/>
+          <p:cNvPr id="6" name="Picture 5" descr="offset_removed.png"/>
           <p:cNvPicPr>
             <a:picLocks noChangeAspect="1"/>
           </p:cNvPicPr>
@@ -6108,69 +5595,14 @@
         </p:blipFill>
         <p:spPr>
           <a:xfrm>
-            <a:off x="502920" y="1170432"/>
-            <a:ext cx="11155680" cy="4754879"/>
+            <a:off x="771085" y="1847088"/>
+            <a:ext cx="10619349" cy="4526280"/>
           </a:xfrm>
           <a:prstGeom prst="rect">
             <a:avLst/>
           </a:prstGeom>
         </p:spPr>
       </p:pic>
-      <p:sp>
-        <p:nvSpPr>
-          <p:cNvPr id="6" name="Rectangle 5"/>
-          <p:cNvSpPr/>
-          <p:nvPr/>
-        </p:nvSpPr>
-        <p:spPr>
-          <a:xfrm>
-            <a:off x="384048" y="6062472"/>
-            <a:ext cx="11109960" cy="393192"/>
-          </a:xfrm>
-          <a:prstGeom prst="rect">
-            <a:avLst/>
-          </a:prstGeom>
-          <a:solidFill>
-            <a:srgbClr val="F1F8F2"/>
-          </a:solidFill>
-          <a:ln>
-            <a:solidFill>
-              <a:srgbClr val="F1F8F2"/>
-            </a:solidFill>
-          </a:ln>
-        </p:spPr>
-        <p:style>
-          <a:lnRef idx="1">
-            <a:schemeClr val="accent1"/>
-          </a:lnRef>
-          <a:fillRef idx="3">
-            <a:schemeClr val="accent1"/>
-          </a:fillRef>
-          <a:effectRef idx="2">
-            <a:schemeClr val="accent1"/>
-          </a:effectRef>
-          <a:fontRef idx="minor">
-            <a:schemeClr val="lt1"/>
-          </a:fontRef>
-        </p:style>
-        <p:txBody>
-          <a:bodyPr rtlCol="0" anchor="ctr"/>
-          <a:lstStyle/>
-          <a:p>
-            <a:pPr algn="ctr">
-              <a:defRPr sz="1400" b="1">
-                <a:solidFill>
-                  <a:srgbClr val="2B7A43"/>
-                </a:solidFill>
-                <a:latin typeface="Aptos"/>
-              </a:defRPr>
-            </a:pPr>
-            <a:r>
-              <a:t>GUPCMD is a capacitor across 1e15 ohm. A truncated pulse strands charge with no path to remove it.</a:t>
-            </a:r>
-          </a:p>
-        </p:txBody>
-      </p:sp>
     </p:spTree>
   </p:cSld>
   <p:clrMapOvr>
@@ -6213,7 +5645,7 @@
               </a:defRPr>
             </a:pPr>
             <a:r>
-              <a:t>delay_cmd removes it</a:t>
+              <a:t>It does not fix the timing</a:t>
             </a:r>
           </a:p>
         </p:txBody>
@@ -6256,124 +5688,182 @@
       </p:sp>
       <p:sp>
         <p:nvSpPr>
-          <p:cNvPr id="4" name="Rectangle 3"/>
-          <p:cNvSpPr/>
+          <p:cNvPr id="4" name="TextBox 3"/>
+          <p:cNvSpPr txBox="1"/>
           <p:nvPr/>
         </p:nvSpPr>
         <p:spPr>
           <a:xfrm>
-            <a:off x="475488" y="1143000"/>
-            <a:ext cx="11210544" cy="4809743"/>
-          </a:xfrm>
-          <a:prstGeom prst="rect">
-            <a:avLst/>
-          </a:prstGeom>
-          <a:solidFill>
-            <a:srgbClr val="FFFFFF"/>
-          </a:solidFill>
-          <a:ln w="10160">
-            <a:solidFill>
-              <a:srgbClr val="CBD0CC"/>
-            </a:solidFill>
-          </a:ln>
-        </p:spPr>
-        <p:style>
-          <a:lnRef idx="1">
-            <a:schemeClr val="accent1"/>
-          </a:lnRef>
-          <a:fillRef idx="3">
-            <a:schemeClr val="accent1"/>
-          </a:fillRef>
-          <a:effectRef idx="2">
-            <a:schemeClr val="accent1"/>
-          </a:effectRef>
-          <a:fontRef idx="minor">
-            <a:schemeClr val="lt1"/>
-          </a:fontRef>
-        </p:style>
-        <p:txBody>
-          <a:bodyPr rtlCol="0" anchor="ctr"/>
-          <a:lstStyle/>
-          <a:p>
-            <a:pPr algn="ctr"/>
-          </a:p>
-        </p:txBody>
-      </p:sp>
-      <p:pic>
-        <p:nvPicPr>
-          <p:cNvPr id="5" name="Picture 4" descr="offset_removed.png"/>
-          <p:cNvPicPr>
-            <a:picLocks noChangeAspect="1"/>
-          </p:cNvPicPr>
+            <a:off x="640080" y="1170432"/>
+            <a:ext cx="11064240" cy="685800"/>
+          </a:xfrm>
+          <a:prstGeom prst="rect">
+            <a:avLst/>
+          </a:prstGeom>
+          <a:noFill/>
+        </p:spPr>
+        <p:txBody>
+          <a:bodyPr wrap="square" lIns="73152" rIns="36576" tIns="36576" bIns="36576">
+            <a:spAutoFit/>
+          </a:bodyPr>
+          <a:lstStyle/>
+          <a:p>
+            <a:pPr>
+              <a:spcAft>
+                <a:spcPts val="300"/>
+              </a:spcAft>
+              <a:defRPr sz="1700">
+                <a:solidFill>
+                  <a:srgbClr val="191F1C"/>
+                </a:solidFill>
+                <a:latin typeface="Aptos"/>
+              </a:defRPr>
+            </a:pPr>
+            <a:r>
+              <a:t>•  If the offset and the timing shift were one mechanism, delay_cmd would fix both. Its amplitude had been measured; its timing never had.</a:t>
+            </a:r>
+          </a:p>
+        </p:txBody>
+      </p:sp>
+      <p:sp>
+        <p:nvSpPr>
+          <p:cNvPr id="5" name="TextBox 4"/>
+          <p:cNvSpPr txBox="1"/>
           <p:nvPr/>
-        </p:nvPicPr>
-        <p:blipFill>
-          <a:blip r:embed="rId2"/>
-          <a:stretch>
-            <a:fillRect/>
-          </a:stretch>
-        </p:blipFill>
-        <p:spPr>
-          <a:xfrm>
-            <a:off x="502920" y="1170432"/>
-            <a:ext cx="11155680" cy="4754879"/>
-          </a:xfrm>
-          <a:prstGeom prst="rect">
-            <a:avLst/>
-          </a:prstGeom>
-        </p:spPr>
-      </p:pic>
-      <p:sp>
-        <p:nvSpPr>
-          <p:cNvPr id="6" name="Rectangle 5"/>
-          <p:cNvSpPr/>
+        </p:nvSpPr>
+        <p:spPr>
+          <a:xfrm>
+            <a:off x="640080" y="2194560"/>
+            <a:ext cx="10972800" cy="457200"/>
+          </a:xfrm>
+          <a:prstGeom prst="rect">
+            <a:avLst/>
+          </a:prstGeom>
+          <a:noFill/>
+        </p:spPr>
+        <p:txBody>
+          <a:bodyPr wrap="square" lIns="45720" rIns="45720" anchor="t">
+            <a:spAutoFit/>
+          </a:bodyPr>
+          <a:lstStyle/>
+          <a:p>
+            <a:pPr algn="l">
+              <a:defRPr sz="1700" b="0">
+                <a:solidFill>
+                  <a:srgbClr val="191F1C"/>
+                </a:solidFill>
+                <a:latin typeface="Aptos"/>
+              </a:defRPr>
+            </a:pPr>
+            <a:r>
+              <a:t>We measured it:</a:t>
+            </a:r>
+          </a:p>
+        </p:txBody>
+      </p:sp>
+      <p:sp>
+        <p:nvSpPr>
+          <p:cNvPr id="6" name="TextBox 5"/>
+          <p:cNvSpPr txBox="1"/>
           <p:nvPr/>
         </p:nvSpPr>
         <p:spPr>
           <a:xfrm>
-            <a:off x="384048" y="6062472"/>
-            <a:ext cx="11109960" cy="393192"/>
-          </a:xfrm>
-          <a:prstGeom prst="rect">
-            <a:avLst/>
-          </a:prstGeom>
-          <a:solidFill>
-            <a:srgbClr val="F1F8F2"/>
-          </a:solidFill>
-          <a:ln>
-            <a:solidFill>
-              <a:srgbClr val="F1F8F2"/>
-            </a:solidFill>
-          </a:ln>
-        </p:spPr>
-        <p:style>
-          <a:lnRef idx="1">
-            <a:schemeClr val="accent1"/>
-          </a:lnRef>
-          <a:fillRef idx="3">
-            <a:schemeClr val="accent1"/>
-          </a:fillRef>
-          <a:effectRef idx="2">
-            <a:schemeClr val="accent1"/>
-          </a:effectRef>
-          <a:fontRef idx="minor">
-            <a:schemeClr val="lt1"/>
-          </a:fontRef>
-        </p:style>
-        <p:txBody>
-          <a:bodyPr rtlCol="0" anchor="ctr"/>
-          <a:lstStyle/>
-          <a:p>
-            <a:pPr algn="ctr">
-              <a:defRPr sz="1400" b="1">
-                <a:solidFill>
-                  <a:srgbClr val="2B7A43"/>
+            <a:off x="640080" y="2743200"/>
+            <a:ext cx="11064240" cy="2057400"/>
+          </a:xfrm>
+          <a:prstGeom prst="rect">
+            <a:avLst/>
+          </a:prstGeom>
+          <a:noFill/>
+        </p:spPr>
+        <p:txBody>
+          <a:bodyPr wrap="square" lIns="73152" rIns="36576" tIns="36576" bIns="36576">
+            <a:spAutoFit/>
+          </a:bodyPr>
+          <a:lstStyle/>
+          <a:p>
+            <a:pPr>
+              <a:spcAft>
+                <a:spcPts val="300"/>
+              </a:spcAft>
+              <a:defRPr sz="1700">
+                <a:solidFill>
+                  <a:srgbClr val="191F1C"/>
                 </a:solidFill>
                 <a:latin typeface="Aptos"/>
               </a:defRPr>
             </a:pPr>
             <a:r>
-              <a:t>Level-driven commands fix the offset. This part is settled.</a:t>
+              <a:t>•  delay_cmd improved the timing on 0 of 19 stress cases</a:t>
+            </a:r>
+          </a:p>
+          <a:p>
+            <a:pPr>
+              <a:spcAft>
+                <a:spcPts val="300"/>
+              </a:spcAft>
+              <a:defRPr sz="1700">
+                <a:solidFill>
+                  <a:srgbClr val="191F1C"/>
+                </a:solidFill>
+                <a:latin typeface="Aptos"/>
+              </a:defRPr>
+            </a:pPr>
+            <a:r>
+              <a:t>•  the shift persists once the stranded charge is gone</a:t>
+            </a:r>
+          </a:p>
+          <a:p>
+            <a:pPr>
+              <a:spcAft>
+                <a:spcPts val="300"/>
+              </a:spcAft>
+              <a:defRPr sz="1700">
+                <a:solidFill>
+                  <a:srgbClr val="191F1C"/>
+                </a:solidFill>
+                <a:latin typeface="Aptos"/>
+              </a:defRPr>
+            </a:pPr>
+            <a:r>
+              <a:t>•  they are two defects, not one</a:t>
+            </a:r>
+          </a:p>
+        </p:txBody>
+      </p:sp>
+      <p:sp>
+        <p:nvSpPr>
+          <p:cNvPr id="7" name="TextBox 6"/>
+          <p:cNvSpPr txBox="1"/>
+          <p:nvPr/>
+        </p:nvSpPr>
+        <p:spPr>
+          <a:xfrm>
+            <a:off x="640080" y="4663440"/>
+            <a:ext cx="10972800" cy="914400"/>
+          </a:xfrm>
+          <a:prstGeom prst="rect">
+            <a:avLst/>
+          </a:prstGeom>
+          <a:noFill/>
+        </p:spPr>
+        <p:txBody>
+          <a:bodyPr wrap="square" lIns="45720" rIns="45720" anchor="t">
+            <a:spAutoFit/>
+          </a:bodyPr>
+          <a:lstStyle/>
+          <a:p>
+            <a:pPr algn="l">
+              <a:defRPr sz="1700" b="0">
+                <a:solidFill>
+                  <a:srgbClr val="191F1C"/>
+                </a:solidFill>
+                <a:latin typeface="Aptos"/>
+              </a:defRPr>
+            </a:pPr>
+            <a:r>
+              <a:t>The offset has a fix. The timing shift has no candidate mechanism yet, and it grows as the pulse is truncated — on all nine buffer variants tested so far.</a:t>
             </a:r>
           </a:p>
         </p:txBody>
@@ -6420,7 +5910,7 @@
               </a:defRPr>
             </a:pPr>
             <a:r>
-              <a:t>It does not fix the timing</a:t>
+              <a:t>The core reconstruction is sound</a:t>
             </a:r>
           </a:p>
         </p:txBody>
@@ -6456,7 +5946,7 @@
               </a:defRPr>
             </a:pPr>
             <a:r>
-              <a:t>THE TWO DEFECTS</a:t>
+              <a:t>CONFIDENCE</a:t>
             </a:r>
           </a:p>
         </p:txBody>
@@ -6469,8 +5959,63 @@
         </p:nvSpPr>
         <p:spPr>
           <a:xfrm>
-            <a:off x="640080" y="1188720"/>
-            <a:ext cx="10972800" cy="1280160"/>
+            <a:off x="640080" y="1170432"/>
+            <a:ext cx="11064240" cy="1371600"/>
+          </a:xfrm>
+          <a:prstGeom prst="rect">
+            <a:avLst/>
+          </a:prstGeom>
+          <a:noFill/>
+        </p:spPr>
+        <p:txBody>
+          <a:bodyPr wrap="square" lIns="73152" rIns="36576" tIns="36576" bIns="36576">
+            <a:spAutoFit/>
+          </a:bodyPr>
+          <a:lstStyle/>
+          <a:p>
+            <a:pPr>
+              <a:spcAft>
+                <a:spcPts val="300"/>
+              </a:spcAft>
+              <a:defRPr sz="1700">
+                <a:solidFill>
+                  <a:srgbClr val="191F1C"/>
+                </a:solidFill>
+                <a:latin typeface="Aptos"/>
+              </a:defRPr>
+            </a:pPr>
+            <a:r>
+              <a:t>•  A golden-waveform test replays a model's own V-T tables into the fixture that produced them — no transistor, no native IBIS, no engine confound.</a:t>
+            </a:r>
+          </a:p>
+          <a:p>
+            <a:pPr>
+              <a:spcAft>
+                <a:spcPts val="300"/>
+              </a:spcAft>
+              <a:defRPr sz="1700">
+                <a:solidFill>
+                  <a:srgbClr val="191F1C"/>
+                </a:solidFill>
+                <a:latin typeface="Aptos"/>
+              </a:defRPr>
+            </a:pPr>
+            <a:r>
+              <a:t>•  We had never done this before. It is now the standing health check.</a:t>
+            </a:r>
+          </a:p>
+        </p:txBody>
+      </p:sp>
+      <p:sp>
+        <p:nvSpPr>
+          <p:cNvPr id="5" name="TextBox 4"/>
+          <p:cNvSpPr txBox="1"/>
+          <p:nvPr/>
+        </p:nvSpPr>
+        <p:spPr>
+          <a:xfrm>
+            <a:off x="640080" y="2834640"/>
+            <a:ext cx="10972800" cy="457200"/>
           </a:xfrm>
           <a:prstGeom prst="rect">
             <a:avLst/>
@@ -6492,189 +6037,98 @@
               </a:defRPr>
             </a:pPr>
             <a:r>
-              <a:t>The open question was whether the offset and the timing shift were one mechanism showing up twice. If they were, delay_cmd would already fix both. Its amplitude had been measured; its timing never had.</a:t>
-            </a:r>
-          </a:p>
-        </p:txBody>
-      </p:sp>
-      <p:sp>
-        <p:nvSpPr>
-          <p:cNvPr id="5" name="Rounded Rectangle 4"/>
-          <p:cNvSpPr/>
+              <a:t>Our model against its own golden waveforms, three buffers, both edges, both fixtures:</a:t>
+            </a:r>
+          </a:p>
+        </p:txBody>
+      </p:sp>
+      <p:sp>
+        <p:nvSpPr>
+          <p:cNvPr id="6" name="TextBox 5"/>
+          <p:cNvSpPr txBox="1"/>
           <p:nvPr/>
         </p:nvSpPr>
         <p:spPr>
           <a:xfrm>
-            <a:off x="640080" y="2743200"/>
-            <a:ext cx="10972800" cy="2118105"/>
-          </a:xfrm>
-          <a:prstGeom prst="roundRect">
-            <a:avLst/>
-          </a:prstGeom>
-          <a:solidFill>
-            <a:srgbClr val="F6F8F7"/>
-          </a:solidFill>
-          <a:ln w="12700">
-            <a:solidFill>
-              <a:srgbClr val="A4AEA8"/>
-            </a:solidFill>
-          </a:ln>
-        </p:spPr>
-        <p:style>
-          <a:lnRef idx="1">
-            <a:schemeClr val="accent1"/>
-          </a:lnRef>
-          <a:fillRef idx="3">
-            <a:schemeClr val="accent1"/>
-          </a:fillRef>
-          <a:effectRef idx="2">
-            <a:schemeClr val="accent1"/>
-          </a:effectRef>
-          <a:fontRef idx="minor">
-            <a:schemeClr val="lt1"/>
-          </a:fontRef>
-        </p:style>
-        <p:txBody>
-          <a:bodyPr rtlCol="0" anchor="t" wrap="none" lIns="118872" rIns="73152" tIns="91440" bIns="73152"/>
+            <a:off x="640080" y="3383280"/>
+            <a:ext cx="11064240" cy="1371600"/>
+          </a:xfrm>
+          <a:prstGeom prst="rect">
+            <a:avLst/>
+          </a:prstGeom>
+          <a:noFill/>
+        </p:spPr>
+        <p:txBody>
+          <a:bodyPr wrap="square" lIns="73152" rIns="36576" tIns="36576" bIns="36576">
+            <a:spAutoFit/>
+          </a:bodyPr>
+          <a:lstStyle/>
+          <a:p>
+            <a:pPr>
+              <a:spcAft>
+                <a:spcPts val="300"/>
+              </a:spcAft>
+              <a:defRPr sz="1700">
+                <a:solidFill>
+                  <a:srgbClr val="191F1C"/>
+                </a:solidFill>
+                <a:latin typeface="Aptos"/>
+              </a:defRPr>
+            </a:pPr>
+            <a:r>
+              <a:t>•  figure of merit   0.03 – 0.41 %</a:t>
+            </a:r>
+          </a:p>
+          <a:p>
+            <a:pPr>
+              <a:spcAft>
+                <a:spcPts val="300"/>
+              </a:spcAft>
+              <a:defRPr sz="1700">
+                <a:solidFill>
+                  <a:srgbClr val="191F1C"/>
+                </a:solidFill>
+                <a:latin typeface="Aptos"/>
+              </a:defRPr>
+            </a:pPr>
+            <a:r>
+              <a:t>•  timing shift      +4 to +8 ps</a:t>
+            </a:r>
+          </a:p>
+        </p:txBody>
+      </p:sp>
+      <p:sp>
+        <p:nvSpPr>
+          <p:cNvPr id="7" name="TextBox 6"/>
+          <p:cNvSpPr txBox="1"/>
+          <p:nvPr/>
+        </p:nvSpPr>
+        <p:spPr>
+          <a:xfrm>
+            <a:off x="640080" y="4572000"/>
+            <a:ext cx="10972800" cy="731520"/>
+          </a:xfrm>
+          <a:prstGeom prst="rect">
+            <a:avLst/>
+          </a:prstGeom>
+          <a:noFill/>
+        </p:spPr>
+        <p:txBody>
+          <a:bodyPr wrap="square" lIns="45720" rIns="45720" anchor="t">
+            <a:spAutoFit/>
+          </a:bodyPr>
           <a:lstStyle/>
           <a:p>
             <a:pPr algn="l">
-              <a:defRPr sz="1700">
-                <a:solidFill>
-                  <a:srgbClr val="1E3027"/>
-                </a:solidFill>
-                <a:latin typeface="Consolas"/>
-              </a:defRPr>
-            </a:pPr>
-            <a:r>
-              <a:t>We measured it.</a:t>
-            </a:r>
-          </a:p>
-          <a:p>
-            <a:pPr algn="l">
-              <a:defRPr sz="1700">
-                <a:solidFill>
-                  <a:srgbClr val="1E3027"/>
-                </a:solidFill>
-                <a:latin typeface="Consolas"/>
-              </a:defRPr>
-            </a:pPr>
-          </a:p>
-          <a:p>
-            <a:pPr algn="l">
-              <a:defRPr sz="1700">
-                <a:solidFill>
-                  <a:srgbClr val="1E3027"/>
-                </a:solidFill>
-                <a:latin typeface="Consolas"/>
-              </a:defRPr>
-            </a:pPr>
-            <a:r>
-              <a:t>  delay_cmd improved the timing on 0 of 19 stress cases.</a:t>
-            </a:r>
-          </a:p>
-          <a:p>
-            <a:pPr algn="l">
-              <a:defRPr sz="1700">
-                <a:solidFill>
-                  <a:srgbClr val="1E3027"/>
-                </a:solidFill>
-                <a:latin typeface="Consolas"/>
-              </a:defRPr>
-            </a:pPr>
-          </a:p>
-          <a:p>
-            <a:pPr algn="l">
-              <a:defRPr sz="1700">
-                <a:solidFill>
-                  <a:srgbClr val="1E3027"/>
-                </a:solidFill>
-                <a:latin typeface="Consolas"/>
-              </a:defRPr>
-            </a:pPr>
-            <a:r>
-              <a:t>  -&gt; the shift persists once the stranded charge is gone</a:t>
-            </a:r>
-          </a:p>
-          <a:p>
-            <a:pPr algn="l">
-              <a:defRPr sz="1700">
-                <a:solidFill>
-                  <a:srgbClr val="1E3027"/>
-                </a:solidFill>
-                <a:latin typeface="Consolas"/>
-              </a:defRPr>
-            </a:pPr>
-            <a:r>
-              <a:t>  -&gt; they are two defects, not one</a:t>
-            </a:r>
-          </a:p>
-          <a:p>
-            <a:pPr algn="l">
-              <a:defRPr sz="1700">
-                <a:solidFill>
-                  <a:srgbClr val="1E3027"/>
-                </a:solidFill>
-                <a:latin typeface="Consolas"/>
-              </a:defRPr>
-            </a:pPr>
-            <a:r>
-              <a:t>  -&gt; the offset has a fix; the shift has no mechanism yet</a:t>
-            </a:r>
-          </a:p>
-        </p:txBody>
-      </p:sp>
-      <p:sp>
-        <p:nvSpPr>
-          <p:cNvPr id="6" name="Rectangle 5"/>
-          <p:cNvSpPr/>
-          <p:nvPr/>
-        </p:nvSpPr>
-        <p:spPr>
-          <a:xfrm>
-            <a:off x="384048" y="6062472"/>
-            <a:ext cx="11109960" cy="393192"/>
-          </a:xfrm>
-          <a:prstGeom prst="rect">
-            <a:avLst/>
-          </a:prstGeom>
-          <a:solidFill>
-            <a:srgbClr val="F1F8F2"/>
-          </a:solidFill>
-          <a:ln>
-            <a:solidFill>
-              <a:srgbClr val="F1F8F2"/>
-            </a:solidFill>
-          </a:ln>
-        </p:spPr>
-        <p:style>
-          <a:lnRef idx="1">
-            <a:schemeClr val="accent1"/>
-          </a:lnRef>
-          <a:fillRef idx="3">
-            <a:schemeClr val="accent1"/>
-          </a:fillRef>
-          <a:effectRef idx="2">
-            <a:schemeClr val="accent1"/>
-          </a:effectRef>
-          <a:fontRef idx="minor">
-            <a:schemeClr val="lt1"/>
-          </a:fontRef>
-        </p:style>
-        <p:txBody>
-          <a:bodyPr rtlCol="0" anchor="ctr"/>
-          <a:lstStyle/>
-          <a:p>
-            <a:pPr algn="ctr">
-              <a:defRPr sz="1400" b="1">
-                <a:solidFill>
-                  <a:srgbClr val="2B7A43"/>
+              <a:defRPr sz="1700" b="0">
+                <a:solidFill>
+                  <a:srgbClr val="191F1C"/>
                 </a:solidFill>
                 <a:latin typeface="Aptos"/>
               </a:defRPr>
             </a:pPr>
             <a:r>
-              <a:t>A cheap experiment closed a question that was open for weeks, with the less convenient answer.</a:t>
+              <a:t>So whatever is wrong under stress, it is not the I-V × Ku(t) reconstruction.</a:t>
             </a:r>
           </a:p>
         </p:txBody>
@@ -6721,7 +6175,7 @@
               </a:defRPr>
             </a:pPr>
             <a:r>
-              <a:t>The shift grows as the pulse is truncated</a:t>
+              <a:t>C_comp is handled correctly</a:t>
             </a:r>
           </a:p>
         </p:txBody>
@@ -6757,131 +6211,189 @@
               </a:defRPr>
             </a:pPr>
             <a:r>
-              <a:t>THE TWO DEFECTS</a:t>
-            </a:r>
-          </a:p>
-        </p:txBody>
-      </p:sp>
-      <p:sp>
-        <p:nvSpPr>
-          <p:cNvPr id="4" name="Rectangle 3"/>
-          <p:cNvSpPr/>
+              <a:t>CONFIDENCE</a:t>
+            </a:r>
+          </a:p>
+        </p:txBody>
+      </p:sp>
+      <p:sp>
+        <p:nvSpPr>
+          <p:cNvPr id="4" name="TextBox 3"/>
+          <p:cNvSpPr txBox="1"/>
           <p:nvPr/>
         </p:nvSpPr>
         <p:spPr>
           <a:xfrm>
-            <a:off x="475488" y="1143000"/>
-            <a:ext cx="11210544" cy="4809743"/>
-          </a:xfrm>
-          <a:prstGeom prst="rect">
-            <a:avLst/>
-          </a:prstGeom>
-          <a:solidFill>
-            <a:srgbClr val="FFFFFF"/>
-          </a:solidFill>
-          <a:ln w="10160">
-            <a:solidFill>
-              <a:srgbClr val="CBD0CC"/>
-            </a:solidFill>
-          </a:ln>
-        </p:spPr>
-        <p:style>
-          <a:lnRef idx="1">
-            <a:schemeClr val="accent1"/>
-          </a:lnRef>
-          <a:fillRef idx="3">
-            <a:schemeClr val="accent1"/>
-          </a:fillRef>
-          <a:effectRef idx="2">
-            <a:schemeClr val="accent1"/>
-          </a:effectRef>
-          <a:fontRef idx="minor">
-            <a:schemeClr val="lt1"/>
-          </a:fontRef>
-        </p:style>
-        <p:txBody>
-          <a:bodyPr rtlCol="0" anchor="ctr"/>
-          <a:lstStyle/>
-          <a:p>
-            <a:pPr algn="ctr"/>
-          </a:p>
-        </p:txBody>
-      </p:sp>
-      <p:pic>
-        <p:nvPicPr>
-          <p:cNvPr id="5" name="Picture 4" descr="shift_vs_depth.png"/>
-          <p:cNvPicPr>
-            <a:picLocks noChangeAspect="1"/>
-          </p:cNvPicPr>
+            <a:off x="640080" y="1170432"/>
+            <a:ext cx="11064240" cy="685800"/>
+          </a:xfrm>
+          <a:prstGeom prst="rect">
+            <a:avLst/>
+          </a:prstGeom>
+          <a:noFill/>
+        </p:spPr>
+        <p:txBody>
+          <a:bodyPr wrap="square" lIns="73152" rIns="36576" tIns="36576" bIns="36576">
+            <a:spAutoFit/>
+          </a:bodyPr>
+          <a:lstStyle/>
+          <a:p>
+            <a:pPr>
+              <a:spcAft>
+                <a:spcPts val="300"/>
+              </a:spcAft>
+              <a:defRPr sz="1700">
+                <a:solidFill>
+                  <a:srgbClr val="191F1C"/>
+                </a:solidFill>
+                <a:latin typeface="Aptos"/>
+              </a:defRPr>
+            </a:pPr>
+            <a:r>
+              <a:t>•  Nominal C_comp beats zero on all 12 tables, and the margin scales with the die capacitance.</a:t>
+            </a:r>
+          </a:p>
+        </p:txBody>
+      </p:sp>
+      <p:sp>
+        <p:nvSpPr>
+          <p:cNvPr id="5" name="TextBox 4"/>
+          <p:cNvSpPr txBox="1"/>
           <p:nvPr/>
-        </p:nvPicPr>
-        <p:blipFill>
-          <a:blip r:embed="rId2"/>
-          <a:stretch>
-            <a:fillRect/>
-          </a:stretch>
-        </p:blipFill>
-        <p:spPr>
-          <a:xfrm>
-            <a:off x="502920" y="1170432"/>
-            <a:ext cx="11155680" cy="4754879"/>
-          </a:xfrm>
-          <a:prstGeom prst="rect">
-            <a:avLst/>
-          </a:prstGeom>
-        </p:spPr>
-      </p:pic>
-      <p:sp>
-        <p:nvSpPr>
-          <p:cNvPr id="6" name="Rectangle 5"/>
-          <p:cNvSpPr/>
+        </p:nvSpPr>
+        <p:spPr>
+          <a:xfrm>
+            <a:off x="640080" y="2011680"/>
+            <a:ext cx="10972800" cy="457200"/>
+          </a:xfrm>
+          <a:prstGeom prst="rect">
+            <a:avLst/>
+          </a:prstGeom>
+          <a:noFill/>
+        </p:spPr>
+        <p:txBody>
+          <a:bodyPr wrap="square" lIns="45720" rIns="45720" anchor="t">
+            <a:spAutoFit/>
+          </a:bodyPr>
+          <a:lstStyle/>
+          <a:p>
+            <a:pPr algn="l">
+              <a:defRPr sz="1700" b="0">
+                <a:solidFill>
+                  <a:srgbClr val="191F1C"/>
+                </a:solidFill>
+                <a:latin typeface="Aptos"/>
+              </a:defRPr>
+            </a:pPr>
+            <a:r>
+              <a:t>50% crossing shift against the transistor, with C_comp at nominal and set to zero:</a:t>
+            </a:r>
+          </a:p>
+        </p:txBody>
+      </p:sp>
+      <p:sp>
+        <p:nvSpPr>
+          <p:cNvPr id="6" name="TextBox 5"/>
+          <p:cNvSpPr txBox="1"/>
           <p:nvPr/>
         </p:nvSpPr>
         <p:spPr>
           <a:xfrm>
-            <a:off x="384048" y="6062472"/>
-            <a:ext cx="11109960" cy="393192"/>
-          </a:xfrm>
-          <a:prstGeom prst="rect">
-            <a:avLst/>
-          </a:prstGeom>
-          <a:solidFill>
-            <a:srgbClr val="F1F8F2"/>
-          </a:solidFill>
-          <a:ln>
-            <a:solidFill>
-              <a:srgbClr val="F1F8F2"/>
-            </a:solidFill>
-          </a:ln>
-        </p:spPr>
-        <p:style>
-          <a:lnRef idx="1">
-            <a:schemeClr val="accent1"/>
-          </a:lnRef>
-          <a:fillRef idx="3">
-            <a:schemeClr val="accent1"/>
-          </a:fillRef>
-          <a:effectRef idx="2">
-            <a:schemeClr val="accent1"/>
-          </a:effectRef>
-          <a:fontRef idx="minor">
-            <a:schemeClr val="lt1"/>
-          </a:fontRef>
-        </p:style>
-        <p:txBody>
-          <a:bodyPr rtlCol="0" anchor="ctr"/>
-          <a:lstStyle/>
-          <a:p>
-            <a:pPr algn="ctr">
-              <a:defRPr sz="1400" b="1">
-                <a:solidFill>
-                  <a:srgbClr val="2B7A43"/>
+            <a:off x="640080" y="2560320"/>
+            <a:ext cx="11064240" cy="2057400"/>
+          </a:xfrm>
+          <a:prstGeom prst="rect">
+            <a:avLst/>
+          </a:prstGeom>
+          <a:noFill/>
+        </p:spPr>
+        <p:txBody>
+          <a:bodyPr wrap="square" lIns="73152" rIns="36576" tIns="36576" bIns="36576">
+            <a:spAutoFit/>
+          </a:bodyPr>
+          <a:lstStyle/>
+          <a:p>
+            <a:pPr>
+              <a:spcAft>
+                <a:spcPts val="300"/>
+              </a:spcAft>
+              <a:defRPr sz="1700">
+                <a:solidFill>
+                  <a:srgbClr val="191F1C"/>
                 </a:solidFill>
                 <a:latin typeface="Aptos"/>
               </a:defRPr>
             </a:pPr>
             <a:r>
-              <a:t>Not a fixed penalty. It grows with truncation on every buffer we have tried.</a:t>
+              <a:t>•  50 Ω, 0 pF     +6.7 ps        −277.8 ps</a:t>
+            </a:r>
+          </a:p>
+          <a:p>
+            <a:pPr>
+              <a:spcAft>
+                <a:spcPts val="300"/>
+              </a:spcAft>
+              <a:defRPr sz="1700">
+                <a:solidFill>
+                  <a:srgbClr val="191F1C"/>
+                </a:solidFill>
+                <a:latin typeface="Aptos"/>
+              </a:defRPr>
+            </a:pPr>
+            <a:r>
+              <a:t>•  500 Ω, 2 pF    −0.2 ps          −0.9 ps</a:t>
+            </a:r>
+          </a:p>
+          <a:p>
+            <a:pPr>
+              <a:spcAft>
+                <a:spcPts val="300"/>
+              </a:spcAft>
+              <a:defRPr sz="1700">
+                <a:solidFill>
+                  <a:srgbClr val="191F1C"/>
+                </a:solidFill>
+                <a:latin typeface="Aptos"/>
+              </a:defRPr>
+            </a:pPr>
+            <a:r>
+              <a:t>•  1 kΩ, 5 pF     −1.3 ps          −1.1 ps</a:t>
+            </a:r>
+          </a:p>
+        </p:txBody>
+      </p:sp>
+      <p:sp>
+        <p:nvSpPr>
+          <p:cNvPr id="7" name="TextBox 6"/>
+          <p:cNvSpPr txBox="1"/>
+          <p:nvPr/>
+        </p:nvSpPr>
+        <p:spPr>
+          <a:xfrm>
+            <a:off x="640080" y="4480560"/>
+            <a:ext cx="10972800" cy="1005840"/>
+          </a:xfrm>
+          <a:prstGeom prst="rect">
+            <a:avLst/>
+          </a:prstGeom>
+          <a:noFill/>
+        </p:spPr>
+        <p:txBody>
+          <a:bodyPr wrap="square" lIns="45720" rIns="45720" anchor="t">
+            <a:spAutoFit/>
+          </a:bodyPr>
+          <a:lstStyle/>
+          <a:p>
+            <a:pPr algn="l">
+              <a:defRPr sz="1700" b="0">
+                <a:solidFill>
+                  <a:srgbClr val="191F1C"/>
+                </a:solidFill>
+                <a:latin typeface="Aptos"/>
+              </a:defRPr>
+            </a:pPr>
+            <a:r>
+              <a:t>I had this backwards at first. I misapplied the book's double-counting diagnostic and reported that our model over-applies C_comp; the golden-waveform test overturned it.</a:t>
             </a:r>
           </a:p>
         </p:txBody>

--- a/results/meeting_deck_2026-09-04/ibis_pybis_status_2026-09-04.pptx
+++ b/results/meeting_deck_2026-09-04/ibis_pybis_status_2026-09-04.pptx
@@ -22,6 +22,8 @@
     <p:sldId id="267" r:id="rId19"/>
     <p:sldId id="268" r:id="rId20"/>
     <p:sldId id="269" r:id="rId21"/>
+    <p:sldId id="270" r:id="rId22"/>
+    <p:sldId id="271" r:id="rId23"/>
   </p:sldIdLst>
   <p:sldSz cx="12192000" cy="6858000"/>
   <p:notesSz cx="6858000" cy="9144000"/>
@@ -625,6 +627,146 @@
 </p:notes>
 </file>
 
+<file path=ppt/notesSlides/notesSlide10.xml><?xml version="1.0" encoding="utf-8"?>
+<p:notes xmlns:a="http://schemas.openxmlformats.org/drawingml/2006/main" xmlns:p="http://schemas.openxmlformats.org/presentationml/2006/main" xmlns:r="http://schemas.openxmlformats.org/officeDocument/2006/relationships">
+  <p:cSld>
+    <p:spTree>
+      <p:nvGrpSpPr>
+        <p:cNvPr id="1" name=""/>
+        <p:cNvGrpSpPr/>
+        <p:nvPr/>
+      </p:nvGrpSpPr>
+      <p:grpSpPr>
+        <a:xfrm>
+          <a:off x="0" y="0"/>
+          <a:ext cx="0" cy="0"/>
+          <a:chOff x="0" y="0"/>
+          <a:chExt cx="0" cy="0"/>
+        </a:xfrm>
+      </p:grpSpPr>
+      <p:sp>
+        <p:nvSpPr>
+          <p:cNvPr id="2" name="Slide Image Placeholder 1"/>
+          <p:cNvSpPr>
+            <a:spLocks noGrp="1"/>
+          </p:cNvSpPr>
+          <p:nvPr>
+            <p:ph type="sldImg" idx="2"/>
+          </p:nvPr>
+        </p:nvSpPr>
+        <p:spPr/>
+      </p:sp>
+      <p:sp>
+        <p:nvSpPr>
+          <p:cNvPr id="3" name="Notes Placeholder 2"/>
+          <p:cNvSpPr>
+            <a:spLocks noGrp="1"/>
+          </p:cNvSpPr>
+          <p:nvPr>
+            <p:ph type="body" idx="3" sz="quarter"/>
+          </p:nvPr>
+        </p:nvSpPr>
+        <p:spPr/>
+        <p:txBody>
+          <a:bodyPr/>
+          <a:lstStyle/>
+          <a:p>
+            <a:r>
+              <a:t>Ku and Kd here come from the transistor itself, by driving it into two fixtures and running the same two-equation solve the model uses. That is a ground-truth coefficient target, not native IBIS's opinion.</a:t>
+            </a:r>
+          </a:p>
+        </p:txBody>
+      </p:sp>
+      <p:sp>
+        <p:nvSpPr>
+          <p:cNvPr id="4" name="Slide Number Placeholder 3"/>
+          <p:cNvSpPr>
+            <a:spLocks noGrp="1"/>
+          </p:cNvSpPr>
+          <p:nvPr>
+            <p:ph type="sldNum" idx="5" sz="quarter"/>
+          </p:nvPr>
+        </p:nvSpPr>
+        <p:spPr/>
+      </p:sp>
+    </p:spTree>
+  </p:cSld>
+  <p:clrMapOvr>
+    <a:masterClrMapping/>
+  </p:clrMapOvr>
+</p:notes>
+</file>
+
+<file path=ppt/notesSlides/notesSlide11.xml><?xml version="1.0" encoding="utf-8"?>
+<p:notes xmlns:a="http://schemas.openxmlformats.org/drawingml/2006/main" xmlns:p="http://schemas.openxmlformats.org/presentationml/2006/main" xmlns:r="http://schemas.openxmlformats.org/officeDocument/2006/relationships">
+  <p:cSld>
+    <p:spTree>
+      <p:nvGrpSpPr>
+        <p:cNvPr id="1" name=""/>
+        <p:cNvGrpSpPr/>
+        <p:nvPr/>
+      </p:nvGrpSpPr>
+      <p:grpSpPr>
+        <a:xfrm>
+          <a:off x="0" y="0"/>
+          <a:ext cx="0" cy="0"/>
+          <a:chOff x="0" y="0"/>
+          <a:chExt cx="0" cy="0"/>
+        </a:xfrm>
+      </p:grpSpPr>
+      <p:sp>
+        <p:nvSpPr>
+          <p:cNvPr id="2" name="Slide Image Placeholder 1"/>
+          <p:cNvSpPr>
+            <a:spLocks noGrp="1"/>
+          </p:cNvSpPr>
+          <p:nvPr>
+            <p:ph type="sldImg" idx="2"/>
+          </p:nvPr>
+        </p:nvSpPr>
+        <p:spPr/>
+      </p:sp>
+      <p:sp>
+        <p:nvSpPr>
+          <p:cNvPr id="3" name="Notes Placeholder 2"/>
+          <p:cNvSpPr>
+            <a:spLocks noGrp="1"/>
+          </p:cNvSpPr>
+          <p:nvPr>
+            <p:ph type="body" idx="3" sz="quarter"/>
+          </p:nvPr>
+        </p:nvSpPr>
+        <p:spPr/>
+        <p:txBody>
+          <a:bodyPr/>
+          <a:lstStyle/>
+          <a:p>
+            <a:r>
+              <a:t>Two rules worth not re-learning: any bench for this model must start with a real edge, never a held level, because it initialises pulldown-on and latches state only on an edge. And ngspice must be converged before drawing any conclusion.</a:t>
+            </a:r>
+          </a:p>
+        </p:txBody>
+      </p:sp>
+      <p:sp>
+        <p:nvSpPr>
+          <p:cNvPr id="4" name="Slide Number Placeholder 3"/>
+          <p:cNvSpPr>
+            <a:spLocks noGrp="1"/>
+          </p:cNvSpPr>
+          <p:nvPr>
+            <p:ph type="sldNum" idx="5" sz="quarter"/>
+          </p:nvPr>
+        </p:nvSpPr>
+        <p:spPr/>
+      </p:sp>
+    </p:spTree>
+  </p:cSld>
+  <p:clrMapOvr>
+    <a:masterClrMapping/>
+  </p:clrMapOvr>
+</p:notes>
+</file>
+
 <file path=ppt/notesSlides/notesSlide2.xml><?xml version="1.0" encoding="utf-8"?>
 <p:notes xmlns:a="http://schemas.openxmlformats.org/drawingml/2006/main" xmlns:p="http://schemas.openxmlformats.org/presentationml/2006/main" xmlns:r="http://schemas.openxmlformats.org/officeDocument/2006/relationships">
   <p:cSld>
@@ -810,7 +952,7 @@
           <a:lstStyle/>
           <a:p>
             <a:r>
-              <a:t>The sign of the stranded charge flips with the timestep, so it is an integration error. Any fix by tuning a coefficient is a coin flip, which is why the retuned version helped on some cases and not others.</a:t>
+              <a:t>The plan quotes 69-99 ps late where native is 5-26 ps early. That is not reproducible from the data on disk with this metric -- what the stress matrix shows is about 15 ps later than native on io_buf and inv_chain, and on ex2 both are early with ours the closer. The defect is real and device-dependent, but smaller and less one-sided than the plan states.</a:t>
             </a:r>
           </a:p>
         </p:txBody>
@@ -880,7 +1022,7 @@
           <a:lstStyle/>
           <a:p>
             <a:r>
-              <a:t>On this case the pedestal goes from 97.9 mV to 5.2 mV against the transistor's 2.1 mV. Across all 29 matched stress cases RMSE goes from 108.6 to 92.2 mV, the only build that beats native IBIS. Caveat to state: delay_cmd has a 1.25 ns dead zone after a reversal where neither device is commanded on.</a:t>
+              <a:t>The sign of the stranded charge flips with the timestep, so it is an integration error. Any fix by tuning a coefficient is a coin flip, which is why the retuned version helped on some cases and not others.</a:t>
             </a:r>
           </a:p>
         </p:txBody>
@@ -950,7 +1092,7 @@
           <a:lstStyle/>
           <a:p>
             <a:r>
-              <a:t>I proposed the wrong cause first -- Miller feedthrough -- and built the nomiller variant to test it. It came back identical to the control. Those caps are 20.5 fF against C_comp's 5 pF, 0.41%, 250x too small, which is arithmetic I should have done before building the variant.</a:t>
+              <a:t>One line of the generated subcircuit separates them. gate_state: CGUPCMD across RGUPCMD 1e15 with BGUPCMDON injecting a packet per edge. delay_cmd: BGUPCMD GUPCMD 0 V = V(PUCMDLVL). On the tail after the reversal gate_state sits at -0.144 and creeps back over ~3 ns; delay_cmd is at exactly 0. On this particular bench the stranded charge is negative and the command clamp removes it before it reaches Ku, so the two pads agree to 5 mV -- the pad consequence on the right is the case where the charge is positive.</a:t>
             </a:r>
           </a:p>
         </p:txBody>
@@ -1020,7 +1162,7 @@
           <a:lstStyle/>
           <a:p>
             <a:r>
-              <a:t>Ku and Kd here come from the transistor itself, by driving it into two fixtures and running the same two-equation solve the model uses. That is a ground-truth coefficient target, not native IBIS's opinion.</a:t>
+              <a:t>On this case the pedestal goes from 97.9 mV to 5.2 mV against the transistor's 2.1 mV. Across all 29 matched stress cases RMSE goes from 108.6 to 92.2 mV, the only build that beats native IBIS. Caveat to state: delay_cmd has a 1.25 ns dead zone after a reversal where neither device is commanded on.</a:t>
             </a:r>
           </a:p>
         </p:txBody>
@@ -1090,7 +1232,77 @@
           <a:lstStyle/>
           <a:p>
             <a:r>
-              <a:t>Two rules worth not re-learning: any bench for this model must start with a real edge, never a held level, because it initialises pulldown-on and latches state only on an edge. And ngspice must be converged before drawing any conclusion.</a:t>
+              <a:t>The control reproduces the shipped solve to 2.4e-08, so the method is exact. In quiet regions Ku is load-independent to four decimals, which is the point: the extraction is a device property, not a fixture artifact. On io_buf the mean Ku error is 0.011 for C alone, 0.14-0.16 for L, and the worst-case excursion reaches 7.9 on L 2 nH. Practical rule: avoid a resonant fixture when characterising.</a:t>
+            </a:r>
+          </a:p>
+        </p:txBody>
+      </p:sp>
+      <p:sp>
+        <p:nvSpPr>
+          <p:cNvPr id="4" name="Slide Number Placeholder 3"/>
+          <p:cNvSpPr>
+            <a:spLocks noGrp="1"/>
+          </p:cNvSpPr>
+          <p:nvPr>
+            <p:ph type="sldNum" idx="5" sz="quarter"/>
+          </p:nvPr>
+        </p:nvSpPr>
+        <p:spPr/>
+      </p:sp>
+    </p:spTree>
+  </p:cSld>
+  <p:clrMapOvr>
+    <a:masterClrMapping/>
+  </p:clrMapOvr>
+</p:notes>
+</file>
+
+<file path=ppt/notesSlides/notesSlide9.xml><?xml version="1.0" encoding="utf-8"?>
+<p:notes xmlns:a="http://schemas.openxmlformats.org/drawingml/2006/main" xmlns:p="http://schemas.openxmlformats.org/presentationml/2006/main" xmlns:r="http://schemas.openxmlformats.org/officeDocument/2006/relationships">
+  <p:cSld>
+    <p:spTree>
+      <p:nvGrpSpPr>
+        <p:cNvPr id="1" name=""/>
+        <p:cNvGrpSpPr/>
+        <p:nvPr/>
+      </p:nvGrpSpPr>
+      <p:grpSpPr>
+        <a:xfrm>
+          <a:off x="0" y="0"/>
+          <a:ext cx="0" cy="0"/>
+          <a:chOff x="0" y="0"/>
+          <a:chExt cx="0" cy="0"/>
+        </a:xfrm>
+      </p:grpSpPr>
+      <p:sp>
+        <p:nvSpPr>
+          <p:cNvPr id="2" name="Slide Image Placeholder 1"/>
+          <p:cNvSpPr>
+            <a:spLocks noGrp="1"/>
+          </p:cNvSpPr>
+          <p:nvPr>
+            <p:ph type="sldImg" idx="2"/>
+          </p:nvPr>
+        </p:nvSpPr>
+        <p:spPr/>
+      </p:sp>
+      <p:sp>
+        <p:nvSpPr>
+          <p:cNvPr id="3" name="Notes Placeholder 2"/>
+          <p:cNvSpPr>
+            <a:spLocks noGrp="1"/>
+          </p:cNvSpPr>
+          <p:nvPr>
+            <p:ph type="body" idx="3" sz="quarter"/>
+          </p:nvPr>
+        </p:nvSpPr>
+        <p:spPr/>
+        <p:txBody>
+          <a:bodyPr/>
+          <a:lstStyle/>
+          <a:p>
+            <a:r>
+              <a:t>I proposed the wrong cause first -- Miller feedthrough -- and built the nomiller variant to test it. It came back identical to the control. Those caps are 20.5 fF against C_comp's 5 pF, 0.41%, 250x too small, which is arithmetic I should have done before building the variant.</a:t>
             </a:r>
           </a:p>
         </p:txBody>
@@ -3161,7 +3373,7 @@
               </a:defRPr>
             </a:pPr>
             <a:r>
-              <a:t>Is the difference the engine or the model?</a:t>
+              <a:t>The core reconstruction is sound</a:t>
             </a:r>
           </a:p>
         </p:txBody>
@@ -3197,7 +3409,7 @@
               </a:defRPr>
             </a:pPr>
             <a:r>
-              <a:t>METHOD</a:t>
+              <a:t>CONFIDENCE</a:t>
             </a:r>
           </a:p>
         </p:txBody>
@@ -3211,7 +3423,7 @@
         <p:spPr>
           <a:xfrm>
             <a:off x="640080" y="1170432"/>
-            <a:ext cx="11064240" cy="685800"/>
+            <a:ext cx="11064240" cy="1371600"/>
           </a:xfrm>
           <a:prstGeom prst="rect">
             <a:avLst/>
@@ -3236,68 +3448,9 @@
               </a:defRPr>
             </a:pPr>
             <a:r>
-              <a:t>•  Every native-vs-ours number changes two things at once. We wrote a translator so the same model runs in both simulators.</a:t>
-            </a:r>
-          </a:p>
-        </p:txBody>
-      </p:sp>
-      <p:sp>
-        <p:nvSpPr>
-          <p:cNvPr id="5" name="TextBox 4"/>
-          <p:cNvSpPr txBox="1"/>
-          <p:nvPr/>
-        </p:nvSpPr>
-        <p:spPr>
-          <a:xfrm>
-            <a:off x="640080" y="2103120"/>
-            <a:ext cx="10972800" cy="457200"/>
-          </a:xfrm>
-          <a:prstGeom prst="rect">
-            <a:avLst/>
-          </a:prstGeom>
-          <a:noFill/>
-        </p:spPr>
-        <p:txBody>
-          <a:bodyPr wrap="square" lIns="45720" rIns="45720" anchor="t">
-            <a:spAutoFit/>
-          </a:bodyPr>
-          <a:lstStyle/>
-          <a:p>
-            <a:pPr algn="l">
-              <a:defRPr sz="1700" b="0">
-                <a:solidFill>
-                  <a:srgbClr val="191F1C"/>
-                </a:solidFill>
-                <a:latin typeface="Aptos"/>
-              </a:defRPr>
-            </a:pPr>
-            <a:r>
-              <a:t>Falling 50% crossing:</a:t>
-            </a:r>
-          </a:p>
-        </p:txBody>
-      </p:sp>
-      <p:sp>
-        <p:nvSpPr>
-          <p:cNvPr id="6" name="TextBox 5"/>
-          <p:cNvSpPr txBox="1"/>
-          <p:nvPr/>
-        </p:nvSpPr>
-        <p:spPr>
-          <a:xfrm>
-            <a:off x="640080" y="2651760"/>
-            <a:ext cx="11064240" cy="2057400"/>
-          </a:xfrm>
-          <a:prstGeom prst="rect">
-            <a:avLst/>
-          </a:prstGeom>
-          <a:noFill/>
-        </p:spPr>
-        <p:txBody>
-          <a:bodyPr wrap="square" lIns="73152" rIns="36576" tIns="36576" bIns="36576">
-            <a:spAutoFit/>
-          </a:bodyPr>
-          <a:lstStyle/>
+              <a:t>•  A golden-waveform test replays a model's own V-T tables into the fixture that produced them — no transistor, no native IBIS, no engine confound.</a:t>
+            </a:r>
+          </a:p>
           <a:p>
             <a:pPr>
               <a:spcAft>
@@ -3311,9 +3464,68 @@
               </a:defRPr>
             </a:pPr>
             <a:r>
-              <a:t>•  our model in ngspice     5.3371 ns</a:t>
-            </a:r>
-          </a:p>
+              <a:t>•  We had never done this before. It is now the standing health check.</a:t>
+            </a:r>
+          </a:p>
+        </p:txBody>
+      </p:sp>
+      <p:sp>
+        <p:nvSpPr>
+          <p:cNvPr id="5" name="TextBox 4"/>
+          <p:cNvSpPr txBox="1"/>
+          <p:nvPr/>
+        </p:nvSpPr>
+        <p:spPr>
+          <a:xfrm>
+            <a:off x="640080" y="2834640"/>
+            <a:ext cx="10972800" cy="457200"/>
+          </a:xfrm>
+          <a:prstGeom prst="rect">
+            <a:avLst/>
+          </a:prstGeom>
+          <a:noFill/>
+        </p:spPr>
+        <p:txBody>
+          <a:bodyPr wrap="square" lIns="45720" rIns="45720" anchor="t">
+            <a:spAutoFit/>
+          </a:bodyPr>
+          <a:lstStyle/>
+          <a:p>
+            <a:pPr algn="l">
+              <a:defRPr sz="1700" b="0">
+                <a:solidFill>
+                  <a:srgbClr val="191F1C"/>
+                </a:solidFill>
+                <a:latin typeface="Aptos"/>
+              </a:defRPr>
+            </a:pPr>
+            <a:r>
+              <a:t>Our model against its own golden waveforms, three buffers, both edges, both fixtures:</a:t>
+            </a:r>
+          </a:p>
+        </p:txBody>
+      </p:sp>
+      <p:sp>
+        <p:nvSpPr>
+          <p:cNvPr id="6" name="TextBox 5"/>
+          <p:cNvSpPr txBox="1"/>
+          <p:nvPr/>
+        </p:nvSpPr>
+        <p:spPr>
+          <a:xfrm>
+            <a:off x="640080" y="3383280"/>
+            <a:ext cx="11064240" cy="1371600"/>
+          </a:xfrm>
+          <a:prstGeom prst="rect">
+            <a:avLst/>
+          </a:prstGeom>
+          <a:noFill/>
+        </p:spPr>
+        <p:txBody>
+          <a:bodyPr wrap="square" lIns="73152" rIns="36576" tIns="36576" bIns="36576">
+            <a:spAutoFit/>
+          </a:bodyPr>
+          <a:lstStyle/>
           <a:p>
             <a:pPr>
               <a:spcAft>
@@ -3327,7 +3539,7 @@
               </a:defRPr>
             </a:pPr>
             <a:r>
-              <a:t>•  our model in HSPICE      5.3375 ns     engine:  −0.5 ps</a:t>
+              <a:t>•  figure of merit   0.03 – 0.41 %</a:t>
             </a:r>
           </a:p>
           <a:p>
@@ -3343,7 +3555,7 @@
               </a:defRPr>
             </a:pPr>
             <a:r>
-              <a:t>•  native IBIS in HSPICE    5.3319 ns     model:   +5.6 ps</a:t>
+              <a:t>•  timing shift      +4 to +8 ps</a:t>
             </a:r>
           </a:p>
         </p:txBody>
@@ -3357,7 +3569,7 @@
         <p:spPr>
           <a:xfrm>
             <a:off x="640080" y="4572000"/>
-            <a:ext cx="10972800" cy="914400"/>
+            <a:ext cx="10972800" cy="731520"/>
           </a:xfrm>
           <a:prstGeom prst="rect">
             <a:avLst/>
@@ -3379,7 +3591,7 @@
               </a:defRPr>
             </a:pPr>
             <a:r>
-              <a:t>The engine is not the source — provided ngspice is converged. At a 1 ps step it was an aliasing outlier that doubled the apparent lag.</a:t>
+              <a:t>So whatever is wrong under stress, it is not the I-V × Ku(t) reconstruction.</a:t>
             </a:r>
           </a:p>
         </p:txBody>
@@ -3426,7 +3638,7 @@
               </a:defRPr>
             </a:pPr>
             <a:r>
-              <a:t>What fixtures do to the extracted Ku/Kd</a:t>
+              <a:t>C_comp is handled correctly</a:t>
             </a:r>
           </a:p>
         </p:txBody>
@@ -3462,7 +3674,7 @@
               </a:defRPr>
             </a:pPr>
             <a:r>
-              <a:t>METHOD</a:t>
+              <a:t>CONFIDENCE</a:t>
             </a:r>
           </a:p>
         </p:txBody>
@@ -3476,7 +3688,7 @@
         <p:spPr>
           <a:xfrm>
             <a:off x="640080" y="1170432"/>
-            <a:ext cx="11064240" cy="2057400"/>
+            <a:ext cx="11064240" cy="685800"/>
           </a:xfrm>
           <a:prstGeom prst="rect">
             <a:avLst/>
@@ -3501,9 +3713,68 @@
               </a:defRPr>
             </a:pPr>
             <a:r>
-              <a:t>•  The control reproduces the shipped solve to 2.4e−08, so the method is exact.</a:t>
-            </a:r>
-          </a:p>
+              <a:t>•  Nominal C_comp beats zero on all 12 tables, and the margin scales with the die capacitance.</a:t>
+            </a:r>
+          </a:p>
+        </p:txBody>
+      </p:sp>
+      <p:sp>
+        <p:nvSpPr>
+          <p:cNvPr id="5" name="TextBox 4"/>
+          <p:cNvSpPr txBox="1"/>
+          <p:nvPr/>
+        </p:nvSpPr>
+        <p:spPr>
+          <a:xfrm>
+            <a:off x="640080" y="2011680"/>
+            <a:ext cx="10972800" cy="457200"/>
+          </a:xfrm>
+          <a:prstGeom prst="rect">
+            <a:avLst/>
+          </a:prstGeom>
+          <a:noFill/>
+        </p:spPr>
+        <p:txBody>
+          <a:bodyPr wrap="square" lIns="45720" rIns="45720" anchor="t">
+            <a:spAutoFit/>
+          </a:bodyPr>
+          <a:lstStyle/>
+          <a:p>
+            <a:pPr algn="l">
+              <a:defRPr sz="1700" b="0">
+                <a:solidFill>
+                  <a:srgbClr val="191F1C"/>
+                </a:solidFill>
+                <a:latin typeface="Aptos"/>
+              </a:defRPr>
+            </a:pPr>
+            <a:r>
+              <a:t>50% crossing shift against the transistor, with C_comp at nominal and set to zero:</a:t>
+            </a:r>
+          </a:p>
+        </p:txBody>
+      </p:sp>
+      <p:sp>
+        <p:nvSpPr>
+          <p:cNvPr id="6" name="TextBox 5"/>
+          <p:cNvSpPr txBox="1"/>
+          <p:nvPr/>
+        </p:nvSpPr>
+        <p:spPr>
+          <a:xfrm>
+            <a:off x="640080" y="2560320"/>
+            <a:ext cx="11064240" cy="2057400"/>
+          </a:xfrm>
+          <a:prstGeom prst="rect">
+            <a:avLst/>
+          </a:prstGeom>
+          <a:noFill/>
+        </p:spPr>
+        <p:txBody>
+          <a:bodyPr wrap="square" lIns="73152" rIns="36576" tIns="36576" bIns="36576">
+            <a:spAutoFit/>
+          </a:bodyPr>
+          <a:lstStyle/>
           <a:p>
             <a:pPr>
               <a:spcAft>
@@ -3517,7 +3788,7 @@
               </a:defRPr>
             </a:pPr>
             <a:r>
-              <a:t>•  In quiet regions Ku is load-independent to four decimals — a device property, not a fixture artifact.</a:t>
+              <a:t>•  50 Ω, 0 pF     +6.7 ps        −277.8 ps</a:t>
             </a:r>
           </a:p>
           <a:p>
@@ -3533,21 +3804,37 @@
               </a:defRPr>
             </a:pPr>
             <a:r>
-              <a:t>•  A resonant R+L+C fixture corrupts Ku for 1.14 ns, reaching 0.26 of error.</a:t>
-            </a:r>
-          </a:p>
-        </p:txBody>
-      </p:sp>
-      <p:sp>
-        <p:nvSpPr>
-          <p:cNvPr id="5" name="TextBox 4"/>
+              <a:t>•  500 Ω, 2 pF    −0.2 ps          −0.9 ps</a:t>
+            </a:r>
+          </a:p>
+          <a:p>
+            <a:pPr>
+              <a:spcAft>
+                <a:spcPts val="300"/>
+              </a:spcAft>
+              <a:defRPr sz="1700">
+                <a:solidFill>
+                  <a:srgbClr val="191F1C"/>
+                </a:solidFill>
+                <a:latin typeface="Aptos"/>
+              </a:defRPr>
+            </a:pPr>
+            <a:r>
+              <a:t>•  1 kΩ, 5 pF     −1.3 ps          −1.1 ps</a:t>
+            </a:r>
+          </a:p>
+        </p:txBody>
+      </p:sp>
+      <p:sp>
+        <p:nvSpPr>
+          <p:cNvPr id="7" name="TextBox 6"/>
           <p:cNvSpPr txBox="1"/>
           <p:nvPr/>
         </p:nvSpPr>
         <p:spPr>
           <a:xfrm>
-            <a:off x="640080" y="3931920"/>
-            <a:ext cx="10972800" cy="731520"/>
+            <a:off x="640080" y="4480560"/>
+            <a:ext cx="10972800" cy="1005840"/>
           </a:xfrm>
           <a:prstGeom prst="rect">
             <a:avLst/>
@@ -3569,7 +3856,7 @@
               </a:defRPr>
             </a:pPr>
             <a:r>
-              <a:t>Added L and C are safe individually. The resonant combination has to be avoided when characterising.</a:t>
+              <a:t>I had this backwards at first. I misapplied the book's double-counting diagnostic and reported that our model over-applies C_comp; the golden-waveform test overturned it.</a:t>
             </a:r>
           </a:p>
         </p:txBody>
@@ -3616,7 +3903,7 @@
               </a:defRPr>
             </a:pPr>
             <a:r>
-              <a:t>The 1.25 max|Ku| cap rejects good models</a:t>
+              <a:t>Is the difference the engine or the model?</a:t>
             </a:r>
           </a:p>
         </p:txBody>
@@ -3652,7 +3939,7 @@
               </a:defRPr>
             </a:pPr>
             <a:r>
-              <a:t>WHAT SHOULD CHANGE</a:t>
+              <a:t>METHOD</a:t>
             </a:r>
           </a:p>
         </p:txBody>
@@ -3665,44 +3952,8 @@
         </p:nvSpPr>
         <p:spPr>
           <a:xfrm>
-            <a:off x="640080" y="1188720"/>
-            <a:ext cx="10972800" cy="457200"/>
-          </a:xfrm>
-          <a:prstGeom prst="rect">
-            <a:avLst/>
-          </a:prstGeom>
-          <a:noFill/>
-        </p:spPr>
-        <p:txBody>
-          <a:bodyPr wrap="square" lIns="45720" rIns="45720" anchor="t">
-            <a:spAutoFit/>
-          </a:bodyPr>
-          <a:lstStyle/>
-          <a:p>
-            <a:pPr algn="l">
-              <a:defRPr sz="1700" b="0">
-                <a:solidFill>
-                  <a:srgbClr val="191F1C"/>
-                </a:solidFill>
-                <a:latin typeface="Aptos"/>
-              </a:defRPr>
-            </a:pPr>
-            <a:r>
-              <a:t>ex2 variants, across all seven characterisation edge rates:</a:t>
-            </a:r>
-          </a:p>
-        </p:txBody>
-      </p:sp>
-      <p:sp>
-        <p:nvSpPr>
-          <p:cNvPr id="5" name="TextBox 4"/>
-          <p:cNvSpPr txBox="1"/>
-          <p:nvPr/>
-        </p:nvSpPr>
-        <p:spPr>
-          <a:xfrm>
-            <a:off x="640080" y="1737360"/>
-            <a:ext cx="11064240" cy="3429000"/>
+            <a:off x="640080" y="1170432"/>
+            <a:ext cx="11064240" cy="685800"/>
           </a:xfrm>
           <a:prstGeom prst="rect">
             <a:avLst/>
@@ -3727,9 +3978,68 @@
               </a:defRPr>
             </a:pPr>
             <a:r>
-              <a:t>•  slowpre   predriver halved      328 ps      1.047</a:t>
-            </a:r>
-          </a:p>
+              <a:t>•  Every native-vs-ours number changes two things at once. We wrote a translator so the same model runs in both simulators.</a:t>
+            </a:r>
+          </a:p>
+        </p:txBody>
+      </p:sp>
+      <p:sp>
+        <p:nvSpPr>
+          <p:cNvPr id="5" name="TextBox 4"/>
+          <p:cNvSpPr txBox="1"/>
+          <p:nvPr/>
+        </p:nvSpPr>
+        <p:spPr>
+          <a:xfrm>
+            <a:off x="640080" y="2103120"/>
+            <a:ext cx="10972800" cy="457200"/>
+          </a:xfrm>
+          <a:prstGeom prst="rect">
+            <a:avLst/>
+          </a:prstGeom>
+          <a:noFill/>
+        </p:spPr>
+        <p:txBody>
+          <a:bodyPr wrap="square" lIns="45720" rIns="45720" anchor="t">
+            <a:spAutoFit/>
+          </a:bodyPr>
+          <a:lstStyle/>
+          <a:p>
+            <a:pPr algn="l">
+              <a:defRPr sz="1700" b="0">
+                <a:solidFill>
+                  <a:srgbClr val="191F1C"/>
+                </a:solidFill>
+                <a:latin typeface="Aptos"/>
+              </a:defRPr>
+            </a:pPr>
+            <a:r>
+              <a:t>Falling 50% crossing:</a:t>
+            </a:r>
+          </a:p>
+        </p:txBody>
+      </p:sp>
+      <p:sp>
+        <p:nvSpPr>
+          <p:cNvPr id="6" name="TextBox 5"/>
+          <p:cNvSpPr txBox="1"/>
+          <p:nvPr/>
+        </p:nvSpPr>
+        <p:spPr>
+          <a:xfrm>
+            <a:off x="640080" y="2651760"/>
+            <a:ext cx="11064240" cy="2057400"/>
+          </a:xfrm>
+          <a:prstGeom prst="rect">
+            <a:avLst/>
+          </a:prstGeom>
+          <a:noFill/>
+        </p:spPr>
+        <p:txBody>
+          <a:bodyPr wrap="square" lIns="73152" rIns="36576" tIns="36576" bIns="36576">
+            <a:spAutoFit/>
+          </a:bodyPr>
+          <a:lstStyle/>
           <a:p>
             <a:pPr>
               <a:spcAft>
@@ -3743,7 +4053,7 @@
               </a:defRPr>
             </a:pPr>
             <a:r>
-              <a:t>•  base      control               200 ps      1.283</a:t>
+              <a:t>•  our model in ngspice     5.3371 ns</a:t>
             </a:r>
           </a:p>
           <a:p>
@@ -3759,7 +4069,7 @@
               </a:defRPr>
             </a:pPr>
             <a:r>
-              <a:t>•  nomiller  Miller caps removed   208 ps      1.299</a:t>
+              <a:t>•  our model in HSPICE      5.3375 ns     engine:  −0.5 ps</a:t>
             </a:r>
           </a:p>
           <a:p>
@@ -3775,37 +4085,21 @@
               </a:defRPr>
             </a:pPr>
             <a:r>
-              <a:t>•  skewp     output PMOS halved    160 ps      1.589</a:t>
-            </a:r>
-          </a:p>
-          <a:p>
-            <a:pPr>
-              <a:spcAft>
-                <a:spcPts val="300"/>
-              </a:spcAft>
-              <a:defRPr sz="1700">
-                <a:solidFill>
-                  <a:srgbClr val="191F1C"/>
-                </a:solidFill>
-                <a:latin typeface="Aptos"/>
-              </a:defRPr>
-            </a:pPr>
-            <a:r>
-              <a:t>•  weak      both devices halved   152 ps      1.779</a:t>
-            </a:r>
-          </a:p>
-        </p:txBody>
-      </p:sp>
-      <p:sp>
-        <p:nvSpPr>
-          <p:cNvPr id="6" name="TextBox 5"/>
+              <a:t>•  native IBIS in HSPICE    5.3319 ns     model:   +5.6 ps</a:t>
+            </a:r>
+          </a:p>
+        </p:txBody>
+      </p:sp>
+      <p:sp>
+        <p:nvSpPr>
+          <p:cNvPr id="7" name="TextBox 6"/>
           <p:cNvSpPr txBox="1"/>
           <p:nvPr/>
         </p:nvSpPr>
         <p:spPr>
           <a:xfrm>
-            <a:off x="640080" y="4480560"/>
-            <a:ext cx="10972800" cy="1463040"/>
+            <a:off x="640080" y="4572000"/>
+            <a:ext cx="10972800" cy="914400"/>
           </a:xfrm>
           <a:prstGeom prst="rect">
             <a:avLst/>
@@ -3827,11 +4121,7 @@
               </a:defRPr>
             </a:pPr>
             <a:r>
-              <a:t>It follows C_comp × dV/dt against the device drive. For ex2 that is 82 mA of displacement current against a ~51 mA drive — it exceeds the device, so the solve has to push Ku above 1.</a:t>
-            </a:r>
-            <a:br/>
-            <a:r>
-              <a:t>Healthy baselines differ per silicon: inv_chain 1.03, io_buf 1.18, ex2 1.28. No absolute number works; it should be a within-buffer outlier test.</a:t>
+              <a:t>The engine is not the source — provided ngspice is converged. At a 1 ps step it was an aliasing outlier that doubled the apparent lag.</a:t>
             </a:r>
           </a:p>
         </p:txBody>
@@ -3878,7 +4168,7 @@
               </a:defRPr>
             </a:pPr>
             <a:r>
-              <a:t>Nine new buffer variants, same stress axis</a:t>
+              <a:t>What fixtures do to the extracted Ku/Kd</a:t>
             </a:r>
           </a:p>
         </p:txBody>
@@ -3914,7 +4204,7 @@
               </a:defRPr>
             </a:pPr>
             <a:r>
-              <a:t>WHAT SHOULD CHANGE</a:t>
+              <a:t>METHOD</a:t>
             </a:r>
           </a:p>
         </p:txBody>
@@ -3953,7 +4243,7 @@
               </a:defRPr>
             </a:pPr>
             <a:r>
-              <a:t>•  Slower predriver, halved output devices, skewed PMOS, open-drain.</a:t>
+              <a:t>•  Ku re-solved on five different characterisation fixtures, against the R-only baseline. Through the transition all five sit on top of each other.</a:t>
             </a:r>
           </a:p>
           <a:p>
@@ -3969,7 +4259,7 @@
               </a:defRPr>
             </a:pPr>
             <a:r>
-              <a:t>•  Characterised and stressed exactly like the three base buffers.</a:t>
+              <a:t>•  The resonant L+C fixture rings for nanoseconds after the reversal; L and C on their own do not.</a:t>
             </a:r>
           </a:p>
         </p:txBody>
@@ -4021,7 +4311,7 @@
       </p:sp>
       <p:pic>
         <p:nvPicPr>
-          <p:cNvPr id="6" name="Picture 5" descr="variant_pad.png"/>
+          <p:cNvPr id="6" name="Picture 5" descr="fixture_vt.png"/>
           <p:cNvPicPr>
             <a:picLocks noChangeAspect="1"/>
           </p:cNvPicPr>
@@ -4090,7 +4380,7 @@
       </p:sp>
       <p:pic>
         <p:nvPicPr>
-          <p:cNvPr id="8" name="Picture 7" descr="variant_kukd.png"/>
+          <p:cNvPr id="8" name="Picture 7" descr="fixture_ku.png"/>
           <p:cNvPicPr>
             <a:picLocks noChangeAspect="1"/>
           </p:cNvPicPr>
@@ -4154,6 +4444,544 @@
               </a:defRPr>
             </a:pPr>
             <a:r>
+              <a:t>The 1.25 max|Ku| cap rejects good models</a:t>
+            </a:r>
+          </a:p>
+        </p:txBody>
+      </p:sp>
+      <p:sp>
+        <p:nvSpPr>
+          <p:cNvPr id="3" name="TextBox 2"/>
+          <p:cNvSpPr txBox="1"/>
+          <p:nvPr/>
+        </p:nvSpPr>
+        <p:spPr>
+          <a:xfrm>
+            <a:off x="9372600" y="109728"/>
+            <a:ext cx="2148840" cy="228600"/>
+          </a:xfrm>
+          <a:prstGeom prst="rect">
+            <a:avLst/>
+          </a:prstGeom>
+          <a:noFill/>
+        </p:spPr>
+        <p:txBody>
+          <a:bodyPr wrap="square" lIns="45720" rIns="45720" anchor="t">
+            <a:spAutoFit/>
+          </a:bodyPr>
+          <a:lstStyle/>
+          <a:p>
+            <a:pPr algn="r">
+              <a:defRPr sz="950" b="1">
+                <a:solidFill>
+                  <a:srgbClr val="666C68"/>
+                </a:solidFill>
+                <a:latin typeface="Aptos"/>
+              </a:defRPr>
+            </a:pPr>
+            <a:r>
+              <a:t>WHAT SHOULD CHANGE</a:t>
+            </a:r>
+          </a:p>
+        </p:txBody>
+      </p:sp>
+      <p:sp>
+        <p:nvSpPr>
+          <p:cNvPr id="4" name="TextBox 3"/>
+          <p:cNvSpPr txBox="1"/>
+          <p:nvPr/>
+        </p:nvSpPr>
+        <p:spPr>
+          <a:xfrm>
+            <a:off x="640080" y="1188720"/>
+            <a:ext cx="10972800" cy="457200"/>
+          </a:xfrm>
+          <a:prstGeom prst="rect">
+            <a:avLst/>
+          </a:prstGeom>
+          <a:noFill/>
+        </p:spPr>
+        <p:txBody>
+          <a:bodyPr wrap="square" lIns="45720" rIns="45720" anchor="t">
+            <a:spAutoFit/>
+          </a:bodyPr>
+          <a:lstStyle/>
+          <a:p>
+            <a:pPr algn="l">
+              <a:defRPr sz="1700" b="0">
+                <a:solidFill>
+                  <a:srgbClr val="191F1C"/>
+                </a:solidFill>
+                <a:latin typeface="Aptos"/>
+              </a:defRPr>
+            </a:pPr>
+            <a:r>
+              <a:t>ex2 variants, across all seven characterisation edge rates:</a:t>
+            </a:r>
+          </a:p>
+        </p:txBody>
+      </p:sp>
+      <p:sp>
+        <p:nvSpPr>
+          <p:cNvPr id="5" name="TextBox 4"/>
+          <p:cNvSpPr txBox="1"/>
+          <p:nvPr/>
+        </p:nvSpPr>
+        <p:spPr>
+          <a:xfrm>
+            <a:off x="640080" y="1737360"/>
+            <a:ext cx="11064240" cy="3429000"/>
+          </a:xfrm>
+          <a:prstGeom prst="rect">
+            <a:avLst/>
+          </a:prstGeom>
+          <a:noFill/>
+        </p:spPr>
+        <p:txBody>
+          <a:bodyPr wrap="square" lIns="73152" rIns="36576" tIns="36576" bIns="36576">
+            <a:spAutoFit/>
+          </a:bodyPr>
+          <a:lstStyle/>
+          <a:p>
+            <a:pPr>
+              <a:spcAft>
+                <a:spcPts val="300"/>
+              </a:spcAft>
+              <a:defRPr sz="1700">
+                <a:solidFill>
+                  <a:srgbClr val="191F1C"/>
+                </a:solidFill>
+                <a:latin typeface="Aptos"/>
+              </a:defRPr>
+            </a:pPr>
+            <a:r>
+              <a:t>•  slowpre   predriver halved      328 ps      1.047</a:t>
+            </a:r>
+          </a:p>
+          <a:p>
+            <a:pPr>
+              <a:spcAft>
+                <a:spcPts val="300"/>
+              </a:spcAft>
+              <a:defRPr sz="1700">
+                <a:solidFill>
+                  <a:srgbClr val="191F1C"/>
+                </a:solidFill>
+                <a:latin typeface="Aptos"/>
+              </a:defRPr>
+            </a:pPr>
+            <a:r>
+              <a:t>•  base      control               200 ps      1.283</a:t>
+            </a:r>
+          </a:p>
+          <a:p>
+            <a:pPr>
+              <a:spcAft>
+                <a:spcPts val="300"/>
+              </a:spcAft>
+              <a:defRPr sz="1700">
+                <a:solidFill>
+                  <a:srgbClr val="191F1C"/>
+                </a:solidFill>
+                <a:latin typeface="Aptos"/>
+              </a:defRPr>
+            </a:pPr>
+            <a:r>
+              <a:t>•  nomiller  Miller caps removed   208 ps      1.299</a:t>
+            </a:r>
+          </a:p>
+          <a:p>
+            <a:pPr>
+              <a:spcAft>
+                <a:spcPts val="300"/>
+              </a:spcAft>
+              <a:defRPr sz="1700">
+                <a:solidFill>
+                  <a:srgbClr val="191F1C"/>
+                </a:solidFill>
+                <a:latin typeface="Aptos"/>
+              </a:defRPr>
+            </a:pPr>
+            <a:r>
+              <a:t>•  skewp     output PMOS halved    160 ps      1.589</a:t>
+            </a:r>
+          </a:p>
+          <a:p>
+            <a:pPr>
+              <a:spcAft>
+                <a:spcPts val="300"/>
+              </a:spcAft>
+              <a:defRPr sz="1700">
+                <a:solidFill>
+                  <a:srgbClr val="191F1C"/>
+                </a:solidFill>
+                <a:latin typeface="Aptos"/>
+              </a:defRPr>
+            </a:pPr>
+            <a:r>
+              <a:t>•  weak      both devices halved   152 ps      1.779</a:t>
+            </a:r>
+          </a:p>
+        </p:txBody>
+      </p:sp>
+      <p:sp>
+        <p:nvSpPr>
+          <p:cNvPr id="6" name="TextBox 5"/>
+          <p:cNvSpPr txBox="1"/>
+          <p:nvPr/>
+        </p:nvSpPr>
+        <p:spPr>
+          <a:xfrm>
+            <a:off x="640080" y="4480560"/>
+            <a:ext cx="10972800" cy="1463040"/>
+          </a:xfrm>
+          <a:prstGeom prst="rect">
+            <a:avLst/>
+          </a:prstGeom>
+          <a:noFill/>
+        </p:spPr>
+        <p:txBody>
+          <a:bodyPr wrap="square" lIns="45720" rIns="45720" anchor="t">
+            <a:spAutoFit/>
+          </a:bodyPr>
+          <a:lstStyle/>
+          <a:p>
+            <a:pPr algn="l">
+              <a:defRPr sz="1700" b="0">
+                <a:solidFill>
+                  <a:srgbClr val="191F1C"/>
+                </a:solidFill>
+                <a:latin typeface="Aptos"/>
+              </a:defRPr>
+            </a:pPr>
+            <a:r>
+              <a:t>It follows C_comp × dV/dt against the device drive. For ex2 that is 82 mA of displacement current against a ~51 mA drive — it exceeds the device, so the solve has to push Ku above 1.</a:t>
+            </a:r>
+            <a:br/>
+            <a:r>
+              <a:t>Healthy baselines differ per silicon: inv_chain 1.03, io_buf 1.18, ex2 1.28. No absolute number works; it should be a within-buffer outlier test.</a:t>
+            </a:r>
+          </a:p>
+        </p:txBody>
+      </p:sp>
+    </p:spTree>
+  </p:cSld>
+  <p:clrMapOvr>
+    <a:masterClrMapping/>
+  </p:clrMapOvr>
+</p:sld>
+</file>
+
+<file path=ppt/slides/slide15.xml><?xml version="1.0" encoding="utf-8"?>
+<p:sld xmlns:a="http://schemas.openxmlformats.org/drawingml/2006/main" xmlns:p="http://schemas.openxmlformats.org/presentationml/2006/main" xmlns:r="http://schemas.openxmlformats.org/officeDocument/2006/relationships">
+  <p:cSld>
+    <p:spTree>
+      <p:nvGrpSpPr>
+        <p:cNvPr id="1" name=""/>
+        <p:cNvGrpSpPr/>
+        <p:nvPr/>
+      </p:nvGrpSpPr>
+      <p:grpSpPr/>
+      <p:sp>
+        <p:nvSpPr>
+          <p:cNvPr id="2" name="Title 1"/>
+          <p:cNvSpPr>
+            <a:spLocks noGrp="1"/>
+          </p:cNvSpPr>
+          <p:nvPr>
+            <p:ph type="title"/>
+          </p:nvPr>
+        </p:nvSpPr>
+        <p:spPr/>
+        <p:txBody>
+          <a:bodyPr/>
+          <a:lstStyle/>
+          <a:p>
+            <a:pPr algn="l">
+              <a:defRPr sz="2700" b="0">
+                <a:solidFill>
+                  <a:srgbClr val="000000"/>
+                </a:solidFill>
+                <a:latin typeface="Times New Roman"/>
+              </a:defRPr>
+            </a:pPr>
+            <a:r>
+              <a:t>Nine new buffer variants, same stress axis</a:t>
+            </a:r>
+          </a:p>
+        </p:txBody>
+      </p:sp>
+      <p:sp>
+        <p:nvSpPr>
+          <p:cNvPr id="3" name="TextBox 2"/>
+          <p:cNvSpPr txBox="1"/>
+          <p:nvPr/>
+        </p:nvSpPr>
+        <p:spPr>
+          <a:xfrm>
+            <a:off x="9372600" y="109728"/>
+            <a:ext cx="2148840" cy="228600"/>
+          </a:xfrm>
+          <a:prstGeom prst="rect">
+            <a:avLst/>
+          </a:prstGeom>
+          <a:noFill/>
+        </p:spPr>
+        <p:txBody>
+          <a:bodyPr wrap="square" lIns="45720" rIns="45720" anchor="t">
+            <a:spAutoFit/>
+          </a:bodyPr>
+          <a:lstStyle/>
+          <a:p>
+            <a:pPr algn="r">
+              <a:defRPr sz="950" b="1">
+                <a:solidFill>
+                  <a:srgbClr val="666C68"/>
+                </a:solidFill>
+                <a:latin typeface="Aptos"/>
+              </a:defRPr>
+            </a:pPr>
+            <a:r>
+              <a:t>WHAT SHOULD CHANGE</a:t>
+            </a:r>
+          </a:p>
+        </p:txBody>
+      </p:sp>
+      <p:sp>
+        <p:nvSpPr>
+          <p:cNvPr id="4" name="TextBox 3"/>
+          <p:cNvSpPr txBox="1"/>
+          <p:nvPr/>
+        </p:nvSpPr>
+        <p:spPr>
+          <a:xfrm>
+            <a:off x="640080" y="1170432"/>
+            <a:ext cx="11064240" cy="1371600"/>
+          </a:xfrm>
+          <a:prstGeom prst="rect">
+            <a:avLst/>
+          </a:prstGeom>
+          <a:noFill/>
+        </p:spPr>
+        <p:txBody>
+          <a:bodyPr wrap="square" lIns="73152" rIns="36576" tIns="36576" bIns="36576">
+            <a:spAutoFit/>
+          </a:bodyPr>
+          <a:lstStyle/>
+          <a:p>
+            <a:pPr>
+              <a:spcAft>
+                <a:spcPts val="300"/>
+              </a:spcAft>
+              <a:defRPr sz="1700">
+                <a:solidFill>
+                  <a:srgbClr val="191F1C"/>
+                </a:solidFill>
+                <a:latin typeface="Aptos"/>
+              </a:defRPr>
+            </a:pPr>
+            <a:r>
+              <a:t>•  Slower predriver, halved output devices, skewed PMOS, open-drain.</a:t>
+            </a:r>
+          </a:p>
+          <a:p>
+            <a:pPr>
+              <a:spcAft>
+                <a:spcPts val="300"/>
+              </a:spcAft>
+              <a:defRPr sz="1700">
+                <a:solidFill>
+                  <a:srgbClr val="191F1C"/>
+                </a:solidFill>
+                <a:latin typeface="Aptos"/>
+              </a:defRPr>
+            </a:pPr>
+            <a:r>
+              <a:t>•  Characterised and stressed exactly like the three base buffers.</a:t>
+            </a:r>
+          </a:p>
+        </p:txBody>
+      </p:sp>
+      <p:sp>
+        <p:nvSpPr>
+          <p:cNvPr id="5" name="Rectangle 4"/>
+          <p:cNvSpPr/>
+          <p:nvPr/>
+        </p:nvSpPr>
+        <p:spPr>
+          <a:xfrm>
+            <a:off x="513743" y="2057400"/>
+            <a:ext cx="5373312" cy="4398264"/>
+          </a:xfrm>
+          <a:prstGeom prst="rect">
+            <a:avLst/>
+          </a:prstGeom>
+          <a:solidFill>
+            <a:srgbClr val="FFFFFF"/>
+          </a:solidFill>
+          <a:ln w="10160">
+            <a:solidFill>
+              <a:srgbClr val="CBD0CC"/>
+            </a:solidFill>
+          </a:ln>
+        </p:spPr>
+        <p:style>
+          <a:lnRef idx="1">
+            <a:schemeClr val="accent1"/>
+          </a:lnRef>
+          <a:fillRef idx="3">
+            <a:schemeClr val="accent1"/>
+          </a:fillRef>
+          <a:effectRef idx="2">
+            <a:schemeClr val="accent1"/>
+          </a:effectRef>
+          <a:fontRef idx="minor">
+            <a:schemeClr val="lt1"/>
+          </a:fontRef>
+        </p:style>
+        <p:txBody>
+          <a:bodyPr rtlCol="0" anchor="ctr"/>
+          <a:lstStyle/>
+          <a:p>
+            <a:pPr algn="ctr"/>
+          </a:p>
+        </p:txBody>
+      </p:sp>
+      <p:pic>
+        <p:nvPicPr>
+          <p:cNvPr id="6" name="Picture 5" descr="variant_pad.png"/>
+          <p:cNvPicPr>
+            <a:picLocks noChangeAspect="1"/>
+          </p:cNvPicPr>
+          <p:nvPr/>
+        </p:nvPicPr>
+        <p:blipFill>
+          <a:blip r:embed="rId2"/>
+          <a:stretch>
+            <a:fillRect/>
+          </a:stretch>
+        </p:blipFill>
+        <p:spPr>
+          <a:xfrm>
+            <a:off x="541175" y="2084831"/>
+            <a:ext cx="5318448" cy="4343400"/>
+          </a:xfrm>
+          <a:prstGeom prst="rect">
+            <a:avLst/>
+          </a:prstGeom>
+        </p:spPr>
+      </p:pic>
+      <p:sp>
+        <p:nvSpPr>
+          <p:cNvPr id="7" name="Rectangle 6"/>
+          <p:cNvSpPr/>
+          <p:nvPr/>
+        </p:nvSpPr>
+        <p:spPr>
+          <a:xfrm>
+            <a:off x="6274463" y="2057400"/>
+            <a:ext cx="5373312" cy="4398264"/>
+          </a:xfrm>
+          <a:prstGeom prst="rect">
+            <a:avLst/>
+          </a:prstGeom>
+          <a:solidFill>
+            <a:srgbClr val="FFFFFF"/>
+          </a:solidFill>
+          <a:ln w="10160">
+            <a:solidFill>
+              <a:srgbClr val="CBD0CC"/>
+            </a:solidFill>
+          </a:ln>
+        </p:spPr>
+        <p:style>
+          <a:lnRef idx="1">
+            <a:schemeClr val="accent1"/>
+          </a:lnRef>
+          <a:fillRef idx="3">
+            <a:schemeClr val="accent1"/>
+          </a:fillRef>
+          <a:effectRef idx="2">
+            <a:schemeClr val="accent1"/>
+          </a:effectRef>
+          <a:fontRef idx="minor">
+            <a:schemeClr val="lt1"/>
+          </a:fontRef>
+        </p:style>
+        <p:txBody>
+          <a:bodyPr rtlCol="0" anchor="ctr"/>
+          <a:lstStyle/>
+          <a:p>
+            <a:pPr algn="ctr"/>
+          </a:p>
+        </p:txBody>
+      </p:sp>
+      <p:pic>
+        <p:nvPicPr>
+          <p:cNvPr id="8" name="Picture 7" descr="variant_kukd.png"/>
+          <p:cNvPicPr>
+            <a:picLocks noChangeAspect="1"/>
+          </p:cNvPicPr>
+          <p:nvPr/>
+        </p:nvPicPr>
+        <p:blipFill>
+          <a:blip r:embed="rId3"/>
+          <a:stretch>
+            <a:fillRect/>
+          </a:stretch>
+        </p:blipFill>
+        <p:spPr>
+          <a:xfrm>
+            <a:off x="6301895" y="2084831"/>
+            <a:ext cx="5318448" cy="4343400"/>
+          </a:xfrm>
+          <a:prstGeom prst="rect">
+            <a:avLst/>
+          </a:prstGeom>
+        </p:spPr>
+      </p:pic>
+    </p:spTree>
+  </p:cSld>
+  <p:clrMapOvr>
+    <a:masterClrMapping/>
+  </p:clrMapOvr>
+</p:sld>
+</file>
+
+<file path=ppt/slides/slide16.xml><?xml version="1.0" encoding="utf-8"?>
+<p:sld xmlns:a="http://schemas.openxmlformats.org/drawingml/2006/main" xmlns:p="http://schemas.openxmlformats.org/presentationml/2006/main" xmlns:r="http://schemas.openxmlformats.org/officeDocument/2006/relationships">
+  <p:cSld>
+    <p:spTree>
+      <p:nvGrpSpPr>
+        <p:cNvPr id="1" name=""/>
+        <p:cNvGrpSpPr/>
+        <p:nvPr/>
+      </p:nvGrpSpPr>
+      <p:grpSpPr/>
+      <p:sp>
+        <p:nvSpPr>
+          <p:cNvPr id="2" name="Title 1"/>
+          <p:cNvSpPr>
+            <a:spLocks noGrp="1"/>
+          </p:cNvSpPr>
+          <p:nvPr>
+            <p:ph type="title"/>
+          </p:nvPr>
+        </p:nvSpPr>
+        <p:spPr/>
+        <p:txBody>
+          <a:bodyPr/>
+          <a:lstStyle/>
+          <a:p>
+            <a:pPr algn="l">
+              <a:defRPr sz="2700" b="0">
+                <a:solidFill>
+                  <a:srgbClr val="000000"/>
+                </a:solidFill>
+                <a:latin typeface="Times New Roman"/>
+              </a:defRPr>
+            </a:pPr>
+            <a:r>
               <a:t>Where this leaves us</a:t>
             </a:r>
           </a:p>
@@ -4955,7 +5783,7 @@
               </a:defRPr>
             </a:pPr>
             <a:r>
-              <a:t>Under a truncated pulse, two things go wrong</a:t>
+              <a:t>Defect 1: the pad does not settle</a:t>
             </a:r>
           </a:p>
         </p:txBody>
@@ -5046,7 +5874,7 @@
               </a:defRPr>
             </a:pPr>
             <a:r>
-              <a:t>•  Left: the pad comes back up. Right: Ku stays part-on instead of returning.</a:t>
+              <a:t>•  Left: our pad comes back up where the transistor does not. Right: Ku stays part-on instead of returning to zero.</a:t>
             </a:r>
           </a:p>
         </p:txBody>
@@ -5231,7 +6059,7 @@
               </a:defRPr>
             </a:pPr>
             <a:r>
-              <a:t>The offset: charge stranded in the command capacitor</a:t>
+              <a:t>Defect 2: our crossing is late</a:t>
             </a:r>
           </a:p>
         </p:txBody>
@@ -5306,7 +6134,7 @@
               </a:defRPr>
             </a:pPr>
             <a:r>
-              <a:t>•  GUPCMD is a capacitor across 1e15 ohm, charged once per input edge.</a:t>
+              <a:t>•  A separate defect: the 50% crossing arrives later than native IBIS.</a:t>
             </a:r>
           </a:p>
           <a:p>
@@ -5322,7 +6150,7 @@
               </a:defRPr>
             </a:pPr>
             <a:r>
-              <a:t>•  A truncated pulse leaves charge in it with no resistive path out.</a:t>
+              <a:t>•  Over the five stress cases per device — io_buf native +11..+18 ps, ours +27..+34;  inv_chain native −6..−5, ours +8..+12;  ex2 both early.</a:t>
             </a:r>
           </a:p>
         </p:txBody>
@@ -5374,7 +6202,7 @@
       </p:sp>
       <p:pic>
         <p:nvPicPr>
-          <p:cNvPr id="6" name="Picture 5" descr="offset_chain.png"/>
+          <p:cNvPr id="6" name="Picture 5" descr="timing_shift.png"/>
           <p:cNvPicPr>
             <a:picLocks noChangeAspect="1"/>
           </p:cNvPicPr>
@@ -5438,7 +6266,7 @@
               </a:defRPr>
             </a:pPr>
             <a:r>
-              <a:t>delay_cmd removes the offset</a:t>
+              <a:t>The offset: charge stranded in the command capacitor</a:t>
             </a:r>
           </a:p>
         </p:txBody>
@@ -5513,7 +6341,7 @@
               </a:defRPr>
             </a:pPr>
             <a:r>
-              <a:t>•  The command becomes a function of the input level, not of edge history.</a:t>
+              <a:t>•  GUPCMD is a capacitor across 1e15 ohm, charged once per input edge.</a:t>
             </a:r>
           </a:p>
           <a:p>
@@ -5529,7 +6357,7 @@
               </a:defRPr>
             </a:pPr>
             <a:r>
-              <a:t>•  It returns to exactly zero, so nothing is stranded.</a:t>
+              <a:t>•  A truncated pulse leaves charge in it with no resistive path out.</a:t>
             </a:r>
           </a:p>
         </p:txBody>
@@ -5581,7 +6409,7 @@
       </p:sp>
       <p:pic>
         <p:nvPicPr>
-          <p:cNvPr id="6" name="Picture 5" descr="offset_removed.png"/>
+          <p:cNvPr id="6" name="Picture 5" descr="offset_chain.png"/>
           <p:cNvPicPr>
             <a:picLocks noChangeAspect="1"/>
           </p:cNvPicPr>
@@ -5645,7 +6473,7 @@
               </a:defRPr>
             </a:pPr>
             <a:r>
-              <a:t>It does not fix the timing</a:t>
+              <a:t>How delay_cmd works</a:t>
             </a:r>
           </a:p>
         </p:txBody>
@@ -5695,7 +6523,7 @@
         <p:spPr>
           <a:xfrm>
             <a:off x="640080" y="1170432"/>
-            <a:ext cx="11064240" cy="685800"/>
+            <a:ext cx="11064240" cy="1371600"/>
           </a:xfrm>
           <a:prstGeom prst="rect">
             <a:avLst/>
@@ -5720,68 +6548,9 @@
               </a:defRPr>
             </a:pPr>
             <a:r>
-              <a:t>•  If the offset and the timing shift were one mechanism, delay_cmd would fix both. Its amplitude had been measured; its timing never had.</a:t>
-            </a:r>
-          </a:p>
-        </p:txBody>
-      </p:sp>
-      <p:sp>
-        <p:nvSpPr>
-          <p:cNvPr id="5" name="TextBox 4"/>
-          <p:cNvSpPr txBox="1"/>
-          <p:nvPr/>
-        </p:nvSpPr>
-        <p:spPr>
-          <a:xfrm>
-            <a:off x="640080" y="2194560"/>
-            <a:ext cx="10972800" cy="457200"/>
-          </a:xfrm>
-          <a:prstGeom prst="rect">
-            <a:avLst/>
-          </a:prstGeom>
-          <a:noFill/>
-        </p:spPr>
-        <p:txBody>
-          <a:bodyPr wrap="square" lIns="45720" rIns="45720" anchor="t">
-            <a:spAutoFit/>
-          </a:bodyPr>
-          <a:lstStyle/>
-          <a:p>
-            <a:pPr algn="l">
-              <a:defRPr sz="1700" b="0">
-                <a:solidFill>
-                  <a:srgbClr val="191F1C"/>
-                </a:solidFill>
-                <a:latin typeface="Aptos"/>
-              </a:defRPr>
-            </a:pPr>
-            <a:r>
-              <a:t>We measured it:</a:t>
-            </a:r>
-          </a:p>
-        </p:txBody>
-      </p:sp>
-      <p:sp>
-        <p:nvSpPr>
-          <p:cNvPr id="6" name="TextBox 5"/>
-          <p:cNvSpPr txBox="1"/>
-          <p:nvPr/>
-        </p:nvSpPr>
-        <p:spPr>
-          <a:xfrm>
-            <a:off x="640080" y="2743200"/>
-            <a:ext cx="11064240" cy="2057400"/>
-          </a:xfrm>
-          <a:prstGeom prst="rect">
-            <a:avLst/>
-          </a:prstGeom>
-          <a:noFill/>
-        </p:spPr>
-        <p:txBody>
-          <a:bodyPr wrap="square" lIns="73152" rIns="36576" tIns="36576" bIns="36576">
-            <a:spAutoFit/>
-          </a:bodyPr>
-          <a:lstStyle/>
+              <a:t>•  gate-state: GUPCMD is a capacitor across 1e15 Ω, given a fixed packet of charge on each input edge — an integrator with no DC path.</a:t>
+            </a:r>
+          </a:p>
           <a:p>
             <a:pPr>
               <a:spcAft>
@@ -5795,79 +6564,149 @@
               </a:defRPr>
             </a:pPr>
             <a:r>
-              <a:t>•  delay_cmd improved the timing on 0 of 19 stress cases</a:t>
-            </a:r>
-          </a:p>
-          <a:p>
-            <a:pPr>
-              <a:spcAft>
-                <a:spcPts val="300"/>
-              </a:spcAft>
-              <a:defRPr sz="1700">
-                <a:solidFill>
-                  <a:srgbClr val="191F1C"/>
-                </a:solidFill>
-                <a:latin typeface="Aptos"/>
-              </a:defRPr>
-            </a:pPr>
-            <a:r>
-              <a:t>•  the shift persists once the stranded charge is gone</a:t>
-            </a:r>
-          </a:p>
-          <a:p>
-            <a:pPr>
-              <a:spcAft>
-                <a:spcPts val="300"/>
-              </a:spcAft>
-              <a:defRPr sz="1700">
-                <a:solidFill>
-                  <a:srgbClr val="191F1C"/>
-                </a:solidFill>
-                <a:latin typeface="Aptos"/>
-              </a:defRPr>
-            </a:pPr>
-            <a:r>
-              <a:t>•  they are two defects, not one</a:t>
-            </a:r>
-          </a:p>
-        </p:txBody>
-      </p:sp>
-      <p:sp>
-        <p:nvSpPr>
-          <p:cNvPr id="7" name="TextBox 6"/>
-          <p:cNvSpPr txBox="1"/>
+              <a:t>•  delay_cmd: GUPCMD is driven straight from the present input level.</a:t>
+            </a:r>
+          </a:p>
+        </p:txBody>
+      </p:sp>
+      <p:sp>
+        <p:nvSpPr>
+          <p:cNvPr id="5" name="Rectangle 4"/>
+          <p:cNvSpPr/>
           <p:nvPr/>
         </p:nvSpPr>
         <p:spPr>
           <a:xfrm>
-            <a:off x="640080" y="4663440"/>
-            <a:ext cx="10972800" cy="914400"/>
-          </a:xfrm>
-          <a:prstGeom prst="rect">
-            <a:avLst/>
-          </a:prstGeom>
-          <a:noFill/>
-        </p:spPr>
-        <p:txBody>
-          <a:bodyPr wrap="square" lIns="45720" rIns="45720" anchor="t">
-            <a:spAutoFit/>
-          </a:bodyPr>
-          <a:lstStyle/>
-          <a:p>
-            <a:pPr algn="l">
-              <a:defRPr sz="1700" b="0">
-                <a:solidFill>
-                  <a:srgbClr val="191F1C"/>
-                </a:solidFill>
-                <a:latin typeface="Aptos"/>
-              </a:defRPr>
-            </a:pPr>
-            <a:r>
-              <a:t>The offset has a fix. The timing shift has no candidate mechanism yet, and it grows as the pulse is truncated — on all nine buffer variants tested so far.</a:t>
-            </a:r>
-          </a:p>
-        </p:txBody>
-      </p:sp>
+            <a:off x="513743" y="2057400"/>
+            <a:ext cx="5373312" cy="4398264"/>
+          </a:xfrm>
+          <a:prstGeom prst="rect">
+            <a:avLst/>
+          </a:prstGeom>
+          <a:solidFill>
+            <a:srgbClr val="FFFFFF"/>
+          </a:solidFill>
+          <a:ln w="10160">
+            <a:solidFill>
+              <a:srgbClr val="CBD0CC"/>
+            </a:solidFill>
+          </a:ln>
+        </p:spPr>
+        <p:style>
+          <a:lnRef idx="1">
+            <a:schemeClr val="accent1"/>
+          </a:lnRef>
+          <a:fillRef idx="3">
+            <a:schemeClr val="accent1"/>
+          </a:fillRef>
+          <a:effectRef idx="2">
+            <a:schemeClr val="accent1"/>
+          </a:effectRef>
+          <a:fontRef idx="minor">
+            <a:schemeClr val="lt1"/>
+          </a:fontRef>
+        </p:style>
+        <p:txBody>
+          <a:bodyPr rtlCol="0" anchor="ctr"/>
+          <a:lstStyle/>
+          <a:p>
+            <a:pPr algn="ctr"/>
+          </a:p>
+        </p:txBody>
+      </p:sp>
+      <p:pic>
+        <p:nvPicPr>
+          <p:cNvPr id="6" name="Picture 5" descr="command_node.png"/>
+          <p:cNvPicPr>
+            <a:picLocks noChangeAspect="1"/>
+          </p:cNvPicPr>
+          <p:nvPr/>
+        </p:nvPicPr>
+        <p:blipFill>
+          <a:blip r:embed="rId2"/>
+          <a:stretch>
+            <a:fillRect/>
+          </a:stretch>
+        </p:blipFill>
+        <p:spPr>
+          <a:xfrm>
+            <a:off x="541175" y="2084831"/>
+            <a:ext cx="5318448" cy="4343400"/>
+          </a:xfrm>
+          <a:prstGeom prst="rect">
+            <a:avLst/>
+          </a:prstGeom>
+        </p:spPr>
+      </p:pic>
+      <p:sp>
+        <p:nvSpPr>
+          <p:cNvPr id="7" name="Rectangle 6"/>
+          <p:cNvSpPr/>
+          <p:nvPr/>
+        </p:nvSpPr>
+        <p:spPr>
+          <a:xfrm>
+            <a:off x="6274463" y="2057400"/>
+            <a:ext cx="5373312" cy="4398264"/>
+          </a:xfrm>
+          <a:prstGeom prst="rect">
+            <a:avLst/>
+          </a:prstGeom>
+          <a:solidFill>
+            <a:srgbClr val="FFFFFF"/>
+          </a:solidFill>
+          <a:ln w="10160">
+            <a:solidFill>
+              <a:srgbClr val="CBD0CC"/>
+            </a:solidFill>
+          </a:ln>
+        </p:spPr>
+        <p:style>
+          <a:lnRef idx="1">
+            <a:schemeClr val="accent1"/>
+          </a:lnRef>
+          <a:fillRef idx="3">
+            <a:schemeClr val="accent1"/>
+          </a:fillRef>
+          <a:effectRef idx="2">
+            <a:schemeClr val="accent1"/>
+          </a:effectRef>
+          <a:fontRef idx="minor">
+            <a:schemeClr val="lt1"/>
+          </a:fontRef>
+        </p:style>
+        <p:txBody>
+          <a:bodyPr rtlCol="0" anchor="ctr"/>
+          <a:lstStyle/>
+          <a:p>
+            <a:pPr algn="ctr"/>
+          </a:p>
+        </p:txBody>
+      </p:sp>
+      <p:pic>
+        <p:nvPicPr>
+          <p:cNvPr id="8" name="Picture 7" descr="command_pad.png"/>
+          <p:cNvPicPr>
+            <a:picLocks noChangeAspect="1"/>
+          </p:cNvPicPr>
+          <p:nvPr/>
+        </p:nvPicPr>
+        <p:blipFill>
+          <a:blip r:embed="rId3"/>
+          <a:stretch>
+            <a:fillRect/>
+          </a:stretch>
+        </p:blipFill>
+        <p:spPr>
+          <a:xfrm>
+            <a:off x="6301895" y="2084831"/>
+            <a:ext cx="5318448" cy="4343400"/>
+          </a:xfrm>
+          <a:prstGeom prst="rect">
+            <a:avLst/>
+          </a:prstGeom>
+        </p:spPr>
+      </p:pic>
     </p:spTree>
   </p:cSld>
   <p:clrMapOvr>
@@ -5910,7 +6749,7 @@
               </a:defRPr>
             </a:pPr>
             <a:r>
-              <a:t>The core reconstruction is sound</a:t>
+              <a:t>delay_cmd removes the offset</a:t>
             </a:r>
           </a:p>
         </p:txBody>
@@ -5946,7 +6785,7 @@
               </a:defRPr>
             </a:pPr>
             <a:r>
-              <a:t>CONFIDENCE</a:t>
+              <a:t>THE TWO DEFECTS</a:t>
             </a:r>
           </a:p>
         </p:txBody>
@@ -5985,7 +6824,7 @@
               </a:defRPr>
             </a:pPr>
             <a:r>
-              <a:t>•  A golden-waveform test replays a model's own V-T tables into the fixture that produced them — no transistor, no native IBIS, no engine confound.</a:t>
+              <a:t>•  The command returns to exactly zero, so nothing is stranded.</a:t>
             </a:r>
           </a:p>
           <a:p>
@@ -6001,138 +6840,80 @@
               </a:defRPr>
             </a:pPr>
             <a:r>
-              <a:t>•  We had never done this before. It is now the standing health check.</a:t>
-            </a:r>
-          </a:p>
-        </p:txBody>
-      </p:sp>
-      <p:sp>
-        <p:nvSpPr>
-          <p:cNvPr id="5" name="TextBox 4"/>
-          <p:cNvSpPr txBox="1"/>
+              <a:t>•  The pedestal goes from 97.9 mV to 5.2 mV, against the transistor's 2.1.</a:t>
+            </a:r>
+          </a:p>
+        </p:txBody>
+      </p:sp>
+      <p:sp>
+        <p:nvSpPr>
+          <p:cNvPr id="5" name="Rectangle 4"/>
+          <p:cNvSpPr/>
           <p:nvPr/>
         </p:nvSpPr>
         <p:spPr>
           <a:xfrm>
-            <a:off x="640080" y="2834640"/>
-            <a:ext cx="10972800" cy="457200"/>
-          </a:xfrm>
-          <a:prstGeom prst="rect">
-            <a:avLst/>
-          </a:prstGeom>
-          <a:noFill/>
-        </p:spPr>
-        <p:txBody>
-          <a:bodyPr wrap="square" lIns="45720" rIns="45720" anchor="t">
-            <a:spAutoFit/>
-          </a:bodyPr>
-          <a:lstStyle/>
-          <a:p>
-            <a:pPr algn="l">
-              <a:defRPr sz="1700" b="0">
-                <a:solidFill>
-                  <a:srgbClr val="191F1C"/>
-                </a:solidFill>
-                <a:latin typeface="Aptos"/>
-              </a:defRPr>
-            </a:pPr>
-            <a:r>
-              <a:t>Our model against its own golden waveforms, three buffers, both edges, both fixtures:</a:t>
-            </a:r>
-          </a:p>
-        </p:txBody>
-      </p:sp>
-      <p:sp>
-        <p:nvSpPr>
-          <p:cNvPr id="6" name="TextBox 5"/>
-          <p:cNvSpPr txBox="1"/>
+            <a:off x="743653" y="1819656"/>
+            <a:ext cx="10674213" cy="4581144"/>
+          </a:xfrm>
+          <a:prstGeom prst="rect">
+            <a:avLst/>
+          </a:prstGeom>
+          <a:solidFill>
+            <a:srgbClr val="FFFFFF"/>
+          </a:solidFill>
+          <a:ln w="10160">
+            <a:solidFill>
+              <a:srgbClr val="CBD0CC"/>
+            </a:solidFill>
+          </a:ln>
+        </p:spPr>
+        <p:style>
+          <a:lnRef idx="1">
+            <a:schemeClr val="accent1"/>
+          </a:lnRef>
+          <a:fillRef idx="3">
+            <a:schemeClr val="accent1"/>
+          </a:fillRef>
+          <a:effectRef idx="2">
+            <a:schemeClr val="accent1"/>
+          </a:effectRef>
+          <a:fontRef idx="minor">
+            <a:schemeClr val="lt1"/>
+          </a:fontRef>
+        </p:style>
+        <p:txBody>
+          <a:bodyPr rtlCol="0" anchor="ctr"/>
+          <a:lstStyle/>
+          <a:p>
+            <a:pPr algn="ctr"/>
+          </a:p>
+        </p:txBody>
+      </p:sp>
+      <p:pic>
+        <p:nvPicPr>
+          <p:cNvPr id="6" name="Picture 5" descr="offset_removed.png"/>
+          <p:cNvPicPr>
+            <a:picLocks noChangeAspect="1"/>
+          </p:cNvPicPr>
           <p:nvPr/>
-        </p:nvSpPr>
-        <p:spPr>
-          <a:xfrm>
-            <a:off x="640080" y="3383280"/>
-            <a:ext cx="11064240" cy="1371600"/>
-          </a:xfrm>
-          <a:prstGeom prst="rect">
-            <a:avLst/>
-          </a:prstGeom>
-          <a:noFill/>
-        </p:spPr>
-        <p:txBody>
-          <a:bodyPr wrap="square" lIns="73152" rIns="36576" tIns="36576" bIns="36576">
-            <a:spAutoFit/>
-          </a:bodyPr>
-          <a:lstStyle/>
-          <a:p>
-            <a:pPr>
-              <a:spcAft>
-                <a:spcPts val="300"/>
-              </a:spcAft>
-              <a:defRPr sz="1700">
-                <a:solidFill>
-                  <a:srgbClr val="191F1C"/>
-                </a:solidFill>
-                <a:latin typeface="Aptos"/>
-              </a:defRPr>
-            </a:pPr>
-            <a:r>
-              <a:t>•  figure of merit   0.03 – 0.41 %</a:t>
-            </a:r>
-          </a:p>
-          <a:p>
-            <a:pPr>
-              <a:spcAft>
-                <a:spcPts val="300"/>
-              </a:spcAft>
-              <a:defRPr sz="1700">
-                <a:solidFill>
-                  <a:srgbClr val="191F1C"/>
-                </a:solidFill>
-                <a:latin typeface="Aptos"/>
-              </a:defRPr>
-            </a:pPr>
-            <a:r>
-              <a:t>•  timing shift      +4 to +8 ps</a:t>
-            </a:r>
-          </a:p>
-        </p:txBody>
-      </p:sp>
-      <p:sp>
-        <p:nvSpPr>
-          <p:cNvPr id="7" name="TextBox 6"/>
-          <p:cNvSpPr txBox="1"/>
-          <p:nvPr/>
-        </p:nvSpPr>
-        <p:spPr>
-          <a:xfrm>
-            <a:off x="640080" y="4572000"/>
-            <a:ext cx="10972800" cy="731520"/>
-          </a:xfrm>
-          <a:prstGeom prst="rect">
-            <a:avLst/>
-          </a:prstGeom>
-          <a:noFill/>
-        </p:spPr>
-        <p:txBody>
-          <a:bodyPr wrap="square" lIns="45720" rIns="45720" anchor="t">
-            <a:spAutoFit/>
-          </a:bodyPr>
-          <a:lstStyle/>
-          <a:p>
-            <a:pPr algn="l">
-              <a:defRPr sz="1700" b="0">
-                <a:solidFill>
-                  <a:srgbClr val="191F1C"/>
-                </a:solidFill>
-                <a:latin typeface="Aptos"/>
-              </a:defRPr>
-            </a:pPr>
-            <a:r>
-              <a:t>So whatever is wrong under stress, it is not the I-V × Ku(t) reconstruction.</a:t>
-            </a:r>
-          </a:p>
-        </p:txBody>
-      </p:sp>
+        </p:nvPicPr>
+        <p:blipFill>
+          <a:blip r:embed="rId2"/>
+          <a:stretch>
+            <a:fillRect/>
+          </a:stretch>
+        </p:blipFill>
+        <p:spPr>
+          <a:xfrm>
+            <a:off x="771085" y="1847088"/>
+            <a:ext cx="10619349" cy="4526280"/>
+          </a:xfrm>
+          <a:prstGeom prst="rect">
+            <a:avLst/>
+          </a:prstGeom>
+        </p:spPr>
+      </p:pic>
     </p:spTree>
   </p:cSld>
   <p:clrMapOvr>
@@ -6175,7 +6956,7 @@
               </a:defRPr>
             </a:pPr>
             <a:r>
-              <a:t>C_comp is handled correctly</a:t>
+              <a:t>It does not fix the timing</a:t>
             </a:r>
           </a:p>
         </p:txBody>
@@ -6211,7 +6992,7 @@
               </a:defRPr>
             </a:pPr>
             <a:r>
-              <a:t>CONFIDENCE</a:t>
+              <a:t>THE TWO DEFECTS</a:t>
             </a:r>
           </a:p>
         </p:txBody>
@@ -6250,7 +7031,7 @@
               </a:defRPr>
             </a:pPr>
             <a:r>
-              <a:t>•  Nominal C_comp beats zero on all 12 tables, and the margin scales with the die capacitance.</a:t>
+              <a:t>•  If the offset and the timing shift were one mechanism, delay_cmd would fix both. Its amplitude had been measured; its timing never had.</a:t>
             </a:r>
           </a:p>
         </p:txBody>
@@ -6263,7 +7044,7 @@
         </p:nvSpPr>
         <p:spPr>
           <a:xfrm>
-            <a:off x="640080" y="2011680"/>
+            <a:off x="640080" y="2194560"/>
             <a:ext cx="10972800" cy="457200"/>
           </a:xfrm>
           <a:prstGeom prst="rect">
@@ -6286,7 +7067,7 @@
               </a:defRPr>
             </a:pPr>
             <a:r>
-              <a:t>50% crossing shift against the transistor, with C_comp at nominal and set to zero:</a:t>
+              <a:t>We measured it:</a:t>
             </a:r>
           </a:p>
         </p:txBody>
@@ -6299,7 +7080,7 @@
         </p:nvSpPr>
         <p:spPr>
           <a:xfrm>
-            <a:off x="640080" y="2560320"/>
+            <a:off x="640080" y="2743200"/>
             <a:ext cx="11064240" cy="2057400"/>
           </a:xfrm>
           <a:prstGeom prst="rect">
@@ -6325,7 +7106,7 @@
               </a:defRPr>
             </a:pPr>
             <a:r>
-              <a:t>•  50 Ω, 0 pF     +6.7 ps        −277.8 ps</a:t>
+              <a:t>•  delay_cmd improved the timing on 0 of 19 stress cases</a:t>
             </a:r>
           </a:p>
           <a:p>
@@ -6341,7 +7122,7 @@
               </a:defRPr>
             </a:pPr>
             <a:r>
-              <a:t>•  500 Ω, 2 pF    −0.2 ps          −0.9 ps</a:t>
+              <a:t>•  the shift persists once the stranded charge is gone</a:t>
             </a:r>
           </a:p>
           <a:p>
@@ -6357,7 +7138,7 @@
               </a:defRPr>
             </a:pPr>
             <a:r>
-              <a:t>•  1 kΩ, 5 pF     −1.3 ps          −1.1 ps</a:t>
+              <a:t>•  they are two defects, not one</a:t>
             </a:r>
           </a:p>
         </p:txBody>
@@ -6370,8 +7151,8 @@
         </p:nvSpPr>
         <p:spPr>
           <a:xfrm>
-            <a:off x="640080" y="4480560"/>
-            <a:ext cx="10972800" cy="1005840"/>
+            <a:off x="640080" y="4663440"/>
+            <a:ext cx="10972800" cy="914400"/>
           </a:xfrm>
           <a:prstGeom prst="rect">
             <a:avLst/>
@@ -6393,7 +7174,7 @@
               </a:defRPr>
             </a:pPr>
             <a:r>
-              <a:t>I had this backwards at first. I misapplied the book's double-counting diagnostic and reported that our model over-applies C_comp; the golden-waveform test overturned it.</a:t>
+              <a:t>The offset has a fix. The timing shift has no candidate mechanism yet, and it grows as the pulse is truncated — on all nine buffer variants tested so far.</a:t>
             </a:r>
           </a:p>
         </p:txBody>

--- a/results/meeting_deck_2026-09-04/ibis_pybis_status_2026-09-04.pptx
+++ b/results/meeting_deck_2026-09-04/ibis_pybis_status_2026-09-04.pptx
@@ -1232,7 +1232,7 @@
           <a:lstStyle/>
           <a:p>
             <a:r>
-              <a:t>The control reproduces the shipped solve to 2.4e-08, so the method is exact. In quiet regions Ku is load-independent to four decimals, which is the point: the extraction is a device property, not a fixture artifact. On io_buf the mean Ku error is 0.011 for C alone, 0.14-0.16 for L, and the worst-case excursion reaches 7.9 on L 2 nH. Practical rule: avoid a resonant fixture when characterising.</a:t>
+              <a:t>The control reproduces the shipped solve to 2.4e-08, so the method is exact, and in the quiet regions Ku is load-independent to four decimals -- the extraction really is a device property, not a fixture artifact.  Ku RMSE against the R-only baseline:  io_buf C 0.011 / L0.5 0.142 / L2 0.164 / L+C 0.159;  inv_chain C 0.007 / L0.5 0.004 / L2 0.007 / L+C 0.009;  ex2 C 0.028 / L0.5 0.008 / L2 0.022 / L+C 0.032.  Correction worth stating: the plan says added L and C are safe individually and the resonant combination is the problem. The measurement does not support that. On io_buf L alone is the worst case (0.164, peak 7.9) and L+C is no worse (0.159, peak 5.2); on the other two devices everything stays under 0.03. The real rule is that series inductance disturbs the solve, by an amount that depends on the buffer.</a:t>
             </a:r>
           </a:p>
         </p:txBody>
@@ -4243,7 +4243,7 @@
               </a:defRPr>
             </a:pPr>
             <a:r>
-              <a:t>•  Ku re-solved on five different characterisation fixtures, against the R-only baseline. Through the transition all five sit on top of each other.</a:t>
+              <a:t>•  Ku re-solved on five characterisation fixtures against the R-only baseline. Through the transition all five sit on top of each other, and in the quiet regions they agree to four decimals.</a:t>
             </a:r>
           </a:p>
           <a:p>
@@ -4259,7 +4259,7 @@
               </a:defRPr>
             </a:pPr>
             <a:r>
-              <a:t>•  The resonant L+C fixture rings for nanoseconds after the reversal; L and C on their own do not.</a:t>
+              <a:t>•  Series inductance is what disturbs it, and only on io_buf: Ku RMSE 0.14–0.16 with excursions to 7.9, against ≤0.03 on inv_chain and ex2.</a:t>
             </a:r>
           </a:p>
         </p:txBody>

--- a/results/meeting_deck_2026-09-04/ibis_pybis_status_2026-09-04.pptx
+++ b/results/meeting_deck_2026-09-04/ibis_pybis_status_2026-09-04.pptx
@@ -4243,7 +4243,7 @@
               </a:defRPr>
             </a:pPr>
             <a:r>
-              <a:t>•  Ku re-solved on five characterisation fixtures against the R-only baseline. Through the transition all five sit on top of each other, and in the quiet regions they agree to four decimals.</a:t>
+              <a:t>•  Five fixtures, Ku re-solved on each. In the quiet regions all five agree to four decimals.</a:t>
             </a:r>
           </a:p>
           <a:p>
@@ -4259,7 +4259,7 @@
               </a:defRPr>
             </a:pPr>
             <a:r>
-              <a:t>•  Series inductance is what disturbs it, and only on io_buf: Ku RMSE 0.14–0.16 with excursions to 7.9, against ≤0.03 on inv_chain and ex2.</a:t>
+              <a:t>•  Series inductance disturbs it, and only on io_buf.</a:t>
             </a:r>
           </a:p>
         </p:txBody>

--- a/results/meeting_deck_2026-09-04/ibis_pybis_status_2026-09-04.pptx
+++ b/results/meeting_deck_2026-09-04/ibis_pybis_status_2026-09-04.pptx
@@ -20,10 +20,6 @@
     <p:sldId id="265" r:id="rId17"/>
     <p:sldId id="266" r:id="rId18"/>
     <p:sldId id="267" r:id="rId19"/>
-    <p:sldId id="268" r:id="rId20"/>
-    <p:sldId id="269" r:id="rId21"/>
-    <p:sldId id="270" r:id="rId22"/>
-    <p:sldId id="271" r:id="rId23"/>
   </p:sldIdLst>
   <p:sldSz cx="12192000" cy="6858000"/>
   <p:notesSz cx="6858000" cy="9144000"/>
@@ -627,146 +623,6 @@
 </p:notes>
 </file>
 
-<file path=ppt/notesSlides/notesSlide10.xml><?xml version="1.0" encoding="utf-8"?>
-<p:notes xmlns:a="http://schemas.openxmlformats.org/drawingml/2006/main" xmlns:p="http://schemas.openxmlformats.org/presentationml/2006/main" xmlns:r="http://schemas.openxmlformats.org/officeDocument/2006/relationships">
-  <p:cSld>
-    <p:spTree>
-      <p:nvGrpSpPr>
-        <p:cNvPr id="1" name=""/>
-        <p:cNvGrpSpPr/>
-        <p:nvPr/>
-      </p:nvGrpSpPr>
-      <p:grpSpPr>
-        <a:xfrm>
-          <a:off x="0" y="0"/>
-          <a:ext cx="0" cy="0"/>
-          <a:chOff x="0" y="0"/>
-          <a:chExt cx="0" cy="0"/>
-        </a:xfrm>
-      </p:grpSpPr>
-      <p:sp>
-        <p:nvSpPr>
-          <p:cNvPr id="2" name="Slide Image Placeholder 1"/>
-          <p:cNvSpPr>
-            <a:spLocks noGrp="1"/>
-          </p:cNvSpPr>
-          <p:nvPr>
-            <p:ph type="sldImg" idx="2"/>
-          </p:nvPr>
-        </p:nvSpPr>
-        <p:spPr/>
-      </p:sp>
-      <p:sp>
-        <p:nvSpPr>
-          <p:cNvPr id="3" name="Notes Placeholder 2"/>
-          <p:cNvSpPr>
-            <a:spLocks noGrp="1"/>
-          </p:cNvSpPr>
-          <p:nvPr>
-            <p:ph type="body" idx="3" sz="quarter"/>
-          </p:nvPr>
-        </p:nvSpPr>
-        <p:spPr/>
-        <p:txBody>
-          <a:bodyPr/>
-          <a:lstStyle/>
-          <a:p>
-            <a:r>
-              <a:t>Ku and Kd here come from the transistor itself, by driving it into two fixtures and running the same two-equation solve the model uses. That is a ground-truth coefficient target, not native IBIS's opinion.</a:t>
-            </a:r>
-          </a:p>
-        </p:txBody>
-      </p:sp>
-      <p:sp>
-        <p:nvSpPr>
-          <p:cNvPr id="4" name="Slide Number Placeholder 3"/>
-          <p:cNvSpPr>
-            <a:spLocks noGrp="1"/>
-          </p:cNvSpPr>
-          <p:nvPr>
-            <p:ph type="sldNum" idx="5" sz="quarter"/>
-          </p:nvPr>
-        </p:nvSpPr>
-        <p:spPr/>
-      </p:sp>
-    </p:spTree>
-  </p:cSld>
-  <p:clrMapOvr>
-    <a:masterClrMapping/>
-  </p:clrMapOvr>
-</p:notes>
-</file>
-
-<file path=ppt/notesSlides/notesSlide11.xml><?xml version="1.0" encoding="utf-8"?>
-<p:notes xmlns:a="http://schemas.openxmlformats.org/drawingml/2006/main" xmlns:p="http://schemas.openxmlformats.org/presentationml/2006/main" xmlns:r="http://schemas.openxmlformats.org/officeDocument/2006/relationships">
-  <p:cSld>
-    <p:spTree>
-      <p:nvGrpSpPr>
-        <p:cNvPr id="1" name=""/>
-        <p:cNvGrpSpPr/>
-        <p:nvPr/>
-      </p:nvGrpSpPr>
-      <p:grpSpPr>
-        <a:xfrm>
-          <a:off x="0" y="0"/>
-          <a:ext cx="0" cy="0"/>
-          <a:chOff x="0" y="0"/>
-          <a:chExt cx="0" cy="0"/>
-        </a:xfrm>
-      </p:grpSpPr>
-      <p:sp>
-        <p:nvSpPr>
-          <p:cNvPr id="2" name="Slide Image Placeholder 1"/>
-          <p:cNvSpPr>
-            <a:spLocks noGrp="1"/>
-          </p:cNvSpPr>
-          <p:nvPr>
-            <p:ph type="sldImg" idx="2"/>
-          </p:nvPr>
-        </p:nvSpPr>
-        <p:spPr/>
-      </p:sp>
-      <p:sp>
-        <p:nvSpPr>
-          <p:cNvPr id="3" name="Notes Placeholder 2"/>
-          <p:cNvSpPr>
-            <a:spLocks noGrp="1"/>
-          </p:cNvSpPr>
-          <p:nvPr>
-            <p:ph type="body" idx="3" sz="quarter"/>
-          </p:nvPr>
-        </p:nvSpPr>
-        <p:spPr/>
-        <p:txBody>
-          <a:bodyPr/>
-          <a:lstStyle/>
-          <a:p>
-            <a:r>
-              <a:t>Two rules worth not re-learning: any bench for this model must start with a real edge, never a held level, because it initialises pulldown-on and latches state only on an edge. And ngspice must be converged before drawing any conclusion.</a:t>
-            </a:r>
-          </a:p>
-        </p:txBody>
-      </p:sp>
-      <p:sp>
-        <p:nvSpPr>
-          <p:cNvPr id="4" name="Slide Number Placeholder 3"/>
-          <p:cNvSpPr>
-            <a:spLocks noGrp="1"/>
-          </p:cNvSpPr>
-          <p:nvPr>
-            <p:ph type="sldNum" idx="5" sz="quarter"/>
-          </p:nvPr>
-        </p:nvSpPr>
-        <p:spPr/>
-      </p:sp>
-    </p:spTree>
-  </p:cSld>
-  <p:clrMapOvr>
-    <a:masterClrMapping/>
-  </p:clrMapOvr>
-</p:notes>
-</file>
-
 <file path=ppt/notesSlides/notesSlide2.xml><?xml version="1.0" encoding="utf-8"?>
 <p:notes xmlns:a="http://schemas.openxmlformats.org/drawingml/2006/main" xmlns:p="http://schemas.openxmlformats.org/presentationml/2006/main" xmlns:r="http://schemas.openxmlformats.org/officeDocument/2006/relationships">
   <p:cSld>
@@ -812,7 +668,7 @@
           <a:lstStyle/>
           <a:p>
             <a:r>
-              <a:t>Lead with this. Full-swing accuracy is close to as good as the format allows, so the effort belongs on truncated pulses.</a:t>
+              <a:t>The sign of the stranded charge flips with the timestep, so it is an integration error. Any fix by tuning a coefficient is a coin flip, which is why the retuned version helped on some cases and not others.</a:t>
             </a:r>
           </a:p>
         </p:txBody>
@@ -882,7 +738,7 @@
           <a:lstStyle/>
           <a:p>
             <a:r>
-              <a:t>Two separate defects. The offset is a settled-state Ku error, on the 90/60/50 targets only -- a ~6 ns tail that looks permanent on a 10 ns plot. The timing shift is the falling 50% crossing 69-99 ps late on every case, where native IBIS is 5-26 ps early.</a:t>
+              <a:t>One line of the generated subcircuit separates them. gate_state: CGUPCMD across RGUPCMD 1e15 with BGUPCMDON injecting a packet per edge. delay_cmd: BGUPCMD GUPCMD 0 V = V(PUCMDLVL). On the tail after the reversal gate_state sits at -0.144 and creeps back over ~3 ns; delay_cmd is at exactly 0. On this particular bench the stranded charge is negative and the command clamp removes it before it reaches Ku, so the two pads agree to 5 mV -- the pad consequence on the right is the case where the charge is positive.</a:t>
             </a:r>
           </a:p>
         </p:txBody>
@@ -952,7 +808,7 @@
           <a:lstStyle/>
           <a:p>
             <a:r>
-              <a:t>The plan quotes 69-99 ps late where native is 5-26 ps early. That is not reproducible from the data on disk with this metric -- what the stress matrix shows is about 15 ps later than native on io_buf and inv_chain, and on ex2 both are early with ours the closer. The defect is real and device-dependent, but smaller and less one-sided than the plan states.</a:t>
+              <a:t>On this case the pedestal goes from 97.9 mV to 5.2 mV against the transistor's 2.1 mV. Across all 29 matched stress cases RMSE goes from 108.6 to 92.2 mV, the only build that beats native IBIS. Caveat to state: delay_cmd has a 1.25 ns dead zone after a reversal where neither device is commanded on.</a:t>
             </a:r>
           </a:p>
         </p:txBody>
@@ -1022,7 +878,7 @@
           <a:lstStyle/>
           <a:p>
             <a:r>
-              <a:t>The sign of the stranded charge flips with the timestep, so it is an integration error. Any fix by tuning a coefficient is a coin flip, which is why the retuned version helped on some cases and not others.</a:t>
+              <a:t>The plan quotes 69-99 ps late where native is 5-26 ps early. That is not reproducible from the data on disk with a 50%-of-excursion metric. The stress matrix gives io_buf native +11..+18 against ours +27..+34; inv_chain native -6..-5 against ours +8..+12; ex2 both early with ours closer. The defect is real and device-dependent, but smaller and less one-sided than the plan states. It also grows as the pulse is truncated, on all nine buffer variants tested so far.</a:t>
             </a:r>
           </a:p>
         </p:txBody>
@@ -1092,7 +948,7 @@
           <a:lstStyle/>
           <a:p>
             <a:r>
-              <a:t>One line of the generated subcircuit separates them. gate_state: CGUPCMD across RGUPCMD 1e15 with BGUPCMDON injecting a packet per edge. delay_cmd: BGUPCMD GUPCMD 0 V = V(PUCMDLVL). On the tail after the reversal gate_state sits at -0.144 and creeps back over ~3 ns; delay_cmd is at exactly 0. On this particular bench the stranded charge is negative and the command clamp removes it before it reaches Ku, so the two pads agree to 5 mV -- the pad consequence on the right is the case where the charge is positive.</a:t>
+              <a:t>The control reproduces the shipped solve to 2.4e-08, so the method is exact, and in the quiet regions Ku is load-independent to four decimals -- the extraction really is a device property, not a fixture artifact.  Ku RMSE against the R-only baseline:  io_buf C 0.011 / L0.5 0.142 / L2 0.164 / L+C 0.159;  inv_chain C 0.007 / L0.5 0.004 / L2 0.007 / L+C 0.009;  ex2 C 0.028 / L0.5 0.008 / L2 0.022 / L+C 0.032.  Correction worth stating: the plan says added L and C are safe individually and the resonant combination is the problem. The measurement does not support that. On io_buf L alone is the worst case (0.164, peak 7.9) and L+C is no worse (0.159, peak 5.2); on the other two devices everything stays under 0.03. The real rule is that series inductance disturbs the solve, by an amount that depends on the buffer.</a:t>
             </a:r>
           </a:p>
         </p:txBody>
@@ -1162,7 +1018,7 @@
           <a:lstStyle/>
           <a:p>
             <a:r>
-              <a:t>On this case the pedestal goes from 97.9 mV to 5.2 mV against the transistor's 2.1 mV. Across all 29 matched stress cases RMSE goes from 108.6 to 92.2 mV, the only build that beats native IBIS. Caveat to state: delay_cmd has a 1.25 ns dead zone after a reversal where neither device is commanded on.</a:t>
+              <a:t>Ku and Kd here come from the transistor itself, by driving it into two fixtures and running the same two-equation solve the model uses. That is a ground-truth coefficient target, not native IBIS's opinion.</a:t>
             </a:r>
           </a:p>
         </p:txBody>
@@ -1232,77 +1088,7 @@
           <a:lstStyle/>
           <a:p>
             <a:r>
-              <a:t>The control reproduces the shipped solve to 2.4e-08, so the method is exact, and in the quiet regions Ku is load-independent to four decimals -- the extraction really is a device property, not a fixture artifact.  Ku RMSE against the R-only baseline:  io_buf C 0.011 / L0.5 0.142 / L2 0.164 / L+C 0.159;  inv_chain C 0.007 / L0.5 0.004 / L2 0.007 / L+C 0.009;  ex2 C 0.028 / L0.5 0.008 / L2 0.022 / L+C 0.032.  Correction worth stating: the plan says added L and C are safe individually and the resonant combination is the problem. The measurement does not support that. On io_buf L alone is the worst case (0.164, peak 7.9) and L+C is no worse (0.159, peak 5.2); on the other two devices everything stays under 0.03. The real rule is that series inductance disturbs the solve, by an amount that depends on the buffer.</a:t>
-            </a:r>
-          </a:p>
-        </p:txBody>
-      </p:sp>
-      <p:sp>
-        <p:nvSpPr>
-          <p:cNvPr id="4" name="Slide Number Placeholder 3"/>
-          <p:cNvSpPr>
-            <a:spLocks noGrp="1"/>
-          </p:cNvSpPr>
-          <p:nvPr>
-            <p:ph type="sldNum" idx="5" sz="quarter"/>
-          </p:nvPr>
-        </p:nvSpPr>
-        <p:spPr/>
-      </p:sp>
-    </p:spTree>
-  </p:cSld>
-  <p:clrMapOvr>
-    <a:masterClrMapping/>
-  </p:clrMapOvr>
-</p:notes>
-</file>
-
-<file path=ppt/notesSlides/notesSlide9.xml><?xml version="1.0" encoding="utf-8"?>
-<p:notes xmlns:a="http://schemas.openxmlformats.org/drawingml/2006/main" xmlns:p="http://schemas.openxmlformats.org/presentationml/2006/main" xmlns:r="http://schemas.openxmlformats.org/officeDocument/2006/relationships">
-  <p:cSld>
-    <p:spTree>
-      <p:nvGrpSpPr>
-        <p:cNvPr id="1" name=""/>
-        <p:cNvGrpSpPr/>
-        <p:nvPr/>
-      </p:nvGrpSpPr>
-      <p:grpSpPr>
-        <a:xfrm>
-          <a:off x="0" y="0"/>
-          <a:ext cx="0" cy="0"/>
-          <a:chOff x="0" y="0"/>
-          <a:chExt cx="0" cy="0"/>
-        </a:xfrm>
-      </p:grpSpPr>
-      <p:sp>
-        <p:nvSpPr>
-          <p:cNvPr id="2" name="Slide Image Placeholder 1"/>
-          <p:cNvSpPr>
-            <a:spLocks noGrp="1"/>
-          </p:cNvSpPr>
-          <p:nvPr>
-            <p:ph type="sldImg" idx="2"/>
-          </p:nvPr>
-        </p:nvSpPr>
-        <p:spPr/>
-      </p:sp>
-      <p:sp>
-        <p:nvSpPr>
-          <p:cNvPr id="3" name="Notes Placeholder 2"/>
-          <p:cNvSpPr>
-            <a:spLocks noGrp="1"/>
-          </p:cNvSpPr>
-          <p:nvPr>
-            <p:ph type="body" idx="3" sz="quarter"/>
-          </p:nvPr>
-        </p:nvSpPr>
-        <p:spPr/>
-        <p:txBody>
-          <a:bodyPr/>
-          <a:lstStyle/>
-          <a:p>
-            <a:r>
-              <a:t>I proposed the wrong cause first -- Miller feedthrough -- and built the nomiller variant to test it. It came back identical to the control. Those caps are 20.5 fF against C_comp's 5 pF, 0.41%, 250x too small, which is arithmetic I should have done before building the variant.</a:t>
+              <a:t>Two rules worth not re-learning: any bench for this model must start with a real edge, never a held level, because it initialises pulldown-on and latches state only on an edge. And ngspice must be converged before drawing any conclusion.</a:t>
             </a:r>
           </a:p>
         </p:txBody>
@@ -3268,7 +3054,7 @@
               </a:defRPr>
             </a:pPr>
             <a:r>
-              <a:t>Getting our IBIS model closer to the transistor</a:t>
+              <a:t>IBIS Simulation Short Pulse Handling</a:t>
             </a:r>
           </a:p>
         </p:txBody>
@@ -3308,7 +3094,7 @@
               </a:defRPr>
             </a:pPr>
             <a:r>
-              <a:t>IBIS buffer modelling — status</a:t>
+              <a:t>Simon Hwang</a:t>
             </a:r>
           </a:p>
           <a:p>
@@ -3321,7 +3107,33 @@
               </a:defRPr>
             </a:pPr>
             <a:r>
-              <a:t>4 September 2026</a:t>
+              <a:t>Dr. Chulsoon Hwang</a:t>
+            </a:r>
+          </a:p>
+          <a:p>
+            <a:pPr algn="ctr">
+              <a:defRPr sz="1600">
+                <a:solidFill>
+                  <a:srgbClr val="000000"/>
+                </a:solidFill>
+                <a:latin typeface="Times New Roman"/>
+              </a:defRPr>
+            </a:pPr>
+            <a:r>
+              <a:t>Dr. Zhiping Yang</a:t>
+            </a:r>
+          </a:p>
+          <a:p>
+            <a:pPr algn="ctr">
+              <a:defRPr sz="1600">
+                <a:solidFill>
+                  <a:srgbClr val="000000"/>
+                </a:solidFill>
+                <a:latin typeface="Times New Roman"/>
+              </a:defRPr>
+            </a:pPr>
+            <a:r>
+              <a:t>9/4/2026</a:t>
             </a:r>
           </a:p>
         </p:txBody>
@@ -3373,7 +3185,7 @@
               </a:defRPr>
             </a:pPr>
             <a:r>
-              <a:t>The core reconstruction is sound</a:t>
+              <a:t>What fixtures do to the extracted Ku/Kd</a:t>
             </a:r>
           </a:p>
         </p:txBody>
@@ -3409,7 +3221,7 @@
               </a:defRPr>
             </a:pPr>
             <a:r>
-              <a:t>CONFIDENCE</a:t>
+              <a:t>RLC FIXTURE EFFECTS</a:t>
             </a:r>
           </a:p>
         </p:txBody>
@@ -3448,7 +3260,7 @@
               </a:defRPr>
             </a:pPr>
             <a:r>
-              <a:t>•  A golden-waveform test replays a model's own V-T tables into the fixture that produced them — no transistor, no native IBIS, no engine confound.</a:t>
+              <a:t>•  Five fixtures, Ku re-solved on each. In the quiet regions all five agree to four decimals.</a:t>
             </a:r>
           </a:p>
           <a:p>
@@ -3464,138 +3276,149 @@
               </a:defRPr>
             </a:pPr>
             <a:r>
-              <a:t>•  We had never done this before. It is now the standing health check.</a:t>
-            </a:r>
-          </a:p>
-        </p:txBody>
-      </p:sp>
-      <p:sp>
-        <p:nvSpPr>
-          <p:cNvPr id="5" name="TextBox 4"/>
-          <p:cNvSpPr txBox="1"/>
+              <a:t>•  Series inductance disturbs it, and only on io_buf.</a:t>
+            </a:r>
+          </a:p>
+        </p:txBody>
+      </p:sp>
+      <p:sp>
+        <p:nvSpPr>
+          <p:cNvPr id="5" name="Rectangle 4"/>
+          <p:cNvSpPr/>
           <p:nvPr/>
         </p:nvSpPr>
         <p:spPr>
           <a:xfrm>
-            <a:off x="640080" y="2834640"/>
-            <a:ext cx="10972800" cy="457200"/>
+            <a:off x="513743" y="2057400"/>
+            <a:ext cx="5373312" cy="4398264"/>
           </a:xfrm>
           <a:prstGeom prst="rect">
             <a:avLst/>
           </a:prstGeom>
-          <a:noFill/>
-        </p:spPr>
-        <p:txBody>
-          <a:bodyPr wrap="square" lIns="45720" rIns="45720" anchor="t">
-            <a:spAutoFit/>
-          </a:bodyPr>
-          <a:lstStyle/>
-          <a:p>
-            <a:pPr algn="l">
-              <a:defRPr sz="1700" b="0">
-                <a:solidFill>
-                  <a:srgbClr val="191F1C"/>
-                </a:solidFill>
-                <a:latin typeface="Aptos"/>
-              </a:defRPr>
-            </a:pPr>
-            <a:r>
-              <a:t>Our model against its own golden waveforms, three buffers, both edges, both fixtures:</a:t>
-            </a:r>
-          </a:p>
-        </p:txBody>
-      </p:sp>
-      <p:sp>
-        <p:nvSpPr>
-          <p:cNvPr id="6" name="TextBox 5"/>
-          <p:cNvSpPr txBox="1"/>
+          <a:solidFill>
+            <a:srgbClr val="FFFFFF"/>
+          </a:solidFill>
+          <a:ln w="10160">
+            <a:solidFill>
+              <a:srgbClr val="CBD0CC"/>
+            </a:solidFill>
+          </a:ln>
+        </p:spPr>
+        <p:style>
+          <a:lnRef idx="1">
+            <a:schemeClr val="accent1"/>
+          </a:lnRef>
+          <a:fillRef idx="3">
+            <a:schemeClr val="accent1"/>
+          </a:fillRef>
+          <a:effectRef idx="2">
+            <a:schemeClr val="accent1"/>
+          </a:effectRef>
+          <a:fontRef idx="minor">
+            <a:schemeClr val="lt1"/>
+          </a:fontRef>
+        </p:style>
+        <p:txBody>
+          <a:bodyPr rtlCol="0" anchor="ctr"/>
+          <a:lstStyle/>
+          <a:p>
+            <a:pPr algn="ctr"/>
+          </a:p>
+        </p:txBody>
+      </p:sp>
+      <p:pic>
+        <p:nvPicPr>
+          <p:cNvPr id="6" name="Picture 5" descr="fixture_vt.png"/>
+          <p:cNvPicPr>
+            <a:picLocks noChangeAspect="1"/>
+          </p:cNvPicPr>
           <p:nvPr/>
-        </p:nvSpPr>
-        <p:spPr>
-          <a:xfrm>
-            <a:off x="640080" y="3383280"/>
-            <a:ext cx="11064240" cy="1371600"/>
+        </p:nvPicPr>
+        <p:blipFill>
+          <a:blip r:embed="rId2"/>
+          <a:stretch>
+            <a:fillRect/>
+          </a:stretch>
+        </p:blipFill>
+        <p:spPr>
+          <a:xfrm>
+            <a:off x="541175" y="2084831"/>
+            <a:ext cx="5318448" cy="4343400"/>
           </a:xfrm>
           <a:prstGeom prst="rect">
             <a:avLst/>
           </a:prstGeom>
-          <a:noFill/>
-        </p:spPr>
-        <p:txBody>
-          <a:bodyPr wrap="square" lIns="73152" rIns="36576" tIns="36576" bIns="36576">
-            <a:spAutoFit/>
-          </a:bodyPr>
-          <a:lstStyle/>
-          <a:p>
-            <a:pPr>
-              <a:spcAft>
-                <a:spcPts val="300"/>
-              </a:spcAft>
-              <a:defRPr sz="1700">
-                <a:solidFill>
-                  <a:srgbClr val="191F1C"/>
-                </a:solidFill>
-                <a:latin typeface="Aptos"/>
-              </a:defRPr>
-            </a:pPr>
-            <a:r>
-              <a:t>•  figure of merit   0.03 – 0.41 %</a:t>
-            </a:r>
-          </a:p>
-          <a:p>
-            <a:pPr>
-              <a:spcAft>
-                <a:spcPts val="300"/>
-              </a:spcAft>
-              <a:defRPr sz="1700">
-                <a:solidFill>
-                  <a:srgbClr val="191F1C"/>
-                </a:solidFill>
-                <a:latin typeface="Aptos"/>
-              </a:defRPr>
-            </a:pPr>
-            <a:r>
-              <a:t>•  timing shift      +4 to +8 ps</a:t>
-            </a:r>
-          </a:p>
-        </p:txBody>
-      </p:sp>
-      <p:sp>
-        <p:nvSpPr>
-          <p:cNvPr id="7" name="TextBox 6"/>
-          <p:cNvSpPr txBox="1"/>
+        </p:spPr>
+      </p:pic>
+      <p:sp>
+        <p:nvSpPr>
+          <p:cNvPr id="7" name="Rectangle 6"/>
+          <p:cNvSpPr/>
           <p:nvPr/>
         </p:nvSpPr>
         <p:spPr>
           <a:xfrm>
-            <a:off x="640080" y="4572000"/>
-            <a:ext cx="10972800" cy="731520"/>
+            <a:off x="6274463" y="2057400"/>
+            <a:ext cx="5373312" cy="4398264"/>
           </a:xfrm>
           <a:prstGeom prst="rect">
             <a:avLst/>
           </a:prstGeom>
-          <a:noFill/>
-        </p:spPr>
-        <p:txBody>
-          <a:bodyPr wrap="square" lIns="45720" rIns="45720" anchor="t">
-            <a:spAutoFit/>
-          </a:bodyPr>
-          <a:lstStyle/>
-          <a:p>
-            <a:pPr algn="l">
-              <a:defRPr sz="1700" b="0">
-                <a:solidFill>
-                  <a:srgbClr val="191F1C"/>
-                </a:solidFill>
-                <a:latin typeface="Aptos"/>
-              </a:defRPr>
-            </a:pPr>
-            <a:r>
-              <a:t>So whatever is wrong under stress, it is not the I-V × Ku(t) reconstruction.</a:t>
-            </a:r>
-          </a:p>
-        </p:txBody>
-      </p:sp>
+          <a:solidFill>
+            <a:srgbClr val="FFFFFF"/>
+          </a:solidFill>
+          <a:ln w="10160">
+            <a:solidFill>
+              <a:srgbClr val="CBD0CC"/>
+            </a:solidFill>
+          </a:ln>
+        </p:spPr>
+        <p:style>
+          <a:lnRef idx="1">
+            <a:schemeClr val="accent1"/>
+          </a:lnRef>
+          <a:fillRef idx="3">
+            <a:schemeClr val="accent1"/>
+          </a:fillRef>
+          <a:effectRef idx="2">
+            <a:schemeClr val="accent1"/>
+          </a:effectRef>
+          <a:fontRef idx="minor">
+            <a:schemeClr val="lt1"/>
+          </a:fontRef>
+        </p:style>
+        <p:txBody>
+          <a:bodyPr rtlCol="0" anchor="ctr"/>
+          <a:lstStyle/>
+          <a:p>
+            <a:pPr algn="ctr"/>
+          </a:p>
+        </p:txBody>
+      </p:sp>
+      <p:pic>
+        <p:nvPicPr>
+          <p:cNvPr id="8" name="Picture 7" descr="fixture_ku.png"/>
+          <p:cNvPicPr>
+            <a:picLocks noChangeAspect="1"/>
+          </p:cNvPicPr>
+          <p:nvPr/>
+        </p:nvPicPr>
+        <p:blipFill>
+          <a:blip r:embed="rId3"/>
+          <a:stretch>
+            <a:fillRect/>
+          </a:stretch>
+        </p:blipFill>
+        <p:spPr>
+          <a:xfrm>
+            <a:off x="6301895" y="2084831"/>
+            <a:ext cx="5318448" cy="4343400"/>
+          </a:xfrm>
+          <a:prstGeom prst="rect">
+            <a:avLst/>
+          </a:prstGeom>
+        </p:spPr>
+      </p:pic>
     </p:spTree>
   </p:cSld>
   <p:clrMapOvr>
@@ -3638,7 +3461,7 @@
               </a:defRPr>
             </a:pPr>
             <a:r>
-              <a:t>C_comp is handled correctly</a:t>
+              <a:t>Nine new buffer variants, same stress axis</a:t>
             </a:r>
           </a:p>
         </p:txBody>
@@ -3674,7 +3497,7 @@
               </a:defRPr>
             </a:pPr>
             <a:r>
-              <a:t>CONFIDENCE</a:t>
+              <a:t>MORE SPICE BUFFER MOCKUPS</a:t>
             </a:r>
           </a:p>
         </p:txBody>
@@ -3688,7 +3511,7 @@
         <p:spPr>
           <a:xfrm>
             <a:off x="640080" y="1170432"/>
-            <a:ext cx="11064240" cy="685800"/>
+            <a:ext cx="11064240" cy="1371600"/>
           </a:xfrm>
           <a:prstGeom prst="rect">
             <a:avLst/>
@@ -3713,68 +3536,9 @@
               </a:defRPr>
             </a:pPr>
             <a:r>
-              <a:t>•  Nominal C_comp beats zero on all 12 tables, and the margin scales with the die capacitance.</a:t>
-            </a:r>
-          </a:p>
-        </p:txBody>
-      </p:sp>
-      <p:sp>
-        <p:nvSpPr>
-          <p:cNvPr id="5" name="TextBox 4"/>
-          <p:cNvSpPr txBox="1"/>
-          <p:nvPr/>
-        </p:nvSpPr>
-        <p:spPr>
-          <a:xfrm>
-            <a:off x="640080" y="2011680"/>
-            <a:ext cx="10972800" cy="457200"/>
-          </a:xfrm>
-          <a:prstGeom prst="rect">
-            <a:avLst/>
-          </a:prstGeom>
-          <a:noFill/>
-        </p:spPr>
-        <p:txBody>
-          <a:bodyPr wrap="square" lIns="45720" rIns="45720" anchor="t">
-            <a:spAutoFit/>
-          </a:bodyPr>
-          <a:lstStyle/>
-          <a:p>
-            <a:pPr algn="l">
-              <a:defRPr sz="1700" b="0">
-                <a:solidFill>
-                  <a:srgbClr val="191F1C"/>
-                </a:solidFill>
-                <a:latin typeface="Aptos"/>
-              </a:defRPr>
-            </a:pPr>
-            <a:r>
-              <a:t>50% crossing shift against the transistor, with C_comp at nominal and set to zero:</a:t>
-            </a:r>
-          </a:p>
-        </p:txBody>
-      </p:sp>
-      <p:sp>
-        <p:nvSpPr>
-          <p:cNvPr id="6" name="TextBox 5"/>
-          <p:cNvSpPr txBox="1"/>
-          <p:nvPr/>
-        </p:nvSpPr>
-        <p:spPr>
-          <a:xfrm>
-            <a:off x="640080" y="2560320"/>
-            <a:ext cx="11064240" cy="2057400"/>
-          </a:xfrm>
-          <a:prstGeom prst="rect">
-            <a:avLst/>
-          </a:prstGeom>
-          <a:noFill/>
-        </p:spPr>
-        <p:txBody>
-          <a:bodyPr wrap="square" lIns="73152" rIns="36576" tIns="36576" bIns="36576">
-            <a:spAutoFit/>
-          </a:bodyPr>
-          <a:lstStyle/>
+              <a:t>•  Slower predriver, halved output devices, skewed PMOS, open-drain.</a:t>
+            </a:r>
+          </a:p>
           <a:p>
             <a:pPr>
               <a:spcAft>
@@ -3788,79 +3552,149 @@
               </a:defRPr>
             </a:pPr>
             <a:r>
-              <a:t>•  50 Ω, 0 pF     +6.7 ps        −277.8 ps</a:t>
-            </a:r>
-          </a:p>
-          <a:p>
-            <a:pPr>
-              <a:spcAft>
-                <a:spcPts val="300"/>
-              </a:spcAft>
-              <a:defRPr sz="1700">
-                <a:solidFill>
-                  <a:srgbClr val="191F1C"/>
-                </a:solidFill>
-                <a:latin typeface="Aptos"/>
-              </a:defRPr>
-            </a:pPr>
-            <a:r>
-              <a:t>•  500 Ω, 2 pF    −0.2 ps          −0.9 ps</a:t>
-            </a:r>
-          </a:p>
-          <a:p>
-            <a:pPr>
-              <a:spcAft>
-                <a:spcPts val="300"/>
-              </a:spcAft>
-              <a:defRPr sz="1700">
-                <a:solidFill>
-                  <a:srgbClr val="191F1C"/>
-                </a:solidFill>
-                <a:latin typeface="Aptos"/>
-              </a:defRPr>
-            </a:pPr>
-            <a:r>
-              <a:t>•  1 kΩ, 5 pF     −1.3 ps          −1.1 ps</a:t>
-            </a:r>
-          </a:p>
-        </p:txBody>
-      </p:sp>
-      <p:sp>
-        <p:nvSpPr>
-          <p:cNvPr id="7" name="TextBox 6"/>
-          <p:cNvSpPr txBox="1"/>
+              <a:t>•  Characterised and stressed exactly like the three base buffers.</a:t>
+            </a:r>
+          </a:p>
+        </p:txBody>
+      </p:sp>
+      <p:sp>
+        <p:nvSpPr>
+          <p:cNvPr id="5" name="Rectangle 4"/>
+          <p:cNvSpPr/>
           <p:nvPr/>
         </p:nvSpPr>
         <p:spPr>
           <a:xfrm>
-            <a:off x="640080" y="4480560"/>
-            <a:ext cx="10972800" cy="1005840"/>
+            <a:off x="513743" y="2057400"/>
+            <a:ext cx="5373312" cy="4398264"/>
           </a:xfrm>
           <a:prstGeom prst="rect">
             <a:avLst/>
           </a:prstGeom>
-          <a:noFill/>
-        </p:spPr>
-        <p:txBody>
-          <a:bodyPr wrap="square" lIns="45720" rIns="45720" anchor="t">
-            <a:spAutoFit/>
-          </a:bodyPr>
-          <a:lstStyle/>
-          <a:p>
-            <a:pPr algn="l">
-              <a:defRPr sz="1700" b="0">
-                <a:solidFill>
-                  <a:srgbClr val="191F1C"/>
-                </a:solidFill>
-                <a:latin typeface="Aptos"/>
-              </a:defRPr>
-            </a:pPr>
-            <a:r>
-              <a:t>I had this backwards at first. I misapplied the book's double-counting diagnostic and reported that our model over-applies C_comp; the golden-waveform test overturned it.</a:t>
-            </a:r>
-          </a:p>
-        </p:txBody>
-      </p:sp>
+          <a:solidFill>
+            <a:srgbClr val="FFFFFF"/>
+          </a:solidFill>
+          <a:ln w="10160">
+            <a:solidFill>
+              <a:srgbClr val="CBD0CC"/>
+            </a:solidFill>
+          </a:ln>
+        </p:spPr>
+        <p:style>
+          <a:lnRef idx="1">
+            <a:schemeClr val="accent1"/>
+          </a:lnRef>
+          <a:fillRef idx="3">
+            <a:schemeClr val="accent1"/>
+          </a:fillRef>
+          <a:effectRef idx="2">
+            <a:schemeClr val="accent1"/>
+          </a:effectRef>
+          <a:fontRef idx="minor">
+            <a:schemeClr val="lt1"/>
+          </a:fontRef>
+        </p:style>
+        <p:txBody>
+          <a:bodyPr rtlCol="0" anchor="ctr"/>
+          <a:lstStyle/>
+          <a:p>
+            <a:pPr algn="ctr"/>
+          </a:p>
+        </p:txBody>
+      </p:sp>
+      <p:pic>
+        <p:nvPicPr>
+          <p:cNvPr id="6" name="Picture 5" descr="variant_pad.png"/>
+          <p:cNvPicPr>
+            <a:picLocks noChangeAspect="1"/>
+          </p:cNvPicPr>
+          <p:nvPr/>
+        </p:nvPicPr>
+        <p:blipFill>
+          <a:blip r:embed="rId2"/>
+          <a:stretch>
+            <a:fillRect/>
+          </a:stretch>
+        </p:blipFill>
+        <p:spPr>
+          <a:xfrm>
+            <a:off x="541175" y="2084831"/>
+            <a:ext cx="5318448" cy="4343400"/>
+          </a:xfrm>
+          <a:prstGeom prst="rect">
+            <a:avLst/>
+          </a:prstGeom>
+        </p:spPr>
+      </p:pic>
+      <p:sp>
+        <p:nvSpPr>
+          <p:cNvPr id="7" name="Rectangle 6"/>
+          <p:cNvSpPr/>
+          <p:nvPr/>
+        </p:nvSpPr>
+        <p:spPr>
+          <a:xfrm>
+            <a:off x="6274463" y="2057400"/>
+            <a:ext cx="5373312" cy="4398264"/>
+          </a:xfrm>
+          <a:prstGeom prst="rect">
+            <a:avLst/>
+          </a:prstGeom>
+          <a:solidFill>
+            <a:srgbClr val="FFFFFF"/>
+          </a:solidFill>
+          <a:ln w="10160">
+            <a:solidFill>
+              <a:srgbClr val="CBD0CC"/>
+            </a:solidFill>
+          </a:ln>
+        </p:spPr>
+        <p:style>
+          <a:lnRef idx="1">
+            <a:schemeClr val="accent1"/>
+          </a:lnRef>
+          <a:fillRef idx="3">
+            <a:schemeClr val="accent1"/>
+          </a:fillRef>
+          <a:effectRef idx="2">
+            <a:schemeClr val="accent1"/>
+          </a:effectRef>
+          <a:fontRef idx="minor">
+            <a:schemeClr val="lt1"/>
+          </a:fontRef>
+        </p:style>
+        <p:txBody>
+          <a:bodyPr rtlCol="0" anchor="ctr"/>
+          <a:lstStyle/>
+          <a:p>
+            <a:pPr algn="ctr"/>
+          </a:p>
+        </p:txBody>
+      </p:sp>
+      <p:pic>
+        <p:nvPicPr>
+          <p:cNvPr id="8" name="Picture 7" descr="variant_kukd.png"/>
+          <p:cNvPicPr>
+            <a:picLocks noChangeAspect="1"/>
+          </p:cNvPicPr>
+          <p:nvPr/>
+        </p:nvPicPr>
+        <p:blipFill>
+          <a:blip r:embed="rId3"/>
+          <a:stretch>
+            <a:fillRect/>
+          </a:stretch>
+        </p:blipFill>
+        <p:spPr>
+          <a:xfrm>
+            <a:off x="6301895" y="2084831"/>
+            <a:ext cx="5318448" cy="4343400"/>
+          </a:xfrm>
+          <a:prstGeom prst="rect">
+            <a:avLst/>
+          </a:prstGeom>
+        </p:spPr>
+      </p:pic>
     </p:spTree>
   </p:cSld>
   <p:clrMapOvr>
@@ -3903,1085 +3737,6 @@
               </a:defRPr>
             </a:pPr>
             <a:r>
-              <a:t>Is the difference the engine or the model?</a:t>
-            </a:r>
-          </a:p>
-        </p:txBody>
-      </p:sp>
-      <p:sp>
-        <p:nvSpPr>
-          <p:cNvPr id="3" name="TextBox 2"/>
-          <p:cNvSpPr txBox="1"/>
-          <p:nvPr/>
-        </p:nvSpPr>
-        <p:spPr>
-          <a:xfrm>
-            <a:off x="9372600" y="109728"/>
-            <a:ext cx="2148840" cy="228600"/>
-          </a:xfrm>
-          <a:prstGeom prst="rect">
-            <a:avLst/>
-          </a:prstGeom>
-          <a:noFill/>
-        </p:spPr>
-        <p:txBody>
-          <a:bodyPr wrap="square" lIns="45720" rIns="45720" anchor="t">
-            <a:spAutoFit/>
-          </a:bodyPr>
-          <a:lstStyle/>
-          <a:p>
-            <a:pPr algn="r">
-              <a:defRPr sz="950" b="1">
-                <a:solidFill>
-                  <a:srgbClr val="666C68"/>
-                </a:solidFill>
-                <a:latin typeface="Aptos"/>
-              </a:defRPr>
-            </a:pPr>
-            <a:r>
-              <a:t>METHOD</a:t>
-            </a:r>
-          </a:p>
-        </p:txBody>
-      </p:sp>
-      <p:sp>
-        <p:nvSpPr>
-          <p:cNvPr id="4" name="TextBox 3"/>
-          <p:cNvSpPr txBox="1"/>
-          <p:nvPr/>
-        </p:nvSpPr>
-        <p:spPr>
-          <a:xfrm>
-            <a:off x="640080" y="1170432"/>
-            <a:ext cx="11064240" cy="685800"/>
-          </a:xfrm>
-          <a:prstGeom prst="rect">
-            <a:avLst/>
-          </a:prstGeom>
-          <a:noFill/>
-        </p:spPr>
-        <p:txBody>
-          <a:bodyPr wrap="square" lIns="73152" rIns="36576" tIns="36576" bIns="36576">
-            <a:spAutoFit/>
-          </a:bodyPr>
-          <a:lstStyle/>
-          <a:p>
-            <a:pPr>
-              <a:spcAft>
-                <a:spcPts val="300"/>
-              </a:spcAft>
-              <a:defRPr sz="1700">
-                <a:solidFill>
-                  <a:srgbClr val="191F1C"/>
-                </a:solidFill>
-                <a:latin typeface="Aptos"/>
-              </a:defRPr>
-            </a:pPr>
-            <a:r>
-              <a:t>•  Every native-vs-ours number changes two things at once. We wrote a translator so the same model runs in both simulators.</a:t>
-            </a:r>
-          </a:p>
-        </p:txBody>
-      </p:sp>
-      <p:sp>
-        <p:nvSpPr>
-          <p:cNvPr id="5" name="TextBox 4"/>
-          <p:cNvSpPr txBox="1"/>
-          <p:nvPr/>
-        </p:nvSpPr>
-        <p:spPr>
-          <a:xfrm>
-            <a:off x="640080" y="2103120"/>
-            <a:ext cx="10972800" cy="457200"/>
-          </a:xfrm>
-          <a:prstGeom prst="rect">
-            <a:avLst/>
-          </a:prstGeom>
-          <a:noFill/>
-        </p:spPr>
-        <p:txBody>
-          <a:bodyPr wrap="square" lIns="45720" rIns="45720" anchor="t">
-            <a:spAutoFit/>
-          </a:bodyPr>
-          <a:lstStyle/>
-          <a:p>
-            <a:pPr algn="l">
-              <a:defRPr sz="1700" b="0">
-                <a:solidFill>
-                  <a:srgbClr val="191F1C"/>
-                </a:solidFill>
-                <a:latin typeface="Aptos"/>
-              </a:defRPr>
-            </a:pPr>
-            <a:r>
-              <a:t>Falling 50% crossing:</a:t>
-            </a:r>
-          </a:p>
-        </p:txBody>
-      </p:sp>
-      <p:sp>
-        <p:nvSpPr>
-          <p:cNvPr id="6" name="TextBox 5"/>
-          <p:cNvSpPr txBox="1"/>
-          <p:nvPr/>
-        </p:nvSpPr>
-        <p:spPr>
-          <a:xfrm>
-            <a:off x="640080" y="2651760"/>
-            <a:ext cx="11064240" cy="2057400"/>
-          </a:xfrm>
-          <a:prstGeom prst="rect">
-            <a:avLst/>
-          </a:prstGeom>
-          <a:noFill/>
-        </p:spPr>
-        <p:txBody>
-          <a:bodyPr wrap="square" lIns="73152" rIns="36576" tIns="36576" bIns="36576">
-            <a:spAutoFit/>
-          </a:bodyPr>
-          <a:lstStyle/>
-          <a:p>
-            <a:pPr>
-              <a:spcAft>
-                <a:spcPts val="300"/>
-              </a:spcAft>
-              <a:defRPr sz="1700">
-                <a:solidFill>
-                  <a:srgbClr val="191F1C"/>
-                </a:solidFill>
-                <a:latin typeface="Aptos"/>
-              </a:defRPr>
-            </a:pPr>
-            <a:r>
-              <a:t>•  our model in ngspice     5.3371 ns</a:t>
-            </a:r>
-          </a:p>
-          <a:p>
-            <a:pPr>
-              <a:spcAft>
-                <a:spcPts val="300"/>
-              </a:spcAft>
-              <a:defRPr sz="1700">
-                <a:solidFill>
-                  <a:srgbClr val="191F1C"/>
-                </a:solidFill>
-                <a:latin typeface="Aptos"/>
-              </a:defRPr>
-            </a:pPr>
-            <a:r>
-              <a:t>•  our model in HSPICE      5.3375 ns     engine:  −0.5 ps</a:t>
-            </a:r>
-          </a:p>
-          <a:p>
-            <a:pPr>
-              <a:spcAft>
-                <a:spcPts val="300"/>
-              </a:spcAft>
-              <a:defRPr sz="1700">
-                <a:solidFill>
-                  <a:srgbClr val="191F1C"/>
-                </a:solidFill>
-                <a:latin typeface="Aptos"/>
-              </a:defRPr>
-            </a:pPr>
-            <a:r>
-              <a:t>•  native IBIS in HSPICE    5.3319 ns     model:   +5.6 ps</a:t>
-            </a:r>
-          </a:p>
-        </p:txBody>
-      </p:sp>
-      <p:sp>
-        <p:nvSpPr>
-          <p:cNvPr id="7" name="TextBox 6"/>
-          <p:cNvSpPr txBox="1"/>
-          <p:nvPr/>
-        </p:nvSpPr>
-        <p:spPr>
-          <a:xfrm>
-            <a:off x="640080" y="4572000"/>
-            <a:ext cx="10972800" cy="914400"/>
-          </a:xfrm>
-          <a:prstGeom prst="rect">
-            <a:avLst/>
-          </a:prstGeom>
-          <a:noFill/>
-        </p:spPr>
-        <p:txBody>
-          <a:bodyPr wrap="square" lIns="45720" rIns="45720" anchor="t">
-            <a:spAutoFit/>
-          </a:bodyPr>
-          <a:lstStyle/>
-          <a:p>
-            <a:pPr algn="l">
-              <a:defRPr sz="1700" b="0">
-                <a:solidFill>
-                  <a:srgbClr val="191F1C"/>
-                </a:solidFill>
-                <a:latin typeface="Aptos"/>
-              </a:defRPr>
-            </a:pPr>
-            <a:r>
-              <a:t>The engine is not the source — provided ngspice is converged. At a 1 ps step it was an aliasing outlier that doubled the apparent lag.</a:t>
-            </a:r>
-          </a:p>
-        </p:txBody>
-      </p:sp>
-    </p:spTree>
-  </p:cSld>
-  <p:clrMapOvr>
-    <a:masterClrMapping/>
-  </p:clrMapOvr>
-</p:sld>
-</file>
-
-<file path=ppt/slides/slide13.xml><?xml version="1.0" encoding="utf-8"?>
-<p:sld xmlns:a="http://schemas.openxmlformats.org/drawingml/2006/main" xmlns:p="http://schemas.openxmlformats.org/presentationml/2006/main" xmlns:r="http://schemas.openxmlformats.org/officeDocument/2006/relationships">
-  <p:cSld>
-    <p:spTree>
-      <p:nvGrpSpPr>
-        <p:cNvPr id="1" name=""/>
-        <p:cNvGrpSpPr/>
-        <p:nvPr/>
-      </p:nvGrpSpPr>
-      <p:grpSpPr/>
-      <p:sp>
-        <p:nvSpPr>
-          <p:cNvPr id="2" name="Title 1"/>
-          <p:cNvSpPr>
-            <a:spLocks noGrp="1"/>
-          </p:cNvSpPr>
-          <p:nvPr>
-            <p:ph type="title"/>
-          </p:nvPr>
-        </p:nvSpPr>
-        <p:spPr/>
-        <p:txBody>
-          <a:bodyPr/>
-          <a:lstStyle/>
-          <a:p>
-            <a:pPr algn="l">
-              <a:defRPr sz="2700" b="0">
-                <a:solidFill>
-                  <a:srgbClr val="000000"/>
-                </a:solidFill>
-                <a:latin typeface="Times New Roman"/>
-              </a:defRPr>
-            </a:pPr>
-            <a:r>
-              <a:t>What fixtures do to the extracted Ku/Kd</a:t>
-            </a:r>
-          </a:p>
-        </p:txBody>
-      </p:sp>
-      <p:sp>
-        <p:nvSpPr>
-          <p:cNvPr id="3" name="TextBox 2"/>
-          <p:cNvSpPr txBox="1"/>
-          <p:nvPr/>
-        </p:nvSpPr>
-        <p:spPr>
-          <a:xfrm>
-            <a:off x="9372600" y="109728"/>
-            <a:ext cx="2148840" cy="228600"/>
-          </a:xfrm>
-          <a:prstGeom prst="rect">
-            <a:avLst/>
-          </a:prstGeom>
-          <a:noFill/>
-        </p:spPr>
-        <p:txBody>
-          <a:bodyPr wrap="square" lIns="45720" rIns="45720" anchor="t">
-            <a:spAutoFit/>
-          </a:bodyPr>
-          <a:lstStyle/>
-          <a:p>
-            <a:pPr algn="r">
-              <a:defRPr sz="950" b="1">
-                <a:solidFill>
-                  <a:srgbClr val="666C68"/>
-                </a:solidFill>
-                <a:latin typeface="Aptos"/>
-              </a:defRPr>
-            </a:pPr>
-            <a:r>
-              <a:t>METHOD</a:t>
-            </a:r>
-          </a:p>
-        </p:txBody>
-      </p:sp>
-      <p:sp>
-        <p:nvSpPr>
-          <p:cNvPr id="4" name="TextBox 3"/>
-          <p:cNvSpPr txBox="1"/>
-          <p:nvPr/>
-        </p:nvSpPr>
-        <p:spPr>
-          <a:xfrm>
-            <a:off x="640080" y="1170432"/>
-            <a:ext cx="11064240" cy="1371600"/>
-          </a:xfrm>
-          <a:prstGeom prst="rect">
-            <a:avLst/>
-          </a:prstGeom>
-          <a:noFill/>
-        </p:spPr>
-        <p:txBody>
-          <a:bodyPr wrap="square" lIns="73152" rIns="36576" tIns="36576" bIns="36576">
-            <a:spAutoFit/>
-          </a:bodyPr>
-          <a:lstStyle/>
-          <a:p>
-            <a:pPr>
-              <a:spcAft>
-                <a:spcPts val="300"/>
-              </a:spcAft>
-              <a:defRPr sz="1700">
-                <a:solidFill>
-                  <a:srgbClr val="191F1C"/>
-                </a:solidFill>
-                <a:latin typeface="Aptos"/>
-              </a:defRPr>
-            </a:pPr>
-            <a:r>
-              <a:t>•  Five fixtures, Ku re-solved on each. In the quiet regions all five agree to four decimals.</a:t>
-            </a:r>
-          </a:p>
-          <a:p>
-            <a:pPr>
-              <a:spcAft>
-                <a:spcPts val="300"/>
-              </a:spcAft>
-              <a:defRPr sz="1700">
-                <a:solidFill>
-                  <a:srgbClr val="191F1C"/>
-                </a:solidFill>
-                <a:latin typeface="Aptos"/>
-              </a:defRPr>
-            </a:pPr>
-            <a:r>
-              <a:t>•  Series inductance disturbs it, and only on io_buf.</a:t>
-            </a:r>
-          </a:p>
-        </p:txBody>
-      </p:sp>
-      <p:sp>
-        <p:nvSpPr>
-          <p:cNvPr id="5" name="Rectangle 4"/>
-          <p:cNvSpPr/>
-          <p:nvPr/>
-        </p:nvSpPr>
-        <p:spPr>
-          <a:xfrm>
-            <a:off x="513743" y="2057400"/>
-            <a:ext cx="5373312" cy="4398264"/>
-          </a:xfrm>
-          <a:prstGeom prst="rect">
-            <a:avLst/>
-          </a:prstGeom>
-          <a:solidFill>
-            <a:srgbClr val="FFFFFF"/>
-          </a:solidFill>
-          <a:ln w="10160">
-            <a:solidFill>
-              <a:srgbClr val="CBD0CC"/>
-            </a:solidFill>
-          </a:ln>
-        </p:spPr>
-        <p:style>
-          <a:lnRef idx="1">
-            <a:schemeClr val="accent1"/>
-          </a:lnRef>
-          <a:fillRef idx="3">
-            <a:schemeClr val="accent1"/>
-          </a:fillRef>
-          <a:effectRef idx="2">
-            <a:schemeClr val="accent1"/>
-          </a:effectRef>
-          <a:fontRef idx="minor">
-            <a:schemeClr val="lt1"/>
-          </a:fontRef>
-        </p:style>
-        <p:txBody>
-          <a:bodyPr rtlCol="0" anchor="ctr"/>
-          <a:lstStyle/>
-          <a:p>
-            <a:pPr algn="ctr"/>
-          </a:p>
-        </p:txBody>
-      </p:sp>
-      <p:pic>
-        <p:nvPicPr>
-          <p:cNvPr id="6" name="Picture 5" descr="fixture_vt.png"/>
-          <p:cNvPicPr>
-            <a:picLocks noChangeAspect="1"/>
-          </p:cNvPicPr>
-          <p:nvPr/>
-        </p:nvPicPr>
-        <p:blipFill>
-          <a:blip r:embed="rId2"/>
-          <a:stretch>
-            <a:fillRect/>
-          </a:stretch>
-        </p:blipFill>
-        <p:spPr>
-          <a:xfrm>
-            <a:off x="541175" y="2084831"/>
-            <a:ext cx="5318448" cy="4343400"/>
-          </a:xfrm>
-          <a:prstGeom prst="rect">
-            <a:avLst/>
-          </a:prstGeom>
-        </p:spPr>
-      </p:pic>
-      <p:sp>
-        <p:nvSpPr>
-          <p:cNvPr id="7" name="Rectangle 6"/>
-          <p:cNvSpPr/>
-          <p:nvPr/>
-        </p:nvSpPr>
-        <p:spPr>
-          <a:xfrm>
-            <a:off x="6274463" y="2057400"/>
-            <a:ext cx="5373312" cy="4398264"/>
-          </a:xfrm>
-          <a:prstGeom prst="rect">
-            <a:avLst/>
-          </a:prstGeom>
-          <a:solidFill>
-            <a:srgbClr val="FFFFFF"/>
-          </a:solidFill>
-          <a:ln w="10160">
-            <a:solidFill>
-              <a:srgbClr val="CBD0CC"/>
-            </a:solidFill>
-          </a:ln>
-        </p:spPr>
-        <p:style>
-          <a:lnRef idx="1">
-            <a:schemeClr val="accent1"/>
-          </a:lnRef>
-          <a:fillRef idx="3">
-            <a:schemeClr val="accent1"/>
-          </a:fillRef>
-          <a:effectRef idx="2">
-            <a:schemeClr val="accent1"/>
-          </a:effectRef>
-          <a:fontRef idx="minor">
-            <a:schemeClr val="lt1"/>
-          </a:fontRef>
-        </p:style>
-        <p:txBody>
-          <a:bodyPr rtlCol="0" anchor="ctr"/>
-          <a:lstStyle/>
-          <a:p>
-            <a:pPr algn="ctr"/>
-          </a:p>
-        </p:txBody>
-      </p:sp>
-      <p:pic>
-        <p:nvPicPr>
-          <p:cNvPr id="8" name="Picture 7" descr="fixture_ku.png"/>
-          <p:cNvPicPr>
-            <a:picLocks noChangeAspect="1"/>
-          </p:cNvPicPr>
-          <p:nvPr/>
-        </p:nvPicPr>
-        <p:blipFill>
-          <a:blip r:embed="rId3"/>
-          <a:stretch>
-            <a:fillRect/>
-          </a:stretch>
-        </p:blipFill>
-        <p:spPr>
-          <a:xfrm>
-            <a:off x="6301895" y="2084831"/>
-            <a:ext cx="5318448" cy="4343400"/>
-          </a:xfrm>
-          <a:prstGeom prst="rect">
-            <a:avLst/>
-          </a:prstGeom>
-        </p:spPr>
-      </p:pic>
-    </p:spTree>
-  </p:cSld>
-  <p:clrMapOvr>
-    <a:masterClrMapping/>
-  </p:clrMapOvr>
-</p:sld>
-</file>
-
-<file path=ppt/slides/slide14.xml><?xml version="1.0" encoding="utf-8"?>
-<p:sld xmlns:a="http://schemas.openxmlformats.org/drawingml/2006/main" xmlns:p="http://schemas.openxmlformats.org/presentationml/2006/main" xmlns:r="http://schemas.openxmlformats.org/officeDocument/2006/relationships">
-  <p:cSld>
-    <p:spTree>
-      <p:nvGrpSpPr>
-        <p:cNvPr id="1" name=""/>
-        <p:cNvGrpSpPr/>
-        <p:nvPr/>
-      </p:nvGrpSpPr>
-      <p:grpSpPr/>
-      <p:sp>
-        <p:nvSpPr>
-          <p:cNvPr id="2" name="Title 1"/>
-          <p:cNvSpPr>
-            <a:spLocks noGrp="1"/>
-          </p:cNvSpPr>
-          <p:nvPr>
-            <p:ph type="title"/>
-          </p:nvPr>
-        </p:nvSpPr>
-        <p:spPr/>
-        <p:txBody>
-          <a:bodyPr/>
-          <a:lstStyle/>
-          <a:p>
-            <a:pPr algn="l">
-              <a:defRPr sz="2700" b="0">
-                <a:solidFill>
-                  <a:srgbClr val="000000"/>
-                </a:solidFill>
-                <a:latin typeface="Times New Roman"/>
-              </a:defRPr>
-            </a:pPr>
-            <a:r>
-              <a:t>The 1.25 max|Ku| cap rejects good models</a:t>
-            </a:r>
-          </a:p>
-        </p:txBody>
-      </p:sp>
-      <p:sp>
-        <p:nvSpPr>
-          <p:cNvPr id="3" name="TextBox 2"/>
-          <p:cNvSpPr txBox="1"/>
-          <p:nvPr/>
-        </p:nvSpPr>
-        <p:spPr>
-          <a:xfrm>
-            <a:off x="9372600" y="109728"/>
-            <a:ext cx="2148840" cy="228600"/>
-          </a:xfrm>
-          <a:prstGeom prst="rect">
-            <a:avLst/>
-          </a:prstGeom>
-          <a:noFill/>
-        </p:spPr>
-        <p:txBody>
-          <a:bodyPr wrap="square" lIns="45720" rIns="45720" anchor="t">
-            <a:spAutoFit/>
-          </a:bodyPr>
-          <a:lstStyle/>
-          <a:p>
-            <a:pPr algn="r">
-              <a:defRPr sz="950" b="1">
-                <a:solidFill>
-                  <a:srgbClr val="666C68"/>
-                </a:solidFill>
-                <a:latin typeface="Aptos"/>
-              </a:defRPr>
-            </a:pPr>
-            <a:r>
-              <a:t>WHAT SHOULD CHANGE</a:t>
-            </a:r>
-          </a:p>
-        </p:txBody>
-      </p:sp>
-      <p:sp>
-        <p:nvSpPr>
-          <p:cNvPr id="4" name="TextBox 3"/>
-          <p:cNvSpPr txBox="1"/>
-          <p:nvPr/>
-        </p:nvSpPr>
-        <p:spPr>
-          <a:xfrm>
-            <a:off x="640080" y="1188720"/>
-            <a:ext cx="10972800" cy="457200"/>
-          </a:xfrm>
-          <a:prstGeom prst="rect">
-            <a:avLst/>
-          </a:prstGeom>
-          <a:noFill/>
-        </p:spPr>
-        <p:txBody>
-          <a:bodyPr wrap="square" lIns="45720" rIns="45720" anchor="t">
-            <a:spAutoFit/>
-          </a:bodyPr>
-          <a:lstStyle/>
-          <a:p>
-            <a:pPr algn="l">
-              <a:defRPr sz="1700" b="0">
-                <a:solidFill>
-                  <a:srgbClr val="191F1C"/>
-                </a:solidFill>
-                <a:latin typeface="Aptos"/>
-              </a:defRPr>
-            </a:pPr>
-            <a:r>
-              <a:t>ex2 variants, across all seven characterisation edge rates:</a:t>
-            </a:r>
-          </a:p>
-        </p:txBody>
-      </p:sp>
-      <p:sp>
-        <p:nvSpPr>
-          <p:cNvPr id="5" name="TextBox 4"/>
-          <p:cNvSpPr txBox="1"/>
-          <p:nvPr/>
-        </p:nvSpPr>
-        <p:spPr>
-          <a:xfrm>
-            <a:off x="640080" y="1737360"/>
-            <a:ext cx="11064240" cy="3429000"/>
-          </a:xfrm>
-          <a:prstGeom prst="rect">
-            <a:avLst/>
-          </a:prstGeom>
-          <a:noFill/>
-        </p:spPr>
-        <p:txBody>
-          <a:bodyPr wrap="square" lIns="73152" rIns="36576" tIns="36576" bIns="36576">
-            <a:spAutoFit/>
-          </a:bodyPr>
-          <a:lstStyle/>
-          <a:p>
-            <a:pPr>
-              <a:spcAft>
-                <a:spcPts val="300"/>
-              </a:spcAft>
-              <a:defRPr sz="1700">
-                <a:solidFill>
-                  <a:srgbClr val="191F1C"/>
-                </a:solidFill>
-                <a:latin typeface="Aptos"/>
-              </a:defRPr>
-            </a:pPr>
-            <a:r>
-              <a:t>•  slowpre   predriver halved      328 ps      1.047</a:t>
-            </a:r>
-          </a:p>
-          <a:p>
-            <a:pPr>
-              <a:spcAft>
-                <a:spcPts val="300"/>
-              </a:spcAft>
-              <a:defRPr sz="1700">
-                <a:solidFill>
-                  <a:srgbClr val="191F1C"/>
-                </a:solidFill>
-                <a:latin typeface="Aptos"/>
-              </a:defRPr>
-            </a:pPr>
-            <a:r>
-              <a:t>•  base      control               200 ps      1.283</a:t>
-            </a:r>
-          </a:p>
-          <a:p>
-            <a:pPr>
-              <a:spcAft>
-                <a:spcPts val="300"/>
-              </a:spcAft>
-              <a:defRPr sz="1700">
-                <a:solidFill>
-                  <a:srgbClr val="191F1C"/>
-                </a:solidFill>
-                <a:latin typeface="Aptos"/>
-              </a:defRPr>
-            </a:pPr>
-            <a:r>
-              <a:t>•  nomiller  Miller caps removed   208 ps      1.299</a:t>
-            </a:r>
-          </a:p>
-          <a:p>
-            <a:pPr>
-              <a:spcAft>
-                <a:spcPts val="300"/>
-              </a:spcAft>
-              <a:defRPr sz="1700">
-                <a:solidFill>
-                  <a:srgbClr val="191F1C"/>
-                </a:solidFill>
-                <a:latin typeface="Aptos"/>
-              </a:defRPr>
-            </a:pPr>
-            <a:r>
-              <a:t>•  skewp     output PMOS halved    160 ps      1.589</a:t>
-            </a:r>
-          </a:p>
-          <a:p>
-            <a:pPr>
-              <a:spcAft>
-                <a:spcPts val="300"/>
-              </a:spcAft>
-              <a:defRPr sz="1700">
-                <a:solidFill>
-                  <a:srgbClr val="191F1C"/>
-                </a:solidFill>
-                <a:latin typeface="Aptos"/>
-              </a:defRPr>
-            </a:pPr>
-            <a:r>
-              <a:t>•  weak      both devices halved   152 ps      1.779</a:t>
-            </a:r>
-          </a:p>
-        </p:txBody>
-      </p:sp>
-      <p:sp>
-        <p:nvSpPr>
-          <p:cNvPr id="6" name="TextBox 5"/>
-          <p:cNvSpPr txBox="1"/>
-          <p:nvPr/>
-        </p:nvSpPr>
-        <p:spPr>
-          <a:xfrm>
-            <a:off x="640080" y="4480560"/>
-            <a:ext cx="10972800" cy="1463040"/>
-          </a:xfrm>
-          <a:prstGeom prst="rect">
-            <a:avLst/>
-          </a:prstGeom>
-          <a:noFill/>
-        </p:spPr>
-        <p:txBody>
-          <a:bodyPr wrap="square" lIns="45720" rIns="45720" anchor="t">
-            <a:spAutoFit/>
-          </a:bodyPr>
-          <a:lstStyle/>
-          <a:p>
-            <a:pPr algn="l">
-              <a:defRPr sz="1700" b="0">
-                <a:solidFill>
-                  <a:srgbClr val="191F1C"/>
-                </a:solidFill>
-                <a:latin typeface="Aptos"/>
-              </a:defRPr>
-            </a:pPr>
-            <a:r>
-              <a:t>It follows C_comp × dV/dt against the device drive. For ex2 that is 82 mA of displacement current against a ~51 mA drive — it exceeds the device, so the solve has to push Ku above 1.</a:t>
-            </a:r>
-            <a:br/>
-            <a:r>
-              <a:t>Healthy baselines differ per silicon: inv_chain 1.03, io_buf 1.18, ex2 1.28. No absolute number works; it should be a within-buffer outlier test.</a:t>
-            </a:r>
-          </a:p>
-        </p:txBody>
-      </p:sp>
-    </p:spTree>
-  </p:cSld>
-  <p:clrMapOvr>
-    <a:masterClrMapping/>
-  </p:clrMapOvr>
-</p:sld>
-</file>
-
-<file path=ppt/slides/slide15.xml><?xml version="1.0" encoding="utf-8"?>
-<p:sld xmlns:a="http://schemas.openxmlformats.org/drawingml/2006/main" xmlns:p="http://schemas.openxmlformats.org/presentationml/2006/main" xmlns:r="http://schemas.openxmlformats.org/officeDocument/2006/relationships">
-  <p:cSld>
-    <p:spTree>
-      <p:nvGrpSpPr>
-        <p:cNvPr id="1" name=""/>
-        <p:cNvGrpSpPr/>
-        <p:nvPr/>
-      </p:nvGrpSpPr>
-      <p:grpSpPr/>
-      <p:sp>
-        <p:nvSpPr>
-          <p:cNvPr id="2" name="Title 1"/>
-          <p:cNvSpPr>
-            <a:spLocks noGrp="1"/>
-          </p:cNvSpPr>
-          <p:nvPr>
-            <p:ph type="title"/>
-          </p:nvPr>
-        </p:nvSpPr>
-        <p:spPr/>
-        <p:txBody>
-          <a:bodyPr/>
-          <a:lstStyle/>
-          <a:p>
-            <a:pPr algn="l">
-              <a:defRPr sz="2700" b="0">
-                <a:solidFill>
-                  <a:srgbClr val="000000"/>
-                </a:solidFill>
-                <a:latin typeface="Times New Roman"/>
-              </a:defRPr>
-            </a:pPr>
-            <a:r>
-              <a:t>Nine new buffer variants, same stress axis</a:t>
-            </a:r>
-          </a:p>
-        </p:txBody>
-      </p:sp>
-      <p:sp>
-        <p:nvSpPr>
-          <p:cNvPr id="3" name="TextBox 2"/>
-          <p:cNvSpPr txBox="1"/>
-          <p:nvPr/>
-        </p:nvSpPr>
-        <p:spPr>
-          <a:xfrm>
-            <a:off x="9372600" y="109728"/>
-            <a:ext cx="2148840" cy="228600"/>
-          </a:xfrm>
-          <a:prstGeom prst="rect">
-            <a:avLst/>
-          </a:prstGeom>
-          <a:noFill/>
-        </p:spPr>
-        <p:txBody>
-          <a:bodyPr wrap="square" lIns="45720" rIns="45720" anchor="t">
-            <a:spAutoFit/>
-          </a:bodyPr>
-          <a:lstStyle/>
-          <a:p>
-            <a:pPr algn="r">
-              <a:defRPr sz="950" b="1">
-                <a:solidFill>
-                  <a:srgbClr val="666C68"/>
-                </a:solidFill>
-                <a:latin typeface="Aptos"/>
-              </a:defRPr>
-            </a:pPr>
-            <a:r>
-              <a:t>WHAT SHOULD CHANGE</a:t>
-            </a:r>
-          </a:p>
-        </p:txBody>
-      </p:sp>
-      <p:sp>
-        <p:nvSpPr>
-          <p:cNvPr id="4" name="TextBox 3"/>
-          <p:cNvSpPr txBox="1"/>
-          <p:nvPr/>
-        </p:nvSpPr>
-        <p:spPr>
-          <a:xfrm>
-            <a:off x="640080" y="1170432"/>
-            <a:ext cx="11064240" cy="1371600"/>
-          </a:xfrm>
-          <a:prstGeom prst="rect">
-            <a:avLst/>
-          </a:prstGeom>
-          <a:noFill/>
-        </p:spPr>
-        <p:txBody>
-          <a:bodyPr wrap="square" lIns="73152" rIns="36576" tIns="36576" bIns="36576">
-            <a:spAutoFit/>
-          </a:bodyPr>
-          <a:lstStyle/>
-          <a:p>
-            <a:pPr>
-              <a:spcAft>
-                <a:spcPts val="300"/>
-              </a:spcAft>
-              <a:defRPr sz="1700">
-                <a:solidFill>
-                  <a:srgbClr val="191F1C"/>
-                </a:solidFill>
-                <a:latin typeface="Aptos"/>
-              </a:defRPr>
-            </a:pPr>
-            <a:r>
-              <a:t>•  Slower predriver, halved output devices, skewed PMOS, open-drain.</a:t>
-            </a:r>
-          </a:p>
-          <a:p>
-            <a:pPr>
-              <a:spcAft>
-                <a:spcPts val="300"/>
-              </a:spcAft>
-              <a:defRPr sz="1700">
-                <a:solidFill>
-                  <a:srgbClr val="191F1C"/>
-                </a:solidFill>
-                <a:latin typeface="Aptos"/>
-              </a:defRPr>
-            </a:pPr>
-            <a:r>
-              <a:t>•  Characterised and stressed exactly like the three base buffers.</a:t>
-            </a:r>
-          </a:p>
-        </p:txBody>
-      </p:sp>
-      <p:sp>
-        <p:nvSpPr>
-          <p:cNvPr id="5" name="Rectangle 4"/>
-          <p:cNvSpPr/>
-          <p:nvPr/>
-        </p:nvSpPr>
-        <p:spPr>
-          <a:xfrm>
-            <a:off x="513743" y="2057400"/>
-            <a:ext cx="5373312" cy="4398264"/>
-          </a:xfrm>
-          <a:prstGeom prst="rect">
-            <a:avLst/>
-          </a:prstGeom>
-          <a:solidFill>
-            <a:srgbClr val="FFFFFF"/>
-          </a:solidFill>
-          <a:ln w="10160">
-            <a:solidFill>
-              <a:srgbClr val="CBD0CC"/>
-            </a:solidFill>
-          </a:ln>
-        </p:spPr>
-        <p:style>
-          <a:lnRef idx="1">
-            <a:schemeClr val="accent1"/>
-          </a:lnRef>
-          <a:fillRef idx="3">
-            <a:schemeClr val="accent1"/>
-          </a:fillRef>
-          <a:effectRef idx="2">
-            <a:schemeClr val="accent1"/>
-          </a:effectRef>
-          <a:fontRef idx="minor">
-            <a:schemeClr val="lt1"/>
-          </a:fontRef>
-        </p:style>
-        <p:txBody>
-          <a:bodyPr rtlCol="0" anchor="ctr"/>
-          <a:lstStyle/>
-          <a:p>
-            <a:pPr algn="ctr"/>
-          </a:p>
-        </p:txBody>
-      </p:sp>
-      <p:pic>
-        <p:nvPicPr>
-          <p:cNvPr id="6" name="Picture 5" descr="variant_pad.png"/>
-          <p:cNvPicPr>
-            <a:picLocks noChangeAspect="1"/>
-          </p:cNvPicPr>
-          <p:nvPr/>
-        </p:nvPicPr>
-        <p:blipFill>
-          <a:blip r:embed="rId2"/>
-          <a:stretch>
-            <a:fillRect/>
-          </a:stretch>
-        </p:blipFill>
-        <p:spPr>
-          <a:xfrm>
-            <a:off x="541175" y="2084831"/>
-            <a:ext cx="5318448" cy="4343400"/>
-          </a:xfrm>
-          <a:prstGeom prst="rect">
-            <a:avLst/>
-          </a:prstGeom>
-        </p:spPr>
-      </p:pic>
-      <p:sp>
-        <p:nvSpPr>
-          <p:cNvPr id="7" name="Rectangle 6"/>
-          <p:cNvSpPr/>
-          <p:nvPr/>
-        </p:nvSpPr>
-        <p:spPr>
-          <a:xfrm>
-            <a:off x="6274463" y="2057400"/>
-            <a:ext cx="5373312" cy="4398264"/>
-          </a:xfrm>
-          <a:prstGeom prst="rect">
-            <a:avLst/>
-          </a:prstGeom>
-          <a:solidFill>
-            <a:srgbClr val="FFFFFF"/>
-          </a:solidFill>
-          <a:ln w="10160">
-            <a:solidFill>
-              <a:srgbClr val="CBD0CC"/>
-            </a:solidFill>
-          </a:ln>
-        </p:spPr>
-        <p:style>
-          <a:lnRef idx="1">
-            <a:schemeClr val="accent1"/>
-          </a:lnRef>
-          <a:fillRef idx="3">
-            <a:schemeClr val="accent1"/>
-          </a:fillRef>
-          <a:effectRef idx="2">
-            <a:schemeClr val="accent1"/>
-          </a:effectRef>
-          <a:fontRef idx="minor">
-            <a:schemeClr val="lt1"/>
-          </a:fontRef>
-        </p:style>
-        <p:txBody>
-          <a:bodyPr rtlCol="0" anchor="ctr"/>
-          <a:lstStyle/>
-          <a:p>
-            <a:pPr algn="ctr"/>
-          </a:p>
-        </p:txBody>
-      </p:sp>
-      <p:pic>
-        <p:nvPicPr>
-          <p:cNvPr id="8" name="Picture 7" descr="variant_kukd.png"/>
-          <p:cNvPicPr>
-            <a:picLocks noChangeAspect="1"/>
-          </p:cNvPicPr>
-          <p:nvPr/>
-        </p:nvPicPr>
-        <p:blipFill>
-          <a:blip r:embed="rId3"/>
-          <a:stretch>
-            <a:fillRect/>
-          </a:stretch>
-        </p:blipFill>
-        <p:spPr>
-          <a:xfrm>
-            <a:off x="6301895" y="2084831"/>
-            <a:ext cx="5318448" cy="4343400"/>
-          </a:xfrm>
-          <a:prstGeom prst="rect">
-            <a:avLst/>
-          </a:prstGeom>
-        </p:spPr>
-      </p:pic>
-    </p:spTree>
-  </p:cSld>
-  <p:clrMapOvr>
-    <a:masterClrMapping/>
-  </p:clrMapOvr>
-</p:sld>
-</file>
-
-<file path=ppt/slides/slide16.xml><?xml version="1.0" encoding="utf-8"?>
-<p:sld xmlns:a="http://schemas.openxmlformats.org/drawingml/2006/main" xmlns:p="http://schemas.openxmlformats.org/presentationml/2006/main" xmlns:r="http://schemas.openxmlformats.org/officeDocument/2006/relationships">
-  <p:cSld>
-    <p:spTree>
-      <p:nvGrpSpPr>
-        <p:cNvPr id="1" name=""/>
-        <p:cNvGrpSpPr/>
-        <p:nvPr/>
-      </p:nvGrpSpPr>
-      <p:grpSpPr/>
-      <p:sp>
-        <p:nvSpPr>
-          <p:cNvPr id="2" name="Title 1"/>
-          <p:cNvSpPr>
-            <a:spLocks noGrp="1"/>
-          </p:cNvSpPr>
-          <p:nvPr>
-            <p:ph type="title"/>
-          </p:nvPr>
-        </p:nvSpPr>
-        <p:spPr/>
-        <p:txBody>
-          <a:bodyPr/>
-          <a:lstStyle/>
-          <a:p>
-            <a:pPr algn="l">
-              <a:defRPr sz="2700" b="0">
-                <a:solidFill>
-                  <a:srgbClr val="000000"/>
-                </a:solidFill>
-                <a:latin typeface="Times New Roman"/>
-              </a:defRPr>
-            </a:pPr>
-            <a:r>
               <a:t>Where this leaves us</a:t>
             </a:r>
           </a:p>
@@ -5279,7 +4034,7 @@
               </a:defRPr>
             </a:pPr>
             <a:r>
-              <a:t>What we are comparing</a:t>
+              <a:t>Table of contents</a:t>
             </a:r>
           </a:p>
         </p:txBody>
@@ -5292,44 +4047,8 @@
         </p:nvSpPr>
         <p:spPr>
           <a:xfrm>
-            <a:off x="9372600" y="109728"/>
-            <a:ext cx="2148840" cy="228600"/>
-          </a:xfrm>
-          <a:prstGeom prst="rect">
-            <a:avLst/>
-          </a:prstGeom>
-          <a:noFill/>
-        </p:spPr>
-        <p:txBody>
-          <a:bodyPr wrap="square" lIns="45720" rIns="45720" anchor="t">
-            <a:spAutoFit/>
-          </a:bodyPr>
-          <a:lstStyle/>
-          <a:p>
-            <a:pPr algn="r">
-              <a:defRPr sz="950" b="1">
-                <a:solidFill>
-                  <a:srgbClr val="666C68"/>
-                </a:solidFill>
-                <a:latin typeface="Aptos"/>
-              </a:defRPr>
-            </a:pPr>
-            <a:r>
-              <a:t>WHERE WE ARE</a:t>
-            </a:r>
-          </a:p>
-        </p:txBody>
-      </p:sp>
-      <p:sp>
-        <p:nvSpPr>
-          <p:cNvPr id="4" name="TextBox 3"/>
-          <p:cNvSpPr txBox="1"/>
-          <p:nvPr/>
-        </p:nvSpPr>
-        <p:spPr>
-          <a:xfrm>
-            <a:off x="640080" y="1170432"/>
-            <a:ext cx="11064240" cy="2057400"/>
+            <a:off x="640080" y="1371600"/>
+            <a:ext cx="11064240" cy="3429000"/>
           </a:xfrm>
           <a:prstGeom prst="rect">
             <a:avLst/>
@@ -5354,7 +4073,7 @@
               </a:defRPr>
             </a:pPr>
             <a:r>
-              <a:t>•  HSPICE transistor — ground truth</a:t>
+              <a:t>•  Issue recap</a:t>
             </a:r>
           </a:p>
           <a:p>
@@ -5370,7 +4089,7 @@
               </a:defRPr>
             </a:pPr>
             <a:r>
-              <a:t>•  HSPICE native IBIS — the bar to beat, not the target</a:t>
+              <a:t>•  Delaying the input command</a:t>
             </a:r>
           </a:p>
           <a:p>
@@ -5386,68 +4105,9 @@
               </a:defRPr>
             </a:pPr>
             <a:r>
-              <a:t>•  Our IBIS model in ngspice — measured against the transistor</a:t>
-            </a:r>
-          </a:p>
-        </p:txBody>
-      </p:sp>
-      <p:sp>
-        <p:nvSpPr>
-          <p:cNvPr id="5" name="TextBox 4"/>
-          <p:cNvSpPr txBox="1"/>
-          <p:nvPr/>
-        </p:nvSpPr>
-        <p:spPr>
-          <a:xfrm>
-            <a:off x="640080" y="2651760"/>
-            <a:ext cx="10972800" cy="457200"/>
-          </a:xfrm>
-          <a:prstGeom prst="rect">
-            <a:avLst/>
-          </a:prstGeom>
-          <a:noFill/>
-        </p:spPr>
-        <p:txBody>
-          <a:bodyPr wrap="square" lIns="45720" rIns="45720" anchor="t">
-            <a:spAutoFit/>
-          </a:bodyPr>
-          <a:lstStyle/>
-          <a:p>
-            <a:pPr algn="l">
-              <a:defRPr sz="1700" b="0">
-                <a:solidFill>
-                  <a:srgbClr val="191F1C"/>
-                </a:solidFill>
-                <a:latin typeface="Aptos"/>
-              </a:defRPr>
-            </a:pPr>
-            <a:r>
-              <a:t>Falling 50% crossing on io_buf at full swing, later than the transistor:</a:t>
-            </a:r>
-          </a:p>
-        </p:txBody>
-      </p:sp>
-      <p:sp>
-        <p:nvSpPr>
-          <p:cNvPr id="6" name="TextBox 5"/>
-          <p:cNvSpPr txBox="1"/>
-          <p:nvPr/>
-        </p:nvSpPr>
-        <p:spPr>
-          <a:xfrm>
-            <a:off x="640080" y="3200400"/>
-            <a:ext cx="11064240" cy="2057400"/>
-          </a:xfrm>
-          <a:prstGeom prst="rect">
-            <a:avLst/>
-          </a:prstGeom>
-          <a:noFill/>
-        </p:spPr>
-        <p:txBody>
-          <a:bodyPr wrap="square" lIns="73152" rIns="36576" tIns="36576" bIns="36576">
-            <a:spAutoFit/>
-          </a:bodyPr>
-          <a:lstStyle/>
+              <a:t>•  RLC fixture effects on V-t waveforms and Ku/Kd</a:t>
+            </a:r>
+          </a:p>
           <a:p>
             <a:pPr>
               <a:spcAft>
@@ -5461,7 +4121,7 @@
               </a:defRPr>
             </a:pPr>
             <a:r>
-              <a:t>•  native IBIS          +34.6 ps</a:t>
+              <a:t>•  Pybis in HSPICE vs. NgSPICE</a:t>
             </a:r>
           </a:p>
           <a:p>
@@ -5477,59 +4137,7 @@
               </a:defRPr>
             </a:pPr>
             <a:r>
-              <a:t>•  our model, stock     +38.4 ps</a:t>
-            </a:r>
-          </a:p>
-          <a:p>
-            <a:pPr>
-              <a:spcAft>
-                <a:spcPts val="300"/>
-              </a:spcAft>
-              <a:defRPr sz="1700">
-                <a:solidFill>
-                  <a:srgbClr val="191F1C"/>
-                </a:solidFill>
-                <a:latin typeface="Aptos"/>
-              </a:defRPr>
-            </a:pPr>
-            <a:r>
-              <a:t>•  our model, gate-state  +43.5 ps</a:t>
-            </a:r>
-          </a:p>
-        </p:txBody>
-      </p:sp>
-      <p:sp>
-        <p:nvSpPr>
-          <p:cNvPr id="7" name="TextBox 6"/>
-          <p:cNvSpPr txBox="1"/>
-          <p:nvPr/>
-        </p:nvSpPr>
-        <p:spPr>
-          <a:xfrm>
-            <a:off x="640080" y="5029200"/>
-            <a:ext cx="10972800" cy="731520"/>
-          </a:xfrm>
-          <a:prstGeom prst="rect">
-            <a:avLst/>
-          </a:prstGeom>
-          <a:noFill/>
-        </p:spPr>
-        <p:txBody>
-          <a:bodyPr wrap="square" lIns="45720" rIns="45720" anchor="t">
-            <a:spAutoFit/>
-          </a:bodyPr>
-          <a:lstStyle/>
-          <a:p>
-            <a:pPr algn="l">
-              <a:defRPr sz="1700" b="0">
-                <a:solidFill>
-                  <a:srgbClr val="191F1C"/>
-                </a:solidFill>
-                <a:latin typeface="Aptos"/>
-              </a:defRPr>
-            </a:pPr>
-            <a:r>
-              <a:t>So the IBIS format itself costs about 35 ps, which native pays too. Our command layer costs about 5 ps on top.</a:t>
+              <a:t>•  More SPICE buffer mockups</a:t>
             </a:r>
           </a:p>
         </p:txBody>
@@ -5576,7 +4184,7 @@
               </a:defRPr>
             </a:pPr>
             <a:r>
-              <a:t>At full swing all three agree</a:t>
+              <a:t>Issue recap</a:t>
             </a:r>
           </a:p>
         </p:txBody>
@@ -5612,7 +4220,7 @@
               </a:defRPr>
             </a:pPr>
             <a:r>
-              <a:t>WHERE WE ARE</a:t>
+              <a:t>ISSUE RECAP</a:t>
             </a:r>
           </a:p>
         </p:txBody>
@@ -5651,7 +4259,7 @@
               </a:defRPr>
             </a:pPr>
             <a:r>
-              <a:t>•  The three curves sit on top of each other through the transition.</a:t>
+              <a:t>•  A short pulse reverses before the pad has finished its transition.</a:t>
             </a:r>
           </a:p>
           <a:p>
@@ -5667,7 +4275,7 @@
               </a:defRPr>
             </a:pPr>
             <a:r>
-              <a:t>•  What is left on the falling edge is the format's ~35 ps, not our layer.</a:t>
+              <a:t>•  Both IBIS models under-shoot the peak the transistor reaches, and ours sits slightly high on the tail after the reversal.</a:t>
             </a:r>
           </a:p>
         </p:txBody>
@@ -5719,7 +4327,7 @@
       </p:sp>
       <p:pic>
         <p:nvPicPr>
-          <p:cNvPr id="6" name="Picture 5" descr="clean_edge.png"/>
+          <p:cNvPr id="6" name="Picture 5" descr="recap_pad.png"/>
           <p:cNvPicPr>
             <a:picLocks noChangeAspect="1"/>
           </p:cNvPicPr>
@@ -5783,7 +4391,7 @@
               </a:defRPr>
             </a:pPr>
             <a:r>
-              <a:t>Defect 1: the pad does not settle</a:t>
+              <a:t>Issue recap — the coefficients</a:t>
             </a:r>
           </a:p>
         </p:txBody>
@@ -5819,7 +4427,7 @@
               </a:defRPr>
             </a:pPr>
             <a:r>
-              <a:t>THE TWO DEFECTS</a:t>
+              <a:t>ISSUE RECAP</a:t>
             </a:r>
           </a:p>
         </p:txBody>
@@ -5858,7 +4466,7 @@
               </a:defRPr>
             </a:pPr>
             <a:r>
-              <a:t>•  The input reverses before the pad finishes its transition.</a:t>
+              <a:t>•  Ku(t) and Kd(t) assume the transition starts from a settled state.</a:t>
             </a:r>
           </a:p>
           <a:p>
@@ -5874,7 +4482,7 @@
               </a:defRPr>
             </a:pPr>
             <a:r>
-              <a:t>•  Left: our pad comes back up where the transistor does not. Right: Ku stays part-on instead of returning to zero.</a:t>
+              <a:t>•  When the reverse edge arrives first, they are still replayed from fully settled, and Ku does not return to zero.</a:t>
             </a:r>
           </a:p>
         </p:txBody>
@@ -5887,8 +4495,8 @@
         </p:nvSpPr>
         <p:spPr>
           <a:xfrm>
-            <a:off x="513743" y="2057400"/>
-            <a:ext cx="5373312" cy="4398264"/>
+            <a:off x="743653" y="1819656"/>
+            <a:ext cx="10674213" cy="4581144"/>
           </a:xfrm>
           <a:prstGeom prst="rect">
             <a:avLst/>
@@ -5926,7 +4534,7 @@
       </p:sp>
       <p:pic>
         <p:nvPicPr>
-          <p:cNvPr id="6" name="Picture 5" descr="stress_pad.png"/>
+          <p:cNvPr id="6" name="Picture 5" descr="recap_kukd.png"/>
           <p:cNvPicPr>
             <a:picLocks noChangeAspect="1"/>
           </p:cNvPicPr>
@@ -5940,77 +4548,8 @@
         </p:blipFill>
         <p:spPr>
           <a:xfrm>
-            <a:off x="541175" y="2084831"/>
-            <a:ext cx="5318448" cy="4343400"/>
-          </a:xfrm>
-          <a:prstGeom prst="rect">
-            <a:avLst/>
-          </a:prstGeom>
-        </p:spPr>
-      </p:pic>
-      <p:sp>
-        <p:nvSpPr>
-          <p:cNvPr id="7" name="Rectangle 6"/>
-          <p:cNvSpPr/>
-          <p:nvPr/>
-        </p:nvSpPr>
-        <p:spPr>
-          <a:xfrm>
-            <a:off x="6274463" y="2057400"/>
-            <a:ext cx="5373312" cy="4398264"/>
-          </a:xfrm>
-          <a:prstGeom prst="rect">
-            <a:avLst/>
-          </a:prstGeom>
-          <a:solidFill>
-            <a:srgbClr val="FFFFFF"/>
-          </a:solidFill>
-          <a:ln w="10160">
-            <a:solidFill>
-              <a:srgbClr val="CBD0CC"/>
-            </a:solidFill>
-          </a:ln>
-        </p:spPr>
-        <p:style>
-          <a:lnRef idx="1">
-            <a:schemeClr val="accent1"/>
-          </a:lnRef>
-          <a:fillRef idx="3">
-            <a:schemeClr val="accent1"/>
-          </a:fillRef>
-          <a:effectRef idx="2">
-            <a:schemeClr val="accent1"/>
-          </a:effectRef>
-          <a:fontRef idx="minor">
-            <a:schemeClr val="lt1"/>
-          </a:fontRef>
-        </p:style>
-        <p:txBody>
-          <a:bodyPr rtlCol="0" anchor="ctr"/>
-          <a:lstStyle/>
-          <a:p>
-            <a:pPr algn="ctr"/>
-          </a:p>
-        </p:txBody>
-      </p:sp>
-      <p:pic>
-        <p:nvPicPr>
-          <p:cNvPr id="8" name="Picture 7" descr="stress_kukd.png"/>
-          <p:cNvPicPr>
-            <a:picLocks noChangeAspect="1"/>
-          </p:cNvPicPr>
-          <p:nvPr/>
-        </p:nvPicPr>
-        <p:blipFill>
-          <a:blip r:embed="rId3"/>
-          <a:stretch>
-            <a:fillRect/>
-          </a:stretch>
-        </p:blipFill>
-        <p:spPr>
-          <a:xfrm>
-            <a:off x="6301895" y="2084831"/>
-            <a:ext cx="5318448" cy="4343400"/>
+            <a:off x="771085" y="1847088"/>
+            <a:ext cx="10619349" cy="4526280"/>
           </a:xfrm>
           <a:prstGeom prst="rect">
             <a:avLst/>
@@ -6059,7 +4598,7 @@
               </a:defRPr>
             </a:pPr>
             <a:r>
-              <a:t>Defect 2: our crossing is late</a:t>
+              <a:t>The offset: charge stranded in the command capacitor</a:t>
             </a:r>
           </a:p>
         </p:txBody>
@@ -6095,7 +4634,7 @@
               </a:defRPr>
             </a:pPr>
             <a:r>
-              <a:t>THE TWO DEFECTS</a:t>
+              <a:t>DELAYING THE INPUT COMMAND</a:t>
             </a:r>
           </a:p>
         </p:txBody>
@@ -6134,7 +4673,7 @@
               </a:defRPr>
             </a:pPr>
             <a:r>
-              <a:t>•  A separate defect: the 50% crossing arrives later than native IBIS.</a:t>
+              <a:t>•  GUPCMD is a capacitor across 1e15 ohm, charged once per input edge.</a:t>
             </a:r>
           </a:p>
           <a:p>
@@ -6150,7 +4689,7 @@
               </a:defRPr>
             </a:pPr>
             <a:r>
-              <a:t>•  Over the five stress cases per device — io_buf native +11..+18 ps, ours +27..+34;  inv_chain native −6..−5, ours +8..+12;  ex2 both early.</a:t>
+              <a:t>•  A truncated pulse leaves charge in it with no resistive path out.</a:t>
             </a:r>
           </a:p>
         </p:txBody>
@@ -6202,7 +4741,7 @@
       </p:sp>
       <p:pic>
         <p:nvPicPr>
-          <p:cNvPr id="6" name="Picture 5" descr="timing_shift.png"/>
+          <p:cNvPr id="6" name="Picture 5" descr="offset_chain.png"/>
           <p:cNvPicPr>
             <a:picLocks noChangeAspect="1"/>
           </p:cNvPicPr>
@@ -6266,7 +4805,7 @@
               </a:defRPr>
             </a:pPr>
             <a:r>
-              <a:t>The offset: charge stranded in the command capacitor</a:t>
+              <a:t>How delay_cmd works</a:t>
             </a:r>
           </a:p>
         </p:txBody>
@@ -6302,7 +4841,7 @@
               </a:defRPr>
             </a:pPr>
             <a:r>
-              <a:t>THE TWO DEFECTS</a:t>
+              <a:t>DELAYING THE INPUT COMMAND</a:t>
             </a:r>
           </a:p>
         </p:txBody>
@@ -6341,7 +4880,7 @@
               </a:defRPr>
             </a:pPr>
             <a:r>
-              <a:t>•  GUPCMD is a capacitor across 1e15 ohm, charged once per input edge.</a:t>
+              <a:t>•  gate-state: GUPCMD is a capacitor across 1e15 Ω, given a fixed packet of charge on each input edge — an integrator with no DC path.</a:t>
             </a:r>
           </a:p>
           <a:p>
@@ -6357,7 +4896,7 @@
               </a:defRPr>
             </a:pPr>
             <a:r>
-              <a:t>•  A truncated pulse leaves charge in it with no resistive path out.</a:t>
+              <a:t>•  delay_cmd: GUPCMD is driven straight from the present input level.</a:t>
             </a:r>
           </a:p>
         </p:txBody>
@@ -6370,8 +4909,8 @@
         </p:nvSpPr>
         <p:spPr>
           <a:xfrm>
-            <a:off x="743653" y="1819656"/>
-            <a:ext cx="10674213" cy="4581144"/>
+            <a:off x="513743" y="2057400"/>
+            <a:ext cx="5373312" cy="4398264"/>
           </a:xfrm>
           <a:prstGeom prst="rect">
             <a:avLst/>
@@ -6409,7 +4948,7 @@
       </p:sp>
       <p:pic>
         <p:nvPicPr>
-          <p:cNvPr id="6" name="Picture 5" descr="offset_chain.png"/>
+          <p:cNvPr id="6" name="Picture 5" descr="command_node.png"/>
           <p:cNvPicPr>
             <a:picLocks noChangeAspect="1"/>
           </p:cNvPicPr>
@@ -6423,8 +4962,77 @@
         </p:blipFill>
         <p:spPr>
           <a:xfrm>
-            <a:off x="771085" y="1847088"/>
-            <a:ext cx="10619349" cy="4526280"/>
+            <a:off x="541175" y="2084831"/>
+            <a:ext cx="5318448" cy="4343400"/>
+          </a:xfrm>
+          <a:prstGeom prst="rect">
+            <a:avLst/>
+          </a:prstGeom>
+        </p:spPr>
+      </p:pic>
+      <p:sp>
+        <p:nvSpPr>
+          <p:cNvPr id="7" name="Rectangle 6"/>
+          <p:cNvSpPr/>
+          <p:nvPr/>
+        </p:nvSpPr>
+        <p:spPr>
+          <a:xfrm>
+            <a:off x="6274463" y="2057400"/>
+            <a:ext cx="5373312" cy="4398264"/>
+          </a:xfrm>
+          <a:prstGeom prst="rect">
+            <a:avLst/>
+          </a:prstGeom>
+          <a:solidFill>
+            <a:srgbClr val="FFFFFF"/>
+          </a:solidFill>
+          <a:ln w="10160">
+            <a:solidFill>
+              <a:srgbClr val="CBD0CC"/>
+            </a:solidFill>
+          </a:ln>
+        </p:spPr>
+        <p:style>
+          <a:lnRef idx="1">
+            <a:schemeClr val="accent1"/>
+          </a:lnRef>
+          <a:fillRef idx="3">
+            <a:schemeClr val="accent1"/>
+          </a:fillRef>
+          <a:effectRef idx="2">
+            <a:schemeClr val="accent1"/>
+          </a:effectRef>
+          <a:fontRef idx="minor">
+            <a:schemeClr val="lt1"/>
+          </a:fontRef>
+        </p:style>
+        <p:txBody>
+          <a:bodyPr rtlCol="0" anchor="ctr"/>
+          <a:lstStyle/>
+          <a:p>
+            <a:pPr algn="ctr"/>
+          </a:p>
+        </p:txBody>
+      </p:sp>
+      <p:pic>
+        <p:nvPicPr>
+          <p:cNvPr id="8" name="Picture 7" descr="command_pad.png"/>
+          <p:cNvPicPr>
+            <a:picLocks noChangeAspect="1"/>
+          </p:cNvPicPr>
+          <p:nvPr/>
+        </p:nvPicPr>
+        <p:blipFill>
+          <a:blip r:embed="rId3"/>
+          <a:stretch>
+            <a:fillRect/>
+          </a:stretch>
+        </p:blipFill>
+        <p:spPr>
+          <a:xfrm>
+            <a:off x="6301895" y="2084831"/>
+            <a:ext cx="5318448" cy="4343400"/>
           </a:xfrm>
           <a:prstGeom prst="rect">
             <a:avLst/>
@@ -6473,7 +5081,7 @@
               </a:defRPr>
             </a:pPr>
             <a:r>
-              <a:t>How delay_cmd works</a:t>
+              <a:t>delay_cmd removes the offset</a:t>
             </a:r>
           </a:p>
         </p:txBody>
@@ -6509,7 +5117,7 @@
               </a:defRPr>
             </a:pPr>
             <a:r>
-              <a:t>THE TWO DEFECTS</a:t>
+              <a:t>DELAYING THE INPUT COMMAND</a:t>
             </a:r>
           </a:p>
         </p:txBody>
@@ -6548,7 +5156,7 @@
               </a:defRPr>
             </a:pPr>
             <a:r>
-              <a:t>•  gate-state: GUPCMD is a capacitor across 1e15 Ω, given a fixed packet of charge on each input edge — an integrator with no DC path.</a:t>
+              <a:t>•  The command returns to exactly zero, so nothing is stranded.</a:t>
             </a:r>
           </a:p>
           <a:p>
@@ -6564,7 +5172,7 @@
               </a:defRPr>
             </a:pPr>
             <a:r>
-              <a:t>•  delay_cmd: GUPCMD is driven straight from the present input level.</a:t>
+              <a:t>•  The pedestal goes from 97.9 mV to 5.2 mV, against the transistor's 2.1.</a:t>
             </a:r>
           </a:p>
         </p:txBody>
@@ -6577,8 +5185,8 @@
         </p:nvSpPr>
         <p:spPr>
           <a:xfrm>
-            <a:off x="513743" y="2057400"/>
-            <a:ext cx="5373312" cy="4398264"/>
+            <a:off x="743653" y="1819656"/>
+            <a:ext cx="10674213" cy="4581144"/>
           </a:xfrm>
           <a:prstGeom prst="rect">
             <a:avLst/>
@@ -6616,7 +5224,7 @@
       </p:sp>
       <p:pic>
         <p:nvPicPr>
-          <p:cNvPr id="6" name="Picture 5" descr="command_node.png"/>
+          <p:cNvPr id="6" name="Picture 5" descr="offset_removed.png"/>
           <p:cNvPicPr>
             <a:picLocks noChangeAspect="1"/>
           </p:cNvPicPr>
@@ -6630,77 +5238,8 @@
         </p:blipFill>
         <p:spPr>
           <a:xfrm>
-            <a:off x="541175" y="2084831"/>
-            <a:ext cx="5318448" cy="4343400"/>
-          </a:xfrm>
-          <a:prstGeom prst="rect">
-            <a:avLst/>
-          </a:prstGeom>
-        </p:spPr>
-      </p:pic>
-      <p:sp>
-        <p:nvSpPr>
-          <p:cNvPr id="7" name="Rectangle 6"/>
-          <p:cNvSpPr/>
-          <p:nvPr/>
-        </p:nvSpPr>
-        <p:spPr>
-          <a:xfrm>
-            <a:off x="6274463" y="2057400"/>
-            <a:ext cx="5373312" cy="4398264"/>
-          </a:xfrm>
-          <a:prstGeom prst="rect">
-            <a:avLst/>
-          </a:prstGeom>
-          <a:solidFill>
-            <a:srgbClr val="FFFFFF"/>
-          </a:solidFill>
-          <a:ln w="10160">
-            <a:solidFill>
-              <a:srgbClr val="CBD0CC"/>
-            </a:solidFill>
-          </a:ln>
-        </p:spPr>
-        <p:style>
-          <a:lnRef idx="1">
-            <a:schemeClr val="accent1"/>
-          </a:lnRef>
-          <a:fillRef idx="3">
-            <a:schemeClr val="accent1"/>
-          </a:fillRef>
-          <a:effectRef idx="2">
-            <a:schemeClr val="accent1"/>
-          </a:effectRef>
-          <a:fontRef idx="minor">
-            <a:schemeClr val="lt1"/>
-          </a:fontRef>
-        </p:style>
-        <p:txBody>
-          <a:bodyPr rtlCol="0" anchor="ctr"/>
-          <a:lstStyle/>
-          <a:p>
-            <a:pPr algn="ctr"/>
-          </a:p>
-        </p:txBody>
-      </p:sp>
-      <p:pic>
-        <p:nvPicPr>
-          <p:cNvPr id="8" name="Picture 7" descr="command_pad.png"/>
-          <p:cNvPicPr>
-            <a:picLocks noChangeAspect="1"/>
-          </p:cNvPicPr>
-          <p:nvPr/>
-        </p:nvPicPr>
-        <p:blipFill>
-          <a:blip r:embed="rId3"/>
-          <a:stretch>
-            <a:fillRect/>
-          </a:stretch>
-        </p:blipFill>
-        <p:spPr>
-          <a:xfrm>
-            <a:off x="6301895" y="2084831"/>
-            <a:ext cx="5318448" cy="4343400"/>
+            <a:off x="771085" y="1847088"/>
+            <a:ext cx="10619349" cy="4526280"/>
           </a:xfrm>
           <a:prstGeom prst="rect">
             <a:avLst/>
@@ -6749,7 +5288,7 @@
               </a:defRPr>
             </a:pPr>
             <a:r>
-              <a:t>delay_cmd removes the offset</a:t>
+              <a:t>It does not fix the timing</a:t>
             </a:r>
           </a:p>
         </p:txBody>
@@ -6785,7 +5324,7 @@
               </a:defRPr>
             </a:pPr>
             <a:r>
-              <a:t>THE TWO DEFECTS</a:t>
+              <a:t>DELAYING THE INPUT COMMAND</a:t>
             </a:r>
           </a:p>
         </p:txBody>
@@ -6824,7 +5363,7 @@
               </a:defRPr>
             </a:pPr>
             <a:r>
-              <a:t>•  The command returns to exactly zero, so nothing is stranded.</a:t>
+              <a:t>•  delay_cmd improved the timing on 0 of 19 stress cases — so the offset and the shift are two mechanisms, not one.</a:t>
             </a:r>
           </a:p>
           <a:p>
@@ -6840,7 +5379,7 @@
               </a:defRPr>
             </a:pPr>
             <a:r>
-              <a:t>•  The pedestal goes from 97.9 mV to 5.2 mV, against the transistor's 2.1.</a:t>
+              <a:t>•  Our 50% crossing still arrives after native's: io_buf +27..+34 ps against native's +11..+18.</a:t>
             </a:r>
           </a:p>
         </p:txBody>
@@ -6892,7 +5431,7 @@
       </p:sp>
       <p:pic>
         <p:nvPicPr>
-          <p:cNvPr id="6" name="Picture 5" descr="offset_removed.png"/>
+          <p:cNvPr id="6" name="Picture 5" descr="timing_shift.png"/>
           <p:cNvPicPr>
             <a:picLocks noChangeAspect="1"/>
           </p:cNvPicPr>
@@ -6956,7 +5495,7 @@
               </a:defRPr>
             </a:pPr>
             <a:r>
-              <a:t>It does not fix the timing</a:t>
+              <a:t>Is the difference the engine or the model?</a:t>
             </a:r>
           </a:p>
         </p:txBody>
@@ -6992,7 +5531,7 @@
               </a:defRPr>
             </a:pPr>
             <a:r>
-              <a:t>THE TWO DEFECTS</a:t>
+              <a:t>PYBIS IN HSPICE VS. NGSPICE</a:t>
             </a:r>
           </a:p>
         </p:txBody>
@@ -7031,7 +5570,7 @@
               </a:defRPr>
             </a:pPr>
             <a:r>
-              <a:t>•  If the offset and the timing shift were one mechanism, delay_cmd would fix both. Its amplitude had been measured; its timing never had.</a:t>
+              <a:t>•  Every native-vs-ours number changes two things at once. We wrote a translator so the same model runs in both simulators.</a:t>
             </a:r>
           </a:p>
         </p:txBody>
@@ -7044,7 +5583,7 @@
         </p:nvSpPr>
         <p:spPr>
           <a:xfrm>
-            <a:off x="640080" y="2194560"/>
+            <a:off x="640080" y="2103120"/>
             <a:ext cx="10972800" cy="457200"/>
           </a:xfrm>
           <a:prstGeom prst="rect">
@@ -7067,7 +5606,7 @@
               </a:defRPr>
             </a:pPr>
             <a:r>
-              <a:t>We measured it:</a:t>
+              <a:t>Falling 50% crossing:</a:t>
             </a:r>
           </a:p>
         </p:txBody>
@@ -7080,7 +5619,7 @@
         </p:nvSpPr>
         <p:spPr>
           <a:xfrm>
-            <a:off x="640080" y="2743200"/>
+            <a:off x="640080" y="2651760"/>
             <a:ext cx="11064240" cy="2057400"/>
           </a:xfrm>
           <a:prstGeom prst="rect">
@@ -7106,7 +5645,7 @@
               </a:defRPr>
             </a:pPr>
             <a:r>
-              <a:t>•  delay_cmd improved the timing on 0 of 19 stress cases</a:t>
+              <a:t>•  our model in ngspice     5.3371 ns</a:t>
             </a:r>
           </a:p>
           <a:p>
@@ -7122,7 +5661,7 @@
               </a:defRPr>
             </a:pPr>
             <a:r>
-              <a:t>•  the shift persists once the stranded charge is gone</a:t>
+              <a:t>•  our model in HSPICE      5.3375 ns     engine:  −0.5 ps</a:t>
             </a:r>
           </a:p>
           <a:p>
@@ -7138,7 +5677,7 @@
               </a:defRPr>
             </a:pPr>
             <a:r>
-              <a:t>•  they are two defects, not one</a:t>
+              <a:t>•  native IBIS in HSPICE    5.3319 ns     model:   +5.6 ps</a:t>
             </a:r>
           </a:p>
         </p:txBody>
@@ -7151,7 +5690,7 @@
         </p:nvSpPr>
         <p:spPr>
           <a:xfrm>
-            <a:off x="640080" y="4663440"/>
+            <a:off x="640080" y="4572000"/>
             <a:ext cx="10972800" cy="914400"/>
           </a:xfrm>
           <a:prstGeom prst="rect">
@@ -7174,7 +5713,7 @@
               </a:defRPr>
             </a:pPr>
             <a:r>
-              <a:t>The offset has a fix. The timing shift has no candidate mechanism yet, and it grows as the pulse is truncated — on all nine buffer variants tested so far.</a:t>
+              <a:t>The engine is not the source — provided ngspice is converged. At a 1 ps step it was an aliasing outlier that doubled the apparent lag.</a:t>
             </a:r>
           </a:p>
         </p:txBody>

--- a/results/meeting_deck_2026-09-04/ibis_pybis_status_2026-09-04.pptx
+++ b/results/meeting_deck_2026-09-04/ibis_pybis_status_2026-09-04.pptx
@@ -4275,7 +4275,7 @@
               </a:defRPr>
             </a:pPr>
             <a:r>
-              <a:t>•  Both IBIS models under-shoot the peak the transistor reaches, and ours sits slightly high on the tail after the reversal.</a:t>
+              <a:t>•  Through the edge all three agree. Our pad stays high afterwards.</a:t>
             </a:r>
           </a:p>
         </p:txBody>

--- a/results/meeting_deck_2026-09-04/ibis_pybis_status_2026-09-04.pptx
+++ b/results/meeting_deck_2026-09-04/ibis_pybis_status_2026-09-04.pptx
@@ -20,6 +20,7 @@
     <p:sldId id="265" r:id="rId17"/>
     <p:sldId id="266" r:id="rId18"/>
     <p:sldId id="267" r:id="rId19"/>
+    <p:sldId id="268" r:id="rId20"/>
   </p:sldIdLst>
   <p:sldSz cx="12192000" cy="6858000"/>
   <p:notesSz cx="6858000" cy="9144000"/>
@@ -1018,7 +1019,7 @@
           <a:lstStyle/>
           <a:p>
             <a:r>
-              <a:t>Ku and Kd here come from the transistor itself, by driving it into two fixtures and running the same two-equation solve the model uses. That is a ground-truth coefficient target, not native IBIS's opinion.</a:t>
+              <a:t>Plus an open-drain build of ex2. The nomiller variant came back identical to the control -- those caps are 20.5 fF against C_comp's 5 pF, 0.41%, so they cannot matter. The null result still rules out the small capacitor and points at C_comp.</a:t>
             </a:r>
           </a:p>
         </p:txBody>
@@ -1044,6 +1045,76 @@
 </file>
 
 <file path=ppt/notesSlides/notesSlide8.xml><?xml version="1.0" encoding="utf-8"?>
+<p:notes xmlns:a="http://schemas.openxmlformats.org/drawingml/2006/main" xmlns:p="http://schemas.openxmlformats.org/presentationml/2006/main" xmlns:r="http://schemas.openxmlformats.org/officeDocument/2006/relationships">
+  <p:cSld>
+    <p:spTree>
+      <p:nvGrpSpPr>
+        <p:cNvPr id="1" name=""/>
+        <p:cNvGrpSpPr/>
+        <p:nvPr/>
+      </p:nvGrpSpPr>
+      <p:grpSpPr>
+        <a:xfrm>
+          <a:off x="0" y="0"/>
+          <a:ext cx="0" cy="0"/>
+          <a:chOff x="0" y="0"/>
+          <a:chExt cx="0" cy="0"/>
+        </a:xfrm>
+      </p:grpSpPr>
+      <p:sp>
+        <p:nvSpPr>
+          <p:cNvPr id="2" name="Slide Image Placeholder 1"/>
+          <p:cNvSpPr>
+            <a:spLocks noGrp="1"/>
+          </p:cNvSpPr>
+          <p:nvPr>
+            <p:ph type="sldImg" idx="2"/>
+          </p:nvPr>
+        </p:nvSpPr>
+        <p:spPr/>
+      </p:sp>
+      <p:sp>
+        <p:nvSpPr>
+          <p:cNvPr id="3" name="Notes Placeholder 2"/>
+          <p:cNvSpPr>
+            <a:spLocks noGrp="1"/>
+          </p:cNvSpPr>
+          <p:nvPr>
+            <p:ph type="body" idx="3" sz="quarter"/>
+          </p:nvPr>
+        </p:nvSpPr>
+        <p:spPr/>
+        <p:txBody>
+          <a:bodyPr/>
+          <a:lstStyle/>
+          <a:p>
+            <a:r>
+              <a:t>Ku and Kd here come from the transistor itself, by driving it into two fixtures and running the same two-equation solve the model uses. That is a ground-truth coefficient target, not native IBIS's opinion.</a:t>
+            </a:r>
+          </a:p>
+        </p:txBody>
+      </p:sp>
+      <p:sp>
+        <p:nvSpPr>
+          <p:cNvPr id="4" name="Slide Number Placeholder 3"/>
+          <p:cNvSpPr>
+            <a:spLocks noGrp="1"/>
+          </p:cNvSpPr>
+          <p:nvPr>
+            <p:ph type="sldNum" idx="5" sz="quarter"/>
+          </p:nvPr>
+        </p:nvSpPr>
+        <p:spPr/>
+      </p:sp>
+    </p:spTree>
+  </p:cSld>
+  <p:clrMapOvr>
+    <a:masterClrMapping/>
+  </p:clrMapOvr>
+</p:notes>
+</file>
+
+<file path=ppt/notesSlides/notesSlide9.xml><?xml version="1.0" encoding="utf-8"?>
 <p:notes xmlns:a="http://schemas.openxmlformats.org/drawingml/2006/main" xmlns:p="http://schemas.openxmlformats.org/presentationml/2006/main" xmlns:r="http://schemas.openxmlformats.org/officeDocument/2006/relationships">
   <p:cSld>
     <p:spTree>
@@ -3511,7 +3582,7 @@
         <p:spPr>
           <a:xfrm>
             <a:off x="640080" y="1170432"/>
-            <a:ext cx="11064240" cy="1371600"/>
+            <a:ext cx="11064240" cy="685800"/>
           </a:xfrm>
           <a:prstGeom prst="rect">
             <a:avLst/>
@@ -3536,47 +3607,31 @@
               </a:defRPr>
             </a:pPr>
             <a:r>
-              <a:t>•  Slower predriver, halved output devices, skewed PMOS, open-drain.</a:t>
-            </a:r>
-          </a:p>
-          <a:p>
-            <a:pPr>
-              <a:spcAft>
-                <a:spcPts val="300"/>
-              </a:spcAft>
-              <a:defRPr sz="1700">
-                <a:solidFill>
-                  <a:srgbClr val="191F1C"/>
-                </a:solidFill>
-                <a:latin typeface="Aptos"/>
-              </a:defRPr>
-            </a:pPr>
-            <a:r>
-              <a:t>•  Characterised and stressed exactly like the three base buffers.</a:t>
-            </a:r>
-          </a:p>
-        </p:txBody>
-      </p:sp>
-      <p:sp>
-        <p:nvSpPr>
-          <p:cNvPr id="5" name="Rectangle 4"/>
+              <a:t>•  Built in HSPICE from the real transistor library, then characterised and stressed exactly like the three base buffers.</a:t>
+            </a:r>
+          </a:p>
+        </p:txBody>
+      </p:sp>
+      <p:sp>
+        <p:nvSpPr>
+          <p:cNvPr id="5" name="Rounded Rectangle 4"/>
           <p:cNvSpPr/>
           <p:nvPr/>
         </p:nvSpPr>
         <p:spPr>
           <a:xfrm>
-            <a:off x="513743" y="2057400"/>
-            <a:ext cx="5373312" cy="4398264"/>
-          </a:xfrm>
-          <a:prstGeom prst="rect">
+            <a:off x="640080" y="1965960"/>
+            <a:ext cx="10972800" cy="3977639"/>
+          </a:xfrm>
+          <a:prstGeom prst="roundRect">
             <a:avLst/>
           </a:prstGeom>
           <a:solidFill>
-            <a:srgbClr val="FFFFFF"/>
+            <a:srgbClr val="F6F8F7"/>
           </a:solidFill>
-          <a:ln w="10160">
+          <a:ln w="12700">
             <a:solidFill>
-              <a:srgbClr val="CBD0CC"/>
+              <a:srgbClr val="A4AEA8"/>
             </a:solidFill>
           </a:ln>
         </p:spPr>
@@ -3595,6 +3650,343 @@
           </a:fontRef>
         </p:style>
         <p:txBody>
+          <a:bodyPr rtlCol="0" anchor="t" wrap="none" lIns="118872" rIns="73152" tIns="91440" bIns="73152"/>
+          <a:lstStyle/>
+          <a:p>
+            <a:pPr algn="l">
+              <a:defRPr sz="1450">
+                <a:solidFill>
+                  <a:srgbClr val="1E3027"/>
+                </a:solidFill>
+                <a:latin typeface="Consolas"/>
+              </a:defRPr>
+            </a:pPr>
+            <a:r>
+              <a:t>inv_chain          stages    Wn        Wp       what it changes</a:t>
+            </a:r>
+          </a:p>
+          <a:p>
+            <a:pPr algn="l">
+              <a:defRPr sz="1450">
+                <a:solidFill>
+                  <a:srgbClr val="1E3027"/>
+                </a:solidFill>
+                <a:latin typeface="Consolas"/>
+              </a:defRPr>
+            </a:pPr>
+          </a:p>
+          <a:p>
+            <a:pPr algn="l">
+              <a:defRPr sz="1450">
+                <a:solidFill>
+                  <a:srgbClr val="1E3027"/>
+                </a:solidFill>
+                <a:latin typeface="Consolas"/>
+              </a:defRPr>
+            </a:pPr>
+            <a:r>
+              <a:t>  base8            8 (x2)    1.0 um    2.0 um   reference</a:t>
+            </a:r>
+          </a:p>
+          <a:p>
+            <a:pPr algn="l">
+              <a:defRPr sz="1450">
+                <a:solidFill>
+                  <a:srgbClr val="1E3027"/>
+                </a:solidFill>
+                <a:latin typeface="Consolas"/>
+              </a:defRPr>
+            </a:pPr>
+            <a:r>
+              <a:t>  stage4           4         1.0 um    2.0 um   predriver depth halved</a:t>
+            </a:r>
+          </a:p>
+          <a:p>
+            <a:pPr algn="l">
+              <a:defRPr sz="1450">
+                <a:solidFill>
+                  <a:srgbClr val="1E3027"/>
+                </a:solidFill>
+                <a:latin typeface="Consolas"/>
+              </a:defRPr>
+            </a:pPr>
+            <a:r>
+              <a:t>  skewp            8 (x2)    1.0 um    1.0 um   Wp = Wn, rise slower than fall</a:t>
+            </a:r>
+          </a:p>
+          <a:p>
+            <a:pPr algn="l">
+              <a:defRPr sz="1450">
+                <a:solidFill>
+                  <a:srgbClr val="1E3027"/>
+                </a:solidFill>
+                <a:latin typeface="Consolas"/>
+              </a:defRPr>
+            </a:pPr>
+            <a:r>
+              <a:t>  weak             8 (x2)    0.5 um    1.0 um   half drive at every stage</a:t>
+            </a:r>
+          </a:p>
+          <a:p>
+            <a:pPr algn="l">
+              <a:defRPr sz="1450">
+                <a:solidFill>
+                  <a:srgbClr val="1E3027"/>
+                </a:solidFill>
+                <a:latin typeface="Consolas"/>
+              </a:defRPr>
+            </a:pPr>
+          </a:p>
+          <a:p>
+            <a:pPr algn="l">
+              <a:defRPr sz="1450">
+                <a:solidFill>
+                  <a:srgbClr val="1E3027"/>
+                </a:solidFill>
+                <a:latin typeface="Consolas"/>
+              </a:defRPr>
+            </a:pPr>
+            <a:r>
+              <a:t>ex2                device widths scaled        what it changes</a:t>
+            </a:r>
+          </a:p>
+          <a:p>
+            <a:pPr algn="l">
+              <a:defRPr sz="1450">
+                <a:solidFill>
+                  <a:srgbClr val="1E3027"/>
+                </a:solidFill>
+                <a:latin typeface="Consolas"/>
+              </a:defRPr>
+            </a:pPr>
+          </a:p>
+          <a:p>
+            <a:pPr algn="l">
+              <a:defRPr sz="1450">
+                <a:solidFill>
+                  <a:srgbClr val="1E3027"/>
+                </a:solidFill>
+                <a:latin typeface="Consolas"/>
+              </a:defRPr>
+            </a:pPr>
+            <a:r>
+              <a:t>  base             none                         reference</a:t>
+            </a:r>
+          </a:p>
+          <a:p>
+            <a:pPr algn="l">
+              <a:defRPr sz="1450">
+                <a:solidFill>
+                  <a:srgbClr val="1E3027"/>
+                </a:solidFill>
+                <a:latin typeface="Consolas"/>
+              </a:defRPr>
+            </a:pPr>
+            <a:r>
+              <a:t>  weak             mx15-19 + mx24-28  x0.5      output stage at half width</a:t>
+            </a:r>
+          </a:p>
+          <a:p>
+            <a:pPr algn="l">
+              <a:defRPr sz="1450">
+                <a:solidFill>
+                  <a:srgbClr val="1E3027"/>
+                </a:solidFill>
+                <a:latin typeface="Consolas"/>
+              </a:defRPr>
+            </a:pPr>
+            <a:r>
+              <a:t>  skewp            mx24-28            x0.5      output PMOS only, rise slows</a:t>
+            </a:r>
+          </a:p>
+          <a:p>
+            <a:pPr algn="l">
+              <a:defRPr sz="1450">
+                <a:solidFill>
+                  <a:srgbClr val="1E3027"/>
+                </a:solidFill>
+                <a:latin typeface="Consolas"/>
+              </a:defRPr>
+            </a:pPr>
+            <a:r>
+              <a:t>  slowpre          mx11-14 + mx20-23  x0.5      predriver, delays the onset</a:t>
+            </a:r>
+          </a:p>
+          <a:p>
+            <a:pPr algn="l">
+              <a:defRPr sz="1450">
+                <a:solidFill>
+                  <a:srgbClr val="1E3027"/>
+                </a:solidFill>
+                <a:latin typeface="Consolas"/>
+              </a:defRPr>
+            </a:pPr>
+            <a:r>
+              <a:t>  nomiller         n4-&gt;out caps removed         tests Miller feedthrough</a:t>
+            </a:r>
+          </a:p>
+        </p:txBody>
+      </p:sp>
+    </p:spTree>
+  </p:cSld>
+  <p:clrMapOvr>
+    <a:masterClrMapping/>
+  </p:clrMapOvr>
+</p:sld>
+</file>
+
+<file path=ppt/slides/slide12.xml><?xml version="1.0" encoding="utf-8"?>
+<p:sld xmlns:a="http://schemas.openxmlformats.org/drawingml/2006/main" xmlns:p="http://schemas.openxmlformats.org/presentationml/2006/main" xmlns:r="http://schemas.openxmlformats.org/officeDocument/2006/relationships">
+  <p:cSld>
+    <p:spTree>
+      <p:nvGrpSpPr>
+        <p:cNvPr id="1" name=""/>
+        <p:cNvGrpSpPr/>
+        <p:nvPr/>
+      </p:nvGrpSpPr>
+      <p:grpSpPr/>
+      <p:sp>
+        <p:nvSpPr>
+          <p:cNvPr id="2" name="Title 1"/>
+          <p:cNvSpPr>
+            <a:spLocks noGrp="1"/>
+          </p:cNvSpPr>
+          <p:nvPr>
+            <p:ph type="title"/>
+          </p:nvPr>
+        </p:nvSpPr>
+        <p:spPr/>
+        <p:txBody>
+          <a:bodyPr/>
+          <a:lstStyle/>
+          <a:p>
+            <a:pPr algn="l">
+              <a:defRPr sz="2700" b="0">
+                <a:solidFill>
+                  <a:srgbClr val="000000"/>
+                </a:solidFill>
+                <a:latin typeface="Times New Roman"/>
+              </a:defRPr>
+            </a:pPr>
+            <a:r>
+              <a:t>A variant under the same stress</a:t>
+            </a:r>
+          </a:p>
+        </p:txBody>
+      </p:sp>
+      <p:sp>
+        <p:nvSpPr>
+          <p:cNvPr id="3" name="TextBox 2"/>
+          <p:cNvSpPr txBox="1"/>
+          <p:nvPr/>
+        </p:nvSpPr>
+        <p:spPr>
+          <a:xfrm>
+            <a:off x="9372600" y="109728"/>
+            <a:ext cx="2148840" cy="228600"/>
+          </a:xfrm>
+          <a:prstGeom prst="rect">
+            <a:avLst/>
+          </a:prstGeom>
+          <a:noFill/>
+        </p:spPr>
+        <p:txBody>
+          <a:bodyPr wrap="square" lIns="45720" rIns="45720" anchor="t">
+            <a:spAutoFit/>
+          </a:bodyPr>
+          <a:lstStyle/>
+          <a:p>
+            <a:pPr algn="r">
+              <a:defRPr sz="950" b="1">
+                <a:solidFill>
+                  <a:srgbClr val="666C68"/>
+                </a:solidFill>
+                <a:latin typeface="Aptos"/>
+              </a:defRPr>
+            </a:pPr>
+            <a:r>
+              <a:t>MORE SPICE BUFFER MOCKUPS</a:t>
+            </a:r>
+          </a:p>
+        </p:txBody>
+      </p:sp>
+      <p:sp>
+        <p:nvSpPr>
+          <p:cNvPr id="4" name="TextBox 3"/>
+          <p:cNvSpPr txBox="1"/>
+          <p:nvPr/>
+        </p:nvSpPr>
+        <p:spPr>
+          <a:xfrm>
+            <a:off x="640080" y="1170432"/>
+            <a:ext cx="11064240" cy="685800"/>
+          </a:xfrm>
+          <a:prstGeom prst="rect">
+            <a:avLst/>
+          </a:prstGeom>
+          <a:noFill/>
+        </p:spPr>
+        <p:txBody>
+          <a:bodyPr wrap="square" lIns="73152" rIns="36576" tIns="36576" bIns="36576">
+            <a:spAutoFit/>
+          </a:bodyPr>
+          <a:lstStyle/>
+          <a:p>
+            <a:pPr>
+              <a:spcAft>
+                <a:spcPts val="300"/>
+              </a:spcAft>
+              <a:defRPr sz="1700">
+                <a:solidFill>
+                  <a:srgbClr val="191F1C"/>
+                </a:solidFill>
+                <a:latin typeface="Aptos"/>
+              </a:defRPr>
+            </a:pPr>
+            <a:r>
+              <a:t>•  Same characterisation, same stress axis, so the comparison is like for like across the family.</a:t>
+            </a:r>
+          </a:p>
+        </p:txBody>
+      </p:sp>
+      <p:sp>
+        <p:nvSpPr>
+          <p:cNvPr id="5" name="Rectangle 4"/>
+          <p:cNvSpPr/>
+          <p:nvPr/>
+        </p:nvSpPr>
+        <p:spPr>
+          <a:xfrm>
+            <a:off x="513743" y="2057400"/>
+            <a:ext cx="5373312" cy="4398264"/>
+          </a:xfrm>
+          <a:prstGeom prst="rect">
+            <a:avLst/>
+          </a:prstGeom>
+          <a:solidFill>
+            <a:srgbClr val="FFFFFF"/>
+          </a:solidFill>
+          <a:ln w="10160">
+            <a:solidFill>
+              <a:srgbClr val="CBD0CC"/>
+            </a:solidFill>
+          </a:ln>
+        </p:spPr>
+        <p:style>
+          <a:lnRef idx="1">
+            <a:schemeClr val="accent1"/>
+          </a:lnRef>
+          <a:fillRef idx="3">
+            <a:schemeClr val="accent1"/>
+          </a:fillRef>
+          <a:effectRef idx="2">
+            <a:schemeClr val="accent1"/>
+          </a:effectRef>
+          <a:fontRef idx="minor">
+            <a:schemeClr val="lt1"/>
+          </a:fontRef>
+        </p:style>
+        <p:txBody>
           <a:bodyPr rtlCol="0" anchor="ctr"/>
           <a:lstStyle/>
           <a:p>
@@ -3703,7 +4095,7 @@
 </p:sld>
 </file>
 
-<file path=ppt/slides/slide12.xml><?xml version="1.0" encoding="utf-8"?>
+<file path=ppt/slides/slide13.xml><?xml version="1.0" encoding="utf-8"?>
 <p:sld xmlns:a="http://schemas.openxmlformats.org/drawingml/2006/main" xmlns:p="http://schemas.openxmlformats.org/presentationml/2006/main" xmlns:r="http://schemas.openxmlformats.org/officeDocument/2006/relationships">
   <p:cSld>
     <p:spTree>

--- a/results/meeting_deck_2026-09-04/ibis_pybis_status_2026-09-04.pptx
+++ b/results/meeting_deck_2026-09-04/ibis_pybis_status_2026-09-04.pptx
@@ -739,7 +739,7 @@
           <a:lstStyle/>
           <a:p>
             <a:r>
-              <a:t>One line of the generated subcircuit separates them. gate_state: CGUPCMD across RGUPCMD 1e15 with BGUPCMDON injecting a packet per edge. delay_cmd: BGUPCMD GUPCMD 0 V = V(PUCMDLVL). On the tail after the reversal gate_state sits at -0.144 and creeps back over ~3 ns; delay_cmd is at exactly 0. On this particular bench the stranded charge is negative and the command clamp removes it before it reaches Ku, so the two pads agree to 5 mV -- the pad consequence on the right is the case where the charge is positive.</a:t>
+              <a:t>Last week's page, with cmd_clean added as a third curve. Same case, same colours -- fix_old is the purple that was labelled 'fix' last week. On the tail, 1.0 to 1.7 ns after the reversal, the command GUPCMD sits at +0.036 original, +0.024 fix_old, +0.000 cmd_clean. The gate state is a lag on the command, so it copies that straight through, and Ku scales it by about 1.18. fix_old does eventually clear, but not until 8.7 ns -- the restore gate does not open until the reversal plus 3.0 ns, and the pad has been holding the offset since 7.5. That is why last week's approach drove the command back to a clean 0 and still left the pedestal: it was late, not wrong. cmd_clean is at zero from the start because the command is read off the present input level rather than accumulated from past edges. The code calls that build delay_cmd.</a:t>
             </a:r>
           </a:p>
         </p:txBody>
@@ -809,7 +809,7 @@
           <a:lstStyle/>
           <a:p>
             <a:r>
-              <a:t>On this case the pedestal goes from 97.9 mV to 5.2 mV against the transistor's 2.1 mV. Across all 29 matched stress cases RMSE goes from 108.6 to 92.2 mV, the only build that beats native IBIS. Caveat to state: delay_cmd has a 1.25 ns dead zone after a reversal where neither device is commanded on.</a:t>
+              <a:t>The same three builds at the pad, against both references. Measured on the same 1.0 to 1.7 ns window: transistor 5.9 mV, native IBIS 6.2, original 76.3, fix_old 51.9, cmd_clean 4.0. fix_old removes a third of the pedestal; cmd_clean removes all of it. Across all 29 matched stress cases RMSE goes from 108.6 to 92.2 mV, the only build that beats native IBIS. Caveat worth stating out loud: cmd_clean has a dead zone of about 0.9 ns after a reversal, the gap between the fitted on-delay and off-delay, where neither device is commanded on. At a 500 ps delay it gives 0.043 V where the original gives 0.122; above about 1.2 ns the two are identical.</a:t>
             </a:r>
           </a:p>
         </p:txBody>
@@ -879,7 +879,7 @@
           <a:lstStyle/>
           <a:p>
             <a:r>
-              <a:t>The plan quotes 69-99 ps late where native is 5-26 ps early. That is not reproducible from the data on disk with a 50%-of-excursion metric. The stress matrix gives io_buf native +11..+18 against ours +27..+34; inv_chain native -6..-5 against ours +8..+12; ex2 both early with ours closer. The defect is real and device-dependent, but smaller and less one-sided than the plan states. It also grows as the pulse is truncated, on all nine buffer variants tested so far.</a:t>
+              <a:t>Why it cannot help: the edge timing is set by the gate lag and the Ku(t) map, and cmd_clean changes neither -- it changes only how the command that drives them is generated. Measured on one truncated pulse, the 50% crossing of every node moves by single digits: GUPCMD -4.5 ps, GUP -8.2, Ku -13.6, pad -7.5, against a model-to-transistor shift of 27 to 46 ps. cmd_clean changes what is left behind, not how fast the edge moves. The plan quotes 69-99 ps late where native is 5-26 ps early. That is not reproducible from the data on disk with a 50%-of-excursion metric. The stress matrix gives io_buf native +11..+18 against ours +27..+34; inv_chain native -6..-5 against ours +8..+12; ex2 both early with ours closer. The defect is real and device-dependent, but smaller and less one-sided than the plan states. It also grows as the pulse is truncated, on all nine buffer variants tested so far.</a:t>
             </a:r>
           </a:p>
         </p:txBody>
@@ -4288,7 +4288,7 @@
               </a:defRPr>
             </a:pPr>
             <a:r>
-              <a:t>•  delay_cmd removes the settled offset</a:t>
+              <a:t>•  cmd_clean removes the settled offset</a:t>
             </a:r>
           </a:p>
         </p:txBody>
@@ -4990,7 +4990,7 @@
               </a:defRPr>
             </a:pPr>
             <a:r>
-              <a:t>The offset: charge stranded in the command capacitor</a:t>
+              <a:t>The offset: the command bucket never empties</a:t>
             </a:r>
           </a:p>
         </p:txBody>
@@ -5065,7 +5065,7 @@
               </a:defRPr>
             </a:pPr>
             <a:r>
-              <a:t>•  GUPCMD is a capacitor across 1e15 ohm, charged once per input edge.</a:t>
+              <a:t>•  GUPCMD is a bucket: one fixed pour in on the rising edge, one back out on the falling edge.</a:t>
             </a:r>
           </a:p>
           <a:p>
@@ -5081,7 +5081,7 @@
               </a:defRPr>
             </a:pPr>
             <a:r>
-              <a:t>•  A truncated pulse leaves charge in it with no resistive path out.</a:t>
+              <a:t>•  On a truncated pulse the two pours are not equal, and there is no drain — so some is left.</a:t>
             </a:r>
           </a:p>
         </p:txBody>
@@ -5197,7 +5197,7 @@
               </a:defRPr>
             </a:pPr>
             <a:r>
-              <a:t>How delay_cmd works</a:t>
+              <a:t>GUP and Ku</a:t>
             </a:r>
           </a:p>
         </p:txBody>
@@ -5240,69 +5240,14 @@
       </p:sp>
       <p:sp>
         <p:nvSpPr>
-          <p:cNvPr id="4" name="TextBox 3"/>
-          <p:cNvSpPr txBox="1"/>
-          <p:nvPr/>
-        </p:nvSpPr>
-        <p:spPr>
-          <a:xfrm>
-            <a:off x="640080" y="1170432"/>
-            <a:ext cx="11064240" cy="1371600"/>
-          </a:xfrm>
-          <a:prstGeom prst="rect">
-            <a:avLst/>
-          </a:prstGeom>
-          <a:noFill/>
-        </p:spPr>
-        <p:txBody>
-          <a:bodyPr wrap="square" lIns="73152" rIns="36576" tIns="36576" bIns="36576">
-            <a:spAutoFit/>
-          </a:bodyPr>
-          <a:lstStyle/>
-          <a:p>
-            <a:pPr>
-              <a:spcAft>
-                <a:spcPts val="300"/>
-              </a:spcAft>
-              <a:defRPr sz="1700">
-                <a:solidFill>
-                  <a:srgbClr val="191F1C"/>
-                </a:solidFill>
-                <a:latin typeface="Aptos"/>
-              </a:defRPr>
-            </a:pPr>
-            <a:r>
-              <a:t>•  gate-state: GUPCMD is a capacitor across 1e15 Ω, given a fixed packet of charge on each input edge — an integrator with no DC path.</a:t>
-            </a:r>
-          </a:p>
-          <a:p>
-            <a:pPr>
-              <a:spcAft>
-                <a:spcPts val="300"/>
-              </a:spcAft>
-              <a:defRPr sz="1700">
-                <a:solidFill>
-                  <a:srgbClr val="191F1C"/>
-                </a:solidFill>
-                <a:latin typeface="Aptos"/>
-              </a:defRPr>
-            </a:pPr>
-            <a:r>
-              <a:t>•  delay_cmd: GUPCMD is driven straight from the present input level.</a:t>
-            </a:r>
-          </a:p>
-        </p:txBody>
-      </p:sp>
-      <p:sp>
-        <p:nvSpPr>
-          <p:cNvPr id="5" name="Rectangle 4"/>
+          <p:cNvPr id="4" name="Rectangle 3"/>
           <p:cNvSpPr/>
           <p:nvPr/>
         </p:nvSpPr>
         <p:spPr>
           <a:xfrm>
-            <a:off x="513743" y="2057400"/>
-            <a:ext cx="5373312" cy="4398264"/>
+            <a:off x="880331" y="1207008"/>
+            <a:ext cx="10400857" cy="5312664"/>
           </a:xfrm>
           <a:prstGeom prst="rect">
             <a:avLst/>
@@ -5340,7 +5285,7 @@
       </p:sp>
       <p:pic>
         <p:nvPicPr>
-          <p:cNvPr id="6" name="Picture 5" descr="command_node.png"/>
+          <p:cNvPr id="5" name="Picture 4" descr="cmd_clean_gate_and_ku.png"/>
           <p:cNvPicPr>
             <a:picLocks noChangeAspect="1"/>
           </p:cNvPicPr>
@@ -5354,77 +5299,8 @@
         </p:blipFill>
         <p:spPr>
           <a:xfrm>
-            <a:off x="541175" y="2084831"/>
-            <a:ext cx="5318448" cy="4343400"/>
-          </a:xfrm>
-          <a:prstGeom prst="rect">
-            <a:avLst/>
-          </a:prstGeom>
-        </p:spPr>
-      </p:pic>
-      <p:sp>
-        <p:nvSpPr>
-          <p:cNvPr id="7" name="Rectangle 6"/>
-          <p:cNvSpPr/>
-          <p:nvPr/>
-        </p:nvSpPr>
-        <p:spPr>
-          <a:xfrm>
-            <a:off x="6274463" y="2057400"/>
-            <a:ext cx="5373312" cy="4398264"/>
-          </a:xfrm>
-          <a:prstGeom prst="rect">
-            <a:avLst/>
-          </a:prstGeom>
-          <a:solidFill>
-            <a:srgbClr val="FFFFFF"/>
-          </a:solidFill>
-          <a:ln w="10160">
-            <a:solidFill>
-              <a:srgbClr val="CBD0CC"/>
-            </a:solidFill>
-          </a:ln>
-        </p:spPr>
-        <p:style>
-          <a:lnRef idx="1">
-            <a:schemeClr val="accent1"/>
-          </a:lnRef>
-          <a:fillRef idx="3">
-            <a:schemeClr val="accent1"/>
-          </a:fillRef>
-          <a:effectRef idx="2">
-            <a:schemeClr val="accent1"/>
-          </a:effectRef>
-          <a:fontRef idx="minor">
-            <a:schemeClr val="lt1"/>
-          </a:fontRef>
-        </p:style>
-        <p:txBody>
-          <a:bodyPr rtlCol="0" anchor="ctr"/>
-          <a:lstStyle/>
-          <a:p>
-            <a:pPr algn="ctr"/>
-          </a:p>
-        </p:txBody>
-      </p:sp>
-      <p:pic>
-        <p:nvPicPr>
-          <p:cNvPr id="8" name="Picture 7" descr="command_pad.png"/>
-          <p:cNvPicPr>
-            <a:picLocks noChangeAspect="1"/>
-          </p:cNvPicPr>
-          <p:nvPr/>
-        </p:nvPicPr>
-        <p:blipFill>
-          <a:blip r:embed="rId3"/>
-          <a:stretch>
-            <a:fillRect/>
-          </a:stretch>
-        </p:blipFill>
-        <p:spPr>
-          <a:xfrm>
-            <a:off x="6301895" y="2084831"/>
-            <a:ext cx="5318448" cy="4343400"/>
+            <a:off x="907763" y="1234440"/>
+            <a:ext cx="10345993" cy="5257800"/>
           </a:xfrm>
           <a:prstGeom prst="rect">
             <a:avLst/>
@@ -5473,7 +5349,7 @@
               </a:defRPr>
             </a:pPr>
             <a:r>
-              <a:t>delay_cmd removes the offset</a:t>
+              <a:t>Pad voltage</a:t>
             </a:r>
           </a:p>
         </p:txBody>
@@ -5516,69 +5392,14 @@
       </p:sp>
       <p:sp>
         <p:nvSpPr>
-          <p:cNvPr id="4" name="TextBox 3"/>
-          <p:cNvSpPr txBox="1"/>
-          <p:nvPr/>
-        </p:nvSpPr>
-        <p:spPr>
-          <a:xfrm>
-            <a:off x="640080" y="1170432"/>
-            <a:ext cx="11064240" cy="1371600"/>
-          </a:xfrm>
-          <a:prstGeom prst="rect">
-            <a:avLst/>
-          </a:prstGeom>
-          <a:noFill/>
-        </p:spPr>
-        <p:txBody>
-          <a:bodyPr wrap="square" lIns="73152" rIns="36576" tIns="36576" bIns="36576">
-            <a:spAutoFit/>
-          </a:bodyPr>
-          <a:lstStyle/>
-          <a:p>
-            <a:pPr>
-              <a:spcAft>
-                <a:spcPts val="300"/>
-              </a:spcAft>
-              <a:defRPr sz="1700">
-                <a:solidFill>
-                  <a:srgbClr val="191F1C"/>
-                </a:solidFill>
-                <a:latin typeface="Aptos"/>
-              </a:defRPr>
-            </a:pPr>
-            <a:r>
-              <a:t>•  The command returns to exactly zero, so nothing is stranded.</a:t>
-            </a:r>
-          </a:p>
-          <a:p>
-            <a:pPr>
-              <a:spcAft>
-                <a:spcPts val="300"/>
-              </a:spcAft>
-              <a:defRPr sz="1700">
-                <a:solidFill>
-                  <a:srgbClr val="191F1C"/>
-                </a:solidFill>
-                <a:latin typeface="Aptos"/>
-              </a:defRPr>
-            </a:pPr>
-            <a:r>
-              <a:t>•  The pedestal goes from 97.9 mV to 5.2 mV, against the transistor's 2.1.</a:t>
-            </a:r>
-          </a:p>
-        </p:txBody>
-      </p:sp>
-      <p:sp>
-        <p:nvSpPr>
-          <p:cNvPr id="5" name="Rectangle 4"/>
+          <p:cNvPr id="4" name="Rectangle 3"/>
           <p:cNvSpPr/>
           <p:nvPr/>
         </p:nvSpPr>
         <p:spPr>
           <a:xfrm>
-            <a:off x="743653" y="1819656"/>
-            <a:ext cx="10674213" cy="4581144"/>
+            <a:off x="475488" y="1367028"/>
+            <a:ext cx="11210544" cy="4992624"/>
           </a:xfrm>
           <a:prstGeom prst="rect">
             <a:avLst/>
@@ -5616,7 +5437,7 @@
       </p:sp>
       <p:pic>
         <p:nvPicPr>
-          <p:cNvPr id="6" name="Picture 5" descr="offset_removed.png"/>
+          <p:cNvPr id="5" name="Picture 4" descr="cmd_clean_pad.png"/>
           <p:cNvPicPr>
             <a:picLocks noChangeAspect="1"/>
           </p:cNvPicPr>
@@ -5630,8 +5451,8 @@
         </p:blipFill>
         <p:spPr>
           <a:xfrm>
-            <a:off x="771085" y="1847088"/>
-            <a:ext cx="10619349" cy="4526280"/>
+            <a:off x="502920" y="1394460"/>
+            <a:ext cx="11155680" cy="4937760"/>
           </a:xfrm>
           <a:prstGeom prst="rect">
             <a:avLst/>
@@ -5755,7 +5576,7 @@
               </a:defRPr>
             </a:pPr>
             <a:r>
-              <a:t>•  delay_cmd improved the timing on 0 of 19 stress cases — so the offset and the shift are two mechanisms, not one.</a:t>
+              <a:t>•  cmd_clean improved the timing on 0 of 19 stress cases — two mechanisms, not one.</a:t>
             </a:r>
           </a:p>
           <a:p>
